--- a/assets/decks/episodio-06-piramide-qualidade.pptx
+++ b/assets/decks/episodio-06-piramide-qualidade.pptx
@@ -2,34 +2,34 @@
 <file path=ppt/presentation.xml><?xml version="1.0" encoding="utf-8"?>
 <p:presentation xmlns:p="http://schemas.openxmlformats.org/presentationml/2006/main">
   <p:sldMasterIdLst>
-    <p:sldMasterId xmlns:r="http://schemas.openxmlformats.org/officeDocument/2006/relationships" id="2147483648" r:id="R0be6b04d3b044507"/>
-    <p:sldMasterId xmlns:r="http://schemas.openxmlformats.org/officeDocument/2006/relationships" id="2147483650" r:id="R1654ad3da36b4fb8"/>
+    <p:sldMasterId xmlns:r="http://schemas.openxmlformats.org/officeDocument/2006/relationships" id="2147483648" r:id="R0ec5de17cfd34509"/>
+    <p:sldMasterId xmlns:r="http://schemas.openxmlformats.org/officeDocument/2006/relationships" id="2147483650" r:id="R96da531806ef4751"/>
   </p:sldMasterIdLst>
   <p:notesMasterIdLst>
-    <p:notesMasterId xmlns:r="http://schemas.openxmlformats.org/officeDocument/2006/relationships" r:id="R4f6fd74b1c0a4e1c"/>
+    <p:notesMasterId xmlns:r="http://schemas.openxmlformats.org/officeDocument/2006/relationships" r:id="Rd69a51ccc0e8458e"/>
   </p:notesMasterIdLst>
   <p:sldIdLst>
-    <p:sldId xmlns:r="http://schemas.openxmlformats.org/officeDocument/2006/relationships" id="256" r:id="R70a5a9d07f9145bf"/>
-    <p:sldId xmlns:r="http://schemas.openxmlformats.org/officeDocument/2006/relationships" id="257" r:id="Rd416673d77b6470c"/>
-    <p:sldId xmlns:r="http://schemas.openxmlformats.org/officeDocument/2006/relationships" id="258" r:id="Re100ae4370b640b2"/>
-    <p:sldId xmlns:r="http://schemas.openxmlformats.org/officeDocument/2006/relationships" id="259" r:id="Ra3b764555740460c"/>
-    <p:sldId xmlns:r="http://schemas.openxmlformats.org/officeDocument/2006/relationships" id="260" r:id="R8d101ef31a384639"/>
-    <p:sldId xmlns:r="http://schemas.openxmlformats.org/officeDocument/2006/relationships" id="261" r:id="Rd861a3fae8f145a1"/>
-    <p:sldId xmlns:r="http://schemas.openxmlformats.org/officeDocument/2006/relationships" id="262" r:id="R664ba95989f5435c"/>
-    <p:sldId xmlns:r="http://schemas.openxmlformats.org/officeDocument/2006/relationships" id="263" r:id="R86b274abc5154b33"/>
-    <p:sldId xmlns:r="http://schemas.openxmlformats.org/officeDocument/2006/relationships" id="264" r:id="Rcf6659893ae14e35"/>
-    <p:sldId xmlns:r="http://schemas.openxmlformats.org/officeDocument/2006/relationships" id="265" r:id="R852b8c553df7467c"/>
-    <p:sldId xmlns:r="http://schemas.openxmlformats.org/officeDocument/2006/relationships" id="266" r:id="R3d84ca0bff33418c"/>
-    <p:sldId xmlns:r="http://schemas.openxmlformats.org/officeDocument/2006/relationships" id="267" r:id="Rc455616cc30a4611"/>
-    <p:sldId xmlns:r="http://schemas.openxmlformats.org/officeDocument/2006/relationships" id="268" r:id="R1f41281aadce44a2"/>
-    <p:sldId xmlns:r="http://schemas.openxmlformats.org/officeDocument/2006/relationships" id="269" r:id="R2f2ff6f472d9445c"/>
-    <p:sldId xmlns:r="http://schemas.openxmlformats.org/officeDocument/2006/relationships" id="270" r:id="R4524d99491f54445"/>
-    <p:sldId xmlns:r="http://schemas.openxmlformats.org/officeDocument/2006/relationships" id="271" r:id="Rabc1c71e2fbf4339"/>
-    <p:sldId xmlns:r="http://schemas.openxmlformats.org/officeDocument/2006/relationships" id="272" r:id="R2271000a2df14825"/>
-    <p:sldId xmlns:r="http://schemas.openxmlformats.org/officeDocument/2006/relationships" id="273" r:id="R6b75c093fba1458a"/>
-    <p:sldId xmlns:r="http://schemas.openxmlformats.org/officeDocument/2006/relationships" id="274" r:id="R99549ec24af24836"/>
-    <p:sldId xmlns:r="http://schemas.openxmlformats.org/officeDocument/2006/relationships" id="275" r:id="R13cee77effdc4e27"/>
-    <p:sldId xmlns:r="http://schemas.openxmlformats.org/officeDocument/2006/relationships" id="276" r:id="R875004cccdad411f"/>
+    <p:sldId xmlns:r="http://schemas.openxmlformats.org/officeDocument/2006/relationships" id="256" r:id="Rd4372923ac094bab"/>
+    <p:sldId xmlns:r="http://schemas.openxmlformats.org/officeDocument/2006/relationships" id="257" r:id="R08314e97baa545d5"/>
+    <p:sldId xmlns:r="http://schemas.openxmlformats.org/officeDocument/2006/relationships" id="258" r:id="R7640de2ff0104cea"/>
+    <p:sldId xmlns:r="http://schemas.openxmlformats.org/officeDocument/2006/relationships" id="259" r:id="R1ebb4ca4ee0c4f54"/>
+    <p:sldId xmlns:r="http://schemas.openxmlformats.org/officeDocument/2006/relationships" id="260" r:id="R60ba85a8cc504bf0"/>
+    <p:sldId xmlns:r="http://schemas.openxmlformats.org/officeDocument/2006/relationships" id="261" r:id="Rb163a1a61389420e"/>
+    <p:sldId xmlns:r="http://schemas.openxmlformats.org/officeDocument/2006/relationships" id="262" r:id="R2e1e4a7266f64d38"/>
+    <p:sldId xmlns:r="http://schemas.openxmlformats.org/officeDocument/2006/relationships" id="263" r:id="Rdd55fdbf2a3043fd"/>
+    <p:sldId xmlns:r="http://schemas.openxmlformats.org/officeDocument/2006/relationships" id="264" r:id="R3922003dbad642be"/>
+    <p:sldId xmlns:r="http://schemas.openxmlformats.org/officeDocument/2006/relationships" id="265" r:id="R90ff056298d74d8b"/>
+    <p:sldId xmlns:r="http://schemas.openxmlformats.org/officeDocument/2006/relationships" id="266" r:id="Rd0f3c692266f45ac"/>
+    <p:sldId xmlns:r="http://schemas.openxmlformats.org/officeDocument/2006/relationships" id="267" r:id="R8ac32813318f419c"/>
+    <p:sldId xmlns:r="http://schemas.openxmlformats.org/officeDocument/2006/relationships" id="268" r:id="R31e2d67197704024"/>
+    <p:sldId xmlns:r="http://schemas.openxmlformats.org/officeDocument/2006/relationships" id="269" r:id="R73b566df47ae483d"/>
+    <p:sldId xmlns:r="http://schemas.openxmlformats.org/officeDocument/2006/relationships" id="270" r:id="R037bd5b7e4c04e50"/>
+    <p:sldId xmlns:r="http://schemas.openxmlformats.org/officeDocument/2006/relationships" id="271" r:id="R44cd4b7369c04c75"/>
+    <p:sldId xmlns:r="http://schemas.openxmlformats.org/officeDocument/2006/relationships" id="272" r:id="Rb304ddef2b4b4728"/>
+    <p:sldId xmlns:r="http://schemas.openxmlformats.org/officeDocument/2006/relationships" id="273" r:id="R8c44a42a3ea04365"/>
+    <p:sldId xmlns:r="http://schemas.openxmlformats.org/officeDocument/2006/relationships" id="274" r:id="R7e8f76137451480b"/>
+    <p:sldId xmlns:r="http://schemas.openxmlformats.org/officeDocument/2006/relationships" id="275" r:id="R3e86ab6a87134b3c"/>
+    <p:sldId xmlns:r="http://schemas.openxmlformats.org/officeDocument/2006/relationships" id="276" r:id="Rf38c76317f104abf"/>
   </p:sldIdLst>
   <p:sldSz cx="12192000" cy="6858000"/>
   <p:notesSz cx="6858000" cy="9144000"/>
@@ -463,7 +463,57 @@
           <a:lstStyle xmlns:a="http://schemas.openxmlformats.org/drawingml/2006/main"/>
           <a:p xmlns:a="http://schemas.openxmlformats.org/drawingml/2006/main">
             <a:r>
-              <a:t>Apresente o objetivo do EPISÓDIO 6 e conecte-o ao checkpoint executável. not_null pode passar enquanto um prazo devolve menos cinco dias.</a:t>
+              <a:t>[Roteiro recomendado]</a:t>
+            </a:r>
+          </a:p>
+          <a:p xmlns:a="http://schemas.openxmlformats.org/drawingml/2006/main">
+            <a:r>
+              <a:t>[Tempo sugerido: 00:45]</a:t>
+            </a:r>
+          </a:p>
+          <a:p xmlns:a="http://schemas.openxmlformats.org/drawingml/2006/main">
+            <a:r>
+              <a:t/>
+            </a:r>
+          </a:p>
+          <a:p xmlns:a="http://schemas.openxmlformats.org/drawingml/2006/main">
+            <a:r>
+              <a:t>Fala sugerida:</a:t>
+            </a:r>
+          </a:p>
+          <a:p xmlns:a="http://schemas.openxmlformats.org/drawingml/2006/main">
+            <a:r>
+              <a:t>Bem-vindo ao episódio 6 do dbt Moderno na Prática. Hoje vamos trabalhar o tema “A pirâmide moderna de qualidade de dados”. Cada risco pede um mecanismo de detecção diferente. O objetivo não é apenas conhecer o conceito: vamos conectá-lo ao laboratório e terminar com uma evidência que você consegue reproduzir no seu próprio ambiente. Ao longo da aula, separe sempre o que é recurso aberto e estável daquilo que aparecerá apenas no Radar.</a:t>
+            </a:r>
+          </a:p>
+          <a:p xmlns:a="http://schemas.openxmlformats.org/drawingml/2006/main">
+            <a:r>
+              <a:t/>
+            </a:r>
+          </a:p>
+          <a:p xmlns:a="http://schemas.openxmlformats.org/drawingml/2006/main">
+            <a:r>
+              <a:t>O que destacar:</a:t>
+            </a:r>
+          </a:p>
+          <a:p xmlns:a="http://schemas.openxmlformats.org/drawingml/2006/main">
+            <a:r>
+              <a:t>- Apresente o título, situe o checkpoint 06 e deixe claro que a aula faz parte da trilha open/stable.</a:t>
+            </a:r>
+          </a:p>
+          <a:p xmlns:a="http://schemas.openxmlformats.org/drawingml/2006/main">
+            <a:r>
+              <a:t/>
+            </a:r>
+          </a:p>
+          <a:p xmlns:a="http://schemas.openxmlformats.org/drawingml/2006/main">
+            <a:r>
+              <a:t>Transição:</a:t>
+            </a:r>
+          </a:p>
+          <a:p xmlns:a="http://schemas.openxmlformats.org/drawingml/2006/main">
+            <a:r>
+              <a:t>Com esse ponto estabelecido, avance para “not_null pode passar enquanto um prazo devolve menos cinco dias.”.</a:t>
             </a:r>
           </a:p>
           <a:p xmlns:a="http://schemas.openxmlformats.org/drawingml/2006/main">
@@ -578,7 +628,57 @@
           <a:lstStyle xmlns:a="http://schemas.openxmlformats.org/drawingml/2006/main"/>
           <a:p xmlns:a="http://schemas.openxmlformats.org/drawingml/2006/main">
             <a:r>
-              <a:t>A população materializada pode falhar mesmo quando o exemplo unitário passa. Desenvolva os pontos: unique e not_null; accepted_values; Regra delivered_revenue.</a:t>
+              <a:t>[Roteiro recomendado]</a:t>
+            </a:r>
+          </a:p>
+          <a:p xmlns:a="http://schemas.openxmlformats.org/drawingml/2006/main">
+            <a:r>
+              <a:t>[Tempo sugerido: 01:10]</a:t>
+            </a:r>
+          </a:p>
+          <a:p xmlns:a="http://schemas.openxmlformats.org/drawingml/2006/main">
+            <a:r>
+              <a:t/>
+            </a:r>
+          </a:p>
+          <a:p xmlns:a="http://schemas.openxmlformats.org/drawingml/2006/main">
+            <a:r>
+              <a:t>Fala sugerida:</a:t>
+            </a:r>
+          </a:p>
+          <a:p xmlns:a="http://schemas.openxmlformats.org/drawingml/2006/main">
+            <a:r>
+              <a:t>A mensagem principal deste slide é: A população materializada pode falhar mesmo quando o exemplo unitário passa. Para tornar isso concreto, observe unique e not_null, accepted_values e Regra delivered_revenue. Esses pontos devem ser entendidos em conjunto; não são funcionalidades isoladas. No projeto, essa combinação transforma uma convenção informal em algo que pode ser revisado, testado ou consumido de maneira consistente.</a:t>
+            </a:r>
+          </a:p>
+          <a:p xmlns:a="http://schemas.openxmlformats.org/drawingml/2006/main">
+            <a:r>
+              <a:t/>
+            </a:r>
+          </a:p>
+          <a:p xmlns:a="http://schemas.openxmlformats.org/drawingml/2006/main">
+            <a:r>
+              <a:t>O que destacar:</a:t>
+            </a:r>
+          </a:p>
+          <a:p xmlns:a="http://schemas.openxmlformats.org/drawingml/2006/main">
+            <a:r>
+              <a:t>- Comece pelo título, leia a afirmação abaixo dele e depois desenvolva os itens sem repetir o texto palavra por palavra.</a:t>
+            </a:r>
+          </a:p>
+          <a:p xmlns:a="http://schemas.openxmlformats.org/drawingml/2006/main">
+            <a:r>
+              <a:t/>
+            </a:r>
+          </a:p>
+          <a:p xmlns:a="http://schemas.openxmlformats.org/drawingml/2006/main">
+            <a:r>
+              <a:t>Transição:</a:t>
+            </a:r>
+          </a:p>
+          <a:p xmlns:a="http://schemas.openxmlformats.org/drawingml/2006/main">
+            <a:r>
+              <a:t>Com esse ponto estabelecido, avance para “Data tests procuram violações reais”.</a:t>
             </a:r>
           </a:p>
           <a:p xmlns:a="http://schemas.openxmlformats.org/drawingml/2006/main">
@@ -693,7 +793,57 @@
           <a:lstStyle xmlns:a="http://schemas.openxmlformats.org/drawingml/2006/main"/>
           <a:p xmlns:a="http://schemas.openxmlformats.org/drawingml/2006/main">
             <a:r>
-              <a:t>Use a composição para explicar visualmente: A população materializada pode falhar mesmo quando o exemplo unitário passa. unique e not_null accepted_values Regra delivered_revenue</a:t>
+              <a:t>[Roteiro recomendado]</a:t>
+            </a:r>
+          </a:p>
+          <a:p xmlns:a="http://schemas.openxmlformats.org/drawingml/2006/main">
+            <a:r>
+              <a:t>[Tempo sugerido: 00:55]</a:t>
+            </a:r>
+          </a:p>
+          <a:p xmlns:a="http://schemas.openxmlformats.org/drawingml/2006/main">
+            <a:r>
+              <a:t/>
+            </a:r>
+          </a:p>
+          <a:p xmlns:a="http://schemas.openxmlformats.org/drawingml/2006/main">
+            <a:r>
+              <a:t>Fala sugerida:</a:t>
+            </a:r>
+          </a:p>
+          <a:p xmlns:a="http://schemas.openxmlformats.org/drawingml/2006/main">
+            <a:r>
+              <a:t>Agora vamos ler a ideia visualmente. A população materializada pode falhar mesmo quando o exemplo unitário passa. Siga a composição na ordem mostrada e conecte build, População, Teste e Falha. A imagem ou o fluxo não cria uma regra nova; ele torna visível a relação que acabamos de explicar. Use a disposição dos elementos para reforçar causa, dependência ou comparação.</a:t>
+            </a:r>
+          </a:p>
+          <a:p xmlns:a="http://schemas.openxmlformats.org/drawingml/2006/main">
+            <a:r>
+              <a:t/>
+            </a:r>
+          </a:p>
+          <a:p xmlns:a="http://schemas.openxmlformats.org/drawingml/2006/main">
+            <a:r>
+              <a:t>O que destacar:</a:t>
+            </a:r>
+          </a:p>
+          <a:p xmlns:a="http://schemas.openxmlformats.org/drawingml/2006/main">
+            <a:r>
+              <a:t>- Acompanhe o fluxo ou a comparação com o cursor e preserve a ordem de leitura do slide.</a:t>
+            </a:r>
+          </a:p>
+          <a:p xmlns:a="http://schemas.openxmlformats.org/drawingml/2006/main">
+            <a:r>
+              <a:t/>
+            </a:r>
+          </a:p>
+          <a:p xmlns:a="http://schemas.openxmlformats.org/drawingml/2006/main">
+            <a:r>
+              <a:t>Transição:</a:t>
+            </a:r>
+          </a:p>
+          <a:p xmlns:a="http://schemas.openxmlformats.org/drawingml/2006/main">
+            <a:r>
+              <a:t>Com esse ponto estabelecido, avance para “Freshness responde se a fonte chegou”.</a:t>
             </a:r>
           </a:p>
           <a:p xmlns:a="http://schemas.openxmlformats.org/drawingml/2006/main">
@@ -808,7 +958,57 @@
           <a:lstStyle xmlns:a="http://schemas.openxmlformats.org/drawingml/2006/main"/>
           <a:p xmlns:a="http://schemas.openxmlformats.org/drawingml/2006/main">
             <a:r>
-              <a:t>Uma fixture recente passa; a mesma carga envelhecida deve falhar. Desenvolva os pontos: loaded_at_field; SLA explícito; Teste positivo e negativo.</a:t>
+              <a:t>[Roteiro recomendado]</a:t>
+            </a:r>
+          </a:p>
+          <a:p xmlns:a="http://schemas.openxmlformats.org/drawingml/2006/main">
+            <a:r>
+              <a:t>[Tempo sugerido: 01:10]</a:t>
+            </a:r>
+          </a:p>
+          <a:p xmlns:a="http://schemas.openxmlformats.org/drawingml/2006/main">
+            <a:r>
+              <a:t/>
+            </a:r>
+          </a:p>
+          <a:p xmlns:a="http://schemas.openxmlformats.org/drawingml/2006/main">
+            <a:r>
+              <a:t>Fala sugerida:</a:t>
+            </a:r>
+          </a:p>
+          <a:p xmlns:a="http://schemas.openxmlformats.org/drawingml/2006/main">
+            <a:r>
+              <a:t>A mensagem principal deste slide é: Uma fixture recente passa; a mesma carga envelhecida deve falhar. Para tornar isso concreto, observe loaded_at_field, SLA explícito e Teste positivo e negativo. Esses pontos devem ser entendidos em conjunto; não são funcionalidades isoladas. No projeto, essa combinação transforma uma convenção informal em algo que pode ser revisado, testado ou consumido de maneira consistente.</a:t>
+            </a:r>
+          </a:p>
+          <a:p xmlns:a="http://schemas.openxmlformats.org/drawingml/2006/main">
+            <a:r>
+              <a:t/>
+            </a:r>
+          </a:p>
+          <a:p xmlns:a="http://schemas.openxmlformats.org/drawingml/2006/main">
+            <a:r>
+              <a:t>O que destacar:</a:t>
+            </a:r>
+          </a:p>
+          <a:p xmlns:a="http://schemas.openxmlformats.org/drawingml/2006/main">
+            <a:r>
+              <a:t>- Comece pelo título, leia a afirmação abaixo dele e depois desenvolva os itens sem repetir o texto palavra por palavra.</a:t>
+            </a:r>
+          </a:p>
+          <a:p xmlns:a="http://schemas.openxmlformats.org/drawingml/2006/main">
+            <a:r>
+              <a:t/>
+            </a:r>
+          </a:p>
+          <a:p xmlns:a="http://schemas.openxmlformats.org/drawingml/2006/main">
+            <a:r>
+              <a:t>Transição:</a:t>
+            </a:r>
+          </a:p>
+          <a:p xmlns:a="http://schemas.openxmlformats.org/drawingml/2006/main">
+            <a:r>
+              <a:t>Com esse ponto estabelecido, avance para “Freshness responde se a fonte chegou”.</a:t>
             </a:r>
           </a:p>
           <a:p xmlns:a="http://schemas.openxmlformats.org/drawingml/2006/main">
@@ -923,7 +1123,57 @@
           <a:lstStyle xmlns:a="http://schemas.openxmlformats.org/drawingml/2006/main"/>
           <a:p xmlns:a="http://schemas.openxmlformats.org/drawingml/2006/main">
             <a:r>
-              <a:t>Use a composição para explicar visualmente: Uma fixture recente passa; a mesma carga envelhecida deve falhar. loaded_at_field SLA explícito Teste positivo e negativo</a:t>
+              <a:t>[Roteiro recomendado]</a:t>
+            </a:r>
+          </a:p>
+          <a:p xmlns:a="http://schemas.openxmlformats.org/drawingml/2006/main">
+            <a:r>
+              <a:t>[Tempo sugerido: 00:55]</a:t>
+            </a:r>
+          </a:p>
+          <a:p xmlns:a="http://schemas.openxmlformats.org/drawingml/2006/main">
+            <a:r>
+              <a:t/>
+            </a:r>
+          </a:p>
+          <a:p xmlns:a="http://schemas.openxmlformats.org/drawingml/2006/main">
+            <a:r>
+              <a:t>Fala sugerida:</a:t>
+            </a:r>
+          </a:p>
+          <a:p xmlns:a="http://schemas.openxmlformats.org/drawingml/2006/main">
+            <a:r>
+              <a:t>Agora vamos ler a ideia visualmente. Uma fixture recente passa; a mesma carga envelhecida deve falhar. Siga a composição na ordem mostrada e conecte recente, Warning e Error. A imagem ou o fluxo não cria uma regra nova; ele torna visível a relação que acabamos de explicar. Use a disposição dos elementos para reforçar causa, dependência ou comparação.</a:t>
+            </a:r>
+          </a:p>
+          <a:p xmlns:a="http://schemas.openxmlformats.org/drawingml/2006/main">
+            <a:r>
+              <a:t/>
+            </a:r>
+          </a:p>
+          <a:p xmlns:a="http://schemas.openxmlformats.org/drawingml/2006/main">
+            <a:r>
+              <a:t>O que destacar:</a:t>
+            </a:r>
+          </a:p>
+          <a:p xmlns:a="http://schemas.openxmlformats.org/drawingml/2006/main">
+            <a:r>
+              <a:t>- Acompanhe o fluxo ou a comparação com o cursor e preserve a ordem de leitura do slide.</a:t>
+            </a:r>
+          </a:p>
+          <a:p xmlns:a="http://schemas.openxmlformats.org/drawingml/2006/main">
+            <a:r>
+              <a:t/>
+            </a:r>
+          </a:p>
+          <a:p xmlns:a="http://schemas.openxmlformats.org/drawingml/2006/main">
+            <a:r>
+              <a:t>Transição:</a:t>
+            </a:r>
+          </a:p>
+          <a:p xmlns:a="http://schemas.openxmlformats.org/drawingml/2006/main">
+            <a:r>
+              <a:t>Com esse ponto estabelecido, avance para “Demonstração — execute”.</a:t>
             </a:r>
           </a:p>
           <a:p xmlns:a="http://schemas.openxmlformats.org/drawingml/2006/main">
@@ -1038,7 +1288,57 @@
           <a:lstStyle xmlns:a="http://schemas.openxmlformats.org/drawingml/2006/main"/>
           <a:p xmlns:a="http://schemas.openxmlformats.org/drawingml/2006/main">
             <a:r>
-              <a:t>Execute python course.py checkpoint 06. Pause para o aluno acompanhar o terminal.</a:t>
+              <a:t>[Roteiro recomendado]</a:t>
+            </a:r>
+          </a:p>
+          <a:p xmlns:a="http://schemas.openxmlformats.org/drawingml/2006/main">
+            <a:r>
+              <a:t>[Tempo sugerido: 01:20]</a:t>
+            </a:r>
+          </a:p>
+          <a:p xmlns:a="http://schemas.openxmlformats.org/drawingml/2006/main">
+            <a:r>
+              <a:t/>
+            </a:r>
+          </a:p>
+          <a:p xmlns:a="http://schemas.openxmlformats.org/drawingml/2006/main">
+            <a:r>
+              <a:t>Fala sugerida:</a:t>
+            </a:r>
+          </a:p>
+          <a:p xmlns:a="http://schemas.openxmlformats.org/drawingml/2006/main">
+            <a:r>
+              <a:t>Agora vamos sair da explicação e comprovar o comportamento. Execute os comandos exatamente como aparecem: python course.py checkpoint 06. Não é necessário ativar o ambiente virtual manualmente; o launcher do curso seleciona o ambiente correto. Antes de avançar, confirme que o comando iniciou sem erro e dê tempo para o aluno acompanhar a mesma etapa.</a:t>
+            </a:r>
+          </a:p>
+          <a:p xmlns:a="http://schemas.openxmlformats.org/drawingml/2006/main">
+            <a:r>
+              <a:t/>
+            </a:r>
+          </a:p>
+          <a:p xmlns:a="http://schemas.openxmlformats.org/drawingml/2006/main">
+            <a:r>
+              <a:t>O que destacar:</a:t>
+            </a:r>
+          </a:p>
+          <a:p xmlns:a="http://schemas.openxmlformats.org/drawingml/2006/main">
+            <a:r>
+              <a:t>- Mostre o comando completo, execute uma linha por vez quando houver mais de uma e mantenha o terminal visível.</a:t>
+            </a:r>
+          </a:p>
+          <a:p xmlns:a="http://schemas.openxmlformats.org/drawingml/2006/main">
+            <a:r>
+              <a:t/>
+            </a:r>
+          </a:p>
+          <a:p xmlns:a="http://schemas.openxmlformats.org/drawingml/2006/main">
+            <a:r>
+              <a:t>Transição:</a:t>
+            </a:r>
+          </a:p>
+          <a:p xmlns:a="http://schemas.openxmlformats.org/drawingml/2006/main">
+            <a:r>
+              <a:t>Com esse ponto estabelecido, avance para “Demonstração — observe”.</a:t>
             </a:r>
           </a:p>
           <a:p xmlns:a="http://schemas.openxmlformats.org/drawingml/2006/main">
@@ -1153,7 +1453,57 @@
           <a:lstStyle xmlns:a="http://schemas.openxmlformats.org/drawingml/2006/main"/>
           <a:p xmlns:a="http://schemas.openxmlformats.org/drawingml/2006/main">
             <a:r>
-              <a:t>Durante a execução, destaque: Unit test do intervalo; 25 data tests; Freshness recente e envelhecida.</a:t>
+              <a:t>[Roteiro recomendado]</a:t>
+            </a:r>
+          </a:p>
+          <a:p xmlns:a="http://schemas.openxmlformats.org/drawingml/2006/main">
+            <a:r>
+              <a:t>[Tempo sugerido: 01:10]</a:t>
+            </a:r>
+          </a:p>
+          <a:p xmlns:a="http://schemas.openxmlformats.org/drawingml/2006/main">
+            <a:r>
+              <a:t/>
+            </a:r>
+          </a:p>
+          <a:p xmlns:a="http://schemas.openxmlformats.org/drawingml/2006/main">
+            <a:r>
+              <a:t>Fala sugerida:</a:t>
+            </a:r>
+          </a:p>
+          <a:p xmlns:a="http://schemas.openxmlformats.org/drawingml/2006/main">
+            <a:r>
+              <a:t>Enquanto a execução acontece, não olhe apenas para a mensagem final. Observe unit test do intervalo, 25 data tests e Freshness recente e envelhecida. Cada sinal responde a uma pergunta diferente sobre o pipeline. Se um deles divergir, interrompa a demonstração e investigue; o objetivo do hands-on é produzir evidência, não apenas chegar rapidamente a uma tela verde.</a:t>
+            </a:r>
+          </a:p>
+          <a:p xmlns:a="http://schemas.openxmlformats.org/drawingml/2006/main">
+            <a:r>
+              <a:t/>
+            </a:r>
+          </a:p>
+          <a:p xmlns:a="http://schemas.openxmlformats.org/drawingml/2006/main">
+            <a:r>
+              <a:t>O que destacar:</a:t>
+            </a:r>
+          </a:p>
+          <a:p xmlns:a="http://schemas.openxmlformats.org/drawingml/2006/main">
+            <a:r>
+              <a:t>- Marque cada observação quando ela aparecer no terminal ou no artifact correspondente.</a:t>
+            </a:r>
+          </a:p>
+          <a:p xmlns:a="http://schemas.openxmlformats.org/drawingml/2006/main">
+            <a:r>
+              <a:t/>
+            </a:r>
+          </a:p>
+          <a:p xmlns:a="http://schemas.openxmlformats.org/drawingml/2006/main">
+            <a:r>
+              <a:t>Transição:</a:t>
+            </a:r>
+          </a:p>
+          <a:p xmlns:a="http://schemas.openxmlformats.org/drawingml/2006/main">
+            <a:r>
+              <a:t>Com esse ponto estabelecido, avance para “RESULTADO ESPERADO”.</a:t>
             </a:r>
           </a:p>
           <a:p xmlns:a="http://schemas.openxmlformats.org/drawingml/2006/main">
@@ -1268,7 +1618,57 @@
           <a:lstStyle xmlns:a="http://schemas.openxmlformats.org/drawingml/2006/main"/>
           <a:p xmlns:a="http://schemas.openxmlformats.org/drawingml/2006/main">
             <a:r>
-              <a:t>Confirme o resultado esperado: 45 PASS · 1 NO-OP · 0 erros. Se o valor divergir, não avance sem investigar.</a:t>
+              <a:t>[Roteiro recomendado]</a:t>
+            </a:r>
+          </a:p>
+          <a:p xmlns:a="http://schemas.openxmlformats.org/drawingml/2006/main">
+            <a:r>
+              <a:t>[Tempo sugerido: 00:45]</a:t>
+            </a:r>
+          </a:p>
+          <a:p xmlns:a="http://schemas.openxmlformats.org/drawingml/2006/main">
+            <a:r>
+              <a:t/>
+            </a:r>
+          </a:p>
+          <a:p xmlns:a="http://schemas.openxmlformats.org/drawingml/2006/main">
+            <a:r>
+              <a:t>Fala sugerida:</a:t>
+            </a:r>
+          </a:p>
+          <a:p xmlns:a="http://schemas.openxmlformats.org/drawingml/2006/main">
+            <a:r>
+              <a:t>Este é o ponto de parada da demonstração: 45 PASS · 1 NO-OP · 0 erros. Esse resultado confirma que a etapa executada produziu a evidência esperada para o checkpoint 06. Se o valor, o status ou o artifact estiver diferente, não trate a divergência como detalhe de ambiente. Use o diagnóstico do curso e só avance quando a causa estiver compreendida.</a:t>
+            </a:r>
+          </a:p>
+          <a:p xmlns:a="http://schemas.openxmlformats.org/drawingml/2006/main">
+            <a:r>
+              <a:t/>
+            </a:r>
+          </a:p>
+          <a:p xmlns:a="http://schemas.openxmlformats.org/drawingml/2006/main">
+            <a:r>
+              <a:t>O que destacar:</a:t>
+            </a:r>
+          </a:p>
+          <a:p xmlns:a="http://schemas.openxmlformats.org/drawingml/2006/main">
+            <a:r>
+              <a:t>- Compare o resultado do terminal com a frase central do slide e registre a evidência antes de continuar.</a:t>
+            </a:r>
+          </a:p>
+          <a:p xmlns:a="http://schemas.openxmlformats.org/drawingml/2006/main">
+            <a:r>
+              <a:t/>
+            </a:r>
+          </a:p>
+          <a:p xmlns:a="http://schemas.openxmlformats.org/drawingml/2006/main">
+            <a:r>
+              <a:t>Transição:</a:t>
+            </a:r>
+          </a:p>
+          <a:p xmlns:a="http://schemas.openxmlformats.org/drawingml/2006/main">
+            <a:r>
+              <a:t>Com esse ponto estabelecido, avance para “O mesmo recurso afeta três decisões”.</a:t>
             </a:r>
           </a:p>
           <a:p xmlns:a="http://schemas.openxmlformats.org/drawingml/2006/main">
@@ -1383,7 +1783,57 @@
           <a:lstStyle xmlns:a="http://schemas.openxmlformats.org/drawingml/2006/main"/>
           <a:p xmlns:a="http://schemas.openxmlformats.org/drawingml/2006/main">
             <a:r>
-              <a:t>Conecte a técnica aos efeitos: Governança: risco e owner; FinOps: controle na etapa barata; IA: interfaces testadas. Não prometa economia sem medição.</a:t>
+              <a:t>[Roteiro recomendado]</a:t>
+            </a:r>
+          </a:p>
+          <a:p xmlns:a="http://schemas.openxmlformats.org/drawingml/2006/main">
+            <a:r>
+              <a:t>[Tempo sugerido: 01:00]</a:t>
+            </a:r>
+          </a:p>
+          <a:p xmlns:a="http://schemas.openxmlformats.org/drawingml/2006/main">
+            <a:r>
+              <a:t/>
+            </a:r>
+          </a:p>
+          <a:p xmlns:a="http://schemas.openxmlformats.org/drawingml/2006/main">
+            <a:r>
+              <a:t>Fala sugerida:</a:t>
+            </a:r>
+          </a:p>
+          <a:p xmlns:a="http://schemas.openxmlformats.org/drawingml/2006/main">
+            <a:r>
+              <a:t>Antes de seguir, conecte a técnica às decisões que ela afeta: Governança: risco e owner, FinOps: controle na etapa barata e IA: interfaces testadas. Governança define responsabilidade e consistência; FinOps pergunta quanto trabalho estamos repetindo; e IA depende do contexto que decidimos expor. A mesma implementação pode melhorar os três eixos, mas os ganhos devem ser medidos separadamente.</a:t>
+            </a:r>
+          </a:p>
+          <a:p xmlns:a="http://schemas.openxmlformats.org/drawingml/2006/main">
+            <a:r>
+              <a:t/>
+            </a:r>
+          </a:p>
+          <a:p xmlns:a="http://schemas.openxmlformats.org/drawingml/2006/main">
+            <a:r>
+              <a:t>O que destacar:</a:t>
+            </a:r>
+          </a:p>
+          <a:p xmlns:a="http://schemas.openxmlformats.org/drawingml/2006/main">
+            <a:r>
+              <a:t>- Percorra os três eixos e evite apresentar economia ou acurácia como consequência automática.</a:t>
+            </a:r>
+          </a:p>
+          <a:p xmlns:a="http://schemas.openxmlformats.org/drawingml/2006/main">
+            <a:r>
+              <a:t/>
+            </a:r>
+          </a:p>
+          <a:p xmlns:a="http://schemas.openxmlformats.org/drawingml/2006/main">
+            <a:r>
+              <a:t>Transição:</a:t>
+            </a:r>
+          </a:p>
+          <a:p xmlns:a="http://schemas.openxmlformats.org/drawingml/2006/main">
+            <a:r>
+              <a:t>Com esse ponto estabelecido, avance para “+4 dias”.</a:t>
             </a:r>
           </a:p>
           <a:p xmlns:a="http://schemas.openxmlformats.org/drawingml/2006/main">
@@ -1498,7 +1948,57 @@
           <a:lstStyle xmlns:a="http://schemas.openxmlformats.org/drawingml/2006/main"/>
           <a:p xmlns:a="http://schemas.openxmlformats.org/drawingml/2006/main">
             <a:r>
-              <a:t>+4 dias: resultado esperado do bug de data. Mini-case reproduzido no laboratório.</a:t>
+              <a:t>[Roteiro recomendado]</a:t>
+            </a:r>
+          </a:p>
+          <a:p xmlns:a="http://schemas.openxmlformats.org/drawingml/2006/main">
+            <a:r>
+              <a:t>[Tempo sugerido: 00:55]</a:t>
+            </a:r>
+          </a:p>
+          <a:p xmlns:a="http://schemas.openxmlformats.org/drawingml/2006/main">
+            <a:r>
+              <a:t/>
+            </a:r>
+          </a:p>
+          <a:p xmlns:a="http://schemas.openxmlformats.org/drawingml/2006/main">
+            <a:r>
+              <a:t>Fala sugerida:</a:t>
+            </a:r>
+          </a:p>
+          <a:p xmlns:a="http://schemas.openxmlformats.org/drawingml/2006/main">
+            <a:r>
+              <a:t>Aqui temos +4 dias: resultado esperado do bug de data. O número ajuda a dimensionar o exemplo, mas precisa ser lido com a ressalva correta. Mini-case reproduzido no laboratório. Use o case como evidência contextual e não como promessa de que outro projeto repetirá o mesmo resultado sem as mesmas condições.</a:t>
+            </a:r>
+          </a:p>
+          <a:p xmlns:a="http://schemas.openxmlformats.org/drawingml/2006/main">
+            <a:r>
+              <a:t/>
+            </a:r>
+          </a:p>
+          <a:p xmlns:a="http://schemas.openxmlformats.org/drawingml/2006/main">
+            <a:r>
+              <a:t>O que destacar:</a:t>
+            </a:r>
+          </a:p>
+          <a:p xmlns:a="http://schemas.openxmlformats.org/drawingml/2006/main">
+            <a:r>
+              <a:t>- Apresente primeiro o número, depois a definição e termine obrigatoriamente com a ressalva.</a:t>
+            </a:r>
+          </a:p>
+          <a:p xmlns:a="http://schemas.openxmlformats.org/drawingml/2006/main">
+            <a:r>
+              <a:t/>
+            </a:r>
+          </a:p>
+          <a:p xmlns:a="http://schemas.openxmlformats.org/drawingml/2006/main">
+            <a:r>
+              <a:t>Transição:</a:t>
+            </a:r>
+          </a:p>
+          <a:p xmlns:a="http://schemas.openxmlformats.org/drawingml/2006/main">
+            <a:r>
+              <a:t>Com esse ponto estabelecido, avance para “Limitações que precisam permanecer visíveis”.</a:t>
             </a:r>
           </a:p>
           <a:p xmlns:a="http://schemas.openxmlformats.org/drawingml/2006/main">
@@ -1613,7 +2113,57 @@
           <a:lstStyle xmlns:a="http://schemas.openxmlformats.org/drawingml/2006/main"/>
           <a:p xmlns:a="http://schemas.openxmlformats.org/drawingml/2006/main">
             <a:r>
-              <a:t>Apresente os limites sem minimizá-los: Freshness não mede volume; Teste pesado pode custar; Alerta sem runbook vira ruído.</a:t>
+              <a:t>[Roteiro recomendado]</a:t>
+            </a:r>
+          </a:p>
+          <a:p xmlns:a="http://schemas.openxmlformats.org/drawingml/2006/main">
+            <a:r>
+              <a:t>[Tempo sugerido: 01:00]</a:t>
+            </a:r>
+          </a:p>
+          <a:p xmlns:a="http://schemas.openxmlformats.org/drawingml/2006/main">
+            <a:r>
+              <a:t/>
+            </a:r>
+          </a:p>
+          <a:p xmlns:a="http://schemas.openxmlformats.org/drawingml/2006/main">
+            <a:r>
+              <a:t>Fala sugerida:</a:t>
+            </a:r>
+          </a:p>
+          <a:p xmlns:a="http://schemas.openxmlformats.org/drawingml/2006/main">
+            <a:r>
+              <a:t>Também precisamos declarar os limites da recomendação. Neste cenário, considere freshness não mede volume, Teste pesado pode custar e Alerta sem runbook vira ruído. Esses pontos não anulam a técnica; eles delimitam onde a demonstração é válida e quais condições precisam ser verificadas antes de levar o padrão para produção. Tratar limites como parte do design evita transformar uma boa prática em regra universal.</a:t>
+            </a:r>
+          </a:p>
+          <a:p xmlns:a="http://schemas.openxmlformats.org/drawingml/2006/main">
+            <a:r>
+              <a:t/>
+            </a:r>
+          </a:p>
+          <a:p xmlns:a="http://schemas.openxmlformats.org/drawingml/2006/main">
+            <a:r>
+              <a:t>O que destacar:</a:t>
+            </a:r>
+          </a:p>
+          <a:p xmlns:a="http://schemas.openxmlformats.org/drawingml/2006/main">
+            <a:r>
+              <a:t>- Leia os limites com o mesmo peso dado aos benefícios e diferencie restrição do laboratório de restrição do produto.</a:t>
+            </a:r>
+          </a:p>
+          <a:p xmlns:a="http://schemas.openxmlformats.org/drawingml/2006/main">
+            <a:r>
+              <a:t/>
+            </a:r>
+          </a:p>
+          <a:p xmlns:a="http://schemas.openxmlformats.org/drawingml/2006/main">
+            <a:r>
+              <a:t>Transição:</a:t>
+            </a:r>
+          </a:p>
+          <a:p xmlns:a="http://schemas.openxmlformats.org/drawingml/2006/main">
+            <a:r>
+              <a:t>Com esse ponto estabelecido, avance para “RADAR”.</a:t>
             </a:r>
           </a:p>
           <a:p xmlns:a="http://schemas.openxmlformats.org/drawingml/2006/main">
@@ -1728,7 +2278,57 @@
           <a:lstStyle xmlns:a="http://schemas.openxmlformats.org/drawingml/2006/main"/>
           <a:p xmlns:a="http://schemas.openxmlformats.org/drawingml/2006/main">
             <a:r>
-              <a:t>not_null pode passar enquanto um prazo devolve menos cinco dias. Use o diagrama para antecipar o problema que será comprovado no laboratório.</a:t>
+              <a:t>[Roteiro recomendado]</a:t>
+            </a:r>
+          </a:p>
+          <a:p xmlns:a="http://schemas.openxmlformats.org/drawingml/2006/main">
+            <a:r>
+              <a:t>[Tempo sugerido: 01:00]</a:t>
+            </a:r>
+          </a:p>
+          <a:p xmlns:a="http://schemas.openxmlformats.org/drawingml/2006/main">
+            <a:r>
+              <a:t/>
+            </a:r>
+          </a:p>
+          <a:p xmlns:a="http://schemas.openxmlformats.org/drawingml/2006/main">
+            <a:r>
+              <a:t>Fala sugerida:</a:t>
+            </a:r>
+          </a:p>
+          <a:p xmlns:a="http://schemas.openxmlformats.org/drawingml/2006/main">
+            <a:r>
+              <a:t>Quero começar com uma provocação: not_null pode passar enquanto um prazo devolve menos cinco dias. Essa pergunta orienta toda a aula. Em vez de aceitar uma afirmação porque ela parece correta, vamos procurar uma definição verificável e uma demonstração executável. Guarde essa tensão, porque voltaremos a ela quando compararmos o conceito com o resultado do laboratório.</a:t>
+            </a:r>
+          </a:p>
+          <a:p xmlns:a="http://schemas.openxmlformats.org/drawingml/2006/main">
+            <a:r>
+              <a:t/>
+            </a:r>
+          </a:p>
+          <a:p xmlns:a="http://schemas.openxmlformats.org/drawingml/2006/main">
+            <a:r>
+              <a:t>O que destacar:</a:t>
+            </a:r>
+          </a:p>
+          <a:p xmlns:a="http://schemas.openxmlformats.org/drawingml/2006/main">
+            <a:r>
+              <a:t>- Dê uma pausa depois da provocação e use o diagrama como mapa do problema, sem explicar todas as etapas ainda.</a:t>
+            </a:r>
+          </a:p>
+          <a:p xmlns:a="http://schemas.openxmlformats.org/drawingml/2006/main">
+            <a:r>
+              <a:t/>
+            </a:r>
+          </a:p>
+          <a:p xmlns:a="http://schemas.openxmlformats.org/drawingml/2006/main">
+            <a:r>
+              <a:t>Transição:</a:t>
+            </a:r>
+          </a:p>
+          <a:p xmlns:a="http://schemas.openxmlformats.org/drawingml/2006/main">
+            <a:r>
+              <a:t>Com esse ponto estabelecido, avance para “Ao final, você consegue...”.</a:t>
             </a:r>
           </a:p>
           <a:p xmlns:a="http://schemas.openxmlformats.org/drawingml/2006/main">
@@ -1843,7 +2443,57 @@
           <a:lstStyle xmlns:a="http://schemas.openxmlformats.org/drawingml/2006/main"/>
           <a:p xmlns:a="http://schemas.openxmlformats.org/drawingml/2006/main">
             <a:r>
-              <a:t>Engines novas antecipam parse; não substituem testes, freshness ou SLO. Reforce que beta e preview não fazem parte da aceitação.</a:t>
+              <a:t>[Roteiro recomendado]</a:t>
+            </a:r>
+          </a:p>
+          <a:p xmlns:a="http://schemas.openxmlformats.org/drawingml/2006/main">
+            <a:r>
+              <a:t>[Tempo sugerido: 00:55]</a:t>
+            </a:r>
+          </a:p>
+          <a:p xmlns:a="http://schemas.openxmlformats.org/drawingml/2006/main">
+            <a:r>
+              <a:t/>
+            </a:r>
+          </a:p>
+          <a:p xmlns:a="http://schemas.openxmlformats.org/drawingml/2006/main">
+            <a:r>
+              <a:t>Fala sugerida:</a:t>
+            </a:r>
+          </a:p>
+          <a:p xmlns:a="http://schemas.openxmlformats.org/drawingml/2006/main">
+            <a:r>
+              <a:t>Este é o nosso Radar: Engines novas antecipam parse; não substituem testes, freshness ou SLO. A intenção é mostrar a direção da ferramenta sem misturar preview com o caminho suportado da aula. Novidade observada não é recomendação de produção. Para adotar qualquer recurso futuro, confirme maturidade, adaptador, documentação e impacto sobre o projeto antes de alterar o baseline estável.</a:t>
+            </a:r>
+          </a:p>
+          <a:p xmlns:a="http://schemas.openxmlformats.org/drawingml/2006/main">
+            <a:r>
+              <a:t/>
+            </a:r>
+          </a:p>
+          <a:p xmlns:a="http://schemas.openxmlformats.org/drawingml/2006/main">
+            <a:r>
+              <a:t>O que destacar:</a:t>
+            </a:r>
+          </a:p>
+          <a:p xmlns:a="http://schemas.openxmlformats.org/drawingml/2006/main">
+            <a:r>
+              <a:t>- Reforce visualmente a regra do rodapé e não execute comandos beta ou preview como parte obrigatória da aula.</a:t>
+            </a:r>
+          </a:p>
+          <a:p xmlns:a="http://schemas.openxmlformats.org/drawingml/2006/main">
+            <a:r>
+              <a:t/>
+            </a:r>
+          </a:p>
+          <a:p xmlns:a="http://schemas.openxmlformats.org/drawingml/2006/main">
+            <a:r>
+              <a:t>Transição:</a:t>
+            </a:r>
+          </a:p>
+          <a:p xmlns:a="http://schemas.openxmlformats.org/drawingml/2006/main">
+            <a:r>
+              <a:t>Com esse ponto estabelecido, avance para “PRÓXIMO PASSO”.</a:t>
             </a:r>
           </a:p>
           <a:p xmlns:a="http://schemas.openxmlformats.org/drawingml/2006/main">
@@ -1958,7 +2608,57 @@
           <a:lstStyle xmlns:a="http://schemas.openxmlformats.org/drawingml/2006/main"/>
           <a:p xmlns:a="http://schemas.openxmlformats.org/drawingml/2006/main">
             <a:r>
-              <a:t>Escreva o menor unit test que reproduz um bug possível. Encerre conectando a aula ao próximo checkpoint.</a:t>
+              <a:t>[Roteiro recomendado]</a:t>
+            </a:r>
+          </a:p>
+          <a:p xmlns:a="http://schemas.openxmlformats.org/drawingml/2006/main">
+            <a:r>
+              <a:t>[Tempo sugerido: 00:40]</a:t>
+            </a:r>
+          </a:p>
+          <a:p xmlns:a="http://schemas.openxmlformats.org/drawingml/2006/main">
+            <a:r>
+              <a:t/>
+            </a:r>
+          </a:p>
+          <a:p xmlns:a="http://schemas.openxmlformats.org/drawingml/2006/main">
+            <a:r>
+              <a:t>Fala sugerida:</a:t>
+            </a:r>
+          </a:p>
+          <a:p xmlns:a="http://schemas.openxmlformats.org/drawingml/2006/main">
+            <a:r>
+              <a:t>Escreva o menor unit test que reproduz um bug possível. Faça essa etapa antes de seguir para o próximo episódio, porque o curso é cumulativo e o checkpoint atual se torna a base da aula seguinte. Se houver divergência, use o relatório de suporte e registre o que foi observado. O objetivo é avançar com um estado conhecido e reproduzível, não apenas assistir ao conteúdo.</a:t>
+            </a:r>
+          </a:p>
+          <a:p xmlns:a="http://schemas.openxmlformats.org/drawingml/2006/main">
+            <a:r>
+              <a:t/>
+            </a:r>
+          </a:p>
+          <a:p xmlns:a="http://schemas.openxmlformats.org/drawingml/2006/main">
+            <a:r>
+              <a:t>O que destacar:</a:t>
+            </a:r>
+          </a:p>
+          <a:p xmlns:a="http://schemas.openxmlformats.org/drawingml/2006/main">
+            <a:r>
+              <a:t>- Mostre o checkpoint e indique no repositório onde ficam o roteiro, os comandos e as referências da aula.</a:t>
+            </a:r>
+          </a:p>
+          <a:p xmlns:a="http://schemas.openxmlformats.org/drawingml/2006/main">
+            <a:r>
+              <a:t/>
+            </a:r>
+          </a:p>
+          <a:p xmlns:a="http://schemas.openxmlformats.org/drawingml/2006/main">
+            <a:r>
+              <a:t>Transição:</a:t>
+            </a:r>
+          </a:p>
+          <a:p xmlns:a="http://schemas.openxmlformats.org/drawingml/2006/main">
+            <a:r>
+              <a:t>Encerre retomando a pergunta inicial e confirme que o aluno sabe qual ação executar depois do episódio 6.</a:t>
             </a:r>
           </a:p>
           <a:p xmlns:a="http://schemas.openxmlformats.org/drawingml/2006/main">
@@ -2073,7 +2773,57 @@
           <a:lstStyle xmlns:a="http://schemas.openxmlformats.org/drawingml/2006/main"/>
           <a:p xmlns:a="http://schemas.openxmlformats.org/drawingml/2006/main">
             <a:r>
-              <a:t>Explique os três resultados observáveis da aula: Separar cinco mecanismos; Isolar uma regra funcional; Testar freshness sem depender da data.</a:t>
+              <a:t>[Roteiro recomendado]</a:t>
+            </a:r>
+          </a:p>
+          <a:p xmlns:a="http://schemas.openxmlformats.org/drawingml/2006/main">
+            <a:r>
+              <a:t>[Tempo sugerido: 01:00]</a:t>
+            </a:r>
+          </a:p>
+          <a:p xmlns:a="http://schemas.openxmlformats.org/drawingml/2006/main">
+            <a:r>
+              <a:t/>
+            </a:r>
+          </a:p>
+          <a:p xmlns:a="http://schemas.openxmlformats.org/drawingml/2006/main">
+            <a:r>
+              <a:t>Fala sugerida:</a:t>
+            </a:r>
+          </a:p>
+          <a:p xmlns:a="http://schemas.openxmlformats.org/drawingml/2006/main">
+            <a:r>
+              <a:t>Ao final desta aula, você deverá conseguir separar cinco mecanismos, Isolar uma regra funcional e Testar freshness sem depender da data. Esses resultados formam uma sequência: primeiro entendemos a regra, depois observamos sua representação no projeto e, por fim, comprovamos o comportamento no checkpoint. Se alguma dessas três partes não estiver clara, volte ao slide correspondente antes de executar a demonstração.</a:t>
+            </a:r>
+          </a:p>
+          <a:p xmlns:a="http://schemas.openxmlformats.org/drawingml/2006/main">
+            <a:r>
+              <a:t/>
+            </a:r>
+          </a:p>
+          <a:p xmlns:a="http://schemas.openxmlformats.org/drawingml/2006/main">
+            <a:r>
+              <a:t>O que destacar:</a:t>
+            </a:r>
+          </a:p>
+          <a:p xmlns:a="http://schemas.openxmlformats.org/drawingml/2006/main">
+            <a:r>
+              <a:t>- Percorra os objetivos da esquerda para a direita e apresente-os como resultados observáveis, não como uma agenda abstrata.</a:t>
+            </a:r>
+          </a:p>
+          <a:p xmlns:a="http://schemas.openxmlformats.org/drawingml/2006/main">
+            <a:r>
+              <a:t/>
+            </a:r>
+          </a:p>
+          <a:p xmlns:a="http://schemas.openxmlformats.org/drawingml/2006/main">
+            <a:r>
+              <a:t>Transição:</a:t>
+            </a:r>
+          </a:p>
+          <a:p xmlns:a="http://schemas.openxmlformats.org/drawingml/2006/main">
+            <a:r>
+              <a:t>Com esse ponto estabelecido, avance para “Cinco perguntas, cinco mecanismos”.</a:t>
             </a:r>
           </a:p>
           <a:p xmlns:a="http://schemas.openxmlformats.org/drawingml/2006/main">
@@ -2188,7 +2938,57 @@
           <a:lstStyle xmlns:a="http://schemas.openxmlformats.org/drawingml/2006/main"/>
           <a:p xmlns:a="http://schemas.openxmlformats.org/drawingml/2006/main">
             <a:r>
-              <a:t>Unit, contrato, data test, freshness e observabilidade cobrem riscos distintos. Desenvolva os pontos: Lógica; Estrutura; População; Atraso; Comportamento.</a:t>
+              <a:t>[Roteiro recomendado]</a:t>
+            </a:r>
+          </a:p>
+          <a:p xmlns:a="http://schemas.openxmlformats.org/drawingml/2006/main">
+            <a:r>
+              <a:t>[Tempo sugerido: 01:10]</a:t>
+            </a:r>
+          </a:p>
+          <a:p xmlns:a="http://schemas.openxmlformats.org/drawingml/2006/main">
+            <a:r>
+              <a:t/>
+            </a:r>
+          </a:p>
+          <a:p xmlns:a="http://schemas.openxmlformats.org/drawingml/2006/main">
+            <a:r>
+              <a:t>Fala sugerida:</a:t>
+            </a:r>
+          </a:p>
+          <a:p xmlns:a="http://schemas.openxmlformats.org/drawingml/2006/main">
+            <a:r>
+              <a:t>A mensagem principal deste slide é: Unit, contrato, data test, freshness e observabilidade cobrem riscos distintos. Para tornar isso concreto, observe lógica, Estrutura, População, Atraso e Comportamento. Esses pontos devem ser entendidos em conjunto; não são funcionalidades isoladas. No projeto, essa combinação transforma uma convenção informal em algo que pode ser revisado, testado ou consumido de maneira consistente.</a:t>
+            </a:r>
+          </a:p>
+          <a:p xmlns:a="http://schemas.openxmlformats.org/drawingml/2006/main">
+            <a:r>
+              <a:t/>
+            </a:r>
+          </a:p>
+          <a:p xmlns:a="http://schemas.openxmlformats.org/drawingml/2006/main">
+            <a:r>
+              <a:t>O que destacar:</a:t>
+            </a:r>
+          </a:p>
+          <a:p xmlns:a="http://schemas.openxmlformats.org/drawingml/2006/main">
+            <a:r>
+              <a:t>- Comece pelo título, leia a afirmação abaixo dele e depois desenvolva os itens sem repetir o texto palavra por palavra.</a:t>
+            </a:r>
+          </a:p>
+          <a:p xmlns:a="http://schemas.openxmlformats.org/drawingml/2006/main">
+            <a:r>
+              <a:t/>
+            </a:r>
+          </a:p>
+          <a:p xmlns:a="http://schemas.openxmlformats.org/drawingml/2006/main">
+            <a:r>
+              <a:t>Transição:</a:t>
+            </a:r>
+          </a:p>
+          <a:p xmlns:a="http://schemas.openxmlformats.org/drawingml/2006/main">
+            <a:r>
+              <a:t>Com esse ponto estabelecido, avance para “Cinco perguntas, cinco mecanismos”.</a:t>
             </a:r>
           </a:p>
           <a:p xmlns:a="http://schemas.openxmlformats.org/drawingml/2006/main">
@@ -2303,7 +3103,57 @@
           <a:lstStyle xmlns:a="http://schemas.openxmlformats.org/drawingml/2006/main"/>
           <a:p xmlns:a="http://schemas.openxmlformats.org/drawingml/2006/main">
             <a:r>
-              <a:t>Use a composição para explicar visualmente: Unit, contrato, data test, freshness e observabilidade cobrem riscos distintos. Lógica Estrutura População Atraso Comportamento</a:t>
+              <a:t>[Roteiro recomendado]</a:t>
+            </a:r>
+          </a:p>
+          <a:p xmlns:a="http://schemas.openxmlformats.org/drawingml/2006/main">
+            <a:r>
+              <a:t>[Tempo sugerido: 00:55]</a:t>
+            </a:r>
+          </a:p>
+          <a:p xmlns:a="http://schemas.openxmlformats.org/drawingml/2006/main">
+            <a:r>
+              <a:t/>
+            </a:r>
+          </a:p>
+          <a:p xmlns:a="http://schemas.openxmlformats.org/drawingml/2006/main">
+            <a:r>
+              <a:t>Fala sugerida:</a:t>
+            </a:r>
+          </a:p>
+          <a:p xmlns:a="http://schemas.openxmlformats.org/drawingml/2006/main">
+            <a:r>
+              <a:t>Agora vamos ler a ideia visualmente. Unit, contrato, data test, freshness e observabilidade cobrem riscos distintos. Siga a composição na ordem mostrada e conecte os elementos principais. A imagem ou o fluxo não cria uma regra nova; ele torna visível a relação que acabamos de explicar. Use a disposição dos elementos para reforçar causa, dependência ou comparação.</a:t>
+            </a:r>
+          </a:p>
+          <a:p xmlns:a="http://schemas.openxmlformats.org/drawingml/2006/main">
+            <a:r>
+              <a:t/>
+            </a:r>
+          </a:p>
+          <a:p xmlns:a="http://schemas.openxmlformats.org/drawingml/2006/main">
+            <a:r>
+              <a:t>O que destacar:</a:t>
+            </a:r>
+          </a:p>
+          <a:p xmlns:a="http://schemas.openxmlformats.org/drawingml/2006/main">
+            <a:r>
+              <a:t>- Acompanhe o fluxo ou a comparação com o cursor e preserve a ordem de leitura do slide.</a:t>
+            </a:r>
+          </a:p>
+          <a:p xmlns:a="http://schemas.openxmlformats.org/drawingml/2006/main">
+            <a:r>
+              <a:t/>
+            </a:r>
+          </a:p>
+          <a:p xmlns:a="http://schemas.openxmlformats.org/drawingml/2006/main">
+            <a:r>
+              <a:t>Transição:</a:t>
+            </a:r>
+          </a:p>
+          <a:p xmlns:a="http://schemas.openxmlformats.org/drawingml/2006/main">
+            <a:r>
+              <a:t>Com esse ponto estabelecido, avance para “Unit test captura o bug conhecido”.</a:t>
             </a:r>
           </a:p>
           <a:p xmlns:a="http://schemas.openxmlformats.org/drawingml/2006/main">
@@ -2418,7 +3268,57 @@
           <a:lstStyle xmlns:a="http://schemas.openxmlformats.org/drawingml/2006/main"/>
           <a:p xmlns:a="http://schemas.openxmlformats.org/drawingml/2006/main">
             <a:r>
-              <a:t>Compra em 1º e entrega em 5 de janeiro devem produzir quatro dias positivos. Desenvolva os pontos: Entrada mínima; Saída esperada; Regressão determinística.</a:t>
+              <a:t>[Roteiro recomendado]</a:t>
+            </a:r>
+          </a:p>
+          <a:p xmlns:a="http://schemas.openxmlformats.org/drawingml/2006/main">
+            <a:r>
+              <a:t>[Tempo sugerido: 01:10]</a:t>
+            </a:r>
+          </a:p>
+          <a:p xmlns:a="http://schemas.openxmlformats.org/drawingml/2006/main">
+            <a:r>
+              <a:t/>
+            </a:r>
+          </a:p>
+          <a:p xmlns:a="http://schemas.openxmlformats.org/drawingml/2006/main">
+            <a:r>
+              <a:t>Fala sugerida:</a:t>
+            </a:r>
+          </a:p>
+          <a:p xmlns:a="http://schemas.openxmlformats.org/drawingml/2006/main">
+            <a:r>
+              <a:t>A mensagem principal deste slide é: Compra em 1º e entrega em 5 de janeiro devem produzir quatro dias positivos. Para tornar isso concreto, observe entrada mínima, Saída esperada e Regressão determinística. Esses pontos devem ser entendidos em conjunto; não são funcionalidades isoladas. No projeto, essa combinação transforma uma convenção informal em algo que pode ser revisado, testado ou consumido de maneira consistente.</a:t>
+            </a:r>
+          </a:p>
+          <a:p xmlns:a="http://schemas.openxmlformats.org/drawingml/2006/main">
+            <a:r>
+              <a:t/>
+            </a:r>
+          </a:p>
+          <a:p xmlns:a="http://schemas.openxmlformats.org/drawingml/2006/main">
+            <a:r>
+              <a:t>O que destacar:</a:t>
+            </a:r>
+          </a:p>
+          <a:p xmlns:a="http://schemas.openxmlformats.org/drawingml/2006/main">
+            <a:r>
+              <a:t>- Comece pelo título, leia a afirmação abaixo dele e depois desenvolva os itens sem repetir o texto palavra por palavra.</a:t>
+            </a:r>
+          </a:p>
+          <a:p xmlns:a="http://schemas.openxmlformats.org/drawingml/2006/main">
+            <a:r>
+              <a:t/>
+            </a:r>
+          </a:p>
+          <a:p xmlns:a="http://schemas.openxmlformats.org/drawingml/2006/main">
+            <a:r>
+              <a:t>Transição:</a:t>
+            </a:r>
+          </a:p>
+          <a:p xmlns:a="http://schemas.openxmlformats.org/drawingml/2006/main">
+            <a:r>
+              <a:t>Com esse ponto estabelecido, avance para “Unit test captura o bug conhecido”.</a:t>
             </a:r>
           </a:p>
           <a:p xmlns:a="http://schemas.openxmlformats.org/drawingml/2006/main">
@@ -2533,7 +3433,57 @@
           <a:lstStyle xmlns:a="http://schemas.openxmlformats.org/drawingml/2006/main"/>
           <a:p xmlns:a="http://schemas.openxmlformats.org/drawingml/2006/main">
             <a:r>
-              <a:t>Use a composição para explicar visualmente: Compra em 1º e entrega em 5 de janeiro devem produzir quatro dias positivos. Entrada mínima Saída esperada Regressão determinística</a:t>
+              <a:t>[Roteiro recomendado]</a:t>
+            </a:r>
+          </a:p>
+          <a:p xmlns:a="http://schemas.openxmlformats.org/drawingml/2006/main">
+            <a:r>
+              <a:t>[Tempo sugerido: 00:55]</a:t>
+            </a:r>
+          </a:p>
+          <a:p xmlns:a="http://schemas.openxmlformats.org/drawingml/2006/main">
+            <a:r>
+              <a:t/>
+            </a:r>
+          </a:p>
+          <a:p xmlns:a="http://schemas.openxmlformats.org/drawingml/2006/main">
+            <a:r>
+              <a:t>Fala sugerida:</a:t>
+            </a:r>
+          </a:p>
+          <a:p xmlns:a="http://schemas.openxmlformats.org/drawingml/2006/main">
+            <a:r>
+              <a:t>Agora vamos ler a ideia visualmente. Compra em 1º e entrega em 5 de janeiro devem produzir quatro dias positivos. Siga a composição na ordem mostrada e conecte fixture, 4 dias, Entrada mínima, Saída esperada e Regressão determinística. A imagem ou o fluxo não cria uma regra nova; ele torna visível a relação que acabamos de explicar. Use a disposição dos elementos para reforçar causa, dependência ou comparação.</a:t>
+            </a:r>
+          </a:p>
+          <a:p xmlns:a="http://schemas.openxmlformats.org/drawingml/2006/main">
+            <a:r>
+              <a:t/>
+            </a:r>
+          </a:p>
+          <a:p xmlns:a="http://schemas.openxmlformats.org/drawingml/2006/main">
+            <a:r>
+              <a:t>O que destacar:</a:t>
+            </a:r>
+          </a:p>
+          <a:p xmlns:a="http://schemas.openxmlformats.org/drawingml/2006/main">
+            <a:r>
+              <a:t>- Acompanhe o fluxo ou a comparação com o cursor e preserve a ordem de leitura do slide.</a:t>
+            </a:r>
+          </a:p>
+          <a:p xmlns:a="http://schemas.openxmlformats.org/drawingml/2006/main">
+            <a:r>
+              <a:t/>
+            </a:r>
+          </a:p>
+          <a:p xmlns:a="http://schemas.openxmlformats.org/drawingml/2006/main">
+            <a:r>
+              <a:t>Transição:</a:t>
+            </a:r>
+          </a:p>
+          <a:p xmlns:a="http://schemas.openxmlformats.org/drawingml/2006/main">
+            <a:r>
+              <a:t>Com esse ponto estabelecido, avance para “O exemplo oficial mostra execução isolada”.</a:t>
             </a:r>
           </a:p>
           <a:p xmlns:a="http://schemas.openxmlformats.org/drawingml/2006/main">
@@ -2648,7 +3598,57 @@
           <a:lstStyle xmlns:a="http://schemas.openxmlformats.org/drawingml/2006/main"/>
           <a:p xmlns:a="http://schemas.openxmlformats.org/drawingml/2006/main">
             <a:r>
-              <a:t>Unit tests validam lógica SQL antes de materializar toda a população. Desenvolva os pontos: Inputs estáticos; Modelo selecionado; Falha localizada.</a:t>
+              <a:t>[Roteiro recomendado]</a:t>
+            </a:r>
+          </a:p>
+          <a:p xmlns:a="http://schemas.openxmlformats.org/drawingml/2006/main">
+            <a:r>
+              <a:t>[Tempo sugerido: 01:10]</a:t>
+            </a:r>
+          </a:p>
+          <a:p xmlns:a="http://schemas.openxmlformats.org/drawingml/2006/main">
+            <a:r>
+              <a:t/>
+            </a:r>
+          </a:p>
+          <a:p xmlns:a="http://schemas.openxmlformats.org/drawingml/2006/main">
+            <a:r>
+              <a:t>Fala sugerida:</a:t>
+            </a:r>
+          </a:p>
+          <a:p xmlns:a="http://schemas.openxmlformats.org/drawingml/2006/main">
+            <a:r>
+              <a:t>A mensagem principal deste slide é: Unit tests validam lógica SQL antes de materializar toda a população. Para tornar isso concreto, observe inputs estáticos, Modelo selecionado e Falha localizada. Esses pontos devem ser entendidos em conjunto; não são funcionalidades isoladas. No projeto, essa combinação transforma uma convenção informal em algo que pode ser revisado, testado ou consumido de maneira consistente.</a:t>
+            </a:r>
+          </a:p>
+          <a:p xmlns:a="http://schemas.openxmlformats.org/drawingml/2006/main">
+            <a:r>
+              <a:t/>
+            </a:r>
+          </a:p>
+          <a:p xmlns:a="http://schemas.openxmlformats.org/drawingml/2006/main">
+            <a:r>
+              <a:t>O que destacar:</a:t>
+            </a:r>
+          </a:p>
+          <a:p xmlns:a="http://schemas.openxmlformats.org/drawingml/2006/main">
+            <a:r>
+              <a:t>- Comece pelo título, leia a afirmação abaixo dele e depois desenvolva os itens sem repetir o texto palavra por palavra.</a:t>
+            </a:r>
+          </a:p>
+          <a:p xmlns:a="http://schemas.openxmlformats.org/drawingml/2006/main">
+            <a:r>
+              <a:t/>
+            </a:r>
+          </a:p>
+          <a:p xmlns:a="http://schemas.openxmlformats.org/drawingml/2006/main">
+            <a:r>
+              <a:t>Transição:</a:t>
+            </a:r>
+          </a:p>
+          <a:p xmlns:a="http://schemas.openxmlformats.org/drawingml/2006/main">
+            <a:r>
+              <a:t>Com esse ponto estabelecido, avance para “O exemplo oficial mostra execução isolada”.</a:t>
             </a:r>
           </a:p>
           <a:p xmlns:a="http://schemas.openxmlformats.org/drawingml/2006/main">
@@ -2763,7 +3763,57 @@
           <a:lstStyle xmlns:a="http://schemas.openxmlformats.org/drawingml/2006/main"/>
           <a:p xmlns:a="http://schemas.openxmlformats.org/drawingml/2006/main">
             <a:r>
-              <a:t>Use a composição para explicar visualmente: Unit tests validam lógica SQL antes de materializar toda a população. Inputs estáticos Modelo selecionado Falha localizada</a:t>
+              <a:t>[Roteiro recomendado]</a:t>
+            </a:r>
+          </a:p>
+          <a:p xmlns:a="http://schemas.openxmlformats.org/drawingml/2006/main">
+            <a:r>
+              <a:t>[Tempo sugerido: 00:55]</a:t>
+            </a:r>
+          </a:p>
+          <a:p xmlns:a="http://schemas.openxmlformats.org/drawingml/2006/main">
+            <a:r>
+              <a:t/>
+            </a:r>
+          </a:p>
+          <a:p xmlns:a="http://schemas.openxmlformats.org/drawingml/2006/main">
+            <a:r>
+              <a:t>Fala sugerida:</a:t>
+            </a:r>
+          </a:p>
+          <a:p xmlns:a="http://schemas.openxmlformats.org/drawingml/2006/main">
+            <a:r>
+              <a:t>Agora vamos ler a ideia visualmente. Unit tests validam lógica SQL antes de materializar toda a população. Siga a composição na ordem mostrada e conecte os elementos principais. A imagem ou o fluxo não cria uma regra nova; ele torna visível a relação que acabamos de explicar. A figura é identificada como exemplo oficial dbt Labs — Apache 2.0</a:t>
+            </a:r>
+          </a:p>
+          <a:p xmlns:a="http://schemas.openxmlformats.org/drawingml/2006/main">
+            <a:r>
+              <a:t/>
+            </a:r>
+          </a:p>
+          <a:p xmlns:a="http://schemas.openxmlformats.org/drawingml/2006/main">
+            <a:r>
+              <a:t>O que destacar:</a:t>
+            </a:r>
+          </a:p>
+          <a:p xmlns:a="http://schemas.openxmlformats.org/drawingml/2006/main">
+            <a:r>
+              <a:t>- Aponte a legenda e deixe explícito quando a figura é oficial; as anotações do curso ficam fora da imagem.</a:t>
+            </a:r>
+          </a:p>
+          <a:p xmlns:a="http://schemas.openxmlformats.org/drawingml/2006/main">
+            <a:r>
+              <a:t/>
+            </a:r>
+          </a:p>
+          <a:p xmlns:a="http://schemas.openxmlformats.org/drawingml/2006/main">
+            <a:r>
+              <a:t>Transição:</a:t>
+            </a:r>
+          </a:p>
+          <a:p xmlns:a="http://schemas.openxmlformats.org/drawingml/2006/main">
+            <a:r>
+              <a:t>Com esse ponto estabelecido, avance para “Data tests procuram violações reais”.</a:t>
             </a:r>
           </a:p>
           <a:p xmlns:a="http://schemas.openxmlformats.org/drawingml/2006/main">
@@ -2915,7 +3965,7 @@
   </p:cSld>
   <p:clrMap bg1="lt1" tx1="dk1" bg2="lt2" tx2="dk2" accent1="accent1" accent2="accent2" accent3="accent3" accent4="accent4" accent5="accent5" accent6="accent6" hlink="hlink" folHlink="folHlink"/>
   <p:sldLayoutIdLst>
-    <p:sldLayoutId xmlns:r="http://schemas.openxmlformats.org/officeDocument/2006/relationships" id="2147483649" r:id="R5b5ef029fe3a439c"/>
+    <p:sldLayoutId xmlns:r="http://schemas.openxmlformats.org/officeDocument/2006/relationships" id="2147483649" r:id="R80fc9060c94d4268"/>
   </p:sldLayoutIdLst>
   <p:txStyles>
     <p:titleStyle>
@@ -3213,8 +4263,8 @@
   </p:cSld>
   <p:clrMap bg1="lt1" tx1="dk1" bg2="lt2" tx2="dk2" accent1="accent1" accent2="accent2" accent3="accent3" accent4="accent4" accent5="accent5" accent6="accent6" hlink="hlink" folHlink="folHlink"/>
   <p:sldLayoutIdLst>
-    <p:sldLayoutId xmlns:r="http://schemas.openxmlformats.org/officeDocument/2006/relationships" id="2147483651" r:id="Rd4f82fa04220491d"/>
-    <p:sldLayoutId xmlns:r="http://schemas.openxmlformats.org/officeDocument/2006/relationships" id="2147483652" r:id="R1aed1e2d37fd404b"/>
+    <p:sldLayoutId xmlns:r="http://schemas.openxmlformats.org/officeDocument/2006/relationships" id="2147483651" r:id="R09d449804b944c39"/>
+    <p:sldLayoutId xmlns:r="http://schemas.openxmlformats.org/officeDocument/2006/relationships" id="2147483652" r:id="Reeb814b7b367401a"/>
   </p:sldLayoutIdLst>
 </p:sldMaster>
 </file>
@@ -3738,14 +4788,14 @@
       </p:grpSpPr>
       <p:pic>
         <p:nvPicPr>
-          <p:cNvPr id="9" name="" descr="Ilustração conceitual autoral da capa: EPISÓDIO 6 — A pirâmide moderna de qualidade de dados."/>
+          <p:cNvPr id="10" name="" descr="Ilustração conceitual autoral da capa: EPISÓDIO 6 — A pirâmide moderna de qualidade de dados."/>
           <p:cNvPicPr>
             <a:picLocks xmlns:a="http://schemas.openxmlformats.org/drawingml/2006/main" noChangeAspect="1"/>
           </p:cNvPicPr>
           <p:nvPr/>
         </p:nvPicPr>
         <p:blipFill>
-          <a:blip xmlns:r="http://schemas.openxmlformats.org/officeDocument/2006/relationships" xmlns:a="http://schemas.openxmlformats.org/drawingml/2006/main" r:embed="Raca5180123ad4796"/>
+          <a:blip xmlns:r="http://schemas.openxmlformats.org/officeDocument/2006/relationships" xmlns:a="http://schemas.openxmlformats.org/drawingml/2006/main" r:embed="Rbf297719e7164c62"/>
           <a:srcRect xmlns:a="http://schemas.openxmlformats.org/drawingml/2006/main" l="19785" t="0" r="19785" b="0"/>
           <a:stretch xmlns:a="http://schemas.openxmlformats.org/drawingml/2006/main">
             <a:fillRect l="0" t="0" r="0" b="0"/>
@@ -3858,6 +4908,7 @@
           <a:lstStyle xmlns:a="http://schemas.openxmlformats.org/drawingml/2006/main"/>
           <a:p xmlns:a="http://schemas.openxmlformats.org/drawingml/2006/main">
             <a:pPr>
+              <a:buNone/>
               <a:defRPr sz="1350" b="1">
                 <a:solidFill>
                   <a:srgbClr val="1EC5FF"/>
@@ -3908,6 +4959,7 @@
           <a:lstStyle xmlns:a="http://schemas.openxmlformats.org/drawingml/2006/main"/>
           <a:p xmlns:a="http://schemas.openxmlformats.org/drawingml/2006/main">
             <a:pPr>
+              <a:buNone/>
               <a:defRPr sz="3225" b="1">
                 <a:solidFill>
                   <a:srgbClr val="FFFFFF"/>
@@ -3958,6 +5010,7 @@
           <a:lstStyle xmlns:a="http://schemas.openxmlformats.org/drawingml/2006/main"/>
           <a:p xmlns:a="http://schemas.openxmlformats.org/drawingml/2006/main">
             <a:pPr>
+              <a:buNone/>
               <a:defRPr sz="1800">
                 <a:solidFill>
                   <a:srgbClr val="E2F2FF"/>
@@ -4039,6 +5092,7 @@
           <a:lstStyle xmlns:a="http://schemas.openxmlformats.org/drawingml/2006/main"/>
           <a:p xmlns:a="http://schemas.openxmlformats.org/drawingml/2006/main">
             <a:pPr>
+              <a:buNone/>
               <a:defRPr sz="1200" b="1">
                 <a:solidFill>
                   <a:srgbClr val="FFFFFF">
@@ -4122,6 +5176,7 @@
           <a:lstStyle xmlns:a="http://schemas.openxmlformats.org/drawingml/2006/main"/>
           <a:p xmlns:a="http://schemas.openxmlformats.org/drawingml/2006/main">
             <a:pPr>
+              <a:buNone/>
               <a:defRPr sz="2925" b="1">
                 <a:solidFill>
                   <a:srgbClr val="0B1F3A"/>
@@ -4172,6 +5227,7 @@
           <a:lstStyle xmlns:a="http://schemas.openxmlformats.org/drawingml/2006/main"/>
           <a:p xmlns:a="http://schemas.openxmlformats.org/drawingml/2006/main">
             <a:pPr>
+              <a:buNone/>
               <a:defRPr sz="1650">
                 <a:solidFill>
                   <a:srgbClr val="5C6F86"/>
@@ -4222,6 +5278,7 @@
           <a:lstStyle xmlns:a="http://schemas.openxmlformats.org/drawingml/2006/main"/>
           <a:p xmlns:a="http://schemas.openxmlformats.org/drawingml/2006/main">
             <a:pPr>
+              <a:buNone/>
               <a:defRPr sz="1800">
                 <a:solidFill>
                   <a:srgbClr val="0B1F3A"/>
@@ -4239,6 +5296,7 @@
           </a:p>
           <a:p xmlns:a="http://schemas.openxmlformats.org/drawingml/2006/main">
             <a:pPr>
+              <a:buNone/>
               <a:defRPr sz="1800">
                 <a:solidFill>
                   <a:srgbClr val="0B1F3A"/>
@@ -4256,6 +5314,7 @@
           </a:p>
           <a:p xmlns:a="http://schemas.openxmlformats.org/drawingml/2006/main">
             <a:pPr>
+              <a:buNone/>
               <a:defRPr sz="1800">
                 <a:solidFill>
                   <a:srgbClr val="0B1F3A"/>
@@ -4380,6 +5439,7 @@
           <a:lstStyle xmlns:a="http://schemas.openxmlformats.org/drawingml/2006/main"/>
           <a:p xmlns:a="http://schemas.openxmlformats.org/drawingml/2006/main">
             <a:pPr algn="ctr">
+              <a:buNone/>
               <a:defRPr sz="4650" b="1">
                 <a:solidFill>
                   <a:srgbClr val="1565C0"/>
@@ -4430,6 +5490,7 @@
           <a:lstStyle xmlns:a="http://schemas.openxmlformats.org/drawingml/2006/main"/>
           <a:p xmlns:a="http://schemas.openxmlformats.org/drawingml/2006/main">
             <a:pPr>
+              <a:buNone/>
               <a:defRPr sz="1050" b="1">
                 <a:solidFill>
                   <a:srgbClr val="1565C0"/>
@@ -4513,6 +5574,7 @@
           <a:lstStyle xmlns:a="http://schemas.openxmlformats.org/drawingml/2006/main"/>
           <a:p xmlns:a="http://schemas.openxmlformats.org/drawingml/2006/main">
             <a:pPr>
+              <a:buNone/>
               <a:defRPr sz="825">
                 <a:solidFill>
                   <a:srgbClr val="0B1F3A">
@@ -4567,6 +5629,7 @@
           <a:lstStyle xmlns:a="http://schemas.openxmlformats.org/drawingml/2006/main"/>
           <a:p xmlns:a="http://schemas.openxmlformats.org/drawingml/2006/main">
             <a:pPr algn="r">
+              <a:buNone/>
               <a:defRPr sz="825" b="1">
                 <a:solidFill>
                   <a:srgbClr val="0B1F3A">
@@ -4658,6 +5721,7 @@
           <a:lstStyle xmlns:a="http://schemas.openxmlformats.org/drawingml/2006/main"/>
           <a:p xmlns:a="http://schemas.openxmlformats.org/drawingml/2006/main">
             <a:pPr>
+              <a:buNone/>
               <a:defRPr sz="2925" b="1">
                 <a:solidFill>
                   <a:srgbClr val="FFFFFF"/>
@@ -4714,6 +5778,7 @@
           <a:lstStyle xmlns:a="http://schemas.openxmlformats.org/drawingml/2006/main"/>
           <a:p xmlns:a="http://schemas.openxmlformats.org/drawingml/2006/main">
             <a:pPr algn="ctr">
+              <a:buNone/>
               <a:defRPr sz="1575" b="1">
                 <a:solidFill>
                   <a:srgbClr val="FFFFFF"/>
@@ -4770,6 +5835,7 @@
           <a:lstStyle xmlns:a="http://schemas.openxmlformats.org/drawingml/2006/main"/>
           <a:p xmlns:a="http://schemas.openxmlformats.org/drawingml/2006/main">
             <a:pPr algn="ctr">
+              <a:buNone/>
               <a:defRPr sz="1575" b="1">
                 <a:solidFill>
                   <a:srgbClr val="FFFFFF"/>
@@ -4826,6 +5892,7 @@
           <a:lstStyle xmlns:a="http://schemas.openxmlformats.org/drawingml/2006/main"/>
           <a:p xmlns:a="http://schemas.openxmlformats.org/drawingml/2006/main">
             <a:pPr algn="ctr">
+              <a:buNone/>
               <a:defRPr sz="1575" b="1">
                 <a:solidFill>
                   <a:srgbClr val="FFFFFF"/>
@@ -4882,6 +5949,7 @@
           <a:lstStyle xmlns:a="http://schemas.openxmlformats.org/drawingml/2006/main"/>
           <a:p xmlns:a="http://schemas.openxmlformats.org/drawingml/2006/main">
             <a:pPr algn="ctr">
+              <a:buNone/>
               <a:defRPr sz="1575" b="1">
                 <a:solidFill>
                   <a:srgbClr val="FFFFFF"/>
@@ -4901,7 +5969,7 @@
       </p:sp>
       <p:cxnSp>
         <p:nvCxnSpPr>
-          <p:cNvPr id="18" name=""/>
+          <p:cNvPr id="26" name=""/>
           <p:cNvCxnSpPr>
             <a:stCxn xmlns:a="http://schemas.openxmlformats.org/drawingml/2006/main" id="2" idx="3"/>
             <a:endCxn xmlns:a="http://schemas.openxmlformats.org/drawingml/2006/main" id="3" idx="1"/>
@@ -4927,7 +5995,7 @@
       </p:cxnSp>
       <p:cxnSp>
         <p:nvCxnSpPr>
-          <p:cNvPr id="19" name=""/>
+          <p:cNvPr id="27" name=""/>
           <p:cNvCxnSpPr>
             <a:stCxn xmlns:a="http://schemas.openxmlformats.org/drawingml/2006/main" id="3" idx="3"/>
             <a:endCxn xmlns:a="http://schemas.openxmlformats.org/drawingml/2006/main" id="4" idx="1"/>
@@ -4953,7 +6021,7 @@
       </p:cxnSp>
       <p:cxnSp>
         <p:nvCxnSpPr>
-          <p:cNvPr id="20" name=""/>
+          <p:cNvPr id="28" name=""/>
           <p:cNvCxnSpPr>
             <a:stCxn xmlns:a="http://schemas.openxmlformats.org/drawingml/2006/main" id="4" idx="3"/>
             <a:endCxn xmlns:a="http://schemas.openxmlformats.org/drawingml/2006/main" id="5" idx="1"/>
@@ -5010,6 +6078,7 @@
           <a:lstStyle xmlns:a="http://schemas.openxmlformats.org/drawingml/2006/main"/>
           <a:p xmlns:a="http://schemas.openxmlformats.org/drawingml/2006/main">
             <a:pPr>
+              <a:buNone/>
               <a:defRPr sz="1050" b="1">
                 <a:solidFill>
                   <a:srgbClr val="1EC5FF"/>
@@ -5093,6 +6162,7 @@
           <a:lstStyle xmlns:a="http://schemas.openxmlformats.org/drawingml/2006/main"/>
           <a:p xmlns:a="http://schemas.openxmlformats.org/drawingml/2006/main">
             <a:pPr>
+              <a:buNone/>
               <a:defRPr sz="825">
                 <a:solidFill>
                   <a:srgbClr val="FFFFFF">
@@ -5147,6 +6217,7 @@
           <a:lstStyle xmlns:a="http://schemas.openxmlformats.org/drawingml/2006/main"/>
           <a:p xmlns:a="http://schemas.openxmlformats.org/drawingml/2006/main">
             <a:pPr algn="r">
+              <a:buNone/>
               <a:defRPr sz="825" b="1">
                 <a:solidFill>
                   <a:srgbClr val="FFFFFF">
@@ -5238,6 +6309,7 @@
           <a:lstStyle xmlns:a="http://schemas.openxmlformats.org/drawingml/2006/main"/>
           <a:p xmlns:a="http://schemas.openxmlformats.org/drawingml/2006/main">
             <a:pPr>
+              <a:buNone/>
               <a:defRPr sz="2925" b="1">
                 <a:solidFill>
                   <a:srgbClr val="FFFFFF"/>
@@ -5288,6 +6360,7 @@
           <a:lstStyle xmlns:a="http://schemas.openxmlformats.org/drawingml/2006/main"/>
           <a:p xmlns:a="http://schemas.openxmlformats.org/drawingml/2006/main">
             <a:pPr>
+              <a:buNone/>
               <a:defRPr sz="1650">
                 <a:solidFill>
                   <a:srgbClr val="E2F2FF"/>
@@ -5338,6 +6411,7 @@
           <a:lstStyle xmlns:a="http://schemas.openxmlformats.org/drawingml/2006/main"/>
           <a:p xmlns:a="http://schemas.openxmlformats.org/drawingml/2006/main">
             <a:pPr>
+              <a:buNone/>
               <a:defRPr sz="1800">
                 <a:solidFill>
                   <a:srgbClr val="FFFFFF"/>
@@ -5355,6 +6429,7 @@
           </a:p>
           <a:p xmlns:a="http://schemas.openxmlformats.org/drawingml/2006/main">
             <a:pPr>
+              <a:buNone/>
               <a:defRPr sz="1800">
                 <a:solidFill>
                   <a:srgbClr val="FFFFFF"/>
@@ -5372,6 +6447,7 @@
           </a:p>
           <a:p xmlns:a="http://schemas.openxmlformats.org/drawingml/2006/main">
             <a:pPr>
+              <a:buNone/>
               <a:defRPr sz="1800">
                 <a:solidFill>
                   <a:srgbClr val="FFFFFF"/>
@@ -5496,6 +6572,7 @@
           <a:lstStyle xmlns:a="http://schemas.openxmlformats.org/drawingml/2006/main"/>
           <a:p xmlns:a="http://schemas.openxmlformats.org/drawingml/2006/main">
             <a:pPr algn="ctr">
+              <a:buNone/>
               <a:defRPr sz="4650" b="1">
                 <a:solidFill>
                   <a:srgbClr val="1EC5FF"/>
@@ -5546,6 +6623,7 @@
           <a:lstStyle xmlns:a="http://schemas.openxmlformats.org/drawingml/2006/main"/>
           <a:p xmlns:a="http://schemas.openxmlformats.org/drawingml/2006/main">
             <a:pPr>
+              <a:buNone/>
               <a:defRPr sz="1050" b="1">
                 <a:solidFill>
                   <a:srgbClr val="1EC5FF"/>
@@ -5629,6 +6707,7 @@
           <a:lstStyle xmlns:a="http://schemas.openxmlformats.org/drawingml/2006/main"/>
           <a:p xmlns:a="http://schemas.openxmlformats.org/drawingml/2006/main">
             <a:pPr>
+              <a:buNone/>
               <a:defRPr sz="825">
                 <a:solidFill>
                   <a:srgbClr val="FFFFFF">
@@ -5683,6 +6762,7 @@
           <a:lstStyle xmlns:a="http://schemas.openxmlformats.org/drawingml/2006/main"/>
           <a:p xmlns:a="http://schemas.openxmlformats.org/drawingml/2006/main">
             <a:pPr algn="r">
+              <a:buNone/>
               <a:defRPr sz="825" b="1">
                 <a:solidFill>
                   <a:srgbClr val="FFFFFF">
@@ -5766,6 +6846,7 @@
           <a:lstStyle xmlns:a="http://schemas.openxmlformats.org/drawingml/2006/main"/>
           <a:p xmlns:a="http://schemas.openxmlformats.org/drawingml/2006/main">
             <a:pPr>
+              <a:buNone/>
               <a:defRPr sz="2925" b="1">
                 <a:solidFill>
                   <a:srgbClr val="0B1F3A"/>
@@ -5849,6 +6930,7 @@
           <a:lstStyle xmlns:a="http://schemas.openxmlformats.org/drawingml/2006/main"/>
           <a:p xmlns:a="http://schemas.openxmlformats.org/drawingml/2006/main">
             <a:pPr algn="ctr">
+              <a:buNone/>
               <a:defRPr sz="1575" b="1">
                 <a:solidFill>
                   <a:srgbClr val="0B1F3A"/>
@@ -5932,6 +7014,7 @@
           <a:lstStyle xmlns:a="http://schemas.openxmlformats.org/drawingml/2006/main"/>
           <a:p xmlns:a="http://schemas.openxmlformats.org/drawingml/2006/main">
             <a:pPr algn="ctr">
+              <a:buNone/>
               <a:defRPr sz="1575" b="1">
                 <a:solidFill>
                   <a:srgbClr val="0B1F3A"/>
@@ -6015,6 +7098,7 @@
           <a:lstStyle xmlns:a="http://schemas.openxmlformats.org/drawingml/2006/main"/>
           <a:p xmlns:a="http://schemas.openxmlformats.org/drawingml/2006/main">
             <a:pPr algn="ctr">
+              <a:buNone/>
               <a:defRPr sz="1575" b="1">
                 <a:solidFill>
                   <a:srgbClr val="0B1F3A"/>
@@ -6065,6 +7149,7 @@
           <a:lstStyle xmlns:a="http://schemas.openxmlformats.org/drawingml/2006/main"/>
           <a:p xmlns:a="http://schemas.openxmlformats.org/drawingml/2006/main">
             <a:pPr>
+              <a:buNone/>
               <a:defRPr sz="1050" b="1">
                 <a:solidFill>
                   <a:srgbClr val="1565C0"/>
@@ -6148,6 +7233,7 @@
           <a:lstStyle xmlns:a="http://schemas.openxmlformats.org/drawingml/2006/main"/>
           <a:p xmlns:a="http://schemas.openxmlformats.org/drawingml/2006/main">
             <a:pPr>
+              <a:buNone/>
               <a:defRPr sz="825">
                 <a:solidFill>
                   <a:srgbClr val="0B1F3A">
@@ -6202,6 +7288,7 @@
           <a:lstStyle xmlns:a="http://schemas.openxmlformats.org/drawingml/2006/main"/>
           <a:p xmlns:a="http://schemas.openxmlformats.org/drawingml/2006/main">
             <a:pPr algn="r">
+              <a:buNone/>
               <a:defRPr sz="825" b="1">
                 <a:solidFill>
                   <a:srgbClr val="0B1F3A">
@@ -6293,6 +7380,7 @@
           <a:lstStyle xmlns:a="http://schemas.openxmlformats.org/drawingml/2006/main"/>
           <a:p xmlns:a="http://schemas.openxmlformats.org/drawingml/2006/main">
             <a:pPr>
+              <a:buNone/>
               <a:defRPr sz="2925" b="1">
                 <a:solidFill>
                   <a:srgbClr val="FFFFFF"/>
@@ -6378,6 +7466,7 @@
           <a:lstStyle xmlns:a="http://schemas.openxmlformats.org/drawingml/2006/main"/>
           <a:p xmlns:a="http://schemas.openxmlformats.org/drawingml/2006/main">
             <a:pPr>
+              <a:buNone/>
               <a:defRPr sz="1875" b="1">
                 <a:solidFill>
                   <a:srgbClr val="1EC5FF"/>
@@ -6428,6 +7517,7 @@
           <a:lstStyle xmlns:a="http://schemas.openxmlformats.org/drawingml/2006/main"/>
           <a:p xmlns:a="http://schemas.openxmlformats.org/drawingml/2006/main">
             <a:pPr>
+              <a:buNone/>
               <a:defRPr sz="1425">
                 <a:solidFill>
                   <a:srgbClr val="E2F2FF"/>
@@ -6478,6 +7568,7 @@
           <a:lstStyle xmlns:a="http://schemas.openxmlformats.org/drawingml/2006/main"/>
           <a:p xmlns:a="http://schemas.openxmlformats.org/drawingml/2006/main">
             <a:pPr>
+              <a:buNone/>
               <a:defRPr sz="1050" b="1">
                 <a:solidFill>
                   <a:srgbClr val="1EC5FF"/>
@@ -6561,6 +7652,7 @@
           <a:lstStyle xmlns:a="http://schemas.openxmlformats.org/drawingml/2006/main"/>
           <a:p xmlns:a="http://schemas.openxmlformats.org/drawingml/2006/main">
             <a:pPr>
+              <a:buNone/>
               <a:defRPr sz="825">
                 <a:solidFill>
                   <a:srgbClr val="FFFFFF">
@@ -6615,6 +7707,7 @@
           <a:lstStyle xmlns:a="http://schemas.openxmlformats.org/drawingml/2006/main"/>
           <a:p xmlns:a="http://schemas.openxmlformats.org/drawingml/2006/main">
             <a:pPr algn="r">
+              <a:buNone/>
               <a:defRPr sz="825" b="1">
                 <a:solidFill>
                   <a:srgbClr val="FFFFFF">
@@ -6698,6 +7791,7 @@
           <a:lstStyle xmlns:a="http://schemas.openxmlformats.org/drawingml/2006/main"/>
           <a:p xmlns:a="http://schemas.openxmlformats.org/drawingml/2006/main">
             <a:pPr>
+              <a:buNone/>
               <a:defRPr sz="2925" b="1">
                 <a:solidFill>
                   <a:srgbClr val="0B1F3A"/>
@@ -6748,6 +7842,7 @@
           <a:lstStyle xmlns:a="http://schemas.openxmlformats.org/drawingml/2006/main"/>
           <a:p xmlns:a="http://schemas.openxmlformats.org/drawingml/2006/main">
             <a:pPr>
+              <a:buNone/>
               <a:defRPr sz="3450" b="1">
                 <a:solidFill>
                   <a:srgbClr val="1565C0"/>
@@ -6798,6 +7893,7 @@
           <a:lstStyle xmlns:a="http://schemas.openxmlformats.org/drawingml/2006/main"/>
           <a:p xmlns:a="http://schemas.openxmlformats.org/drawingml/2006/main">
             <a:pPr>
+              <a:buNone/>
               <a:defRPr sz="1575" b="1">
                 <a:solidFill>
                   <a:srgbClr val="0B1F3A"/>
@@ -6879,6 +7975,7 @@
           <a:lstStyle xmlns:a="http://schemas.openxmlformats.org/drawingml/2006/main"/>
           <a:p xmlns:a="http://schemas.openxmlformats.org/drawingml/2006/main">
             <a:pPr>
+              <a:buNone/>
               <a:defRPr sz="3450" b="1">
                 <a:solidFill>
                   <a:srgbClr val="1565C0"/>
@@ -6929,6 +8026,7 @@
           <a:lstStyle xmlns:a="http://schemas.openxmlformats.org/drawingml/2006/main"/>
           <a:p xmlns:a="http://schemas.openxmlformats.org/drawingml/2006/main">
             <a:pPr>
+              <a:buNone/>
               <a:defRPr sz="1575" b="1">
                 <a:solidFill>
                   <a:srgbClr val="0B1F3A"/>
@@ -7010,6 +8108,7 @@
           <a:lstStyle xmlns:a="http://schemas.openxmlformats.org/drawingml/2006/main"/>
           <a:p xmlns:a="http://schemas.openxmlformats.org/drawingml/2006/main">
             <a:pPr>
+              <a:buNone/>
               <a:defRPr sz="3450" b="1">
                 <a:solidFill>
                   <a:srgbClr val="1565C0"/>
@@ -7060,6 +8159,7 @@
           <a:lstStyle xmlns:a="http://schemas.openxmlformats.org/drawingml/2006/main"/>
           <a:p xmlns:a="http://schemas.openxmlformats.org/drawingml/2006/main">
             <a:pPr>
+              <a:buNone/>
               <a:defRPr sz="1575" b="1">
                 <a:solidFill>
                   <a:srgbClr val="0B1F3A"/>
@@ -7110,6 +8210,7 @@
           <a:lstStyle xmlns:a="http://schemas.openxmlformats.org/drawingml/2006/main"/>
           <a:p xmlns:a="http://schemas.openxmlformats.org/drawingml/2006/main">
             <a:pPr>
+              <a:buNone/>
               <a:defRPr sz="1050" b="1">
                 <a:solidFill>
                   <a:srgbClr val="1565C0"/>
@@ -7193,6 +8294,7 @@
           <a:lstStyle xmlns:a="http://schemas.openxmlformats.org/drawingml/2006/main"/>
           <a:p xmlns:a="http://schemas.openxmlformats.org/drawingml/2006/main">
             <a:pPr>
+              <a:buNone/>
               <a:defRPr sz="825">
                 <a:solidFill>
                   <a:srgbClr val="0B1F3A">
@@ -7247,6 +8349,7 @@
           <a:lstStyle xmlns:a="http://schemas.openxmlformats.org/drawingml/2006/main"/>
           <a:p xmlns:a="http://schemas.openxmlformats.org/drawingml/2006/main">
             <a:pPr algn="r">
+              <a:buNone/>
               <a:defRPr sz="825" b="1">
                 <a:solidFill>
                   <a:srgbClr val="0B1F3A">
@@ -7338,6 +8441,7 @@
           <a:lstStyle xmlns:a="http://schemas.openxmlformats.org/drawingml/2006/main"/>
           <a:p xmlns:a="http://schemas.openxmlformats.org/drawingml/2006/main">
             <a:pPr>
+              <a:buNone/>
               <a:defRPr sz="1350" b="1">
                 <a:solidFill>
                   <a:srgbClr val="1EC5FF"/>
@@ -7388,6 +8492,7 @@
           <a:lstStyle xmlns:a="http://schemas.openxmlformats.org/drawingml/2006/main"/>
           <a:p xmlns:a="http://schemas.openxmlformats.org/drawingml/2006/main">
             <a:pPr>
+              <a:buNone/>
               <a:defRPr sz="3450" b="1">
                 <a:solidFill>
                   <a:srgbClr val="FFFFFF"/>
@@ -7438,6 +8543,7 @@
           <a:lstStyle xmlns:a="http://schemas.openxmlformats.org/drawingml/2006/main"/>
           <a:p xmlns:a="http://schemas.openxmlformats.org/drawingml/2006/main">
             <a:pPr>
+              <a:buNone/>
               <a:defRPr sz="1650">
                 <a:solidFill>
                   <a:srgbClr val="E2F2FF"/>
@@ -7562,6 +8668,7 @@
           <a:lstStyle xmlns:a="http://schemas.openxmlformats.org/drawingml/2006/main"/>
           <a:p xmlns:a="http://schemas.openxmlformats.org/drawingml/2006/main">
             <a:pPr>
+              <a:buNone/>
               <a:defRPr sz="1050" b="1">
                 <a:solidFill>
                   <a:srgbClr val="1EC5FF"/>
@@ -7645,6 +8752,7 @@
           <a:lstStyle xmlns:a="http://schemas.openxmlformats.org/drawingml/2006/main"/>
           <a:p xmlns:a="http://schemas.openxmlformats.org/drawingml/2006/main">
             <a:pPr>
+              <a:buNone/>
               <a:defRPr sz="825">
                 <a:solidFill>
                   <a:srgbClr val="FFFFFF">
@@ -7699,6 +8807,7 @@
           <a:lstStyle xmlns:a="http://schemas.openxmlformats.org/drawingml/2006/main"/>
           <a:p xmlns:a="http://schemas.openxmlformats.org/drawingml/2006/main">
             <a:pPr algn="r">
+              <a:buNone/>
               <a:defRPr sz="825" b="1">
                 <a:solidFill>
                   <a:srgbClr val="FFFFFF">
@@ -7782,6 +8891,7 @@
           <a:lstStyle xmlns:a="http://schemas.openxmlformats.org/drawingml/2006/main"/>
           <a:p xmlns:a="http://schemas.openxmlformats.org/drawingml/2006/main">
             <a:pPr>
+              <a:buNone/>
               <a:defRPr sz="2925" b="1">
                 <a:solidFill>
                   <a:srgbClr val="0B1F3A"/>
@@ -7832,6 +8942,7 @@
           <a:lstStyle xmlns:a="http://schemas.openxmlformats.org/drawingml/2006/main"/>
           <a:p xmlns:a="http://schemas.openxmlformats.org/drawingml/2006/main">
             <a:pPr>
+              <a:buNone/>
               <a:defRPr sz="3450" b="1">
                 <a:solidFill>
                   <a:srgbClr val="1565C0"/>
@@ -7882,6 +8993,7 @@
           <a:lstStyle xmlns:a="http://schemas.openxmlformats.org/drawingml/2006/main"/>
           <a:p xmlns:a="http://schemas.openxmlformats.org/drawingml/2006/main">
             <a:pPr>
+              <a:buNone/>
               <a:defRPr sz="1575" b="1">
                 <a:solidFill>
                   <a:srgbClr val="0B1F3A"/>
@@ -7963,6 +9075,7 @@
           <a:lstStyle xmlns:a="http://schemas.openxmlformats.org/drawingml/2006/main"/>
           <a:p xmlns:a="http://schemas.openxmlformats.org/drawingml/2006/main">
             <a:pPr>
+              <a:buNone/>
               <a:defRPr sz="3450" b="1">
                 <a:solidFill>
                   <a:srgbClr val="1565C0"/>
@@ -8013,6 +9126,7 @@
           <a:lstStyle xmlns:a="http://schemas.openxmlformats.org/drawingml/2006/main"/>
           <a:p xmlns:a="http://schemas.openxmlformats.org/drawingml/2006/main">
             <a:pPr>
+              <a:buNone/>
               <a:defRPr sz="1575" b="1">
                 <a:solidFill>
                   <a:srgbClr val="0B1F3A"/>
@@ -8094,6 +9208,7 @@
           <a:lstStyle xmlns:a="http://schemas.openxmlformats.org/drawingml/2006/main"/>
           <a:p xmlns:a="http://schemas.openxmlformats.org/drawingml/2006/main">
             <a:pPr>
+              <a:buNone/>
               <a:defRPr sz="3450" b="1">
                 <a:solidFill>
                   <a:srgbClr val="1565C0"/>
@@ -8144,6 +9259,7 @@
           <a:lstStyle xmlns:a="http://schemas.openxmlformats.org/drawingml/2006/main"/>
           <a:p xmlns:a="http://schemas.openxmlformats.org/drawingml/2006/main">
             <a:pPr>
+              <a:buNone/>
               <a:defRPr sz="1575" b="1">
                 <a:solidFill>
                   <a:srgbClr val="0B1F3A"/>
@@ -8194,6 +9310,7 @@
           <a:lstStyle xmlns:a="http://schemas.openxmlformats.org/drawingml/2006/main"/>
           <a:p xmlns:a="http://schemas.openxmlformats.org/drawingml/2006/main">
             <a:pPr>
+              <a:buNone/>
               <a:defRPr sz="1050" b="1">
                 <a:solidFill>
                   <a:srgbClr val="1565C0"/>
@@ -8277,6 +9394,7 @@
           <a:lstStyle xmlns:a="http://schemas.openxmlformats.org/drawingml/2006/main"/>
           <a:p xmlns:a="http://schemas.openxmlformats.org/drawingml/2006/main">
             <a:pPr>
+              <a:buNone/>
               <a:defRPr sz="825">
                 <a:solidFill>
                   <a:srgbClr val="0B1F3A">
@@ -8331,6 +9449,7 @@
           <a:lstStyle xmlns:a="http://schemas.openxmlformats.org/drawingml/2006/main"/>
           <a:p xmlns:a="http://schemas.openxmlformats.org/drawingml/2006/main">
             <a:pPr algn="r">
+              <a:buNone/>
               <a:defRPr sz="825" b="1">
                 <a:solidFill>
                   <a:srgbClr val="0B1F3A">
@@ -8422,6 +9541,7 @@
           <a:lstStyle xmlns:a="http://schemas.openxmlformats.org/drawingml/2006/main"/>
           <a:p xmlns:a="http://schemas.openxmlformats.org/drawingml/2006/main">
             <a:pPr>
+              <a:buNone/>
               <a:defRPr sz="5550" b="1">
                 <a:solidFill>
                   <a:srgbClr val="1EC5FF"/>
@@ -8472,6 +9592,7 @@
           <a:lstStyle xmlns:a="http://schemas.openxmlformats.org/drawingml/2006/main"/>
           <a:p xmlns:a="http://schemas.openxmlformats.org/drawingml/2006/main">
             <a:pPr>
+              <a:buNone/>
               <a:defRPr sz="2250" b="1">
                 <a:solidFill>
                   <a:srgbClr val="FFFFFF"/>
@@ -8555,6 +9676,7 @@
           <a:lstStyle xmlns:a="http://schemas.openxmlformats.org/drawingml/2006/main"/>
           <a:p xmlns:a="http://schemas.openxmlformats.org/drawingml/2006/main">
             <a:pPr>
+              <a:buNone/>
               <a:defRPr sz="1800">
                 <a:solidFill>
                   <a:srgbClr val="E2F2FF"/>
@@ -8605,6 +9727,7 @@
           <a:lstStyle xmlns:a="http://schemas.openxmlformats.org/drawingml/2006/main"/>
           <a:p xmlns:a="http://schemas.openxmlformats.org/drawingml/2006/main">
             <a:pPr>
+              <a:buNone/>
               <a:defRPr sz="1050" b="1">
                 <a:solidFill>
                   <a:srgbClr val="1EC5FF"/>
@@ -8688,6 +9811,7 @@
           <a:lstStyle xmlns:a="http://schemas.openxmlformats.org/drawingml/2006/main"/>
           <a:p xmlns:a="http://schemas.openxmlformats.org/drawingml/2006/main">
             <a:pPr>
+              <a:buNone/>
               <a:defRPr sz="825">
                 <a:solidFill>
                   <a:srgbClr val="FFFFFF">
@@ -8742,6 +9866,7 @@
           <a:lstStyle xmlns:a="http://schemas.openxmlformats.org/drawingml/2006/main"/>
           <a:p xmlns:a="http://schemas.openxmlformats.org/drawingml/2006/main">
             <a:pPr algn="r">
+              <a:buNone/>
               <a:defRPr sz="825" b="1">
                 <a:solidFill>
                   <a:srgbClr val="FFFFFF">
@@ -8825,6 +9950,7 @@
           <a:lstStyle xmlns:a="http://schemas.openxmlformats.org/drawingml/2006/main"/>
           <a:p xmlns:a="http://schemas.openxmlformats.org/drawingml/2006/main">
             <a:pPr>
+              <a:buNone/>
               <a:defRPr sz="2925" b="1">
                 <a:solidFill>
                   <a:srgbClr val="0B1F3A"/>
@@ -8875,6 +10001,7 @@
           <a:lstStyle xmlns:a="http://schemas.openxmlformats.org/drawingml/2006/main"/>
           <a:p xmlns:a="http://schemas.openxmlformats.org/drawingml/2006/main">
             <a:pPr>
+              <a:buNone/>
               <a:defRPr sz="1950">
                 <a:solidFill>
                   <a:srgbClr val="0B1F3A"/>
@@ -8892,6 +10019,7 @@
           </a:p>
           <a:p xmlns:a="http://schemas.openxmlformats.org/drawingml/2006/main">
             <a:pPr>
+              <a:buNone/>
               <a:defRPr sz="1950">
                 <a:solidFill>
                   <a:srgbClr val="0B1F3A"/>
@@ -8909,6 +10037,7 @@
           </a:p>
           <a:p xmlns:a="http://schemas.openxmlformats.org/drawingml/2006/main">
             <a:pPr>
+              <a:buNone/>
               <a:defRPr sz="1950">
                 <a:solidFill>
                   <a:srgbClr val="0B1F3A"/>
@@ -8959,6 +10088,7 @@
           <a:lstStyle xmlns:a="http://schemas.openxmlformats.org/drawingml/2006/main"/>
           <a:p xmlns:a="http://schemas.openxmlformats.org/drawingml/2006/main">
             <a:pPr>
+              <a:buNone/>
               <a:defRPr sz="1050" b="1">
                 <a:solidFill>
                   <a:srgbClr val="1565C0"/>
@@ -9042,6 +10172,7 @@
           <a:lstStyle xmlns:a="http://schemas.openxmlformats.org/drawingml/2006/main"/>
           <a:p xmlns:a="http://schemas.openxmlformats.org/drawingml/2006/main">
             <a:pPr>
+              <a:buNone/>
               <a:defRPr sz="825">
                 <a:solidFill>
                   <a:srgbClr val="0B1F3A">
@@ -9096,6 +10227,7 @@
           <a:lstStyle xmlns:a="http://schemas.openxmlformats.org/drawingml/2006/main"/>
           <a:p xmlns:a="http://schemas.openxmlformats.org/drawingml/2006/main">
             <a:pPr algn="r">
+              <a:buNone/>
               <a:defRPr sz="825" b="1">
                 <a:solidFill>
                   <a:srgbClr val="0B1F3A">
@@ -9179,6 +10311,7 @@
           <a:lstStyle xmlns:a="http://schemas.openxmlformats.org/drawingml/2006/main"/>
           <a:p xmlns:a="http://schemas.openxmlformats.org/drawingml/2006/main">
             <a:pPr>
+              <a:buNone/>
               <a:defRPr sz="2850" b="1">
                 <a:solidFill>
                   <a:srgbClr val="0B1F3A"/>
@@ -9260,6 +10393,7 @@
           <a:lstStyle xmlns:a="http://schemas.openxmlformats.org/drawingml/2006/main"/>
           <a:p xmlns:a="http://schemas.openxmlformats.org/drawingml/2006/main">
             <a:pPr>
+              <a:buNone/>
               <a:defRPr sz="1425" b="1">
                 <a:solidFill>
                   <a:srgbClr val="1565C0"/>
@@ -9314,14 +10448,14 @@
       </p:sp>
       <p:pic>
         <p:nvPicPr>
-          <p:cNvPr id="14" name="" descr="Diagrama didático autoral que apresenta: not_null pode passar enquanto um prazo devolve menos cinco dias. — A pergunta que guia a aula."/>
+          <p:cNvPr id="16" name="" descr="Diagrama didático autoral que apresenta: not_null pode passar enquanto um prazo devolve menos cinco dias. — A pergunta que guia a aula."/>
           <p:cNvPicPr>
             <a:picLocks xmlns:a="http://schemas.openxmlformats.org/drawingml/2006/main" noChangeAspect="1"/>
           </p:cNvPicPr>
           <p:nvPr/>
         </p:nvPicPr>
         <p:blipFill>
-          <a:blip xmlns:r="http://schemas.openxmlformats.org/officeDocument/2006/relationships" xmlns:a="http://schemas.openxmlformats.org/drawingml/2006/main" r:embed="R2bce0602c7d04ed4"/>
+          <a:blip xmlns:r="http://schemas.openxmlformats.org/officeDocument/2006/relationships" xmlns:a="http://schemas.openxmlformats.org/drawingml/2006/main" r:embed="Ra40788c29962495b"/>
           <a:stretch xmlns:a="http://schemas.openxmlformats.org/drawingml/2006/main"/>
         </p:blipFill>
         <p:spPr>
@@ -9367,6 +10501,7 @@
           <a:lstStyle xmlns:a="http://schemas.openxmlformats.org/drawingml/2006/main"/>
           <a:p xmlns:a="http://schemas.openxmlformats.org/drawingml/2006/main">
             <a:pPr>
+              <a:buNone/>
               <a:defRPr sz="1050" b="1">
                 <a:solidFill>
                   <a:srgbClr val="1565C0"/>
@@ -9450,6 +10585,7 @@
           <a:lstStyle xmlns:a="http://schemas.openxmlformats.org/drawingml/2006/main"/>
           <a:p xmlns:a="http://schemas.openxmlformats.org/drawingml/2006/main">
             <a:pPr>
+              <a:buNone/>
               <a:defRPr sz="825">
                 <a:solidFill>
                   <a:srgbClr val="0B1F3A">
@@ -9504,6 +10640,7 @@
           <a:lstStyle xmlns:a="http://schemas.openxmlformats.org/drawingml/2006/main"/>
           <a:p xmlns:a="http://schemas.openxmlformats.org/drawingml/2006/main">
             <a:pPr algn="r">
+              <a:buNone/>
               <a:defRPr sz="825" b="1">
                 <a:solidFill>
                   <a:srgbClr val="0B1F3A">
@@ -9595,6 +10732,7 @@
           <a:lstStyle xmlns:a="http://schemas.openxmlformats.org/drawingml/2006/main"/>
           <a:p xmlns:a="http://schemas.openxmlformats.org/drawingml/2006/main">
             <a:pPr>
+              <a:buNone/>
               <a:defRPr sz="1500" b="1">
                 <a:solidFill>
                   <a:srgbClr val="1EC5FF"/>
@@ -9645,6 +10783,7 @@
           <a:lstStyle xmlns:a="http://schemas.openxmlformats.org/drawingml/2006/main"/>
           <a:p xmlns:a="http://schemas.openxmlformats.org/drawingml/2006/main">
             <a:pPr>
+              <a:buNone/>
               <a:defRPr sz="2850" b="1">
                 <a:solidFill>
                   <a:srgbClr val="FFFFFF"/>
@@ -9695,6 +10834,7 @@
           <a:lstStyle xmlns:a="http://schemas.openxmlformats.org/drawingml/2006/main"/>
           <a:p xmlns:a="http://schemas.openxmlformats.org/drawingml/2006/main">
             <a:pPr>
+              <a:buNone/>
               <a:defRPr sz="1500">
                 <a:solidFill>
                   <a:srgbClr val="E2F2FF"/>
@@ -9819,6 +10959,7 @@
           <a:lstStyle xmlns:a="http://schemas.openxmlformats.org/drawingml/2006/main"/>
           <a:p xmlns:a="http://schemas.openxmlformats.org/drawingml/2006/main">
             <a:pPr>
+              <a:buNone/>
               <a:defRPr sz="1050" b="1">
                 <a:solidFill>
                   <a:srgbClr val="1EC5FF"/>
@@ -9902,6 +11043,7 @@
           <a:lstStyle xmlns:a="http://schemas.openxmlformats.org/drawingml/2006/main"/>
           <a:p xmlns:a="http://schemas.openxmlformats.org/drawingml/2006/main">
             <a:pPr>
+              <a:buNone/>
               <a:defRPr sz="825">
                 <a:solidFill>
                   <a:srgbClr val="FFFFFF">
@@ -9956,6 +11098,7 @@
           <a:lstStyle xmlns:a="http://schemas.openxmlformats.org/drawingml/2006/main"/>
           <a:p xmlns:a="http://schemas.openxmlformats.org/drawingml/2006/main">
             <a:pPr algn="r">
+              <a:buNone/>
               <a:defRPr sz="825" b="1">
                 <a:solidFill>
                   <a:srgbClr val="FFFFFF">
@@ -10039,6 +11182,7 @@
           <a:lstStyle xmlns:a="http://schemas.openxmlformats.org/drawingml/2006/main"/>
           <a:p xmlns:a="http://schemas.openxmlformats.org/drawingml/2006/main">
             <a:pPr>
+              <a:buNone/>
               <a:defRPr sz="1350" b="1">
                 <a:solidFill>
                   <a:srgbClr val="1565C0"/>
@@ -10089,6 +11233,7 @@
           <a:lstStyle xmlns:a="http://schemas.openxmlformats.org/drawingml/2006/main"/>
           <a:p xmlns:a="http://schemas.openxmlformats.org/drawingml/2006/main">
             <a:pPr>
+              <a:buNone/>
               <a:defRPr sz="3300" b="1">
                 <a:solidFill>
                   <a:srgbClr val="0B1F3A"/>
@@ -10139,6 +11284,7 @@
           <a:lstStyle xmlns:a="http://schemas.openxmlformats.org/drawingml/2006/main"/>
           <a:p xmlns:a="http://schemas.openxmlformats.org/drawingml/2006/main">
             <a:pPr>
+              <a:buNone/>
               <a:defRPr sz="1500">
                 <a:solidFill>
                   <a:srgbClr val="5C6F86"/>
@@ -10189,6 +11335,7 @@
           <a:lstStyle xmlns:a="http://schemas.openxmlformats.org/drawingml/2006/main"/>
           <a:p xmlns:a="http://schemas.openxmlformats.org/drawingml/2006/main">
             <a:pPr>
+              <a:buNone/>
               <a:defRPr sz="1050" b="1">
                 <a:solidFill>
                   <a:srgbClr val="1565C0"/>
@@ -10272,6 +11419,7 @@
           <a:lstStyle xmlns:a="http://schemas.openxmlformats.org/drawingml/2006/main"/>
           <a:p xmlns:a="http://schemas.openxmlformats.org/drawingml/2006/main">
             <a:pPr>
+              <a:buNone/>
               <a:defRPr sz="825">
                 <a:solidFill>
                   <a:srgbClr val="0B1F3A">
@@ -10326,6 +11474,7 @@
           <a:lstStyle xmlns:a="http://schemas.openxmlformats.org/drawingml/2006/main"/>
           <a:p xmlns:a="http://schemas.openxmlformats.org/drawingml/2006/main">
             <a:pPr algn="r">
+              <a:buNone/>
               <a:defRPr sz="825" b="1">
                 <a:solidFill>
                   <a:srgbClr val="0B1F3A">
@@ -10417,6 +11566,7 @@
           <a:lstStyle xmlns:a="http://schemas.openxmlformats.org/drawingml/2006/main"/>
           <a:p xmlns:a="http://schemas.openxmlformats.org/drawingml/2006/main">
             <a:pPr>
+              <a:buNone/>
               <a:defRPr sz="2925" b="1">
                 <a:solidFill>
                   <a:srgbClr val="FFFFFF"/>
@@ -10467,6 +11617,7 @@
           <a:lstStyle xmlns:a="http://schemas.openxmlformats.org/drawingml/2006/main"/>
           <a:p xmlns:a="http://schemas.openxmlformats.org/drawingml/2006/main">
             <a:pPr>
+              <a:buNone/>
               <a:defRPr sz="3450" b="1">
                 <a:solidFill>
                   <a:srgbClr val="1EC5FF"/>
@@ -10517,6 +11668,7 @@
           <a:lstStyle xmlns:a="http://schemas.openxmlformats.org/drawingml/2006/main"/>
           <a:p xmlns:a="http://schemas.openxmlformats.org/drawingml/2006/main">
             <a:pPr>
+              <a:buNone/>
               <a:defRPr sz="1575" b="1">
                 <a:solidFill>
                   <a:srgbClr val="FFFFFF"/>
@@ -10598,6 +11750,7 @@
           <a:lstStyle xmlns:a="http://schemas.openxmlformats.org/drawingml/2006/main"/>
           <a:p xmlns:a="http://schemas.openxmlformats.org/drawingml/2006/main">
             <a:pPr>
+              <a:buNone/>
               <a:defRPr sz="3450" b="1">
                 <a:solidFill>
                   <a:srgbClr val="1EC5FF"/>
@@ -10648,6 +11801,7 @@
           <a:lstStyle xmlns:a="http://schemas.openxmlformats.org/drawingml/2006/main"/>
           <a:p xmlns:a="http://schemas.openxmlformats.org/drawingml/2006/main">
             <a:pPr>
+              <a:buNone/>
               <a:defRPr sz="1575" b="1">
                 <a:solidFill>
                   <a:srgbClr val="FFFFFF"/>
@@ -10729,6 +11883,7 @@
           <a:lstStyle xmlns:a="http://schemas.openxmlformats.org/drawingml/2006/main"/>
           <a:p xmlns:a="http://schemas.openxmlformats.org/drawingml/2006/main">
             <a:pPr>
+              <a:buNone/>
               <a:defRPr sz="3450" b="1">
                 <a:solidFill>
                   <a:srgbClr val="1EC5FF"/>
@@ -10779,6 +11934,7 @@
           <a:lstStyle xmlns:a="http://schemas.openxmlformats.org/drawingml/2006/main"/>
           <a:p xmlns:a="http://schemas.openxmlformats.org/drawingml/2006/main">
             <a:pPr>
+              <a:buNone/>
               <a:defRPr sz="1575" b="1">
                 <a:solidFill>
                   <a:srgbClr val="FFFFFF"/>
@@ -10829,6 +11985,7 @@
           <a:lstStyle xmlns:a="http://schemas.openxmlformats.org/drawingml/2006/main"/>
           <a:p xmlns:a="http://schemas.openxmlformats.org/drawingml/2006/main">
             <a:pPr>
+              <a:buNone/>
               <a:defRPr sz="1050" b="1">
                 <a:solidFill>
                   <a:srgbClr val="1EC5FF"/>
@@ -10912,6 +12069,7 @@
           <a:lstStyle xmlns:a="http://schemas.openxmlformats.org/drawingml/2006/main"/>
           <a:p xmlns:a="http://schemas.openxmlformats.org/drawingml/2006/main">
             <a:pPr>
+              <a:buNone/>
               <a:defRPr sz="825">
                 <a:solidFill>
                   <a:srgbClr val="FFFFFF">
@@ -10966,6 +12124,7 @@
           <a:lstStyle xmlns:a="http://schemas.openxmlformats.org/drawingml/2006/main"/>
           <a:p xmlns:a="http://schemas.openxmlformats.org/drawingml/2006/main">
             <a:pPr algn="r">
+              <a:buNone/>
               <a:defRPr sz="825" b="1">
                 <a:solidFill>
                   <a:srgbClr val="FFFFFF">
@@ -11057,6 +12216,7 @@
           <a:lstStyle xmlns:a="http://schemas.openxmlformats.org/drawingml/2006/main"/>
           <a:p xmlns:a="http://schemas.openxmlformats.org/drawingml/2006/main">
             <a:pPr>
+              <a:buNone/>
               <a:defRPr sz="2925" b="1">
                 <a:solidFill>
                   <a:srgbClr val="FFFFFF"/>
@@ -11107,6 +12267,7 @@
           <a:lstStyle xmlns:a="http://schemas.openxmlformats.org/drawingml/2006/main"/>
           <a:p xmlns:a="http://schemas.openxmlformats.org/drawingml/2006/main">
             <a:pPr>
+              <a:buNone/>
               <a:defRPr sz="1650">
                 <a:solidFill>
                   <a:srgbClr val="E2F2FF"/>
@@ -11157,6 +12318,7 @@
           <a:lstStyle xmlns:a="http://schemas.openxmlformats.org/drawingml/2006/main"/>
           <a:p xmlns:a="http://schemas.openxmlformats.org/drawingml/2006/main">
             <a:pPr>
+              <a:buNone/>
               <a:defRPr sz="1800">
                 <a:solidFill>
                   <a:srgbClr val="FFFFFF"/>
@@ -11174,6 +12336,7 @@
           </a:p>
           <a:p xmlns:a="http://schemas.openxmlformats.org/drawingml/2006/main">
             <a:pPr>
+              <a:buNone/>
               <a:defRPr sz="1800">
                 <a:solidFill>
                   <a:srgbClr val="FFFFFF"/>
@@ -11191,6 +12354,7 @@
           </a:p>
           <a:p xmlns:a="http://schemas.openxmlformats.org/drawingml/2006/main">
             <a:pPr>
+              <a:buNone/>
               <a:defRPr sz="1800">
                 <a:solidFill>
                   <a:srgbClr val="FFFFFF"/>
@@ -11208,6 +12372,7 @@
           </a:p>
           <a:p xmlns:a="http://schemas.openxmlformats.org/drawingml/2006/main">
             <a:pPr>
+              <a:buNone/>
               <a:defRPr sz="1800">
                 <a:solidFill>
                   <a:srgbClr val="FFFFFF"/>
@@ -11225,6 +12390,7 @@
           </a:p>
           <a:p xmlns:a="http://schemas.openxmlformats.org/drawingml/2006/main">
             <a:pPr>
+              <a:buNone/>
               <a:defRPr sz="1800">
                 <a:solidFill>
                   <a:srgbClr val="FFFFFF"/>
@@ -11349,6 +12515,7 @@
           <a:lstStyle xmlns:a="http://schemas.openxmlformats.org/drawingml/2006/main"/>
           <a:p xmlns:a="http://schemas.openxmlformats.org/drawingml/2006/main">
             <a:pPr algn="ctr">
+              <a:buNone/>
               <a:defRPr sz="4650" b="1">
                 <a:solidFill>
                   <a:srgbClr val="1EC5FF"/>
@@ -11399,6 +12566,7 @@
           <a:lstStyle xmlns:a="http://schemas.openxmlformats.org/drawingml/2006/main"/>
           <a:p xmlns:a="http://schemas.openxmlformats.org/drawingml/2006/main">
             <a:pPr>
+              <a:buNone/>
               <a:defRPr sz="1050" b="1">
                 <a:solidFill>
                   <a:srgbClr val="1EC5FF"/>
@@ -11482,6 +12650,7 @@
           <a:lstStyle xmlns:a="http://schemas.openxmlformats.org/drawingml/2006/main"/>
           <a:p xmlns:a="http://schemas.openxmlformats.org/drawingml/2006/main">
             <a:pPr>
+              <a:buNone/>
               <a:defRPr sz="825">
                 <a:solidFill>
                   <a:srgbClr val="FFFFFF">
@@ -11536,6 +12705,7 @@
           <a:lstStyle xmlns:a="http://schemas.openxmlformats.org/drawingml/2006/main"/>
           <a:p xmlns:a="http://schemas.openxmlformats.org/drawingml/2006/main">
             <a:pPr algn="r">
+              <a:buNone/>
               <a:defRPr sz="825" b="1">
                 <a:solidFill>
                   <a:srgbClr val="FFFFFF">
@@ -11619,6 +12789,7 @@
           <a:lstStyle xmlns:a="http://schemas.openxmlformats.org/drawingml/2006/main"/>
           <a:p xmlns:a="http://schemas.openxmlformats.org/drawingml/2006/main">
             <a:pPr>
+              <a:buNone/>
               <a:defRPr sz="2925" b="1">
                 <a:solidFill>
                   <a:srgbClr val="0B1F3A"/>
@@ -11675,6 +12846,7 @@
           <a:lstStyle xmlns:a="http://schemas.openxmlformats.org/drawingml/2006/main"/>
           <a:p xmlns:a="http://schemas.openxmlformats.org/drawingml/2006/main">
             <a:pPr algn="ctr">
+              <a:buNone/>
               <a:defRPr sz="1500" b="1">
                 <a:solidFill>
                   <a:srgbClr val="0B1F3A"/>
@@ -11731,6 +12903,7 @@
           <a:lstStyle xmlns:a="http://schemas.openxmlformats.org/drawingml/2006/main"/>
           <a:p xmlns:a="http://schemas.openxmlformats.org/drawingml/2006/main">
             <a:pPr algn="ctr">
+              <a:buNone/>
               <a:defRPr sz="1500" b="1">
                 <a:solidFill>
                   <a:srgbClr val="0B1F3A"/>
@@ -11787,6 +12960,7 @@
           <a:lstStyle xmlns:a="http://schemas.openxmlformats.org/drawingml/2006/main"/>
           <a:p xmlns:a="http://schemas.openxmlformats.org/drawingml/2006/main">
             <a:pPr algn="ctr">
+              <a:buNone/>
               <a:defRPr sz="1500" b="1">
                 <a:solidFill>
                   <a:srgbClr val="0B1F3A"/>
@@ -11843,6 +13017,7 @@
           <a:lstStyle xmlns:a="http://schemas.openxmlformats.org/drawingml/2006/main"/>
           <a:p xmlns:a="http://schemas.openxmlformats.org/drawingml/2006/main">
             <a:pPr algn="ctr">
+              <a:buNone/>
               <a:defRPr sz="1500" b="1">
                 <a:solidFill>
                   <a:srgbClr val="0B1F3A"/>
@@ -11899,6 +13074,7 @@
           <a:lstStyle xmlns:a="http://schemas.openxmlformats.org/drawingml/2006/main"/>
           <a:p xmlns:a="http://schemas.openxmlformats.org/drawingml/2006/main">
             <a:pPr algn="ctr">
+              <a:buNone/>
               <a:defRPr sz="1500" b="1">
                 <a:solidFill>
                   <a:srgbClr val="0B1F3A"/>
@@ -11949,6 +13125,7 @@
           <a:lstStyle xmlns:a="http://schemas.openxmlformats.org/drawingml/2006/main"/>
           <a:p xmlns:a="http://schemas.openxmlformats.org/drawingml/2006/main">
             <a:pPr>
+              <a:buNone/>
               <a:defRPr sz="1050" b="1">
                 <a:solidFill>
                   <a:srgbClr val="1565C0"/>
@@ -12032,6 +13209,7 @@
           <a:lstStyle xmlns:a="http://schemas.openxmlformats.org/drawingml/2006/main"/>
           <a:p xmlns:a="http://schemas.openxmlformats.org/drawingml/2006/main">
             <a:pPr>
+              <a:buNone/>
               <a:defRPr sz="825">
                 <a:solidFill>
                   <a:srgbClr val="0B1F3A">
@@ -12086,6 +13264,7 @@
           <a:lstStyle xmlns:a="http://schemas.openxmlformats.org/drawingml/2006/main"/>
           <a:p xmlns:a="http://schemas.openxmlformats.org/drawingml/2006/main">
             <a:pPr algn="r">
+              <a:buNone/>
               <a:defRPr sz="825" b="1">
                 <a:solidFill>
                   <a:srgbClr val="0B1F3A">
@@ -12169,6 +13348,7 @@
           <a:lstStyle xmlns:a="http://schemas.openxmlformats.org/drawingml/2006/main"/>
           <a:p xmlns:a="http://schemas.openxmlformats.org/drawingml/2006/main">
             <a:pPr>
+              <a:buNone/>
               <a:defRPr sz="2925" b="1">
                 <a:solidFill>
                   <a:srgbClr val="0B1F3A"/>
@@ -12219,6 +13399,7 @@
           <a:lstStyle xmlns:a="http://schemas.openxmlformats.org/drawingml/2006/main"/>
           <a:p xmlns:a="http://schemas.openxmlformats.org/drawingml/2006/main">
             <a:pPr>
+              <a:buNone/>
               <a:defRPr sz="1650">
                 <a:solidFill>
                   <a:srgbClr val="5C6F86"/>
@@ -12269,6 +13450,7 @@
           <a:lstStyle xmlns:a="http://schemas.openxmlformats.org/drawingml/2006/main"/>
           <a:p xmlns:a="http://schemas.openxmlformats.org/drawingml/2006/main">
             <a:pPr>
+              <a:buNone/>
               <a:defRPr sz="1800">
                 <a:solidFill>
                   <a:srgbClr val="0B1F3A"/>
@@ -12286,6 +13468,7 @@
           </a:p>
           <a:p xmlns:a="http://schemas.openxmlformats.org/drawingml/2006/main">
             <a:pPr>
+              <a:buNone/>
               <a:defRPr sz="1800">
                 <a:solidFill>
                   <a:srgbClr val="0B1F3A"/>
@@ -12303,6 +13486,7 @@
           </a:p>
           <a:p xmlns:a="http://schemas.openxmlformats.org/drawingml/2006/main">
             <a:pPr>
+              <a:buNone/>
               <a:defRPr sz="1800">
                 <a:solidFill>
                   <a:srgbClr val="0B1F3A"/>
@@ -12427,6 +13611,7 @@
           <a:lstStyle xmlns:a="http://schemas.openxmlformats.org/drawingml/2006/main"/>
           <a:p xmlns:a="http://schemas.openxmlformats.org/drawingml/2006/main">
             <a:pPr algn="ctr">
+              <a:buNone/>
               <a:defRPr sz="4650" b="1">
                 <a:solidFill>
                   <a:srgbClr val="1565C0"/>
@@ -12477,6 +13662,7 @@
           <a:lstStyle xmlns:a="http://schemas.openxmlformats.org/drawingml/2006/main"/>
           <a:p xmlns:a="http://schemas.openxmlformats.org/drawingml/2006/main">
             <a:pPr>
+              <a:buNone/>
               <a:defRPr sz="1050" b="1">
                 <a:solidFill>
                   <a:srgbClr val="1565C0"/>
@@ -12560,6 +13746,7 @@
           <a:lstStyle xmlns:a="http://schemas.openxmlformats.org/drawingml/2006/main"/>
           <a:p xmlns:a="http://schemas.openxmlformats.org/drawingml/2006/main">
             <a:pPr>
+              <a:buNone/>
               <a:defRPr sz="825">
                 <a:solidFill>
                   <a:srgbClr val="0B1F3A">
@@ -12614,6 +13801,7 @@
           <a:lstStyle xmlns:a="http://schemas.openxmlformats.org/drawingml/2006/main"/>
           <a:p xmlns:a="http://schemas.openxmlformats.org/drawingml/2006/main">
             <a:pPr algn="r">
+              <a:buNone/>
               <a:defRPr sz="825" b="1">
                 <a:solidFill>
                   <a:srgbClr val="0B1F3A">
@@ -12705,6 +13893,7 @@
           <a:lstStyle xmlns:a="http://schemas.openxmlformats.org/drawingml/2006/main"/>
           <a:p xmlns:a="http://schemas.openxmlformats.org/drawingml/2006/main">
             <a:pPr>
+              <a:buNone/>
               <a:defRPr sz="2925" b="1">
                 <a:solidFill>
                   <a:srgbClr val="FFFFFF"/>
@@ -12755,6 +13944,7 @@
           <a:lstStyle xmlns:a="http://schemas.openxmlformats.org/drawingml/2006/main"/>
           <a:p xmlns:a="http://schemas.openxmlformats.org/drawingml/2006/main">
             <a:pPr>
+              <a:buNone/>
               <a:defRPr sz="2100" b="1">
                 <a:solidFill>
                   <a:srgbClr val="1EC5FF"/>
@@ -12805,6 +13995,7 @@
           <a:lstStyle xmlns:a="http://schemas.openxmlformats.org/drawingml/2006/main"/>
           <a:p xmlns:a="http://schemas.openxmlformats.org/drawingml/2006/main">
             <a:pPr>
+              <a:buNone/>
               <a:defRPr sz="2100" b="1">
                 <a:solidFill>
                   <a:srgbClr val="2DBE8C"/>
@@ -12888,6 +14079,7 @@
           <a:lstStyle xmlns:a="http://schemas.openxmlformats.org/drawingml/2006/main"/>
           <a:p xmlns:a="http://schemas.openxmlformats.org/drawingml/2006/main">
             <a:pPr>
+              <a:buNone/>
               <a:defRPr sz="1650">
                 <a:solidFill>
                   <a:srgbClr val="FFFFFF"/>
@@ -12905,6 +14097,7 @@
           </a:p>
           <a:p xmlns:a="http://schemas.openxmlformats.org/drawingml/2006/main">
             <a:pPr>
+              <a:buNone/>
               <a:defRPr sz="1650">
                 <a:solidFill>
                   <a:srgbClr val="FFFFFF"/>
@@ -12955,6 +14148,7 @@
           <a:lstStyle xmlns:a="http://schemas.openxmlformats.org/drawingml/2006/main"/>
           <a:p xmlns:a="http://schemas.openxmlformats.org/drawingml/2006/main">
             <a:pPr>
+              <a:buNone/>
               <a:defRPr sz="1650">
                 <a:solidFill>
                   <a:srgbClr val="FFFFFF"/>
@@ -13005,6 +14199,7 @@
           <a:lstStyle xmlns:a="http://schemas.openxmlformats.org/drawingml/2006/main"/>
           <a:p xmlns:a="http://schemas.openxmlformats.org/drawingml/2006/main">
             <a:pPr>
+              <a:buNone/>
               <a:defRPr sz="1050" b="1">
                 <a:solidFill>
                   <a:srgbClr val="1EC5FF"/>
@@ -13088,6 +14283,7 @@
           <a:lstStyle xmlns:a="http://schemas.openxmlformats.org/drawingml/2006/main"/>
           <a:p xmlns:a="http://schemas.openxmlformats.org/drawingml/2006/main">
             <a:pPr>
+              <a:buNone/>
               <a:defRPr sz="825">
                 <a:solidFill>
                   <a:srgbClr val="FFFFFF">
@@ -13142,6 +14338,7 @@
           <a:lstStyle xmlns:a="http://schemas.openxmlformats.org/drawingml/2006/main"/>
           <a:p xmlns:a="http://schemas.openxmlformats.org/drawingml/2006/main">
             <a:pPr algn="r">
+              <a:buNone/>
               <a:defRPr sz="825" b="1">
                 <a:solidFill>
                   <a:srgbClr val="FFFFFF">
@@ -13233,6 +14430,7 @@
           <a:lstStyle xmlns:a="http://schemas.openxmlformats.org/drawingml/2006/main"/>
           <a:p xmlns:a="http://schemas.openxmlformats.org/drawingml/2006/main">
             <a:pPr>
+              <a:buNone/>
               <a:defRPr sz="2925" b="1">
                 <a:solidFill>
                   <a:srgbClr val="FFFFFF"/>
@@ -13283,6 +14481,7 @@
           <a:lstStyle xmlns:a="http://schemas.openxmlformats.org/drawingml/2006/main"/>
           <a:p xmlns:a="http://schemas.openxmlformats.org/drawingml/2006/main">
             <a:pPr>
+              <a:buNone/>
               <a:defRPr sz="1650">
                 <a:solidFill>
                   <a:srgbClr val="E2F2FF"/>
@@ -13333,6 +14532,7 @@
           <a:lstStyle xmlns:a="http://schemas.openxmlformats.org/drawingml/2006/main"/>
           <a:p xmlns:a="http://schemas.openxmlformats.org/drawingml/2006/main">
             <a:pPr>
+              <a:buNone/>
               <a:defRPr sz="1800">
                 <a:solidFill>
                   <a:srgbClr val="FFFFFF"/>
@@ -13350,6 +14550,7 @@
           </a:p>
           <a:p xmlns:a="http://schemas.openxmlformats.org/drawingml/2006/main">
             <a:pPr>
+              <a:buNone/>
               <a:defRPr sz="1800">
                 <a:solidFill>
                   <a:srgbClr val="FFFFFF"/>
@@ -13367,6 +14568,7 @@
           </a:p>
           <a:p xmlns:a="http://schemas.openxmlformats.org/drawingml/2006/main">
             <a:pPr>
+              <a:buNone/>
               <a:defRPr sz="1800">
                 <a:solidFill>
                   <a:srgbClr val="FFFFFF"/>
@@ -13491,6 +14693,7 @@
           <a:lstStyle xmlns:a="http://schemas.openxmlformats.org/drawingml/2006/main"/>
           <a:p xmlns:a="http://schemas.openxmlformats.org/drawingml/2006/main">
             <a:pPr algn="ctr">
+              <a:buNone/>
               <a:defRPr sz="4650" b="1">
                 <a:solidFill>
                   <a:srgbClr val="1EC5FF"/>
@@ -13541,6 +14744,7 @@
           <a:lstStyle xmlns:a="http://schemas.openxmlformats.org/drawingml/2006/main"/>
           <a:p xmlns:a="http://schemas.openxmlformats.org/drawingml/2006/main">
             <a:pPr>
+              <a:buNone/>
               <a:defRPr sz="1050" b="1">
                 <a:solidFill>
                   <a:srgbClr val="1EC5FF"/>
@@ -13624,6 +14828,7 @@
           <a:lstStyle xmlns:a="http://schemas.openxmlformats.org/drawingml/2006/main"/>
           <a:p xmlns:a="http://schemas.openxmlformats.org/drawingml/2006/main">
             <a:pPr>
+              <a:buNone/>
               <a:defRPr sz="825">
                 <a:solidFill>
                   <a:srgbClr val="FFFFFF">
@@ -13678,6 +14883,7 @@
           <a:lstStyle xmlns:a="http://schemas.openxmlformats.org/drawingml/2006/main"/>
           <a:p xmlns:a="http://schemas.openxmlformats.org/drawingml/2006/main">
             <a:pPr algn="r">
+              <a:buNone/>
               <a:defRPr sz="825" b="1">
                 <a:solidFill>
                   <a:srgbClr val="FFFFFF">
@@ -13761,6 +14967,7 @@
           <a:lstStyle xmlns:a="http://schemas.openxmlformats.org/drawingml/2006/main"/>
           <a:p xmlns:a="http://schemas.openxmlformats.org/drawingml/2006/main">
             <a:pPr>
+              <a:buNone/>
               <a:defRPr sz="2925" b="1">
                 <a:solidFill>
                   <a:srgbClr val="0B1F3A"/>
@@ -13811,6 +15018,7 @@
           <a:lstStyle xmlns:a="http://schemas.openxmlformats.org/drawingml/2006/main"/>
           <a:p xmlns:a="http://schemas.openxmlformats.org/drawingml/2006/main">
             <a:pPr>
+              <a:buNone/>
               <a:defRPr sz="1950" b="1">
                 <a:solidFill>
                   <a:srgbClr val="0B1F3A"/>
@@ -13865,14 +15073,14 @@
       </p:sp>
       <p:pic>
         <p:nvPicPr>
-          <p:cNvPr id="13" name="" descr="Figura oficial da documentação dbt usada para explicar: O exemplo oficial mostra execução isolada — Unit tests validam lógica SQL antes de materializar toda a população.."/>
+          <p:cNvPr id="15" name="" descr="Figura oficial da documentação dbt usada para explicar: O exemplo oficial mostra execução isolada — Unit tests validam lógica SQL antes de materializar toda a população.."/>
           <p:cNvPicPr>
             <a:picLocks xmlns:a="http://schemas.openxmlformats.org/drawingml/2006/main" noChangeAspect="1"/>
           </p:cNvPicPr>
           <p:nvPr/>
         </p:nvPicPr>
         <p:blipFill>
-          <a:blip xmlns:r="http://schemas.openxmlformats.org/officeDocument/2006/relationships" xmlns:a="http://schemas.openxmlformats.org/drawingml/2006/main" r:embed="Rec23ed8328214fc9"/>
+          <a:blip xmlns:r="http://schemas.openxmlformats.org/officeDocument/2006/relationships" xmlns:a="http://schemas.openxmlformats.org/drawingml/2006/main" r:embed="R094062bd36bc4e0c"/>
           <a:stretch xmlns:a="http://schemas.openxmlformats.org/drawingml/2006/main"/>
         </p:blipFill>
         <p:spPr>
@@ -13918,6 +15126,7 @@
           <a:lstStyle xmlns:a="http://schemas.openxmlformats.org/drawingml/2006/main"/>
           <a:p xmlns:a="http://schemas.openxmlformats.org/drawingml/2006/main">
             <a:pPr>
+              <a:buNone/>
               <a:defRPr sz="900" i="1">
                 <a:solidFill>
                   <a:srgbClr val="5C6F86"/>
@@ -13968,6 +15177,7 @@
           <a:lstStyle xmlns:a="http://schemas.openxmlformats.org/drawingml/2006/main"/>
           <a:p xmlns:a="http://schemas.openxmlformats.org/drawingml/2006/main">
             <a:pPr>
+              <a:buNone/>
               <a:defRPr sz="1050" b="1">
                 <a:solidFill>
                   <a:srgbClr val="1565C0"/>
@@ -14051,6 +15261,7 @@
           <a:lstStyle xmlns:a="http://schemas.openxmlformats.org/drawingml/2006/main"/>
           <a:p xmlns:a="http://schemas.openxmlformats.org/drawingml/2006/main">
             <a:pPr>
+              <a:buNone/>
               <a:defRPr sz="825">
                 <a:solidFill>
                   <a:srgbClr val="0B1F3A">
@@ -14105,6 +15316,7 @@
           <a:lstStyle xmlns:a="http://schemas.openxmlformats.org/drawingml/2006/main"/>
           <a:p xmlns:a="http://schemas.openxmlformats.org/drawingml/2006/main">
             <a:pPr algn="r">
+              <a:buNone/>
               <a:defRPr sz="825" b="1">
                 <a:solidFill>
                   <a:srgbClr val="0B1F3A">

--- a/assets/decks/episodio-06-piramide-qualidade.pptx
+++ b/assets/decks/episodio-06-piramide-qualidade.pptx
@@ -2,34 +2,34 @@
 <file path=ppt/presentation.xml><?xml version="1.0" encoding="utf-8"?>
 <p:presentation xmlns:p="http://schemas.openxmlformats.org/presentationml/2006/main">
   <p:sldMasterIdLst>
-    <p:sldMasterId xmlns:r="http://schemas.openxmlformats.org/officeDocument/2006/relationships" id="2147483648" r:id="R0ec5de17cfd34509"/>
-    <p:sldMasterId xmlns:r="http://schemas.openxmlformats.org/officeDocument/2006/relationships" id="2147483650" r:id="R96da531806ef4751"/>
+    <p:sldMasterId xmlns:r="http://schemas.openxmlformats.org/officeDocument/2006/relationships" id="2147483648" r:id="R28caffe29eb74b43"/>
+    <p:sldMasterId xmlns:r="http://schemas.openxmlformats.org/officeDocument/2006/relationships" id="2147483650" r:id="R9bc8f05af4f74064"/>
   </p:sldMasterIdLst>
   <p:notesMasterIdLst>
-    <p:notesMasterId xmlns:r="http://schemas.openxmlformats.org/officeDocument/2006/relationships" r:id="Rd69a51ccc0e8458e"/>
+    <p:notesMasterId xmlns:r="http://schemas.openxmlformats.org/officeDocument/2006/relationships" r:id="Rb2a22b756b0c4b49"/>
   </p:notesMasterIdLst>
   <p:sldIdLst>
-    <p:sldId xmlns:r="http://schemas.openxmlformats.org/officeDocument/2006/relationships" id="256" r:id="Rd4372923ac094bab"/>
-    <p:sldId xmlns:r="http://schemas.openxmlformats.org/officeDocument/2006/relationships" id="257" r:id="R08314e97baa545d5"/>
-    <p:sldId xmlns:r="http://schemas.openxmlformats.org/officeDocument/2006/relationships" id="258" r:id="R7640de2ff0104cea"/>
-    <p:sldId xmlns:r="http://schemas.openxmlformats.org/officeDocument/2006/relationships" id="259" r:id="R1ebb4ca4ee0c4f54"/>
-    <p:sldId xmlns:r="http://schemas.openxmlformats.org/officeDocument/2006/relationships" id="260" r:id="R60ba85a8cc504bf0"/>
-    <p:sldId xmlns:r="http://schemas.openxmlformats.org/officeDocument/2006/relationships" id="261" r:id="Rb163a1a61389420e"/>
-    <p:sldId xmlns:r="http://schemas.openxmlformats.org/officeDocument/2006/relationships" id="262" r:id="R2e1e4a7266f64d38"/>
-    <p:sldId xmlns:r="http://schemas.openxmlformats.org/officeDocument/2006/relationships" id="263" r:id="Rdd55fdbf2a3043fd"/>
-    <p:sldId xmlns:r="http://schemas.openxmlformats.org/officeDocument/2006/relationships" id="264" r:id="R3922003dbad642be"/>
-    <p:sldId xmlns:r="http://schemas.openxmlformats.org/officeDocument/2006/relationships" id="265" r:id="R90ff056298d74d8b"/>
-    <p:sldId xmlns:r="http://schemas.openxmlformats.org/officeDocument/2006/relationships" id="266" r:id="Rd0f3c692266f45ac"/>
-    <p:sldId xmlns:r="http://schemas.openxmlformats.org/officeDocument/2006/relationships" id="267" r:id="R8ac32813318f419c"/>
-    <p:sldId xmlns:r="http://schemas.openxmlformats.org/officeDocument/2006/relationships" id="268" r:id="R31e2d67197704024"/>
-    <p:sldId xmlns:r="http://schemas.openxmlformats.org/officeDocument/2006/relationships" id="269" r:id="R73b566df47ae483d"/>
-    <p:sldId xmlns:r="http://schemas.openxmlformats.org/officeDocument/2006/relationships" id="270" r:id="R037bd5b7e4c04e50"/>
-    <p:sldId xmlns:r="http://schemas.openxmlformats.org/officeDocument/2006/relationships" id="271" r:id="R44cd4b7369c04c75"/>
-    <p:sldId xmlns:r="http://schemas.openxmlformats.org/officeDocument/2006/relationships" id="272" r:id="Rb304ddef2b4b4728"/>
-    <p:sldId xmlns:r="http://schemas.openxmlformats.org/officeDocument/2006/relationships" id="273" r:id="R8c44a42a3ea04365"/>
-    <p:sldId xmlns:r="http://schemas.openxmlformats.org/officeDocument/2006/relationships" id="274" r:id="R7e8f76137451480b"/>
-    <p:sldId xmlns:r="http://schemas.openxmlformats.org/officeDocument/2006/relationships" id="275" r:id="R3e86ab6a87134b3c"/>
-    <p:sldId xmlns:r="http://schemas.openxmlformats.org/officeDocument/2006/relationships" id="276" r:id="Rf38c76317f104abf"/>
+    <p:sldId xmlns:r="http://schemas.openxmlformats.org/officeDocument/2006/relationships" id="256" r:id="R6f2d53590e154539"/>
+    <p:sldId xmlns:r="http://schemas.openxmlformats.org/officeDocument/2006/relationships" id="257" r:id="R0ac03d4f0e1a4103"/>
+    <p:sldId xmlns:r="http://schemas.openxmlformats.org/officeDocument/2006/relationships" id="258" r:id="Rf264752f4ae04586"/>
+    <p:sldId xmlns:r="http://schemas.openxmlformats.org/officeDocument/2006/relationships" id="259" r:id="R9566a43568f24b12"/>
+    <p:sldId xmlns:r="http://schemas.openxmlformats.org/officeDocument/2006/relationships" id="260" r:id="Ra7d8072e18fa4cdd"/>
+    <p:sldId xmlns:r="http://schemas.openxmlformats.org/officeDocument/2006/relationships" id="261" r:id="R7fa69921758a4634"/>
+    <p:sldId xmlns:r="http://schemas.openxmlformats.org/officeDocument/2006/relationships" id="262" r:id="R9667a0bb33504adf"/>
+    <p:sldId xmlns:r="http://schemas.openxmlformats.org/officeDocument/2006/relationships" id="263" r:id="Rc5d53b78e69747c9"/>
+    <p:sldId xmlns:r="http://schemas.openxmlformats.org/officeDocument/2006/relationships" id="264" r:id="Redc998c3c57b4756"/>
+    <p:sldId xmlns:r="http://schemas.openxmlformats.org/officeDocument/2006/relationships" id="265" r:id="Rde4e0dc110794c42"/>
+    <p:sldId xmlns:r="http://schemas.openxmlformats.org/officeDocument/2006/relationships" id="266" r:id="Rfacc0305d2a0456e"/>
+    <p:sldId xmlns:r="http://schemas.openxmlformats.org/officeDocument/2006/relationships" id="267" r:id="Rd055e75b35954da0"/>
+    <p:sldId xmlns:r="http://schemas.openxmlformats.org/officeDocument/2006/relationships" id="268" r:id="R4dba74e3c3ac4a71"/>
+    <p:sldId xmlns:r="http://schemas.openxmlformats.org/officeDocument/2006/relationships" id="269" r:id="Rb52cf410fddd4b63"/>
+    <p:sldId xmlns:r="http://schemas.openxmlformats.org/officeDocument/2006/relationships" id="270" r:id="R8bec068d89184ca3"/>
+    <p:sldId xmlns:r="http://schemas.openxmlformats.org/officeDocument/2006/relationships" id="271" r:id="R9120a9f26d834338"/>
+    <p:sldId xmlns:r="http://schemas.openxmlformats.org/officeDocument/2006/relationships" id="272" r:id="Rc9cfdf82eea94c4e"/>
+    <p:sldId xmlns:r="http://schemas.openxmlformats.org/officeDocument/2006/relationships" id="273" r:id="R2dbf1ccb2f654f91"/>
+    <p:sldId xmlns:r="http://schemas.openxmlformats.org/officeDocument/2006/relationships" id="274" r:id="R1c7e5ec4342c4aec"/>
+    <p:sldId xmlns:r="http://schemas.openxmlformats.org/officeDocument/2006/relationships" id="275" r:id="Red70d049affe42c8"/>
+    <p:sldId xmlns:r="http://schemas.openxmlformats.org/officeDocument/2006/relationships" id="276" r:id="R16c573f5551e4943"/>
   </p:sldIdLst>
   <p:sldSz cx="12192000" cy="6858000"/>
   <p:notesSz cx="6858000" cy="9144000"/>
@@ -543,6 +543,11 @@
           </a:p>
           <a:p xmlns:a="http://schemas.openxmlformats.org/drawingml/2006/main">
             <a:r>
+              <a:t>- https://rescuepoint.com.br/assets/img/logo.png</a:t>
+            </a:r>
+          </a:p>
+          <a:p xmlns:a="http://schemas.openxmlformats.org/drawingml/2006/main">
+            <a:r>
               <a:t>- https://github.com/AnselmoBorges/dbt-moderno-na-pratica/blob/main/roteiros/06-piramide-qualidade.md</a:t>
             </a:r>
           </a:p>
@@ -708,6 +713,11 @@
           </a:p>
           <a:p xmlns:a="http://schemas.openxmlformats.org/drawingml/2006/main">
             <a:r>
+              <a:t>- https://rescuepoint.com.br/assets/img/logo.png</a:t>
+            </a:r>
+          </a:p>
+          <a:p xmlns:a="http://schemas.openxmlformats.org/drawingml/2006/main">
+            <a:r>
               <a:t>- https://github.com/AnselmoBorges/dbt-moderno-na-pratica/blob/main/roteiros/06-piramide-qualidade.md</a:t>
             </a:r>
           </a:p>
@@ -873,6 +883,11 @@
           </a:p>
           <a:p xmlns:a="http://schemas.openxmlformats.org/drawingml/2006/main">
             <a:r>
+              <a:t>- https://rescuepoint.com.br/assets/img/logo.png</a:t>
+            </a:r>
+          </a:p>
+          <a:p xmlns:a="http://schemas.openxmlformats.org/drawingml/2006/main">
+            <a:r>
               <a:t>- https://github.com/AnselmoBorges/dbt-moderno-na-pratica/blob/main/roteiros/06-piramide-qualidade.md</a:t>
             </a:r>
           </a:p>
@@ -1038,6 +1053,11 @@
           </a:p>
           <a:p xmlns:a="http://schemas.openxmlformats.org/drawingml/2006/main">
             <a:r>
+              <a:t>- https://rescuepoint.com.br/assets/img/logo.png</a:t>
+            </a:r>
+          </a:p>
+          <a:p xmlns:a="http://schemas.openxmlformats.org/drawingml/2006/main">
+            <a:r>
               <a:t>- https://github.com/AnselmoBorges/dbt-moderno-na-pratica/blob/main/roteiros/06-piramide-qualidade.md</a:t>
             </a:r>
           </a:p>
@@ -1203,6 +1223,11 @@
           </a:p>
           <a:p xmlns:a="http://schemas.openxmlformats.org/drawingml/2006/main">
             <a:r>
+              <a:t>- https://rescuepoint.com.br/assets/img/logo.png</a:t>
+            </a:r>
+          </a:p>
+          <a:p xmlns:a="http://schemas.openxmlformats.org/drawingml/2006/main">
+            <a:r>
               <a:t>- https://github.com/AnselmoBorges/dbt-moderno-na-pratica/blob/main/roteiros/06-piramide-qualidade.md</a:t>
             </a:r>
           </a:p>
@@ -1368,6 +1393,11 @@
           </a:p>
           <a:p xmlns:a="http://schemas.openxmlformats.org/drawingml/2006/main">
             <a:r>
+              <a:t>- https://rescuepoint.com.br/assets/img/logo.png</a:t>
+            </a:r>
+          </a:p>
+          <a:p xmlns:a="http://schemas.openxmlformats.org/drawingml/2006/main">
+            <a:r>
               <a:t>- https://github.com/AnselmoBorges/dbt-moderno-na-pratica/blob/main/roteiros/06-piramide-qualidade.md</a:t>
             </a:r>
           </a:p>
@@ -1533,6 +1563,11 @@
           </a:p>
           <a:p xmlns:a="http://schemas.openxmlformats.org/drawingml/2006/main">
             <a:r>
+              <a:t>- https://rescuepoint.com.br/assets/img/logo.png</a:t>
+            </a:r>
+          </a:p>
+          <a:p xmlns:a="http://schemas.openxmlformats.org/drawingml/2006/main">
+            <a:r>
               <a:t>- https://github.com/AnselmoBorges/dbt-moderno-na-pratica/blob/main/roteiros/06-piramide-qualidade.md</a:t>
             </a:r>
           </a:p>
@@ -1698,6 +1733,11 @@
           </a:p>
           <a:p xmlns:a="http://schemas.openxmlformats.org/drawingml/2006/main">
             <a:r>
+              <a:t>- https://rescuepoint.com.br/assets/img/logo.png</a:t>
+            </a:r>
+          </a:p>
+          <a:p xmlns:a="http://schemas.openxmlformats.org/drawingml/2006/main">
+            <a:r>
               <a:t>- https://github.com/AnselmoBorges/dbt-moderno-na-pratica/blob/main/roteiros/06-piramide-qualidade.md</a:t>
             </a:r>
           </a:p>
@@ -1863,6 +1903,11 @@
           </a:p>
           <a:p xmlns:a="http://schemas.openxmlformats.org/drawingml/2006/main">
             <a:r>
+              <a:t>- https://rescuepoint.com.br/assets/img/logo.png</a:t>
+            </a:r>
+          </a:p>
+          <a:p xmlns:a="http://schemas.openxmlformats.org/drawingml/2006/main">
+            <a:r>
               <a:t>- https://github.com/AnselmoBorges/dbt-moderno-na-pratica/blob/main/roteiros/06-piramide-qualidade.md</a:t>
             </a:r>
           </a:p>
@@ -2028,6 +2073,11 @@
           </a:p>
           <a:p xmlns:a="http://schemas.openxmlformats.org/drawingml/2006/main">
             <a:r>
+              <a:t>- https://rescuepoint.com.br/assets/img/logo.png</a:t>
+            </a:r>
+          </a:p>
+          <a:p xmlns:a="http://schemas.openxmlformats.org/drawingml/2006/main">
+            <a:r>
               <a:t>- https://github.com/AnselmoBorges/dbt-moderno-na-pratica/blob/main/roteiros/06-piramide-qualidade.md</a:t>
             </a:r>
           </a:p>
@@ -2193,6 +2243,11 @@
           </a:p>
           <a:p xmlns:a="http://schemas.openxmlformats.org/drawingml/2006/main">
             <a:r>
+              <a:t>- https://rescuepoint.com.br/assets/img/logo.png</a:t>
+            </a:r>
+          </a:p>
+          <a:p xmlns:a="http://schemas.openxmlformats.org/drawingml/2006/main">
+            <a:r>
               <a:t>- https://github.com/AnselmoBorges/dbt-moderno-na-pratica/blob/main/roteiros/06-piramide-qualidade.md</a:t>
             </a:r>
           </a:p>
@@ -2358,6 +2413,11 @@
           </a:p>
           <a:p xmlns:a="http://schemas.openxmlformats.org/drawingml/2006/main">
             <a:r>
+              <a:t>- https://rescuepoint.com.br/assets/img/logo.png</a:t>
+            </a:r>
+          </a:p>
+          <a:p xmlns:a="http://schemas.openxmlformats.org/drawingml/2006/main">
+            <a:r>
               <a:t>- https://github.com/AnselmoBorges/dbt-moderno-na-pratica/blob/main/roteiros/06-piramide-qualidade.md</a:t>
             </a:r>
           </a:p>
@@ -2523,6 +2583,11 @@
           </a:p>
           <a:p xmlns:a="http://schemas.openxmlformats.org/drawingml/2006/main">
             <a:r>
+              <a:t>- https://rescuepoint.com.br/assets/img/logo.png</a:t>
+            </a:r>
+          </a:p>
+          <a:p xmlns:a="http://schemas.openxmlformats.org/drawingml/2006/main">
+            <a:r>
               <a:t>- https://github.com/AnselmoBorges/dbt-moderno-na-pratica/blob/main/roteiros/06-piramide-qualidade.md</a:t>
             </a:r>
           </a:p>
@@ -2688,6 +2753,11 @@
           </a:p>
           <a:p xmlns:a="http://schemas.openxmlformats.org/drawingml/2006/main">
             <a:r>
+              <a:t>- https://rescuepoint.com.br/assets/img/logo.png</a:t>
+            </a:r>
+          </a:p>
+          <a:p xmlns:a="http://schemas.openxmlformats.org/drawingml/2006/main">
+            <a:r>
               <a:t>- https://github.com/AnselmoBorges/dbt-moderno-na-pratica/blob/main/roteiros/06-piramide-qualidade.md</a:t>
             </a:r>
           </a:p>
@@ -2853,6 +2923,11 @@
           </a:p>
           <a:p xmlns:a="http://schemas.openxmlformats.org/drawingml/2006/main">
             <a:r>
+              <a:t>- https://rescuepoint.com.br/assets/img/logo.png</a:t>
+            </a:r>
+          </a:p>
+          <a:p xmlns:a="http://schemas.openxmlformats.org/drawingml/2006/main">
+            <a:r>
               <a:t>- https://github.com/AnselmoBorges/dbt-moderno-na-pratica/blob/main/roteiros/06-piramide-qualidade.md</a:t>
             </a:r>
           </a:p>
@@ -3018,6 +3093,11 @@
           </a:p>
           <a:p xmlns:a="http://schemas.openxmlformats.org/drawingml/2006/main">
             <a:r>
+              <a:t>- https://rescuepoint.com.br/assets/img/logo.png</a:t>
+            </a:r>
+          </a:p>
+          <a:p xmlns:a="http://schemas.openxmlformats.org/drawingml/2006/main">
+            <a:r>
               <a:t>- https://github.com/AnselmoBorges/dbt-moderno-na-pratica/blob/main/roteiros/06-piramide-qualidade.md</a:t>
             </a:r>
           </a:p>
@@ -3183,6 +3263,11 @@
           </a:p>
           <a:p xmlns:a="http://schemas.openxmlformats.org/drawingml/2006/main">
             <a:r>
+              <a:t>- https://rescuepoint.com.br/assets/img/logo.png</a:t>
+            </a:r>
+          </a:p>
+          <a:p xmlns:a="http://schemas.openxmlformats.org/drawingml/2006/main">
+            <a:r>
               <a:t>- https://github.com/AnselmoBorges/dbt-moderno-na-pratica/blob/main/roteiros/06-piramide-qualidade.md</a:t>
             </a:r>
           </a:p>
@@ -3348,6 +3433,11 @@
           </a:p>
           <a:p xmlns:a="http://schemas.openxmlformats.org/drawingml/2006/main">
             <a:r>
+              <a:t>- https://rescuepoint.com.br/assets/img/logo.png</a:t>
+            </a:r>
+          </a:p>
+          <a:p xmlns:a="http://schemas.openxmlformats.org/drawingml/2006/main">
+            <a:r>
               <a:t>- https://github.com/AnselmoBorges/dbt-moderno-na-pratica/blob/main/roteiros/06-piramide-qualidade.md</a:t>
             </a:r>
           </a:p>
@@ -3513,6 +3603,11 @@
           </a:p>
           <a:p xmlns:a="http://schemas.openxmlformats.org/drawingml/2006/main">
             <a:r>
+              <a:t>- https://rescuepoint.com.br/assets/img/logo.png</a:t>
+            </a:r>
+          </a:p>
+          <a:p xmlns:a="http://schemas.openxmlformats.org/drawingml/2006/main">
+            <a:r>
               <a:t>- https://github.com/AnselmoBorges/dbt-moderno-na-pratica/blob/main/roteiros/06-piramide-qualidade.md</a:t>
             </a:r>
           </a:p>
@@ -3678,6 +3773,11 @@
           </a:p>
           <a:p xmlns:a="http://schemas.openxmlformats.org/drawingml/2006/main">
             <a:r>
+              <a:t>- https://rescuepoint.com.br/assets/img/logo.png</a:t>
+            </a:r>
+          </a:p>
+          <a:p xmlns:a="http://schemas.openxmlformats.org/drawingml/2006/main">
+            <a:r>
               <a:t>- https://github.com/AnselmoBorges/dbt-moderno-na-pratica/blob/main/roteiros/06-piramide-qualidade.md</a:t>
             </a:r>
           </a:p>
@@ -3839,6 +3939,11 @@
           <a:p xmlns:a="http://schemas.openxmlformats.org/drawingml/2006/main">
             <a:r>
               <a:t>- https://docs.getdbt.com/docs/build/sources#source-data-freshness</a:t>
+            </a:r>
+          </a:p>
+          <a:p xmlns:a="http://schemas.openxmlformats.org/drawingml/2006/main">
+            <a:r>
+              <a:t>- https://rescuepoint.com.br/assets/img/logo.png</a:t>
             </a:r>
           </a:p>
           <a:p xmlns:a="http://schemas.openxmlformats.org/drawingml/2006/main">
@@ -3965,7 +4070,7 @@
   </p:cSld>
   <p:clrMap bg1="lt1" tx1="dk1" bg2="lt2" tx2="dk2" accent1="accent1" accent2="accent2" accent3="accent3" accent4="accent4" accent5="accent5" accent6="accent6" hlink="hlink" folHlink="folHlink"/>
   <p:sldLayoutIdLst>
-    <p:sldLayoutId xmlns:r="http://schemas.openxmlformats.org/officeDocument/2006/relationships" id="2147483649" r:id="R80fc9060c94d4268"/>
+    <p:sldLayoutId xmlns:r="http://schemas.openxmlformats.org/officeDocument/2006/relationships" id="2147483649" r:id="R4aea7c002ce84376"/>
   </p:sldLayoutIdLst>
   <p:txStyles>
     <p:titleStyle>
@@ -4263,8 +4368,8 @@
   </p:cSld>
   <p:clrMap bg1="lt1" tx1="dk1" bg2="lt2" tx2="dk2" accent1="accent1" accent2="accent2" accent3="accent3" accent4="accent4" accent5="accent5" accent6="accent6" hlink="hlink" folHlink="folHlink"/>
   <p:sldLayoutIdLst>
-    <p:sldLayoutId xmlns:r="http://schemas.openxmlformats.org/officeDocument/2006/relationships" id="2147483651" r:id="R09d449804b944c39"/>
-    <p:sldLayoutId xmlns:r="http://schemas.openxmlformats.org/officeDocument/2006/relationships" id="2147483652" r:id="Reeb814b7b367401a"/>
+    <p:sldLayoutId xmlns:r="http://schemas.openxmlformats.org/officeDocument/2006/relationships" id="2147483651" r:id="Red93e9f5fa534efe"/>
+    <p:sldLayoutId xmlns:r="http://schemas.openxmlformats.org/officeDocument/2006/relationships" id="2147483652" r:id="R8f9ea57ded8e4f50"/>
   </p:sldLayoutIdLst>
 </p:sldMaster>
 </file>
@@ -4788,14 +4893,14 @@
       </p:grpSpPr>
       <p:pic>
         <p:nvPicPr>
-          <p:cNvPr id="10" name="" descr="Ilustração conceitual autoral da capa: EPISÓDIO 6 — A pirâmide moderna de qualidade de dados."/>
+          <p:cNvPr id="13" name="" descr="Ilustração conceitual autoral da capa: EPISÓDIO 6 — A pirâmide moderna de qualidade de dados."/>
           <p:cNvPicPr>
             <a:picLocks xmlns:a="http://schemas.openxmlformats.org/drawingml/2006/main" noChangeAspect="1"/>
           </p:cNvPicPr>
           <p:nvPr/>
         </p:nvPicPr>
         <p:blipFill>
-          <a:blip xmlns:r="http://schemas.openxmlformats.org/officeDocument/2006/relationships" xmlns:a="http://schemas.openxmlformats.org/drawingml/2006/main" r:embed="Rbf297719e7164c62"/>
+          <a:blip xmlns:r="http://schemas.openxmlformats.org/officeDocument/2006/relationships" xmlns:a="http://schemas.openxmlformats.org/drawingml/2006/main" r:embed="R5258983d070f45a9"/>
           <a:srcRect xmlns:a="http://schemas.openxmlformats.org/drawingml/2006/main" l="19785" t="0" r="19785" b="0"/>
           <a:stretch xmlns:a="http://schemas.openxmlformats.org/drawingml/2006/main">
             <a:fillRect l="0" t="0" r="0" b="0"/>
@@ -4816,7 +4921,7 @@
           <p:cNvPr id="2" name="cover-text-surface">
             <a:extLst xmlns:a="http://schemas.openxmlformats.org/drawingml/2006/main">
               <a:ext uri="{FF2B5EF4-FFF2-40B4-BE49-F238E27FC236}">
-                <a16:creationId xmlns:a16="http://schemas.microsoft.com/office/drawing/2014/main" id="{BB73F186-C5E9-41A4-8A37-068C6058AA7C}"/>
+                <a16:creationId xmlns:a16="http://schemas.microsoft.com/office/drawing/2014/main" id="{98E586A7-0E6D-4618-ACAF-94B6872A0369}"/>
               </a:ext>
             </a:extLst>
           </p:cNvPr>
@@ -4849,7 +4954,7 @@
           <p:cNvPr id="3" name="cover-divider">
             <a:extLst xmlns:a="http://schemas.openxmlformats.org/drawingml/2006/main">
               <a:ext uri="{FF2B5EF4-FFF2-40B4-BE49-F238E27FC236}">
-                <a16:creationId xmlns:a16="http://schemas.microsoft.com/office/drawing/2014/main" id="{06FFE402-0662-44F7-8B41-8C540D58AC49}"/>
+                <a16:creationId xmlns:a16="http://schemas.microsoft.com/office/drawing/2014/main" id="{A68378F0-EF5F-414C-8B5D-9785F6FFF781}"/>
               </a:ext>
             </a:extLst>
           </p:cNvPr>
@@ -4880,7 +4985,7 @@
           <p:cNvPr id="4" name="cover-episode">
             <a:extLst xmlns:a="http://schemas.openxmlformats.org/drawingml/2006/main">
               <a:ext uri="{FF2B5EF4-FFF2-40B4-BE49-F238E27FC236}">
-                <a16:creationId xmlns:a16="http://schemas.microsoft.com/office/drawing/2014/main" id="{3ED7ADDE-AB90-42EF-BD29-BAEB5EB7E52F}"/>
+                <a16:creationId xmlns:a16="http://schemas.microsoft.com/office/drawing/2014/main" id="{ECECDE71-D2BC-4893-856D-EA6E057FDDA8}"/>
               </a:ext>
             </a:extLst>
           </p:cNvPr>
@@ -4928,10 +5033,69 @@
       </p:sp>
       <p:sp>
         <p:nvSpPr>
-          <p:cNvPr id="5" name="cover-title">
-            <a:extLst xmlns:a="http://schemas.openxmlformats.org/drawingml/2006/main">
-              <a:ext uri="{FF2B5EF4-FFF2-40B4-BE49-F238E27FC236}">
-                <a16:creationId xmlns:a16="http://schemas.microsoft.com/office/drawing/2014/main" id="{8C52BD30-06CE-45F4-8983-689DE4C43488}"/>
+          <p:cNvPr id="5" name="rescue-point-logo-background">
+            <a:extLst xmlns:a="http://schemas.openxmlformats.org/drawingml/2006/main">
+              <a:ext uri="{FF2B5EF4-FFF2-40B4-BE49-F238E27FC236}">
+                <a16:creationId xmlns:a16="http://schemas.microsoft.com/office/drawing/2014/main" id="{75165A2A-F71D-465D-B783-E526CAC0F42C}"/>
+              </a:ext>
+            </a:extLst>
+          </p:cNvPr>
+          <p:cNvSpPr>
+            <a:spLocks xmlns:a="http://schemas.openxmlformats.org/drawingml/2006/main" noGrp="1"/>
+          </p:cNvSpPr>
+          <p:nvPr/>
+        </p:nvSpPr>
+        <p:spPr>
+          <a:xfrm xmlns:a="http://schemas.openxmlformats.org/drawingml/2006/main">
+            <a:off x="9772650" y="133350"/>
+            <a:ext cx="1733550" cy="457200"/>
+          </a:xfrm>
+          <a:prstGeom xmlns:a="http://schemas.openxmlformats.org/drawingml/2006/main" prst="roundRect">
+            <a:avLst>
+              <a:gd name="adj" fmla="val 16667"/>
+            </a:avLst>
+          </a:prstGeom>
+          <a:solidFill xmlns:a="http://schemas.openxmlformats.org/drawingml/2006/main">
+            <a:srgbClr val="06142E"/>
+          </a:solidFill>
+          <a:ln xmlns:a="http://schemas.openxmlformats.org/drawingml/2006/main" w="9525">
+            <a:solidFill>
+              <a:srgbClr val="1EC5FF">
+                <a:alpha val="33333"/>
+              </a:srgbClr>
+            </a:solidFill>
+            <a:prstDash val="solid"/>
+          </a:ln>
+        </p:spPr>
+      </p:sp>
+      <p:pic>
+        <p:nvPicPr>
+          <p:cNvPr id="18" name="" descr="Ilustração conceitual autoral da capa: EPISÓDIO 6 — A pirâmide moderna de qualidade de dados."/>
+          <p:cNvPicPr>
+            <a:picLocks xmlns:a="http://schemas.openxmlformats.org/drawingml/2006/main" noChangeAspect="1"/>
+          </p:cNvPicPr>
+          <p:nvPr/>
+        </p:nvPicPr>
+        <p:blipFill>
+          <a:blip xmlns:r="http://schemas.openxmlformats.org/officeDocument/2006/relationships" xmlns:a="http://schemas.openxmlformats.org/drawingml/2006/main" r:embed="R8481e534a39f4ddf"/>
+          <a:stretch xmlns:a="http://schemas.openxmlformats.org/drawingml/2006/main"/>
+        </p:blipFill>
+        <p:spPr>
+          <a:xfrm xmlns:a="http://schemas.openxmlformats.org/drawingml/2006/main">
+            <a:off x="9893718" y="209550"/>
+            <a:ext cx="1491414" cy="323850"/>
+          </a:xfrm>
+          <a:prstGeom xmlns:a="http://schemas.openxmlformats.org/drawingml/2006/main" prst="rect">
+            <a:avLst/>
+          </a:prstGeom>
+        </p:spPr>
+      </p:pic>
+      <p:sp>
+        <p:nvSpPr>
+          <p:cNvPr id="7" name="cover-title">
+            <a:extLst xmlns:a="http://schemas.openxmlformats.org/drawingml/2006/main">
+              <a:ext uri="{FF2B5EF4-FFF2-40B4-BE49-F238E27FC236}">
+                <a16:creationId xmlns:a16="http://schemas.microsoft.com/office/drawing/2014/main" id="{1F4EFA9D-F204-465B-BCC4-380A29038662}"/>
               </a:ext>
             </a:extLst>
           </p:cNvPr>
@@ -4979,10 +5143,10 @@
       </p:sp>
       <p:sp>
         <p:nvSpPr>
-          <p:cNvPr id="6" name="cover-subtitle">
-            <a:extLst xmlns:a="http://schemas.openxmlformats.org/drawingml/2006/main">
-              <a:ext uri="{FF2B5EF4-FFF2-40B4-BE49-F238E27FC236}">
-                <a16:creationId xmlns:a16="http://schemas.microsoft.com/office/drawing/2014/main" id="{050AFE15-9CD1-4934-89A6-07E12B978A3F}"/>
+          <p:cNvPr id="8" name="cover-subtitle">
+            <a:extLst xmlns:a="http://schemas.openxmlformats.org/drawingml/2006/main">
+              <a:ext uri="{FF2B5EF4-FFF2-40B4-BE49-F238E27FC236}">
+                <a16:creationId xmlns:a16="http://schemas.microsoft.com/office/drawing/2014/main" id="{93C1A93B-181A-48C0-8A3F-1B414A0B68A4}"/>
               </a:ext>
             </a:extLst>
           </p:cNvPr>
@@ -5030,10 +5194,10 @@
       </p:sp>
       <p:sp>
         <p:nvSpPr>
-          <p:cNvPr id="7" name="cover-accent">
-            <a:extLst xmlns:a="http://schemas.openxmlformats.org/drawingml/2006/main">
-              <a:ext uri="{FF2B5EF4-FFF2-40B4-BE49-F238E27FC236}">
-                <a16:creationId xmlns:a16="http://schemas.microsoft.com/office/drawing/2014/main" id="{9846C2FE-4E5F-4EC4-B67F-7A19AD81FCEF}"/>
+          <p:cNvPr id="9" name="cover-accent">
+            <a:extLst xmlns:a="http://schemas.openxmlformats.org/drawingml/2006/main">
+              <a:ext uri="{FF2B5EF4-FFF2-40B4-BE49-F238E27FC236}">
+                <a16:creationId xmlns:a16="http://schemas.microsoft.com/office/drawing/2014/main" id="{EF4130BF-CC3B-4B7C-8701-C17C26438F6E}"/>
               </a:ext>
             </a:extLst>
           </p:cNvPr>
@@ -5061,10 +5225,10 @@
       </p:sp>
       <p:sp>
         <p:nvSpPr>
-          <p:cNvPr id="8" name="cover-meta">
-            <a:extLst xmlns:a="http://schemas.openxmlformats.org/drawingml/2006/main">
-              <a:ext uri="{FF2B5EF4-FFF2-40B4-BE49-F238E27FC236}">
-                <a16:creationId xmlns:a16="http://schemas.microsoft.com/office/drawing/2014/main" id="{3318548C-0295-40A4-81EB-7CBB659AC0E6}"/>
+          <p:cNvPr id="10" name="cover-meta">
+            <a:extLst xmlns:a="http://schemas.openxmlformats.org/drawingml/2006/main">
+              <a:ext uri="{FF2B5EF4-FFF2-40B4-BE49-F238E27FC236}">
+                <a16:creationId xmlns:a16="http://schemas.microsoft.com/office/drawing/2014/main" id="{C330636F-4FC2-4533-90C6-B26FDB0CEFAA}"/>
               </a:ext>
             </a:extLst>
           </p:cNvPr>
@@ -5117,7 +5281,7 @@
     </p:spTree>
     <p:extLst>
       <p:ext uri="{BB962C8B-B14F-4D97-AF65-F5344CB8AC3E}">
-        <p14:creationId xmlns:p14="http://schemas.microsoft.com/office/powerpoint/2010/main" val="935284282"/>
+        <p14:creationId xmlns:p14="http://schemas.microsoft.com/office/powerpoint/2010/main" val="879054874"/>
       </p:ext>
     </p:extLst>
   </p:cSld>
@@ -5145,10 +5309,10 @@
       </p:grpSpPr>
       <p:sp>
         <p:nvSpPr>
-          <p:cNvPr id="11" name="slide-title">
-            <a:extLst xmlns:a="http://schemas.openxmlformats.org/drawingml/2006/main">
-              <a:ext uri="{FF2B5EF4-FFF2-40B4-BE49-F238E27FC236}">
-                <a16:creationId xmlns:a16="http://schemas.microsoft.com/office/drawing/2014/main" id="{93A04CB6-8FFC-4412-9AAD-9EA80A28BB33}"/>
+          <p:cNvPr id="13" name="slide-title">
+            <a:extLst xmlns:a="http://schemas.openxmlformats.org/drawingml/2006/main">
+              <a:ext uri="{FF2B5EF4-FFF2-40B4-BE49-F238E27FC236}">
+                <a16:creationId xmlns:a16="http://schemas.microsoft.com/office/drawing/2014/main" id="{6F90258D-A1D9-442C-8B28-94349999514D}"/>
               </a:ext>
             </a:extLst>
           </p:cNvPr>
@@ -5199,7 +5363,7 @@
           <p:cNvPr id="2" name="slide-subtitle">
             <a:extLst xmlns:a="http://schemas.openxmlformats.org/drawingml/2006/main">
               <a:ext uri="{FF2B5EF4-FFF2-40B4-BE49-F238E27FC236}">
-                <a16:creationId xmlns:a16="http://schemas.microsoft.com/office/drawing/2014/main" id="{468BABB8-9124-4C54-9BB6-759F18D5F17C}"/>
+                <a16:creationId xmlns:a16="http://schemas.microsoft.com/office/drawing/2014/main" id="{AB23C578-871D-4A57-89B2-395560C6C3B3}"/>
               </a:ext>
             </a:extLst>
           </p:cNvPr>
@@ -5250,7 +5414,7 @@
           <p:cNvPr id="3" name="bullets">
             <a:extLst xmlns:a="http://schemas.openxmlformats.org/drawingml/2006/main">
               <a:ext uri="{FF2B5EF4-FFF2-40B4-BE49-F238E27FC236}">
-                <a16:creationId xmlns:a16="http://schemas.microsoft.com/office/drawing/2014/main" id="{16B3EAB5-5790-45D5-8201-5F2439390270}"/>
+                <a16:creationId xmlns:a16="http://schemas.microsoft.com/office/drawing/2014/main" id="{1A98FDC2-386F-48C8-A0ED-161F644854BD}"/>
               </a:ext>
             </a:extLst>
           </p:cNvPr>
@@ -5337,7 +5501,7 @@
           <p:cNvPr id="4" name="ambient-glow">
             <a:extLst xmlns:a="http://schemas.openxmlformats.org/drawingml/2006/main">
               <a:ext uri="{FF2B5EF4-FFF2-40B4-BE49-F238E27FC236}">
-                <a16:creationId xmlns:a16="http://schemas.microsoft.com/office/drawing/2014/main" id="{56BAC7BD-4FAA-47B0-BF1C-45A71A487BEC}"/>
+                <a16:creationId xmlns:a16="http://schemas.microsoft.com/office/drawing/2014/main" id="{229DD835-7783-4073-AAFC-BADC7FAEB0FA}"/>
               </a:ext>
             </a:extLst>
           </p:cNvPr>
@@ -5374,7 +5538,7 @@
           <p:cNvPr id="5" name="ambient-core">
             <a:extLst xmlns:a="http://schemas.openxmlformats.org/drawingml/2006/main">
               <a:ext uri="{FF2B5EF4-FFF2-40B4-BE49-F238E27FC236}">
-                <a16:creationId xmlns:a16="http://schemas.microsoft.com/office/drawing/2014/main" id="{15F8A12B-E231-4525-BEB3-6E1884B8A0BA}"/>
+                <a16:creationId xmlns:a16="http://schemas.microsoft.com/office/drawing/2014/main" id="{D30E7B49-5168-4D0E-82A5-4B4A5A78602D}"/>
               </a:ext>
             </a:extLst>
           </p:cNvPr>
@@ -5411,7 +5575,7 @@
           <p:cNvPr id="6" name="section-number">
             <a:extLst xmlns:a="http://schemas.openxmlformats.org/drawingml/2006/main">
               <a:ext uri="{FF2B5EF4-FFF2-40B4-BE49-F238E27FC236}">
-                <a16:creationId xmlns:a16="http://schemas.microsoft.com/office/drawing/2014/main" id="{E1B71FD0-84D2-436A-AB2B-24ECD1FAD68D}"/>
+                <a16:creationId xmlns:a16="http://schemas.microsoft.com/office/drawing/2014/main" id="{852754F0-B59C-42D1-AAB3-E5A1A2703A22}"/>
               </a:ext>
             </a:extLst>
           </p:cNvPr>
@@ -5462,7 +5626,7 @@
           <p:cNvPr id="7" name="eyebrow">
             <a:extLst xmlns:a="http://schemas.openxmlformats.org/drawingml/2006/main">
               <a:ext uri="{FF2B5EF4-FFF2-40B4-BE49-F238E27FC236}">
-                <a16:creationId xmlns:a16="http://schemas.microsoft.com/office/drawing/2014/main" id="{26E2FA09-8EF6-4F92-A888-99B7E8C1B64F}"/>
+                <a16:creationId xmlns:a16="http://schemas.microsoft.com/office/drawing/2014/main" id="{6F1B1D34-6A67-45C1-9366-682F6FE5AC1A}"/>
               </a:ext>
             </a:extLst>
           </p:cNvPr>
@@ -5510,10 +5674,69 @@
       </p:sp>
       <p:sp>
         <p:nvSpPr>
-          <p:cNvPr id="8" name="footer-rule">
-            <a:extLst xmlns:a="http://schemas.openxmlformats.org/drawingml/2006/main">
-              <a:ext uri="{FF2B5EF4-FFF2-40B4-BE49-F238E27FC236}">
-                <a16:creationId xmlns:a16="http://schemas.microsoft.com/office/drawing/2014/main" id="{191FCBE8-25D1-4D8F-BDE7-08C5A1354095}"/>
+          <p:cNvPr id="8" name="rescue-point-logo-background">
+            <a:extLst xmlns:a="http://schemas.openxmlformats.org/drawingml/2006/main">
+              <a:ext uri="{FF2B5EF4-FFF2-40B4-BE49-F238E27FC236}">
+                <a16:creationId xmlns:a16="http://schemas.microsoft.com/office/drawing/2014/main" id="{A47598F4-D5DA-4B94-A410-6B34BA8E7691}"/>
+              </a:ext>
+            </a:extLst>
+          </p:cNvPr>
+          <p:cNvSpPr>
+            <a:spLocks xmlns:a="http://schemas.openxmlformats.org/drawingml/2006/main" noGrp="1"/>
+          </p:cNvSpPr>
+          <p:nvPr/>
+        </p:nvSpPr>
+        <p:spPr>
+          <a:xfrm xmlns:a="http://schemas.openxmlformats.org/drawingml/2006/main">
+            <a:off x="9772650" y="133350"/>
+            <a:ext cx="1733550" cy="457200"/>
+          </a:xfrm>
+          <a:prstGeom xmlns:a="http://schemas.openxmlformats.org/drawingml/2006/main" prst="roundRect">
+            <a:avLst>
+              <a:gd name="adj" fmla="val 16667"/>
+            </a:avLst>
+          </a:prstGeom>
+          <a:solidFill xmlns:a="http://schemas.openxmlformats.org/drawingml/2006/main">
+            <a:srgbClr val="06142E"/>
+          </a:solidFill>
+          <a:ln xmlns:a="http://schemas.openxmlformats.org/drawingml/2006/main" w="9525">
+            <a:solidFill>
+              <a:srgbClr val="1EC5FF">
+                <a:alpha val="33333"/>
+              </a:srgbClr>
+            </a:solidFill>
+            <a:prstDash val="solid"/>
+          </a:ln>
+        </p:spPr>
+      </p:sp>
+      <p:pic>
+        <p:nvPicPr>
+          <p:cNvPr id="23" name="" descr="Figura oficial da documentação dbt usada para explicar: Data tests procuram violações reais — A população materializada pode falhar mesmo quando o exemplo unitário passa.."/>
+          <p:cNvPicPr>
+            <a:picLocks xmlns:a="http://schemas.openxmlformats.org/drawingml/2006/main" noChangeAspect="1"/>
+          </p:cNvPicPr>
+          <p:nvPr/>
+        </p:nvPicPr>
+        <p:blipFill>
+          <a:blip xmlns:r="http://schemas.openxmlformats.org/officeDocument/2006/relationships" xmlns:a="http://schemas.openxmlformats.org/drawingml/2006/main" r:embed="R44d3a654ac4f4f9c"/>
+          <a:stretch xmlns:a="http://schemas.openxmlformats.org/drawingml/2006/main"/>
+        </p:blipFill>
+        <p:spPr>
+          <a:xfrm xmlns:a="http://schemas.openxmlformats.org/drawingml/2006/main">
+            <a:off x="9893718" y="209550"/>
+            <a:ext cx="1491414" cy="323850"/>
+          </a:xfrm>
+          <a:prstGeom xmlns:a="http://schemas.openxmlformats.org/drawingml/2006/main" prst="rect">
+            <a:avLst/>
+          </a:prstGeom>
+        </p:spPr>
+      </p:pic>
+      <p:sp>
+        <p:nvSpPr>
+          <p:cNvPr id="10" name="footer-rule">
+            <a:extLst xmlns:a="http://schemas.openxmlformats.org/drawingml/2006/main">
+              <a:ext uri="{FF2B5EF4-FFF2-40B4-BE49-F238E27FC236}">
+                <a16:creationId xmlns:a16="http://schemas.microsoft.com/office/drawing/2014/main" id="{5DB5F030-C68E-4B89-B7DC-13E4CAFE7F62}"/>
               </a:ext>
             </a:extLst>
           </p:cNvPr>
@@ -5543,10 +5766,10 @@
       </p:sp>
       <p:sp>
         <p:nvSpPr>
-          <p:cNvPr id="9" name="footer">
-            <a:extLst xmlns:a="http://schemas.openxmlformats.org/drawingml/2006/main">
-              <a:ext uri="{FF2B5EF4-FFF2-40B4-BE49-F238E27FC236}">
-                <a16:creationId xmlns:a16="http://schemas.microsoft.com/office/drawing/2014/main" id="{7027A1E9-4BCB-40DF-BFE0-D4E2803B39EA}"/>
+          <p:cNvPr id="11" name="footer">
+            <a:extLst xmlns:a="http://schemas.openxmlformats.org/drawingml/2006/main">
+              <a:ext uri="{FF2B5EF4-FFF2-40B4-BE49-F238E27FC236}">
+                <a16:creationId xmlns:a16="http://schemas.microsoft.com/office/drawing/2014/main" id="{78E79234-0B1C-4DE5-83BE-B0C3A036690C}"/>
               </a:ext>
             </a:extLst>
           </p:cNvPr>
@@ -5598,10 +5821,10 @@
       </p:sp>
       <p:sp>
         <p:nvSpPr>
-          <p:cNvPr id="10" name="page-number">
-            <a:extLst xmlns:a="http://schemas.openxmlformats.org/drawingml/2006/main">
-              <a:ext uri="{FF2B5EF4-FFF2-40B4-BE49-F238E27FC236}">
-                <a16:creationId xmlns:a16="http://schemas.microsoft.com/office/drawing/2014/main" id="{F008D777-346A-4CBC-9DBC-F171808B1426}"/>
+          <p:cNvPr id="12" name="page-number">
+            <a:extLst xmlns:a="http://schemas.openxmlformats.org/drawingml/2006/main">
+              <a:ext uri="{FF2B5EF4-FFF2-40B4-BE49-F238E27FC236}">
+                <a16:creationId xmlns:a16="http://schemas.microsoft.com/office/drawing/2014/main" id="{AE149749-F7ED-4DF9-B158-3C6E74831643}"/>
               </a:ext>
             </a:extLst>
           </p:cNvPr>
@@ -5654,7 +5877,7 @@
     </p:spTree>
     <p:extLst>
       <p:ext uri="{BB962C8B-B14F-4D97-AF65-F5344CB8AC3E}">
-        <p14:creationId xmlns:p14="http://schemas.microsoft.com/office/powerpoint/2010/main" val="1492653375"/>
+        <p14:creationId xmlns:p14="http://schemas.microsoft.com/office/powerpoint/2010/main" val="1094319511"/>
       </p:ext>
     </p:extLst>
   </p:cSld>
@@ -5690,10 +5913,10 @@
       </p:grpSpPr>
       <p:sp>
         <p:nvSpPr>
-          <p:cNvPr id="13" name="slide-title">
-            <a:extLst xmlns:a="http://schemas.openxmlformats.org/drawingml/2006/main">
-              <a:ext uri="{FF2B5EF4-FFF2-40B4-BE49-F238E27FC236}">
-                <a16:creationId xmlns:a16="http://schemas.microsoft.com/office/drawing/2014/main" id="{BA0FFA10-B501-4B9C-9B4E-1ECC3BF6C745}"/>
+          <p:cNvPr id="15" name="slide-title">
+            <a:extLst xmlns:a="http://schemas.openxmlformats.org/drawingml/2006/main">
+              <a:ext uri="{FF2B5EF4-FFF2-40B4-BE49-F238E27FC236}">
+                <a16:creationId xmlns:a16="http://schemas.microsoft.com/office/drawing/2014/main" id="{5759AD93-A910-43B4-95EA-674B07140AF3}"/>
               </a:ext>
             </a:extLst>
           </p:cNvPr>
@@ -5744,7 +5967,7 @@
           <p:cNvPr id="2" name="flow-1">
             <a:extLst xmlns:a="http://schemas.openxmlformats.org/drawingml/2006/main">
               <a:ext uri="{FF2B5EF4-FFF2-40B4-BE49-F238E27FC236}">
-                <a16:creationId xmlns:a16="http://schemas.microsoft.com/office/drawing/2014/main" id="{79DA8DD0-20DF-4599-96C4-F17FAC48B63B}"/>
+                <a16:creationId xmlns:a16="http://schemas.microsoft.com/office/drawing/2014/main" id="{38F6CBAC-63C4-4981-8649-01E71587F050}"/>
               </a:ext>
             </a:extLst>
           </p:cNvPr>
@@ -5801,7 +6024,7 @@
           <p:cNvPr id="3" name="flow-2">
             <a:extLst xmlns:a="http://schemas.openxmlformats.org/drawingml/2006/main">
               <a:ext uri="{FF2B5EF4-FFF2-40B4-BE49-F238E27FC236}">
-                <a16:creationId xmlns:a16="http://schemas.microsoft.com/office/drawing/2014/main" id="{11594C26-8A76-4F11-83E5-5226AF3307E6}"/>
+                <a16:creationId xmlns:a16="http://schemas.microsoft.com/office/drawing/2014/main" id="{E8B36028-7946-4FD2-B0E4-CA34906BEFE5}"/>
               </a:ext>
             </a:extLst>
           </p:cNvPr>
@@ -5858,7 +6081,7 @@
           <p:cNvPr id="4" name="flow-3">
             <a:extLst xmlns:a="http://schemas.openxmlformats.org/drawingml/2006/main">
               <a:ext uri="{FF2B5EF4-FFF2-40B4-BE49-F238E27FC236}">
-                <a16:creationId xmlns:a16="http://schemas.microsoft.com/office/drawing/2014/main" id="{D4C133D6-50AD-4F7B-BCD8-6B1A5A7D39AC}"/>
+                <a16:creationId xmlns:a16="http://schemas.microsoft.com/office/drawing/2014/main" id="{19993B03-A4C5-4752-88A0-A7231D7E84F2}"/>
               </a:ext>
             </a:extLst>
           </p:cNvPr>
@@ -5915,7 +6138,7 @@
           <p:cNvPr id="5" name="flow-4">
             <a:extLst xmlns:a="http://schemas.openxmlformats.org/drawingml/2006/main">
               <a:ext uri="{FF2B5EF4-FFF2-40B4-BE49-F238E27FC236}">
-                <a16:creationId xmlns:a16="http://schemas.microsoft.com/office/drawing/2014/main" id="{9F19615D-DD6F-4422-BF97-8530AC8CD4D5}"/>
+                <a16:creationId xmlns:a16="http://schemas.microsoft.com/office/drawing/2014/main" id="{C4B49EE2-C744-4B22-A976-2E495EE5CB4E}"/>
               </a:ext>
             </a:extLst>
           </p:cNvPr>
@@ -5969,7 +6192,7 @@
       </p:sp>
       <p:cxnSp>
         <p:nvCxnSpPr>
-          <p:cNvPr id="26" name=""/>
+          <p:cNvPr id="29" name=""/>
           <p:cNvCxnSpPr>
             <a:stCxn xmlns:a="http://schemas.openxmlformats.org/drawingml/2006/main" id="2" idx="3"/>
             <a:endCxn xmlns:a="http://schemas.openxmlformats.org/drawingml/2006/main" id="3" idx="1"/>
@@ -5995,7 +6218,7 @@
       </p:cxnSp>
       <p:cxnSp>
         <p:nvCxnSpPr>
-          <p:cNvPr id="27" name=""/>
+          <p:cNvPr id="30" name=""/>
           <p:cNvCxnSpPr>
             <a:stCxn xmlns:a="http://schemas.openxmlformats.org/drawingml/2006/main" id="3" idx="3"/>
             <a:endCxn xmlns:a="http://schemas.openxmlformats.org/drawingml/2006/main" id="4" idx="1"/>
@@ -6021,7 +6244,7 @@
       </p:cxnSp>
       <p:cxnSp>
         <p:nvCxnSpPr>
-          <p:cNvPr id="28" name=""/>
+          <p:cNvPr id="31" name=""/>
           <p:cNvCxnSpPr>
             <a:stCxn xmlns:a="http://schemas.openxmlformats.org/drawingml/2006/main" id="4" idx="3"/>
             <a:endCxn xmlns:a="http://schemas.openxmlformats.org/drawingml/2006/main" id="5" idx="1"/>
@@ -6050,7 +6273,7 @@
           <p:cNvPr id="9" name="eyebrow">
             <a:extLst xmlns:a="http://schemas.openxmlformats.org/drawingml/2006/main">
               <a:ext uri="{FF2B5EF4-FFF2-40B4-BE49-F238E27FC236}">
-                <a16:creationId xmlns:a16="http://schemas.microsoft.com/office/drawing/2014/main" id="{6AEA852D-BF7B-4CAF-9F5B-70126438BE87}"/>
+                <a16:creationId xmlns:a16="http://schemas.microsoft.com/office/drawing/2014/main" id="{75A2AFD6-5038-4D98-B1DF-DB153F436660}"/>
               </a:ext>
             </a:extLst>
           </p:cNvPr>
@@ -6098,10 +6321,69 @@
       </p:sp>
       <p:sp>
         <p:nvSpPr>
-          <p:cNvPr id="10" name="footer-rule">
-            <a:extLst xmlns:a="http://schemas.openxmlformats.org/drawingml/2006/main">
-              <a:ext uri="{FF2B5EF4-FFF2-40B4-BE49-F238E27FC236}">
-                <a16:creationId xmlns:a16="http://schemas.microsoft.com/office/drawing/2014/main" id="{6153ABCC-ACB5-4A6B-A543-8635855ACC20}"/>
+          <p:cNvPr id="10" name="rescue-point-logo-background">
+            <a:extLst xmlns:a="http://schemas.openxmlformats.org/drawingml/2006/main">
+              <a:ext uri="{FF2B5EF4-FFF2-40B4-BE49-F238E27FC236}">
+                <a16:creationId xmlns:a16="http://schemas.microsoft.com/office/drawing/2014/main" id="{021EEA3B-AC9C-447A-BA34-F7073D705E8E}"/>
+              </a:ext>
+            </a:extLst>
+          </p:cNvPr>
+          <p:cNvSpPr>
+            <a:spLocks xmlns:a="http://schemas.openxmlformats.org/drawingml/2006/main" noGrp="1"/>
+          </p:cNvSpPr>
+          <p:nvPr/>
+        </p:nvSpPr>
+        <p:spPr>
+          <a:xfrm xmlns:a="http://schemas.openxmlformats.org/drawingml/2006/main">
+            <a:off x="9772650" y="133350"/>
+            <a:ext cx="1733550" cy="457200"/>
+          </a:xfrm>
+          <a:prstGeom xmlns:a="http://schemas.openxmlformats.org/drawingml/2006/main" prst="roundRect">
+            <a:avLst>
+              <a:gd name="adj" fmla="val 16667"/>
+            </a:avLst>
+          </a:prstGeom>
+          <a:solidFill xmlns:a="http://schemas.openxmlformats.org/drawingml/2006/main">
+            <a:srgbClr val="06142E"/>
+          </a:solidFill>
+          <a:ln xmlns:a="http://schemas.openxmlformats.org/drawingml/2006/main" w="9525">
+            <a:solidFill>
+              <a:srgbClr val="1EC5FF">
+                <a:alpha val="33333"/>
+              </a:srgbClr>
+            </a:solidFill>
+            <a:prstDash val="solid"/>
+          </a:ln>
+        </p:spPr>
+      </p:sp>
+      <p:pic>
+        <p:nvPicPr>
+          <p:cNvPr id="34" name="" descr="Figura oficial da documentação dbt usada para explicar: Data tests procuram violações reais — Build."/>
+          <p:cNvPicPr>
+            <a:picLocks xmlns:a="http://schemas.openxmlformats.org/drawingml/2006/main" noChangeAspect="1"/>
+          </p:cNvPicPr>
+          <p:nvPr/>
+        </p:nvPicPr>
+        <p:blipFill>
+          <a:blip xmlns:r="http://schemas.openxmlformats.org/officeDocument/2006/relationships" xmlns:a="http://schemas.openxmlformats.org/drawingml/2006/main" r:embed="Re69629280b554b4c"/>
+          <a:stretch xmlns:a="http://schemas.openxmlformats.org/drawingml/2006/main"/>
+        </p:blipFill>
+        <p:spPr>
+          <a:xfrm xmlns:a="http://schemas.openxmlformats.org/drawingml/2006/main">
+            <a:off x="9893718" y="209550"/>
+            <a:ext cx="1491414" cy="323850"/>
+          </a:xfrm>
+          <a:prstGeom xmlns:a="http://schemas.openxmlformats.org/drawingml/2006/main" prst="rect">
+            <a:avLst/>
+          </a:prstGeom>
+        </p:spPr>
+      </p:pic>
+      <p:sp>
+        <p:nvSpPr>
+          <p:cNvPr id="12" name="footer-rule">
+            <a:extLst xmlns:a="http://schemas.openxmlformats.org/drawingml/2006/main">
+              <a:ext uri="{FF2B5EF4-FFF2-40B4-BE49-F238E27FC236}">
+                <a16:creationId xmlns:a16="http://schemas.microsoft.com/office/drawing/2014/main" id="{7CA88EC0-5D96-420B-BBCF-C52B80A8353A}"/>
               </a:ext>
             </a:extLst>
           </p:cNvPr>
@@ -6131,10 +6413,10 @@
       </p:sp>
       <p:sp>
         <p:nvSpPr>
-          <p:cNvPr id="11" name="footer">
-            <a:extLst xmlns:a="http://schemas.openxmlformats.org/drawingml/2006/main">
-              <a:ext uri="{FF2B5EF4-FFF2-40B4-BE49-F238E27FC236}">
-                <a16:creationId xmlns:a16="http://schemas.microsoft.com/office/drawing/2014/main" id="{A5B8105D-38B5-4F6A-BC50-35C7058B7FE8}"/>
+          <p:cNvPr id="13" name="footer">
+            <a:extLst xmlns:a="http://schemas.openxmlformats.org/drawingml/2006/main">
+              <a:ext uri="{FF2B5EF4-FFF2-40B4-BE49-F238E27FC236}">
+                <a16:creationId xmlns:a16="http://schemas.microsoft.com/office/drawing/2014/main" id="{DCCDA2FE-8BD2-4A31-AA0D-F4D6786BD785}"/>
               </a:ext>
             </a:extLst>
           </p:cNvPr>
@@ -6186,10 +6468,10 @@
       </p:sp>
       <p:sp>
         <p:nvSpPr>
-          <p:cNvPr id="12" name="page-number">
-            <a:extLst xmlns:a="http://schemas.openxmlformats.org/drawingml/2006/main">
-              <a:ext uri="{FF2B5EF4-FFF2-40B4-BE49-F238E27FC236}">
-                <a16:creationId xmlns:a16="http://schemas.microsoft.com/office/drawing/2014/main" id="{7ABC94BB-ACC3-415F-86E3-3DA4E7A13354}"/>
+          <p:cNvPr id="14" name="page-number">
+            <a:extLst xmlns:a="http://schemas.openxmlformats.org/drawingml/2006/main">
+              <a:ext uri="{FF2B5EF4-FFF2-40B4-BE49-F238E27FC236}">
+                <a16:creationId xmlns:a16="http://schemas.microsoft.com/office/drawing/2014/main" id="{1CECAA9D-D104-471C-BBC4-A6CB0A14E2B1}"/>
               </a:ext>
             </a:extLst>
           </p:cNvPr>
@@ -6242,7 +6524,7 @@
     </p:spTree>
     <p:extLst>
       <p:ext uri="{BB962C8B-B14F-4D97-AF65-F5344CB8AC3E}">
-        <p14:creationId xmlns:p14="http://schemas.microsoft.com/office/powerpoint/2010/main" val="1517441302"/>
+        <p14:creationId xmlns:p14="http://schemas.microsoft.com/office/powerpoint/2010/main" val="483751660"/>
       </p:ext>
     </p:extLst>
   </p:cSld>
@@ -6278,10 +6560,10 @@
       </p:grpSpPr>
       <p:sp>
         <p:nvSpPr>
-          <p:cNvPr id="11" name="slide-title">
-            <a:extLst xmlns:a="http://schemas.openxmlformats.org/drawingml/2006/main">
-              <a:ext uri="{FF2B5EF4-FFF2-40B4-BE49-F238E27FC236}">
-                <a16:creationId xmlns:a16="http://schemas.microsoft.com/office/drawing/2014/main" id="{412A426F-B6D4-48F7-BB11-A38C1FB8A4FF}"/>
+          <p:cNvPr id="13" name="slide-title">
+            <a:extLst xmlns:a="http://schemas.openxmlformats.org/drawingml/2006/main">
+              <a:ext uri="{FF2B5EF4-FFF2-40B4-BE49-F238E27FC236}">
+                <a16:creationId xmlns:a16="http://schemas.microsoft.com/office/drawing/2014/main" id="{AB91BF8A-09DD-49B4-AAF0-61F4865CDBCF}"/>
               </a:ext>
             </a:extLst>
           </p:cNvPr>
@@ -6332,7 +6614,7 @@
           <p:cNvPr id="2" name="slide-subtitle">
             <a:extLst xmlns:a="http://schemas.openxmlformats.org/drawingml/2006/main">
               <a:ext uri="{FF2B5EF4-FFF2-40B4-BE49-F238E27FC236}">
-                <a16:creationId xmlns:a16="http://schemas.microsoft.com/office/drawing/2014/main" id="{87341DC2-FDBD-4506-A30F-0E14BCAA3003}"/>
+                <a16:creationId xmlns:a16="http://schemas.microsoft.com/office/drawing/2014/main" id="{8C10F44A-6D96-43A8-AF4D-22711BFEBBC8}"/>
               </a:ext>
             </a:extLst>
           </p:cNvPr>
@@ -6383,7 +6665,7 @@
           <p:cNvPr id="3" name="bullets">
             <a:extLst xmlns:a="http://schemas.openxmlformats.org/drawingml/2006/main">
               <a:ext uri="{FF2B5EF4-FFF2-40B4-BE49-F238E27FC236}">
-                <a16:creationId xmlns:a16="http://schemas.microsoft.com/office/drawing/2014/main" id="{2A16FC32-A0D2-46F4-9337-D002008FFD8A}"/>
+                <a16:creationId xmlns:a16="http://schemas.microsoft.com/office/drawing/2014/main" id="{34363C07-E3A5-4350-B03D-76D0F5B653AD}"/>
               </a:ext>
             </a:extLst>
           </p:cNvPr>
@@ -6470,7 +6752,7 @@
           <p:cNvPr id="4" name="ambient-glow">
             <a:extLst xmlns:a="http://schemas.openxmlformats.org/drawingml/2006/main">
               <a:ext uri="{FF2B5EF4-FFF2-40B4-BE49-F238E27FC236}">
-                <a16:creationId xmlns:a16="http://schemas.microsoft.com/office/drawing/2014/main" id="{EFC7A0CF-5471-4179-B05D-63D233398331}"/>
+                <a16:creationId xmlns:a16="http://schemas.microsoft.com/office/drawing/2014/main" id="{BEB534CC-B233-4CAD-BA6C-EABBAEED2285}"/>
               </a:ext>
             </a:extLst>
           </p:cNvPr>
@@ -6507,7 +6789,7 @@
           <p:cNvPr id="5" name="ambient-core">
             <a:extLst xmlns:a="http://schemas.openxmlformats.org/drawingml/2006/main">
               <a:ext uri="{FF2B5EF4-FFF2-40B4-BE49-F238E27FC236}">
-                <a16:creationId xmlns:a16="http://schemas.microsoft.com/office/drawing/2014/main" id="{F30A6D7B-1C10-4FAB-A5EE-053853BC8033}"/>
+                <a16:creationId xmlns:a16="http://schemas.microsoft.com/office/drawing/2014/main" id="{39E8A4F0-2E77-431C-B557-A8D8993BADBA}"/>
               </a:ext>
             </a:extLst>
           </p:cNvPr>
@@ -6544,7 +6826,7 @@
           <p:cNvPr id="6" name="section-number">
             <a:extLst xmlns:a="http://schemas.openxmlformats.org/drawingml/2006/main">
               <a:ext uri="{FF2B5EF4-FFF2-40B4-BE49-F238E27FC236}">
-                <a16:creationId xmlns:a16="http://schemas.microsoft.com/office/drawing/2014/main" id="{D88CD924-2CF3-45D6-A7F9-7E29F1436DC4}"/>
+                <a16:creationId xmlns:a16="http://schemas.microsoft.com/office/drawing/2014/main" id="{F002198B-1D7E-450E-8C6C-B39A8EFC545A}"/>
               </a:ext>
             </a:extLst>
           </p:cNvPr>
@@ -6595,7 +6877,7 @@
           <p:cNvPr id="7" name="eyebrow">
             <a:extLst xmlns:a="http://schemas.openxmlformats.org/drawingml/2006/main">
               <a:ext uri="{FF2B5EF4-FFF2-40B4-BE49-F238E27FC236}">
-                <a16:creationId xmlns:a16="http://schemas.microsoft.com/office/drawing/2014/main" id="{9179169E-2E2D-481E-B5A4-8285417D3777}"/>
+                <a16:creationId xmlns:a16="http://schemas.microsoft.com/office/drawing/2014/main" id="{542A0851-E194-4D42-9EA2-6D65DADCCAB1}"/>
               </a:ext>
             </a:extLst>
           </p:cNvPr>
@@ -6643,10 +6925,69 @@
       </p:sp>
       <p:sp>
         <p:nvSpPr>
-          <p:cNvPr id="8" name="footer-rule">
-            <a:extLst xmlns:a="http://schemas.openxmlformats.org/drawingml/2006/main">
-              <a:ext uri="{FF2B5EF4-FFF2-40B4-BE49-F238E27FC236}">
-                <a16:creationId xmlns:a16="http://schemas.microsoft.com/office/drawing/2014/main" id="{EF9A950C-E9DB-4908-95D7-886D2BD12D2C}"/>
+          <p:cNvPr id="8" name="rescue-point-logo-background">
+            <a:extLst xmlns:a="http://schemas.openxmlformats.org/drawingml/2006/main">
+              <a:ext uri="{FF2B5EF4-FFF2-40B4-BE49-F238E27FC236}">
+                <a16:creationId xmlns:a16="http://schemas.microsoft.com/office/drawing/2014/main" id="{832D6A04-EF04-455C-9EBB-1A900C82B697}"/>
+              </a:ext>
+            </a:extLst>
+          </p:cNvPr>
+          <p:cNvSpPr>
+            <a:spLocks xmlns:a="http://schemas.openxmlformats.org/drawingml/2006/main" noGrp="1"/>
+          </p:cNvSpPr>
+          <p:nvPr/>
+        </p:nvSpPr>
+        <p:spPr>
+          <a:xfrm xmlns:a="http://schemas.openxmlformats.org/drawingml/2006/main">
+            <a:off x="9772650" y="133350"/>
+            <a:ext cx="1733550" cy="457200"/>
+          </a:xfrm>
+          <a:prstGeom xmlns:a="http://schemas.openxmlformats.org/drawingml/2006/main" prst="roundRect">
+            <a:avLst>
+              <a:gd name="adj" fmla="val 16667"/>
+            </a:avLst>
+          </a:prstGeom>
+          <a:solidFill xmlns:a="http://schemas.openxmlformats.org/drawingml/2006/main">
+            <a:srgbClr val="06142E"/>
+          </a:solidFill>
+          <a:ln xmlns:a="http://schemas.openxmlformats.org/drawingml/2006/main" w="9525">
+            <a:solidFill>
+              <a:srgbClr val="1EC5FF">
+                <a:alpha val="33333"/>
+              </a:srgbClr>
+            </a:solidFill>
+            <a:prstDash val="solid"/>
+          </a:ln>
+        </p:spPr>
+      </p:sp>
+      <p:pic>
+        <p:nvPicPr>
+          <p:cNvPr id="23" name="" descr="Figura oficial da documentação dbt usada para explicar: Freshness responde se a fonte chegou — Uma fixture recente passa; a mesma carga envelhecida deve falhar.."/>
+          <p:cNvPicPr>
+            <a:picLocks xmlns:a="http://schemas.openxmlformats.org/drawingml/2006/main" noChangeAspect="1"/>
+          </p:cNvPicPr>
+          <p:nvPr/>
+        </p:nvPicPr>
+        <p:blipFill>
+          <a:blip xmlns:r="http://schemas.openxmlformats.org/officeDocument/2006/relationships" xmlns:a="http://schemas.openxmlformats.org/drawingml/2006/main" r:embed="R0ba0befcd4684669"/>
+          <a:stretch xmlns:a="http://schemas.openxmlformats.org/drawingml/2006/main"/>
+        </p:blipFill>
+        <p:spPr>
+          <a:xfrm xmlns:a="http://schemas.openxmlformats.org/drawingml/2006/main">
+            <a:off x="9893718" y="209550"/>
+            <a:ext cx="1491414" cy="323850"/>
+          </a:xfrm>
+          <a:prstGeom xmlns:a="http://schemas.openxmlformats.org/drawingml/2006/main" prst="rect">
+            <a:avLst/>
+          </a:prstGeom>
+        </p:spPr>
+      </p:pic>
+      <p:sp>
+        <p:nvSpPr>
+          <p:cNvPr id="10" name="footer-rule">
+            <a:extLst xmlns:a="http://schemas.openxmlformats.org/drawingml/2006/main">
+              <a:ext uri="{FF2B5EF4-FFF2-40B4-BE49-F238E27FC236}">
+                <a16:creationId xmlns:a16="http://schemas.microsoft.com/office/drawing/2014/main" id="{B96B44EF-3A50-49BF-8786-888790683735}"/>
               </a:ext>
             </a:extLst>
           </p:cNvPr>
@@ -6676,10 +7017,10 @@
       </p:sp>
       <p:sp>
         <p:nvSpPr>
-          <p:cNvPr id="9" name="footer">
-            <a:extLst xmlns:a="http://schemas.openxmlformats.org/drawingml/2006/main">
-              <a:ext uri="{FF2B5EF4-FFF2-40B4-BE49-F238E27FC236}">
-                <a16:creationId xmlns:a16="http://schemas.microsoft.com/office/drawing/2014/main" id="{1E4F1D32-B0BC-4098-8C41-9C1E34CB40D6}"/>
+          <p:cNvPr id="11" name="footer">
+            <a:extLst xmlns:a="http://schemas.openxmlformats.org/drawingml/2006/main">
+              <a:ext uri="{FF2B5EF4-FFF2-40B4-BE49-F238E27FC236}">
+                <a16:creationId xmlns:a16="http://schemas.microsoft.com/office/drawing/2014/main" id="{6A988FD4-DB71-44E7-B85E-E3628B460A83}"/>
               </a:ext>
             </a:extLst>
           </p:cNvPr>
@@ -6731,10 +7072,10 @@
       </p:sp>
       <p:sp>
         <p:nvSpPr>
-          <p:cNvPr id="10" name="page-number">
-            <a:extLst xmlns:a="http://schemas.openxmlformats.org/drawingml/2006/main">
-              <a:ext uri="{FF2B5EF4-FFF2-40B4-BE49-F238E27FC236}">
-                <a16:creationId xmlns:a16="http://schemas.microsoft.com/office/drawing/2014/main" id="{7BF5E7A9-6FCF-4DD8-A71D-55F8E7D799E3}"/>
+          <p:cNvPr id="12" name="page-number">
+            <a:extLst xmlns:a="http://schemas.openxmlformats.org/drawingml/2006/main">
+              <a:ext uri="{FF2B5EF4-FFF2-40B4-BE49-F238E27FC236}">
+                <a16:creationId xmlns:a16="http://schemas.microsoft.com/office/drawing/2014/main" id="{BB29FD56-E018-4974-BC10-7D1DBB2C5D63}"/>
               </a:ext>
             </a:extLst>
           </p:cNvPr>
@@ -6787,7 +7128,7 @@
     </p:spTree>
     <p:extLst>
       <p:ext uri="{BB962C8B-B14F-4D97-AF65-F5344CB8AC3E}">
-        <p14:creationId xmlns:p14="http://schemas.microsoft.com/office/powerpoint/2010/main" val="34377473"/>
+        <p14:creationId xmlns:p14="http://schemas.microsoft.com/office/powerpoint/2010/main" val="1778626927"/>
       </p:ext>
     </p:extLst>
   </p:cSld>
@@ -6815,10 +7156,10 @@
       </p:grpSpPr>
       <p:sp>
         <p:nvSpPr>
-          <p:cNvPr id="12" name="slide-title">
-            <a:extLst xmlns:a="http://schemas.openxmlformats.org/drawingml/2006/main">
-              <a:ext uri="{FF2B5EF4-FFF2-40B4-BE49-F238E27FC236}">
-                <a16:creationId xmlns:a16="http://schemas.microsoft.com/office/drawing/2014/main" id="{D855478C-9140-450A-B77E-676742385FD6}"/>
+          <p:cNvPr id="14" name="slide-title">
+            <a:extLst xmlns:a="http://schemas.openxmlformats.org/drawingml/2006/main">
+              <a:ext uri="{FF2B5EF4-FFF2-40B4-BE49-F238E27FC236}">
+                <a16:creationId xmlns:a16="http://schemas.microsoft.com/office/drawing/2014/main" id="{2AC20660-0547-4947-9BF2-DB89AFB148E4}"/>
               </a:ext>
             </a:extLst>
           </p:cNvPr>
@@ -6869,7 +7210,7 @@
           <p:cNvPr id="2" name="status-dot-1">
             <a:extLst xmlns:a="http://schemas.openxmlformats.org/drawingml/2006/main">
               <a:ext uri="{FF2B5EF4-FFF2-40B4-BE49-F238E27FC236}">
-                <a16:creationId xmlns:a16="http://schemas.microsoft.com/office/drawing/2014/main" id="{A67807B5-836A-4048-BCD5-FD5541EB04B7}"/>
+                <a16:creationId xmlns:a16="http://schemas.microsoft.com/office/drawing/2014/main" id="{30A00A5D-B6C4-4F99-967E-87B52D0D653D}"/>
               </a:ext>
             </a:extLst>
           </p:cNvPr>
@@ -6902,7 +7243,7 @@
           <p:cNvPr id="3" name="status-label-1">
             <a:extLst xmlns:a="http://schemas.openxmlformats.org/drawingml/2006/main">
               <a:ext uri="{FF2B5EF4-FFF2-40B4-BE49-F238E27FC236}">
-                <a16:creationId xmlns:a16="http://schemas.microsoft.com/office/drawing/2014/main" id="{86BBF712-9D7A-4456-B41D-618A49F941B1}"/>
+                <a16:creationId xmlns:a16="http://schemas.microsoft.com/office/drawing/2014/main" id="{39FF7320-2DB2-4D3F-A00F-E8071272ED0D}"/>
               </a:ext>
             </a:extLst>
           </p:cNvPr>
@@ -6953,7 +7294,7 @@
           <p:cNvPr id="4" name="status-dot-2">
             <a:extLst xmlns:a="http://schemas.openxmlformats.org/drawingml/2006/main">
               <a:ext uri="{FF2B5EF4-FFF2-40B4-BE49-F238E27FC236}">
-                <a16:creationId xmlns:a16="http://schemas.microsoft.com/office/drawing/2014/main" id="{2977F3DB-8E37-4557-843F-87E583B52752}"/>
+                <a16:creationId xmlns:a16="http://schemas.microsoft.com/office/drawing/2014/main" id="{E70E750A-14DC-473F-BB6F-93E12AC15E59}"/>
               </a:ext>
             </a:extLst>
           </p:cNvPr>
@@ -6986,7 +7327,7 @@
           <p:cNvPr id="5" name="status-label-2">
             <a:extLst xmlns:a="http://schemas.openxmlformats.org/drawingml/2006/main">
               <a:ext uri="{FF2B5EF4-FFF2-40B4-BE49-F238E27FC236}">
-                <a16:creationId xmlns:a16="http://schemas.microsoft.com/office/drawing/2014/main" id="{8D39DF93-82D4-4B82-AE17-AA28AC4DE75F}"/>
+                <a16:creationId xmlns:a16="http://schemas.microsoft.com/office/drawing/2014/main" id="{257FE510-6D6D-42B3-B8F2-CF06093F74CE}"/>
               </a:ext>
             </a:extLst>
           </p:cNvPr>
@@ -7037,7 +7378,7 @@
           <p:cNvPr id="6" name="status-dot-3">
             <a:extLst xmlns:a="http://schemas.openxmlformats.org/drawingml/2006/main">
               <a:ext uri="{FF2B5EF4-FFF2-40B4-BE49-F238E27FC236}">
-                <a16:creationId xmlns:a16="http://schemas.microsoft.com/office/drawing/2014/main" id="{5BC0C7BD-A1FD-43A9-912D-7556B0A50EA0}"/>
+                <a16:creationId xmlns:a16="http://schemas.microsoft.com/office/drawing/2014/main" id="{163BCBA6-57F3-497F-B786-CE600EA075F5}"/>
               </a:ext>
             </a:extLst>
           </p:cNvPr>
@@ -7070,7 +7411,7 @@
           <p:cNvPr id="7" name="status-label-3">
             <a:extLst xmlns:a="http://schemas.openxmlformats.org/drawingml/2006/main">
               <a:ext uri="{FF2B5EF4-FFF2-40B4-BE49-F238E27FC236}">
-                <a16:creationId xmlns:a16="http://schemas.microsoft.com/office/drawing/2014/main" id="{C16F915A-89BC-4C5C-83AB-E4E60E2B12E1}"/>
+                <a16:creationId xmlns:a16="http://schemas.microsoft.com/office/drawing/2014/main" id="{393B3604-29B5-4AB7-A56A-2EBABDF52261}"/>
               </a:ext>
             </a:extLst>
           </p:cNvPr>
@@ -7121,7 +7462,7 @@
           <p:cNvPr id="8" name="eyebrow">
             <a:extLst xmlns:a="http://schemas.openxmlformats.org/drawingml/2006/main">
               <a:ext uri="{FF2B5EF4-FFF2-40B4-BE49-F238E27FC236}">
-                <a16:creationId xmlns:a16="http://schemas.microsoft.com/office/drawing/2014/main" id="{DEBC8B92-4B33-4170-A386-4709A657E897}"/>
+                <a16:creationId xmlns:a16="http://schemas.microsoft.com/office/drawing/2014/main" id="{AF1C0007-D93D-4B87-90A7-9084491B7FB4}"/>
               </a:ext>
             </a:extLst>
           </p:cNvPr>
@@ -7169,10 +7510,69 @@
       </p:sp>
       <p:sp>
         <p:nvSpPr>
-          <p:cNvPr id="9" name="footer-rule">
-            <a:extLst xmlns:a="http://schemas.openxmlformats.org/drawingml/2006/main">
-              <a:ext uri="{FF2B5EF4-FFF2-40B4-BE49-F238E27FC236}">
-                <a16:creationId xmlns:a16="http://schemas.microsoft.com/office/drawing/2014/main" id="{F1C3BD5B-FBAE-4E1C-907F-C723A4D5924D}"/>
+          <p:cNvPr id="9" name="rescue-point-logo-background">
+            <a:extLst xmlns:a="http://schemas.openxmlformats.org/drawingml/2006/main">
+              <a:ext uri="{FF2B5EF4-FFF2-40B4-BE49-F238E27FC236}">
+                <a16:creationId xmlns:a16="http://schemas.microsoft.com/office/drawing/2014/main" id="{84B2321F-4AEB-4153-B5C6-9975E507048E}"/>
+              </a:ext>
+            </a:extLst>
+          </p:cNvPr>
+          <p:cNvSpPr>
+            <a:spLocks xmlns:a="http://schemas.openxmlformats.org/drawingml/2006/main" noGrp="1"/>
+          </p:cNvSpPr>
+          <p:nvPr/>
+        </p:nvSpPr>
+        <p:spPr>
+          <a:xfrm xmlns:a="http://schemas.openxmlformats.org/drawingml/2006/main">
+            <a:off x="9772650" y="133350"/>
+            <a:ext cx="1733550" cy="457200"/>
+          </a:xfrm>
+          <a:prstGeom xmlns:a="http://schemas.openxmlformats.org/drawingml/2006/main" prst="roundRect">
+            <a:avLst>
+              <a:gd name="adj" fmla="val 16667"/>
+            </a:avLst>
+          </a:prstGeom>
+          <a:solidFill xmlns:a="http://schemas.openxmlformats.org/drawingml/2006/main">
+            <a:srgbClr val="06142E"/>
+          </a:solidFill>
+          <a:ln xmlns:a="http://schemas.openxmlformats.org/drawingml/2006/main" w="9525">
+            <a:solidFill>
+              <a:srgbClr val="1EC5FF">
+                <a:alpha val="33333"/>
+              </a:srgbClr>
+            </a:solidFill>
+            <a:prstDash val="solid"/>
+          </a:ln>
+        </p:spPr>
+      </p:sp>
+      <p:pic>
+        <p:nvPicPr>
+          <p:cNvPr id="25" name="" descr="Figura oficial da documentação dbt usada para explicar: Freshness responde se a fonte chegou — Recente."/>
+          <p:cNvPicPr>
+            <a:picLocks xmlns:a="http://schemas.openxmlformats.org/drawingml/2006/main" noChangeAspect="1"/>
+          </p:cNvPicPr>
+          <p:nvPr/>
+        </p:nvPicPr>
+        <p:blipFill>
+          <a:blip xmlns:r="http://schemas.openxmlformats.org/officeDocument/2006/relationships" xmlns:a="http://schemas.openxmlformats.org/drawingml/2006/main" r:embed="R55b71ac9b0cc4670"/>
+          <a:stretch xmlns:a="http://schemas.openxmlformats.org/drawingml/2006/main"/>
+        </p:blipFill>
+        <p:spPr>
+          <a:xfrm xmlns:a="http://schemas.openxmlformats.org/drawingml/2006/main">
+            <a:off x="9893718" y="209550"/>
+            <a:ext cx="1491414" cy="323850"/>
+          </a:xfrm>
+          <a:prstGeom xmlns:a="http://schemas.openxmlformats.org/drawingml/2006/main" prst="rect">
+            <a:avLst/>
+          </a:prstGeom>
+        </p:spPr>
+      </p:pic>
+      <p:sp>
+        <p:nvSpPr>
+          <p:cNvPr id="11" name="footer-rule">
+            <a:extLst xmlns:a="http://schemas.openxmlformats.org/drawingml/2006/main">
+              <a:ext uri="{FF2B5EF4-FFF2-40B4-BE49-F238E27FC236}">
+                <a16:creationId xmlns:a16="http://schemas.microsoft.com/office/drawing/2014/main" id="{BDE0855F-DBFE-4CE3-B240-EFB95FA1BD2D}"/>
               </a:ext>
             </a:extLst>
           </p:cNvPr>
@@ -7202,10 +7602,10 @@
       </p:sp>
       <p:sp>
         <p:nvSpPr>
-          <p:cNvPr id="10" name="footer">
-            <a:extLst xmlns:a="http://schemas.openxmlformats.org/drawingml/2006/main">
-              <a:ext uri="{FF2B5EF4-FFF2-40B4-BE49-F238E27FC236}">
-                <a16:creationId xmlns:a16="http://schemas.microsoft.com/office/drawing/2014/main" id="{0CCDA829-5ACC-4453-81DE-7C98A377F0D2}"/>
+          <p:cNvPr id="12" name="footer">
+            <a:extLst xmlns:a="http://schemas.openxmlformats.org/drawingml/2006/main">
+              <a:ext uri="{FF2B5EF4-FFF2-40B4-BE49-F238E27FC236}">
+                <a16:creationId xmlns:a16="http://schemas.microsoft.com/office/drawing/2014/main" id="{828A6117-3E18-4E3A-A9ED-27414866FB0A}"/>
               </a:ext>
             </a:extLst>
           </p:cNvPr>
@@ -7257,10 +7657,10 @@
       </p:sp>
       <p:sp>
         <p:nvSpPr>
-          <p:cNvPr id="11" name="page-number">
-            <a:extLst xmlns:a="http://schemas.openxmlformats.org/drawingml/2006/main">
-              <a:ext uri="{FF2B5EF4-FFF2-40B4-BE49-F238E27FC236}">
-                <a16:creationId xmlns:a16="http://schemas.microsoft.com/office/drawing/2014/main" id="{45C05155-D1D8-499E-8546-55AF69DF2812}"/>
+          <p:cNvPr id="13" name="page-number">
+            <a:extLst xmlns:a="http://schemas.openxmlformats.org/drawingml/2006/main">
+              <a:ext uri="{FF2B5EF4-FFF2-40B4-BE49-F238E27FC236}">
+                <a16:creationId xmlns:a16="http://schemas.microsoft.com/office/drawing/2014/main" id="{7399A4D8-09DB-41F6-AB42-4ED9ED7F3B44}"/>
               </a:ext>
             </a:extLst>
           </p:cNvPr>
@@ -7313,7 +7713,7 @@
     </p:spTree>
     <p:extLst>
       <p:ext uri="{BB962C8B-B14F-4D97-AF65-F5344CB8AC3E}">
-        <p14:creationId xmlns:p14="http://schemas.microsoft.com/office/powerpoint/2010/main" val="1077411632"/>
+        <p14:creationId xmlns:p14="http://schemas.microsoft.com/office/powerpoint/2010/main" val="996030362"/>
       </p:ext>
     </p:extLst>
   </p:cSld>
@@ -7349,10 +7749,10 @@
       </p:grpSpPr>
       <p:sp>
         <p:nvSpPr>
-          <p:cNvPr id="9" name="slide-title">
-            <a:extLst xmlns:a="http://schemas.openxmlformats.org/drawingml/2006/main">
-              <a:ext uri="{FF2B5EF4-FFF2-40B4-BE49-F238E27FC236}">
-                <a16:creationId xmlns:a16="http://schemas.microsoft.com/office/drawing/2014/main" id="{46BF1347-10A4-4714-9492-65009D8BCBD0}"/>
+          <p:cNvPr id="11" name="slide-title">
+            <a:extLst xmlns:a="http://schemas.openxmlformats.org/drawingml/2006/main">
+              <a:ext uri="{FF2B5EF4-FFF2-40B4-BE49-F238E27FC236}">
+                <a16:creationId xmlns:a16="http://schemas.microsoft.com/office/drawing/2014/main" id="{22015833-43FC-4179-8DDB-2ECD1336CAED}"/>
               </a:ext>
             </a:extLst>
           </p:cNvPr>
@@ -7403,7 +7803,7 @@
           <p:cNvPr id="2" name="code-surface">
             <a:extLst xmlns:a="http://schemas.openxmlformats.org/drawingml/2006/main">
               <a:ext uri="{FF2B5EF4-FFF2-40B4-BE49-F238E27FC236}">
-                <a16:creationId xmlns:a16="http://schemas.microsoft.com/office/drawing/2014/main" id="{FF7AF34C-E703-4035-93BC-B8432052B802}"/>
+                <a16:creationId xmlns:a16="http://schemas.microsoft.com/office/drawing/2014/main" id="{5EBA3901-201E-473F-8269-6D253D8FC460}"/>
               </a:ext>
             </a:extLst>
           </p:cNvPr>
@@ -7438,7 +7838,7 @@
           <p:cNvPr id="3" name="command">
             <a:extLst xmlns:a="http://schemas.openxmlformats.org/drawingml/2006/main">
               <a:ext uri="{FF2B5EF4-FFF2-40B4-BE49-F238E27FC236}">
-                <a16:creationId xmlns:a16="http://schemas.microsoft.com/office/drawing/2014/main" id="{9EEF474C-0D2F-4B04-B13A-796D25E902D4}"/>
+                <a16:creationId xmlns:a16="http://schemas.microsoft.com/office/drawing/2014/main" id="{B0CB6216-1679-4520-BE27-525F9E2E9CE0}"/>
               </a:ext>
             </a:extLst>
           </p:cNvPr>
@@ -7489,7 +7889,7 @@
           <p:cNvPr id="4" name="command-help">
             <a:extLst xmlns:a="http://schemas.openxmlformats.org/drawingml/2006/main">
               <a:ext uri="{FF2B5EF4-FFF2-40B4-BE49-F238E27FC236}">
-                <a16:creationId xmlns:a16="http://schemas.microsoft.com/office/drawing/2014/main" id="{C654BF16-43D6-44CC-B853-370B6E3D8373}"/>
+                <a16:creationId xmlns:a16="http://schemas.microsoft.com/office/drawing/2014/main" id="{55C5EC51-68D1-4C4A-AF99-FE752E94FD1A}"/>
               </a:ext>
             </a:extLst>
           </p:cNvPr>
@@ -7540,7 +7940,7 @@
           <p:cNvPr id="5" name="eyebrow">
             <a:extLst xmlns:a="http://schemas.openxmlformats.org/drawingml/2006/main">
               <a:ext uri="{FF2B5EF4-FFF2-40B4-BE49-F238E27FC236}">
-                <a16:creationId xmlns:a16="http://schemas.microsoft.com/office/drawing/2014/main" id="{E3CDE4A1-53E5-4E69-BCD3-1207C3476CBA}"/>
+                <a16:creationId xmlns:a16="http://schemas.microsoft.com/office/drawing/2014/main" id="{A2D3619A-3807-4D9D-B7B2-C1464A626D91}"/>
               </a:ext>
             </a:extLst>
           </p:cNvPr>
@@ -7588,10 +7988,69 @@
       </p:sp>
       <p:sp>
         <p:nvSpPr>
-          <p:cNvPr id="6" name="footer-rule">
-            <a:extLst xmlns:a="http://schemas.openxmlformats.org/drawingml/2006/main">
-              <a:ext uri="{FF2B5EF4-FFF2-40B4-BE49-F238E27FC236}">
-                <a16:creationId xmlns:a16="http://schemas.microsoft.com/office/drawing/2014/main" id="{1CBFCB02-4202-4711-B83E-1B5C0EDCB1AE}"/>
+          <p:cNvPr id="6" name="rescue-point-logo-background">
+            <a:extLst xmlns:a="http://schemas.openxmlformats.org/drawingml/2006/main">
+              <a:ext uri="{FF2B5EF4-FFF2-40B4-BE49-F238E27FC236}">
+                <a16:creationId xmlns:a16="http://schemas.microsoft.com/office/drawing/2014/main" id="{0E647982-3D1A-4308-A879-5405E4D1321B}"/>
+              </a:ext>
+            </a:extLst>
+          </p:cNvPr>
+          <p:cNvSpPr>
+            <a:spLocks xmlns:a="http://schemas.openxmlformats.org/drawingml/2006/main" noGrp="1"/>
+          </p:cNvSpPr>
+          <p:nvPr/>
+        </p:nvSpPr>
+        <p:spPr>
+          <a:xfrm xmlns:a="http://schemas.openxmlformats.org/drawingml/2006/main">
+            <a:off x="9772650" y="133350"/>
+            <a:ext cx="1733550" cy="457200"/>
+          </a:xfrm>
+          <a:prstGeom xmlns:a="http://schemas.openxmlformats.org/drawingml/2006/main" prst="roundRect">
+            <a:avLst>
+              <a:gd name="adj" fmla="val 16667"/>
+            </a:avLst>
+          </a:prstGeom>
+          <a:solidFill xmlns:a="http://schemas.openxmlformats.org/drawingml/2006/main">
+            <a:srgbClr val="06142E"/>
+          </a:solidFill>
+          <a:ln xmlns:a="http://schemas.openxmlformats.org/drawingml/2006/main" w="9525">
+            <a:solidFill>
+              <a:srgbClr val="1EC5FF">
+                <a:alpha val="33333"/>
+              </a:srgbClr>
+            </a:solidFill>
+            <a:prstDash val="solid"/>
+          </a:ln>
+        </p:spPr>
+      </p:sp>
+      <p:pic>
+        <p:nvPicPr>
+          <p:cNvPr id="19" name="" descr="Figura oficial da documentação dbt usada para explicar: Demonstração — execute — python course.py checkpoint 06."/>
+          <p:cNvPicPr>
+            <a:picLocks xmlns:a="http://schemas.openxmlformats.org/drawingml/2006/main" noChangeAspect="1"/>
+          </p:cNvPicPr>
+          <p:nvPr/>
+        </p:nvPicPr>
+        <p:blipFill>
+          <a:blip xmlns:r="http://schemas.openxmlformats.org/officeDocument/2006/relationships" xmlns:a="http://schemas.openxmlformats.org/drawingml/2006/main" r:embed="Rf174e842853245a8"/>
+          <a:stretch xmlns:a="http://schemas.openxmlformats.org/drawingml/2006/main"/>
+        </p:blipFill>
+        <p:spPr>
+          <a:xfrm xmlns:a="http://schemas.openxmlformats.org/drawingml/2006/main">
+            <a:off x="9893718" y="209550"/>
+            <a:ext cx="1491414" cy="323850"/>
+          </a:xfrm>
+          <a:prstGeom xmlns:a="http://schemas.openxmlformats.org/drawingml/2006/main" prst="rect">
+            <a:avLst/>
+          </a:prstGeom>
+        </p:spPr>
+      </p:pic>
+      <p:sp>
+        <p:nvSpPr>
+          <p:cNvPr id="8" name="footer-rule">
+            <a:extLst xmlns:a="http://schemas.openxmlformats.org/drawingml/2006/main">
+              <a:ext uri="{FF2B5EF4-FFF2-40B4-BE49-F238E27FC236}">
+                <a16:creationId xmlns:a16="http://schemas.microsoft.com/office/drawing/2014/main" id="{568283D6-2344-4BCE-9C31-32CBE31D728A}"/>
               </a:ext>
             </a:extLst>
           </p:cNvPr>
@@ -7621,10 +8080,10 @@
       </p:sp>
       <p:sp>
         <p:nvSpPr>
-          <p:cNvPr id="7" name="footer">
-            <a:extLst xmlns:a="http://schemas.openxmlformats.org/drawingml/2006/main">
-              <a:ext uri="{FF2B5EF4-FFF2-40B4-BE49-F238E27FC236}">
-                <a16:creationId xmlns:a16="http://schemas.microsoft.com/office/drawing/2014/main" id="{B3F7453C-9FC5-4441-817B-4E7083D501D6}"/>
+          <p:cNvPr id="9" name="footer">
+            <a:extLst xmlns:a="http://schemas.openxmlformats.org/drawingml/2006/main">
+              <a:ext uri="{FF2B5EF4-FFF2-40B4-BE49-F238E27FC236}">
+                <a16:creationId xmlns:a16="http://schemas.microsoft.com/office/drawing/2014/main" id="{C700CA65-77B6-4551-92CA-DF29DB9A5F3E}"/>
               </a:ext>
             </a:extLst>
           </p:cNvPr>
@@ -7676,10 +8135,10 @@
       </p:sp>
       <p:sp>
         <p:nvSpPr>
-          <p:cNvPr id="8" name="page-number">
-            <a:extLst xmlns:a="http://schemas.openxmlformats.org/drawingml/2006/main">
-              <a:ext uri="{FF2B5EF4-FFF2-40B4-BE49-F238E27FC236}">
-                <a16:creationId xmlns:a16="http://schemas.microsoft.com/office/drawing/2014/main" id="{04927316-6279-4118-A0B9-A4BB1DDB20E1}"/>
+          <p:cNvPr id="10" name="page-number">
+            <a:extLst xmlns:a="http://schemas.openxmlformats.org/drawingml/2006/main">
+              <a:ext uri="{FF2B5EF4-FFF2-40B4-BE49-F238E27FC236}">
+                <a16:creationId xmlns:a16="http://schemas.microsoft.com/office/drawing/2014/main" id="{4045E621-7E21-4C26-994E-3BA0D75FC9B7}"/>
               </a:ext>
             </a:extLst>
           </p:cNvPr>
@@ -7732,7 +8191,7 @@
     </p:spTree>
     <p:extLst>
       <p:ext uri="{BB962C8B-B14F-4D97-AF65-F5344CB8AC3E}">
-        <p14:creationId xmlns:p14="http://schemas.microsoft.com/office/powerpoint/2010/main" val="435660471"/>
+        <p14:creationId xmlns:p14="http://schemas.microsoft.com/office/powerpoint/2010/main" val="1521254935"/>
       </p:ext>
     </p:extLst>
   </p:cSld>
@@ -7760,10 +8219,10 @@
       </p:grpSpPr>
       <p:sp>
         <p:nvSpPr>
-          <p:cNvPr id="14" name="slide-title">
-            <a:extLst xmlns:a="http://schemas.openxmlformats.org/drawingml/2006/main">
-              <a:ext uri="{FF2B5EF4-FFF2-40B4-BE49-F238E27FC236}">
-                <a16:creationId xmlns:a16="http://schemas.microsoft.com/office/drawing/2014/main" id="{8EEF6182-4BDE-40D5-97A6-B751390B4FA2}"/>
+          <p:cNvPr id="16" name="slide-title">
+            <a:extLst xmlns:a="http://schemas.openxmlformats.org/drawingml/2006/main">
+              <a:ext uri="{FF2B5EF4-FFF2-40B4-BE49-F238E27FC236}">
+                <a16:creationId xmlns:a16="http://schemas.microsoft.com/office/drawing/2014/main" id="{80F584E3-A182-4E16-B9E3-8AA393B3C9BD}"/>
               </a:ext>
             </a:extLst>
           </p:cNvPr>
@@ -7814,7 +8273,7 @@
           <p:cNvPr id="2" name="step-num-1">
             <a:extLst xmlns:a="http://schemas.openxmlformats.org/drawingml/2006/main">
               <a:ext uri="{FF2B5EF4-FFF2-40B4-BE49-F238E27FC236}">
-                <a16:creationId xmlns:a16="http://schemas.microsoft.com/office/drawing/2014/main" id="{3104918C-6D07-4D5E-A3D1-84E3240A7974}"/>
+                <a16:creationId xmlns:a16="http://schemas.microsoft.com/office/drawing/2014/main" id="{56C6B02D-0578-4A2E-955E-06940386341D}"/>
               </a:ext>
             </a:extLst>
           </p:cNvPr>
@@ -7865,7 +8324,7 @@
           <p:cNvPr id="3" name="step-label-1">
             <a:extLst xmlns:a="http://schemas.openxmlformats.org/drawingml/2006/main">
               <a:ext uri="{FF2B5EF4-FFF2-40B4-BE49-F238E27FC236}">
-                <a16:creationId xmlns:a16="http://schemas.microsoft.com/office/drawing/2014/main" id="{18507F7A-05BE-4B6B-8DF6-F91F8D3762E2}"/>
+                <a16:creationId xmlns:a16="http://schemas.microsoft.com/office/drawing/2014/main" id="{C887E4B2-28CE-4160-868D-6ECD5877D517}"/>
               </a:ext>
             </a:extLst>
           </p:cNvPr>
@@ -7916,7 +8375,7 @@
           <p:cNvPr id="4" name="step-line-1">
             <a:extLst xmlns:a="http://schemas.openxmlformats.org/drawingml/2006/main">
               <a:ext uri="{FF2B5EF4-FFF2-40B4-BE49-F238E27FC236}">
-                <a16:creationId xmlns:a16="http://schemas.microsoft.com/office/drawing/2014/main" id="{F4608AA7-BF7D-4603-8DE7-88E5D0CA0FFB}"/>
+                <a16:creationId xmlns:a16="http://schemas.microsoft.com/office/drawing/2014/main" id="{7D960A44-4352-417D-85C7-DC3AE9C97C6F}"/>
               </a:ext>
             </a:extLst>
           </p:cNvPr>
@@ -7947,7 +8406,7 @@
           <p:cNvPr id="5" name="step-num-2">
             <a:extLst xmlns:a="http://schemas.openxmlformats.org/drawingml/2006/main">
               <a:ext uri="{FF2B5EF4-FFF2-40B4-BE49-F238E27FC236}">
-                <a16:creationId xmlns:a16="http://schemas.microsoft.com/office/drawing/2014/main" id="{4CC96C4A-AC05-4D67-AC44-AF06451AFD33}"/>
+                <a16:creationId xmlns:a16="http://schemas.microsoft.com/office/drawing/2014/main" id="{75534446-BD2B-4411-9CC0-1E33173202C0}"/>
               </a:ext>
             </a:extLst>
           </p:cNvPr>
@@ -7998,7 +8457,7 @@
           <p:cNvPr id="6" name="step-label-2">
             <a:extLst xmlns:a="http://schemas.openxmlformats.org/drawingml/2006/main">
               <a:ext uri="{FF2B5EF4-FFF2-40B4-BE49-F238E27FC236}">
-                <a16:creationId xmlns:a16="http://schemas.microsoft.com/office/drawing/2014/main" id="{1DAAE1C0-C760-46CC-B528-10AAF63F4B3C}"/>
+                <a16:creationId xmlns:a16="http://schemas.microsoft.com/office/drawing/2014/main" id="{DE0BB587-796D-4748-98F0-9F98C3C64CA1}"/>
               </a:ext>
             </a:extLst>
           </p:cNvPr>
@@ -8049,7 +8508,7 @@
           <p:cNvPr id="7" name="step-line-2">
             <a:extLst xmlns:a="http://schemas.openxmlformats.org/drawingml/2006/main">
               <a:ext uri="{FF2B5EF4-FFF2-40B4-BE49-F238E27FC236}">
-                <a16:creationId xmlns:a16="http://schemas.microsoft.com/office/drawing/2014/main" id="{39EA9345-986C-48BF-9469-B7943E959641}"/>
+                <a16:creationId xmlns:a16="http://schemas.microsoft.com/office/drawing/2014/main" id="{FAA76CB0-E4A9-4F42-B8EC-42380F713660}"/>
               </a:ext>
             </a:extLst>
           </p:cNvPr>
@@ -8080,7 +8539,7 @@
           <p:cNvPr id="8" name="step-num-3">
             <a:extLst xmlns:a="http://schemas.openxmlformats.org/drawingml/2006/main">
               <a:ext uri="{FF2B5EF4-FFF2-40B4-BE49-F238E27FC236}">
-                <a16:creationId xmlns:a16="http://schemas.microsoft.com/office/drawing/2014/main" id="{5F322792-E368-48F5-826F-A2FCADB70B3E}"/>
+                <a16:creationId xmlns:a16="http://schemas.microsoft.com/office/drawing/2014/main" id="{7BAEB24F-2F49-4EEF-BAC0-A63B3261C585}"/>
               </a:ext>
             </a:extLst>
           </p:cNvPr>
@@ -8131,7 +8590,7 @@
           <p:cNvPr id="9" name="step-label-3">
             <a:extLst xmlns:a="http://schemas.openxmlformats.org/drawingml/2006/main">
               <a:ext uri="{FF2B5EF4-FFF2-40B4-BE49-F238E27FC236}">
-                <a16:creationId xmlns:a16="http://schemas.microsoft.com/office/drawing/2014/main" id="{DC754918-F925-4BC0-A59D-16ACB4590116}"/>
+                <a16:creationId xmlns:a16="http://schemas.microsoft.com/office/drawing/2014/main" id="{59C409B8-F939-43C1-B258-1425AF837213}"/>
               </a:ext>
             </a:extLst>
           </p:cNvPr>
@@ -8182,7 +8641,7 @@
           <p:cNvPr id="10" name="eyebrow">
             <a:extLst xmlns:a="http://schemas.openxmlformats.org/drawingml/2006/main">
               <a:ext uri="{FF2B5EF4-FFF2-40B4-BE49-F238E27FC236}">
-                <a16:creationId xmlns:a16="http://schemas.microsoft.com/office/drawing/2014/main" id="{3E5780DF-E3B9-4349-B8AE-405927FA67BD}"/>
+                <a16:creationId xmlns:a16="http://schemas.microsoft.com/office/drawing/2014/main" id="{2CD4D2D9-4297-400B-AB65-317CA65D5ACA}"/>
               </a:ext>
             </a:extLst>
           </p:cNvPr>
@@ -8230,10 +8689,69 @@
       </p:sp>
       <p:sp>
         <p:nvSpPr>
-          <p:cNvPr id="11" name="footer-rule">
-            <a:extLst xmlns:a="http://schemas.openxmlformats.org/drawingml/2006/main">
-              <a:ext uri="{FF2B5EF4-FFF2-40B4-BE49-F238E27FC236}">
-                <a16:creationId xmlns:a16="http://schemas.microsoft.com/office/drawing/2014/main" id="{F8C84CCB-5526-47A9-AAEB-80D7EF25F441}"/>
+          <p:cNvPr id="11" name="rescue-point-logo-background">
+            <a:extLst xmlns:a="http://schemas.openxmlformats.org/drawingml/2006/main">
+              <a:ext uri="{FF2B5EF4-FFF2-40B4-BE49-F238E27FC236}">
+                <a16:creationId xmlns:a16="http://schemas.microsoft.com/office/drawing/2014/main" id="{07C4ADB2-1182-485F-9F47-2832D90A6AE8}"/>
+              </a:ext>
+            </a:extLst>
+          </p:cNvPr>
+          <p:cNvSpPr>
+            <a:spLocks xmlns:a="http://schemas.openxmlformats.org/drawingml/2006/main" noGrp="1"/>
+          </p:cNvSpPr>
+          <p:nvPr/>
+        </p:nvSpPr>
+        <p:spPr>
+          <a:xfrm xmlns:a="http://schemas.openxmlformats.org/drawingml/2006/main">
+            <a:off x="9772650" y="133350"/>
+            <a:ext cx="1733550" cy="457200"/>
+          </a:xfrm>
+          <a:prstGeom xmlns:a="http://schemas.openxmlformats.org/drawingml/2006/main" prst="roundRect">
+            <a:avLst>
+              <a:gd name="adj" fmla="val 16667"/>
+            </a:avLst>
+          </a:prstGeom>
+          <a:solidFill xmlns:a="http://schemas.openxmlformats.org/drawingml/2006/main">
+            <a:srgbClr val="06142E"/>
+          </a:solidFill>
+          <a:ln xmlns:a="http://schemas.openxmlformats.org/drawingml/2006/main" w="9525">
+            <a:solidFill>
+              <a:srgbClr val="1EC5FF">
+                <a:alpha val="33333"/>
+              </a:srgbClr>
+            </a:solidFill>
+            <a:prstDash val="solid"/>
+          </a:ln>
+        </p:spPr>
+      </p:sp>
+      <p:pic>
+        <p:nvPicPr>
+          <p:cNvPr id="29" name="" descr="Figura oficial da documentação dbt usada para explicar: Demonstração — observe — 01."/>
+          <p:cNvPicPr>
+            <a:picLocks xmlns:a="http://schemas.openxmlformats.org/drawingml/2006/main" noChangeAspect="1"/>
+          </p:cNvPicPr>
+          <p:nvPr/>
+        </p:nvPicPr>
+        <p:blipFill>
+          <a:blip xmlns:r="http://schemas.openxmlformats.org/officeDocument/2006/relationships" xmlns:a="http://schemas.openxmlformats.org/drawingml/2006/main" r:embed="Rdc88defd64884477"/>
+          <a:stretch xmlns:a="http://schemas.openxmlformats.org/drawingml/2006/main"/>
+        </p:blipFill>
+        <p:spPr>
+          <a:xfrm xmlns:a="http://schemas.openxmlformats.org/drawingml/2006/main">
+            <a:off x="9893718" y="209550"/>
+            <a:ext cx="1491414" cy="323850"/>
+          </a:xfrm>
+          <a:prstGeom xmlns:a="http://schemas.openxmlformats.org/drawingml/2006/main" prst="rect">
+            <a:avLst/>
+          </a:prstGeom>
+        </p:spPr>
+      </p:pic>
+      <p:sp>
+        <p:nvSpPr>
+          <p:cNvPr id="13" name="footer-rule">
+            <a:extLst xmlns:a="http://schemas.openxmlformats.org/drawingml/2006/main">
+              <a:ext uri="{FF2B5EF4-FFF2-40B4-BE49-F238E27FC236}">
+                <a16:creationId xmlns:a16="http://schemas.microsoft.com/office/drawing/2014/main" id="{D3A978B6-522C-4DF1-A2C6-48549C9C7621}"/>
               </a:ext>
             </a:extLst>
           </p:cNvPr>
@@ -8263,10 +8781,10 @@
       </p:sp>
       <p:sp>
         <p:nvSpPr>
-          <p:cNvPr id="12" name="footer">
-            <a:extLst xmlns:a="http://schemas.openxmlformats.org/drawingml/2006/main">
-              <a:ext uri="{FF2B5EF4-FFF2-40B4-BE49-F238E27FC236}">
-                <a16:creationId xmlns:a16="http://schemas.microsoft.com/office/drawing/2014/main" id="{481D41BA-A5CD-4322-862C-493E804E44DD}"/>
+          <p:cNvPr id="14" name="footer">
+            <a:extLst xmlns:a="http://schemas.openxmlformats.org/drawingml/2006/main">
+              <a:ext uri="{FF2B5EF4-FFF2-40B4-BE49-F238E27FC236}">
+                <a16:creationId xmlns:a16="http://schemas.microsoft.com/office/drawing/2014/main" id="{04675701-5589-4054-AF03-988B0E115276}"/>
               </a:ext>
             </a:extLst>
           </p:cNvPr>
@@ -8318,10 +8836,10 @@
       </p:sp>
       <p:sp>
         <p:nvSpPr>
-          <p:cNvPr id="13" name="page-number">
-            <a:extLst xmlns:a="http://schemas.openxmlformats.org/drawingml/2006/main">
-              <a:ext uri="{FF2B5EF4-FFF2-40B4-BE49-F238E27FC236}">
-                <a16:creationId xmlns:a16="http://schemas.microsoft.com/office/drawing/2014/main" id="{AB59D83C-F890-4C69-A75A-5CECFC75BA64}"/>
+          <p:cNvPr id="15" name="page-number">
+            <a:extLst xmlns:a="http://schemas.openxmlformats.org/drawingml/2006/main">
+              <a:ext uri="{FF2B5EF4-FFF2-40B4-BE49-F238E27FC236}">
+                <a16:creationId xmlns:a16="http://schemas.microsoft.com/office/drawing/2014/main" id="{945128EA-CC87-489A-AB1C-B19C028C2AF5}"/>
               </a:ext>
             </a:extLst>
           </p:cNvPr>
@@ -8374,7 +8892,7 @@
     </p:spTree>
     <p:extLst>
       <p:ext uri="{BB962C8B-B14F-4D97-AF65-F5344CB8AC3E}">
-        <p14:creationId xmlns:p14="http://schemas.microsoft.com/office/powerpoint/2010/main" val="1644749686"/>
+        <p14:creationId xmlns:p14="http://schemas.microsoft.com/office/powerpoint/2010/main" val="125201100"/>
       </p:ext>
     </p:extLst>
   </p:cSld>
@@ -8410,10 +8928,10 @@
       </p:grpSpPr>
       <p:sp>
         <p:nvSpPr>
-          <p:cNvPr id="10" name="result-label">
-            <a:extLst xmlns:a="http://schemas.openxmlformats.org/drawingml/2006/main">
-              <a:ext uri="{FF2B5EF4-FFF2-40B4-BE49-F238E27FC236}">
-                <a16:creationId xmlns:a16="http://schemas.microsoft.com/office/drawing/2014/main" id="{F2387D1A-477D-4B20-A6B5-CEABD2659E83}"/>
+          <p:cNvPr id="12" name="result-label">
+            <a:extLst xmlns:a="http://schemas.openxmlformats.org/drawingml/2006/main">
+              <a:ext uri="{FF2B5EF4-FFF2-40B4-BE49-F238E27FC236}">
+                <a16:creationId xmlns:a16="http://schemas.microsoft.com/office/drawing/2014/main" id="{68E2EFE0-B47B-4EFF-9F5B-0BA1D1B74C51}"/>
               </a:ext>
             </a:extLst>
           </p:cNvPr>
@@ -8464,7 +8982,7 @@
           <p:cNvPr id="2" name="result">
             <a:extLst xmlns:a="http://schemas.openxmlformats.org/drawingml/2006/main">
               <a:ext uri="{FF2B5EF4-FFF2-40B4-BE49-F238E27FC236}">
-                <a16:creationId xmlns:a16="http://schemas.microsoft.com/office/drawing/2014/main" id="{2FE6C647-9B2B-4B16-B4A6-0BDA8EEFEF7A}"/>
+                <a16:creationId xmlns:a16="http://schemas.microsoft.com/office/drawing/2014/main" id="{F69774BC-8D57-4D5C-9C48-4735A5110906}"/>
               </a:ext>
             </a:extLst>
           </p:cNvPr>
@@ -8515,7 +9033,7 @@
           <p:cNvPr id="3" name="result-meta">
             <a:extLst xmlns:a="http://schemas.openxmlformats.org/drawingml/2006/main">
               <a:ext uri="{FF2B5EF4-FFF2-40B4-BE49-F238E27FC236}">
-                <a16:creationId xmlns:a16="http://schemas.microsoft.com/office/drawing/2014/main" id="{1BA7BD40-855F-415A-A2F3-2A3DDD8757F2}"/>
+                <a16:creationId xmlns:a16="http://schemas.microsoft.com/office/drawing/2014/main" id="{B85AB5D3-2CDE-4AD2-B8FC-0F4C5E5721D2}"/>
               </a:ext>
             </a:extLst>
           </p:cNvPr>
@@ -8566,7 +9084,7 @@
           <p:cNvPr id="4" name="ambient-glow">
             <a:extLst xmlns:a="http://schemas.openxmlformats.org/drawingml/2006/main">
               <a:ext uri="{FF2B5EF4-FFF2-40B4-BE49-F238E27FC236}">
-                <a16:creationId xmlns:a16="http://schemas.microsoft.com/office/drawing/2014/main" id="{254481EB-5DC8-458F-959F-EA86F89CD477}"/>
+                <a16:creationId xmlns:a16="http://schemas.microsoft.com/office/drawing/2014/main" id="{C39A113A-F71F-4B20-BC38-831515CF2C59}"/>
               </a:ext>
             </a:extLst>
           </p:cNvPr>
@@ -8603,7 +9121,7 @@
           <p:cNvPr id="5" name="ambient-core">
             <a:extLst xmlns:a="http://schemas.openxmlformats.org/drawingml/2006/main">
               <a:ext uri="{FF2B5EF4-FFF2-40B4-BE49-F238E27FC236}">
-                <a16:creationId xmlns:a16="http://schemas.microsoft.com/office/drawing/2014/main" id="{48F4A3F8-59A0-421D-8B28-6D4D38163FDF}"/>
+                <a16:creationId xmlns:a16="http://schemas.microsoft.com/office/drawing/2014/main" id="{6A3B89BC-B059-4BBD-A915-2BEF5FA99FE2}"/>
               </a:ext>
             </a:extLst>
           </p:cNvPr>
@@ -8640,7 +9158,7 @@
           <p:cNvPr id="6" name="eyebrow">
             <a:extLst xmlns:a="http://schemas.openxmlformats.org/drawingml/2006/main">
               <a:ext uri="{FF2B5EF4-FFF2-40B4-BE49-F238E27FC236}">
-                <a16:creationId xmlns:a16="http://schemas.microsoft.com/office/drawing/2014/main" id="{E2B17EC7-61DE-4F9F-8174-229BCB3084EF}"/>
+                <a16:creationId xmlns:a16="http://schemas.microsoft.com/office/drawing/2014/main" id="{CB5602BD-F6C7-42FD-B776-5BB9AAC3DF8C}"/>
               </a:ext>
             </a:extLst>
           </p:cNvPr>
@@ -8688,10 +9206,69 @@
       </p:sp>
       <p:sp>
         <p:nvSpPr>
-          <p:cNvPr id="7" name="footer-rule">
-            <a:extLst xmlns:a="http://schemas.openxmlformats.org/drawingml/2006/main">
-              <a:ext uri="{FF2B5EF4-FFF2-40B4-BE49-F238E27FC236}">
-                <a16:creationId xmlns:a16="http://schemas.microsoft.com/office/drawing/2014/main" id="{EFD42E20-2349-4DC8-BEE2-DD7BD1978852}"/>
+          <p:cNvPr id="7" name="rescue-point-logo-background">
+            <a:extLst xmlns:a="http://schemas.openxmlformats.org/drawingml/2006/main">
+              <a:ext uri="{FF2B5EF4-FFF2-40B4-BE49-F238E27FC236}">
+                <a16:creationId xmlns:a16="http://schemas.microsoft.com/office/drawing/2014/main" id="{DDBD9CE7-5862-416E-8D52-F72302E0A2DD}"/>
+              </a:ext>
+            </a:extLst>
+          </p:cNvPr>
+          <p:cNvSpPr>
+            <a:spLocks xmlns:a="http://schemas.openxmlformats.org/drawingml/2006/main" noGrp="1"/>
+          </p:cNvSpPr>
+          <p:nvPr/>
+        </p:nvSpPr>
+        <p:spPr>
+          <a:xfrm xmlns:a="http://schemas.openxmlformats.org/drawingml/2006/main">
+            <a:off x="9772650" y="133350"/>
+            <a:ext cx="1733550" cy="457200"/>
+          </a:xfrm>
+          <a:prstGeom xmlns:a="http://schemas.openxmlformats.org/drawingml/2006/main" prst="roundRect">
+            <a:avLst>
+              <a:gd name="adj" fmla="val 16667"/>
+            </a:avLst>
+          </a:prstGeom>
+          <a:solidFill xmlns:a="http://schemas.openxmlformats.org/drawingml/2006/main">
+            <a:srgbClr val="06142E"/>
+          </a:solidFill>
+          <a:ln xmlns:a="http://schemas.openxmlformats.org/drawingml/2006/main" w="9525">
+            <a:solidFill>
+              <a:srgbClr val="1EC5FF">
+                <a:alpha val="33333"/>
+              </a:srgbClr>
+            </a:solidFill>
+            <a:prstDash val="solid"/>
+          </a:ln>
+        </p:spPr>
+      </p:sp>
+      <p:pic>
+        <p:nvPicPr>
+          <p:cNvPr id="21" name="" descr="Figura oficial da documentação dbt usada para explicar: RESULTADO ESPERADO — 45 PASS · 1 NO-OP · 0 erros."/>
+          <p:cNvPicPr>
+            <a:picLocks xmlns:a="http://schemas.openxmlformats.org/drawingml/2006/main" noChangeAspect="1"/>
+          </p:cNvPicPr>
+          <p:nvPr/>
+        </p:nvPicPr>
+        <p:blipFill>
+          <a:blip xmlns:r="http://schemas.openxmlformats.org/officeDocument/2006/relationships" xmlns:a="http://schemas.openxmlformats.org/drawingml/2006/main" r:embed="R29ed2176919e4369"/>
+          <a:stretch xmlns:a="http://schemas.openxmlformats.org/drawingml/2006/main"/>
+        </p:blipFill>
+        <p:spPr>
+          <a:xfrm xmlns:a="http://schemas.openxmlformats.org/drawingml/2006/main">
+            <a:off x="9893718" y="209550"/>
+            <a:ext cx="1491414" cy="323850"/>
+          </a:xfrm>
+          <a:prstGeom xmlns:a="http://schemas.openxmlformats.org/drawingml/2006/main" prst="rect">
+            <a:avLst/>
+          </a:prstGeom>
+        </p:spPr>
+      </p:pic>
+      <p:sp>
+        <p:nvSpPr>
+          <p:cNvPr id="9" name="footer-rule">
+            <a:extLst xmlns:a="http://schemas.openxmlformats.org/drawingml/2006/main">
+              <a:ext uri="{FF2B5EF4-FFF2-40B4-BE49-F238E27FC236}">
+                <a16:creationId xmlns:a16="http://schemas.microsoft.com/office/drawing/2014/main" id="{34BF1E03-7634-4208-9143-7173DEBEF50C}"/>
               </a:ext>
             </a:extLst>
           </p:cNvPr>
@@ -8721,10 +9298,10 @@
       </p:sp>
       <p:sp>
         <p:nvSpPr>
-          <p:cNvPr id="8" name="footer">
-            <a:extLst xmlns:a="http://schemas.openxmlformats.org/drawingml/2006/main">
-              <a:ext uri="{FF2B5EF4-FFF2-40B4-BE49-F238E27FC236}">
-                <a16:creationId xmlns:a16="http://schemas.microsoft.com/office/drawing/2014/main" id="{1CBEE74A-791E-41B8-92F6-489F8C75ABF9}"/>
+          <p:cNvPr id="10" name="footer">
+            <a:extLst xmlns:a="http://schemas.openxmlformats.org/drawingml/2006/main">
+              <a:ext uri="{FF2B5EF4-FFF2-40B4-BE49-F238E27FC236}">
+                <a16:creationId xmlns:a16="http://schemas.microsoft.com/office/drawing/2014/main" id="{FDC910DB-CEDA-4721-A126-422E16175907}"/>
               </a:ext>
             </a:extLst>
           </p:cNvPr>
@@ -8776,10 +9353,10 @@
       </p:sp>
       <p:sp>
         <p:nvSpPr>
-          <p:cNvPr id="9" name="page-number">
-            <a:extLst xmlns:a="http://schemas.openxmlformats.org/drawingml/2006/main">
-              <a:ext uri="{FF2B5EF4-FFF2-40B4-BE49-F238E27FC236}">
-                <a16:creationId xmlns:a16="http://schemas.microsoft.com/office/drawing/2014/main" id="{0F2A0D80-D3E4-4AD7-98D1-17AE588BFEEE}"/>
+          <p:cNvPr id="11" name="page-number">
+            <a:extLst xmlns:a="http://schemas.openxmlformats.org/drawingml/2006/main">
+              <a:ext uri="{FF2B5EF4-FFF2-40B4-BE49-F238E27FC236}">
+                <a16:creationId xmlns:a16="http://schemas.microsoft.com/office/drawing/2014/main" id="{219C9E14-475C-4F66-920C-549DC6328F35}"/>
               </a:ext>
             </a:extLst>
           </p:cNvPr>
@@ -8832,7 +9409,7 @@
     </p:spTree>
     <p:extLst>
       <p:ext uri="{BB962C8B-B14F-4D97-AF65-F5344CB8AC3E}">
-        <p14:creationId xmlns:p14="http://schemas.microsoft.com/office/powerpoint/2010/main" val="2004831256"/>
+        <p14:creationId xmlns:p14="http://schemas.microsoft.com/office/powerpoint/2010/main" val="1444898070"/>
       </p:ext>
     </p:extLst>
   </p:cSld>
@@ -8860,10 +9437,10 @@
       </p:grpSpPr>
       <p:sp>
         <p:nvSpPr>
-          <p:cNvPr id="14" name="slide-title">
-            <a:extLst xmlns:a="http://schemas.openxmlformats.org/drawingml/2006/main">
-              <a:ext uri="{FF2B5EF4-FFF2-40B4-BE49-F238E27FC236}">
-                <a16:creationId xmlns:a16="http://schemas.microsoft.com/office/drawing/2014/main" id="{0B2BAE2B-AAB5-4E23-B955-80C83597B02D}"/>
+          <p:cNvPr id="16" name="slide-title">
+            <a:extLst xmlns:a="http://schemas.openxmlformats.org/drawingml/2006/main">
+              <a:ext uri="{FF2B5EF4-FFF2-40B4-BE49-F238E27FC236}">
+                <a16:creationId xmlns:a16="http://schemas.microsoft.com/office/drawing/2014/main" id="{682C6A07-9649-4B06-9714-49BB5CF59045}"/>
               </a:ext>
             </a:extLst>
           </p:cNvPr>
@@ -8914,7 +9491,7 @@
           <p:cNvPr id="2" name="step-num-1">
             <a:extLst xmlns:a="http://schemas.openxmlformats.org/drawingml/2006/main">
               <a:ext uri="{FF2B5EF4-FFF2-40B4-BE49-F238E27FC236}">
-                <a16:creationId xmlns:a16="http://schemas.microsoft.com/office/drawing/2014/main" id="{0DF90B4C-61FE-4352-8683-44DB9ABA1614}"/>
+                <a16:creationId xmlns:a16="http://schemas.microsoft.com/office/drawing/2014/main" id="{40E4FE38-E058-4A37-98E3-2E198CFDAAC0}"/>
               </a:ext>
             </a:extLst>
           </p:cNvPr>
@@ -8965,7 +9542,7 @@
           <p:cNvPr id="3" name="step-label-1">
             <a:extLst xmlns:a="http://schemas.openxmlformats.org/drawingml/2006/main">
               <a:ext uri="{FF2B5EF4-FFF2-40B4-BE49-F238E27FC236}">
-                <a16:creationId xmlns:a16="http://schemas.microsoft.com/office/drawing/2014/main" id="{A7FD8211-CFFE-45D0-8D4E-3A72ABBA993D}"/>
+                <a16:creationId xmlns:a16="http://schemas.microsoft.com/office/drawing/2014/main" id="{7A6B2759-FF0A-4175-A9FF-859189E5F034}"/>
               </a:ext>
             </a:extLst>
           </p:cNvPr>
@@ -9016,7 +9593,7 @@
           <p:cNvPr id="4" name="step-line-1">
             <a:extLst xmlns:a="http://schemas.openxmlformats.org/drawingml/2006/main">
               <a:ext uri="{FF2B5EF4-FFF2-40B4-BE49-F238E27FC236}">
-                <a16:creationId xmlns:a16="http://schemas.microsoft.com/office/drawing/2014/main" id="{C6EFD58E-553A-411A-BC65-176896DCA289}"/>
+                <a16:creationId xmlns:a16="http://schemas.microsoft.com/office/drawing/2014/main" id="{9C13DAC5-9EA3-4BFD-BC88-AEEB5C5EB686}"/>
               </a:ext>
             </a:extLst>
           </p:cNvPr>
@@ -9047,7 +9624,7 @@
           <p:cNvPr id="5" name="step-num-2">
             <a:extLst xmlns:a="http://schemas.openxmlformats.org/drawingml/2006/main">
               <a:ext uri="{FF2B5EF4-FFF2-40B4-BE49-F238E27FC236}">
-                <a16:creationId xmlns:a16="http://schemas.microsoft.com/office/drawing/2014/main" id="{7C688F80-2BC6-4619-A237-01533EABF498}"/>
+                <a16:creationId xmlns:a16="http://schemas.microsoft.com/office/drawing/2014/main" id="{ACA17E39-E8D2-4162-8D85-9721E41A3FA7}"/>
               </a:ext>
             </a:extLst>
           </p:cNvPr>
@@ -9098,7 +9675,7 @@
           <p:cNvPr id="6" name="step-label-2">
             <a:extLst xmlns:a="http://schemas.openxmlformats.org/drawingml/2006/main">
               <a:ext uri="{FF2B5EF4-FFF2-40B4-BE49-F238E27FC236}">
-                <a16:creationId xmlns:a16="http://schemas.microsoft.com/office/drawing/2014/main" id="{24888481-00AF-4609-B8E1-440C4F60F1E1}"/>
+                <a16:creationId xmlns:a16="http://schemas.microsoft.com/office/drawing/2014/main" id="{1BE9700C-E15F-4090-97E2-3714444A68C1}"/>
               </a:ext>
             </a:extLst>
           </p:cNvPr>
@@ -9149,7 +9726,7 @@
           <p:cNvPr id="7" name="step-line-2">
             <a:extLst xmlns:a="http://schemas.openxmlformats.org/drawingml/2006/main">
               <a:ext uri="{FF2B5EF4-FFF2-40B4-BE49-F238E27FC236}">
-                <a16:creationId xmlns:a16="http://schemas.microsoft.com/office/drawing/2014/main" id="{707072F2-29A7-45A3-885D-999C06C2FCC4}"/>
+                <a16:creationId xmlns:a16="http://schemas.microsoft.com/office/drawing/2014/main" id="{BA9DF986-0637-4D61-8779-10FE480D3BA3}"/>
               </a:ext>
             </a:extLst>
           </p:cNvPr>
@@ -9180,7 +9757,7 @@
           <p:cNvPr id="8" name="step-num-3">
             <a:extLst xmlns:a="http://schemas.openxmlformats.org/drawingml/2006/main">
               <a:ext uri="{FF2B5EF4-FFF2-40B4-BE49-F238E27FC236}">
-                <a16:creationId xmlns:a16="http://schemas.microsoft.com/office/drawing/2014/main" id="{BBEF2983-9145-4662-8639-9270231C88D4}"/>
+                <a16:creationId xmlns:a16="http://schemas.microsoft.com/office/drawing/2014/main" id="{6A8FDD6E-FEED-438C-A1A0-EB74B621FB62}"/>
               </a:ext>
             </a:extLst>
           </p:cNvPr>
@@ -9231,7 +9808,7 @@
           <p:cNvPr id="9" name="step-label-3">
             <a:extLst xmlns:a="http://schemas.openxmlformats.org/drawingml/2006/main">
               <a:ext uri="{FF2B5EF4-FFF2-40B4-BE49-F238E27FC236}">
-                <a16:creationId xmlns:a16="http://schemas.microsoft.com/office/drawing/2014/main" id="{781BE527-06CC-45A5-ABCA-8AC706F5D57B}"/>
+                <a16:creationId xmlns:a16="http://schemas.microsoft.com/office/drawing/2014/main" id="{B8A3498C-22AF-497E-B2EB-84BF25D5AC73}"/>
               </a:ext>
             </a:extLst>
           </p:cNvPr>
@@ -9282,7 +9859,7 @@
           <p:cNvPr id="10" name="eyebrow">
             <a:extLst xmlns:a="http://schemas.openxmlformats.org/drawingml/2006/main">
               <a:ext uri="{FF2B5EF4-FFF2-40B4-BE49-F238E27FC236}">
-                <a16:creationId xmlns:a16="http://schemas.microsoft.com/office/drawing/2014/main" id="{B3D1D5BB-2144-4A26-9200-423DB394CEB9}"/>
+                <a16:creationId xmlns:a16="http://schemas.microsoft.com/office/drawing/2014/main" id="{793F43F9-AFA9-49DC-8BAD-48BC5AD52E4F}"/>
               </a:ext>
             </a:extLst>
           </p:cNvPr>
@@ -9330,10 +9907,69 @@
       </p:sp>
       <p:sp>
         <p:nvSpPr>
-          <p:cNvPr id="11" name="footer-rule">
-            <a:extLst xmlns:a="http://schemas.openxmlformats.org/drawingml/2006/main">
-              <a:ext uri="{FF2B5EF4-FFF2-40B4-BE49-F238E27FC236}">
-                <a16:creationId xmlns:a16="http://schemas.microsoft.com/office/drawing/2014/main" id="{6B415C31-3525-40C0-9A85-72318232B2A0}"/>
+          <p:cNvPr id="11" name="rescue-point-logo-background">
+            <a:extLst xmlns:a="http://schemas.openxmlformats.org/drawingml/2006/main">
+              <a:ext uri="{FF2B5EF4-FFF2-40B4-BE49-F238E27FC236}">
+                <a16:creationId xmlns:a16="http://schemas.microsoft.com/office/drawing/2014/main" id="{D57C05C6-5A20-4CDE-8C6D-3948576E1BFF}"/>
+              </a:ext>
+            </a:extLst>
+          </p:cNvPr>
+          <p:cNvSpPr>
+            <a:spLocks xmlns:a="http://schemas.openxmlformats.org/drawingml/2006/main" noGrp="1"/>
+          </p:cNvSpPr>
+          <p:nvPr/>
+        </p:nvSpPr>
+        <p:spPr>
+          <a:xfrm xmlns:a="http://schemas.openxmlformats.org/drawingml/2006/main">
+            <a:off x="9772650" y="133350"/>
+            <a:ext cx="1733550" cy="457200"/>
+          </a:xfrm>
+          <a:prstGeom xmlns:a="http://schemas.openxmlformats.org/drawingml/2006/main" prst="roundRect">
+            <a:avLst>
+              <a:gd name="adj" fmla="val 16667"/>
+            </a:avLst>
+          </a:prstGeom>
+          <a:solidFill xmlns:a="http://schemas.openxmlformats.org/drawingml/2006/main">
+            <a:srgbClr val="06142E"/>
+          </a:solidFill>
+          <a:ln xmlns:a="http://schemas.openxmlformats.org/drawingml/2006/main" w="9525">
+            <a:solidFill>
+              <a:srgbClr val="1EC5FF">
+                <a:alpha val="33333"/>
+              </a:srgbClr>
+            </a:solidFill>
+            <a:prstDash val="solid"/>
+          </a:ln>
+        </p:spPr>
+      </p:sp>
+      <p:pic>
+        <p:nvPicPr>
+          <p:cNvPr id="29" name="" descr="Figura oficial da documentação dbt usada para explicar: O mesmo recurso afeta três decisões — 01."/>
+          <p:cNvPicPr>
+            <a:picLocks xmlns:a="http://schemas.openxmlformats.org/drawingml/2006/main" noChangeAspect="1"/>
+          </p:cNvPicPr>
+          <p:nvPr/>
+        </p:nvPicPr>
+        <p:blipFill>
+          <a:blip xmlns:r="http://schemas.openxmlformats.org/officeDocument/2006/relationships" xmlns:a="http://schemas.openxmlformats.org/drawingml/2006/main" r:embed="Raefc12f9020f409b"/>
+          <a:stretch xmlns:a="http://schemas.openxmlformats.org/drawingml/2006/main"/>
+        </p:blipFill>
+        <p:spPr>
+          <a:xfrm xmlns:a="http://schemas.openxmlformats.org/drawingml/2006/main">
+            <a:off x="9893718" y="209550"/>
+            <a:ext cx="1491414" cy="323850"/>
+          </a:xfrm>
+          <a:prstGeom xmlns:a="http://schemas.openxmlformats.org/drawingml/2006/main" prst="rect">
+            <a:avLst/>
+          </a:prstGeom>
+        </p:spPr>
+      </p:pic>
+      <p:sp>
+        <p:nvSpPr>
+          <p:cNvPr id="13" name="footer-rule">
+            <a:extLst xmlns:a="http://schemas.openxmlformats.org/drawingml/2006/main">
+              <a:ext uri="{FF2B5EF4-FFF2-40B4-BE49-F238E27FC236}">
+                <a16:creationId xmlns:a16="http://schemas.microsoft.com/office/drawing/2014/main" id="{D695F15C-1D4D-4566-A24D-A34BF16349F5}"/>
               </a:ext>
             </a:extLst>
           </p:cNvPr>
@@ -9363,10 +9999,10 @@
       </p:sp>
       <p:sp>
         <p:nvSpPr>
-          <p:cNvPr id="12" name="footer">
-            <a:extLst xmlns:a="http://schemas.openxmlformats.org/drawingml/2006/main">
-              <a:ext uri="{FF2B5EF4-FFF2-40B4-BE49-F238E27FC236}">
-                <a16:creationId xmlns:a16="http://schemas.microsoft.com/office/drawing/2014/main" id="{AD90B47F-631F-406C-A3CE-34D58DF02C00}"/>
+          <p:cNvPr id="14" name="footer">
+            <a:extLst xmlns:a="http://schemas.openxmlformats.org/drawingml/2006/main">
+              <a:ext uri="{FF2B5EF4-FFF2-40B4-BE49-F238E27FC236}">
+                <a16:creationId xmlns:a16="http://schemas.microsoft.com/office/drawing/2014/main" id="{D76D2A1B-7047-4266-81E6-70964F88137C}"/>
               </a:ext>
             </a:extLst>
           </p:cNvPr>
@@ -9418,10 +10054,10 @@
       </p:sp>
       <p:sp>
         <p:nvSpPr>
-          <p:cNvPr id="13" name="page-number">
-            <a:extLst xmlns:a="http://schemas.openxmlformats.org/drawingml/2006/main">
-              <a:ext uri="{FF2B5EF4-FFF2-40B4-BE49-F238E27FC236}">
-                <a16:creationId xmlns:a16="http://schemas.microsoft.com/office/drawing/2014/main" id="{E1830324-C533-45B5-838D-D7BB2F9B34D3}"/>
+          <p:cNvPr id="15" name="page-number">
+            <a:extLst xmlns:a="http://schemas.openxmlformats.org/drawingml/2006/main">
+              <a:ext uri="{FF2B5EF4-FFF2-40B4-BE49-F238E27FC236}">
+                <a16:creationId xmlns:a16="http://schemas.microsoft.com/office/drawing/2014/main" id="{32474B2B-92E7-4B6E-83FA-59111230348A}"/>
               </a:ext>
             </a:extLst>
           </p:cNvPr>
@@ -9474,7 +10110,7 @@
     </p:spTree>
     <p:extLst>
       <p:ext uri="{BB962C8B-B14F-4D97-AF65-F5344CB8AC3E}">
-        <p14:creationId xmlns:p14="http://schemas.microsoft.com/office/powerpoint/2010/main" val="928152643"/>
+        <p14:creationId xmlns:p14="http://schemas.microsoft.com/office/powerpoint/2010/main" val="149141939"/>
       </p:ext>
     </p:extLst>
   </p:cSld>
@@ -9510,10 +10146,10 @@
       </p:grpSpPr>
       <p:sp>
         <p:nvSpPr>
-          <p:cNvPr id="9" name="case-number">
-            <a:extLst xmlns:a="http://schemas.openxmlformats.org/drawingml/2006/main">
-              <a:ext uri="{FF2B5EF4-FFF2-40B4-BE49-F238E27FC236}">
-                <a16:creationId xmlns:a16="http://schemas.microsoft.com/office/drawing/2014/main" id="{113B1175-C913-4DFD-8C38-1F4F1EF8FBF6}"/>
+          <p:cNvPr id="11" name="case-number">
+            <a:extLst xmlns:a="http://schemas.openxmlformats.org/drawingml/2006/main">
+              <a:ext uri="{FF2B5EF4-FFF2-40B4-BE49-F238E27FC236}">
+                <a16:creationId xmlns:a16="http://schemas.microsoft.com/office/drawing/2014/main" id="{BCD86A8C-D7A7-4464-98BF-F401C73FBDB8}"/>
               </a:ext>
             </a:extLst>
           </p:cNvPr>
@@ -9564,7 +10200,7 @@
           <p:cNvPr id="2" name="case-label">
             <a:extLst xmlns:a="http://schemas.openxmlformats.org/drawingml/2006/main">
               <a:ext uri="{FF2B5EF4-FFF2-40B4-BE49-F238E27FC236}">
-                <a16:creationId xmlns:a16="http://schemas.microsoft.com/office/drawing/2014/main" id="{BBB325A1-E431-4DDD-AB2E-0494774E1BD5}"/>
+                <a16:creationId xmlns:a16="http://schemas.microsoft.com/office/drawing/2014/main" id="{9104B4ED-6EFD-4814-B7AE-16B62D99B6E6}"/>
               </a:ext>
             </a:extLst>
           </p:cNvPr>
@@ -9615,7 +10251,7 @@
           <p:cNvPr id="3" name="case-divider">
             <a:extLst xmlns:a="http://schemas.openxmlformats.org/drawingml/2006/main">
               <a:ext uri="{FF2B5EF4-FFF2-40B4-BE49-F238E27FC236}">
-                <a16:creationId xmlns:a16="http://schemas.microsoft.com/office/drawing/2014/main" id="{7BFF70F4-36F3-4D88-8494-EF48430153E5}"/>
+                <a16:creationId xmlns:a16="http://schemas.microsoft.com/office/drawing/2014/main" id="{BE7FC7AF-BD7C-42F6-A297-21746C837A08}"/>
               </a:ext>
             </a:extLst>
           </p:cNvPr>
@@ -9648,7 +10284,7 @@
           <p:cNvPr id="4" name="case-caveat">
             <a:extLst xmlns:a="http://schemas.openxmlformats.org/drawingml/2006/main">
               <a:ext uri="{FF2B5EF4-FFF2-40B4-BE49-F238E27FC236}">
-                <a16:creationId xmlns:a16="http://schemas.microsoft.com/office/drawing/2014/main" id="{D503255F-0617-4129-B6DD-B3A1D2BFF249}"/>
+                <a16:creationId xmlns:a16="http://schemas.microsoft.com/office/drawing/2014/main" id="{23134B4C-43E1-4CAA-9B5D-510A725694F7}"/>
               </a:ext>
             </a:extLst>
           </p:cNvPr>
@@ -9699,7 +10335,7 @@
           <p:cNvPr id="5" name="eyebrow">
             <a:extLst xmlns:a="http://schemas.openxmlformats.org/drawingml/2006/main">
               <a:ext uri="{FF2B5EF4-FFF2-40B4-BE49-F238E27FC236}">
-                <a16:creationId xmlns:a16="http://schemas.microsoft.com/office/drawing/2014/main" id="{DB962454-F0E3-4134-B5F4-EE2D25EF790A}"/>
+                <a16:creationId xmlns:a16="http://schemas.microsoft.com/office/drawing/2014/main" id="{58D08CF7-7A83-4445-AFF4-301487B2EDE0}"/>
               </a:ext>
             </a:extLst>
           </p:cNvPr>
@@ -9747,10 +10383,69 @@
       </p:sp>
       <p:sp>
         <p:nvSpPr>
-          <p:cNvPr id="6" name="footer-rule">
-            <a:extLst xmlns:a="http://schemas.openxmlformats.org/drawingml/2006/main">
-              <a:ext uri="{FF2B5EF4-FFF2-40B4-BE49-F238E27FC236}">
-                <a16:creationId xmlns:a16="http://schemas.microsoft.com/office/drawing/2014/main" id="{9849A392-B688-4797-B673-6E1139CAD3BF}"/>
+          <p:cNvPr id="6" name="rescue-point-logo-background">
+            <a:extLst xmlns:a="http://schemas.openxmlformats.org/drawingml/2006/main">
+              <a:ext uri="{FF2B5EF4-FFF2-40B4-BE49-F238E27FC236}">
+                <a16:creationId xmlns:a16="http://schemas.microsoft.com/office/drawing/2014/main" id="{F0697CE4-737D-450A-B337-BE3CCF60379E}"/>
+              </a:ext>
+            </a:extLst>
+          </p:cNvPr>
+          <p:cNvSpPr>
+            <a:spLocks xmlns:a="http://schemas.openxmlformats.org/drawingml/2006/main" noGrp="1"/>
+          </p:cNvSpPr>
+          <p:nvPr/>
+        </p:nvSpPr>
+        <p:spPr>
+          <a:xfrm xmlns:a="http://schemas.openxmlformats.org/drawingml/2006/main">
+            <a:off x="9772650" y="133350"/>
+            <a:ext cx="1733550" cy="457200"/>
+          </a:xfrm>
+          <a:prstGeom xmlns:a="http://schemas.openxmlformats.org/drawingml/2006/main" prst="roundRect">
+            <a:avLst>
+              <a:gd name="adj" fmla="val 16667"/>
+            </a:avLst>
+          </a:prstGeom>
+          <a:solidFill xmlns:a="http://schemas.openxmlformats.org/drawingml/2006/main">
+            <a:srgbClr val="06142E"/>
+          </a:solidFill>
+          <a:ln xmlns:a="http://schemas.openxmlformats.org/drawingml/2006/main" w="9525">
+            <a:solidFill>
+              <a:srgbClr val="1EC5FF">
+                <a:alpha val="33333"/>
+              </a:srgbClr>
+            </a:solidFill>
+            <a:prstDash val="solid"/>
+          </a:ln>
+        </p:spPr>
+      </p:sp>
+      <p:pic>
+        <p:nvPicPr>
+          <p:cNvPr id="19" name="" descr="Figura oficial da documentação dbt usada para explicar: +4 dias — resultado esperado do bug de data."/>
+          <p:cNvPicPr>
+            <a:picLocks xmlns:a="http://schemas.openxmlformats.org/drawingml/2006/main" noChangeAspect="1"/>
+          </p:cNvPicPr>
+          <p:nvPr/>
+        </p:nvPicPr>
+        <p:blipFill>
+          <a:blip xmlns:r="http://schemas.openxmlformats.org/officeDocument/2006/relationships" xmlns:a="http://schemas.openxmlformats.org/drawingml/2006/main" r:embed="R45aa294721774868"/>
+          <a:stretch xmlns:a="http://schemas.openxmlformats.org/drawingml/2006/main"/>
+        </p:blipFill>
+        <p:spPr>
+          <a:xfrm xmlns:a="http://schemas.openxmlformats.org/drawingml/2006/main">
+            <a:off x="9893718" y="209550"/>
+            <a:ext cx="1491414" cy="323850"/>
+          </a:xfrm>
+          <a:prstGeom xmlns:a="http://schemas.openxmlformats.org/drawingml/2006/main" prst="rect">
+            <a:avLst/>
+          </a:prstGeom>
+        </p:spPr>
+      </p:pic>
+      <p:sp>
+        <p:nvSpPr>
+          <p:cNvPr id="8" name="footer-rule">
+            <a:extLst xmlns:a="http://schemas.openxmlformats.org/drawingml/2006/main">
+              <a:ext uri="{FF2B5EF4-FFF2-40B4-BE49-F238E27FC236}">
+                <a16:creationId xmlns:a16="http://schemas.microsoft.com/office/drawing/2014/main" id="{82A830A3-AB55-4B75-A4D4-11A2A8C0CD23}"/>
               </a:ext>
             </a:extLst>
           </p:cNvPr>
@@ -9780,10 +10475,10 @@
       </p:sp>
       <p:sp>
         <p:nvSpPr>
-          <p:cNvPr id="7" name="footer">
-            <a:extLst xmlns:a="http://schemas.openxmlformats.org/drawingml/2006/main">
-              <a:ext uri="{FF2B5EF4-FFF2-40B4-BE49-F238E27FC236}">
-                <a16:creationId xmlns:a16="http://schemas.microsoft.com/office/drawing/2014/main" id="{98D37A52-9099-442E-A450-881DD765B616}"/>
+          <p:cNvPr id="9" name="footer">
+            <a:extLst xmlns:a="http://schemas.openxmlformats.org/drawingml/2006/main">
+              <a:ext uri="{FF2B5EF4-FFF2-40B4-BE49-F238E27FC236}">
+                <a16:creationId xmlns:a16="http://schemas.microsoft.com/office/drawing/2014/main" id="{0F476A9B-B228-4053-882E-CEC114F4AE6A}"/>
               </a:ext>
             </a:extLst>
           </p:cNvPr>
@@ -9835,10 +10530,10 @@
       </p:sp>
       <p:sp>
         <p:nvSpPr>
-          <p:cNvPr id="8" name="page-number">
-            <a:extLst xmlns:a="http://schemas.openxmlformats.org/drawingml/2006/main">
-              <a:ext uri="{FF2B5EF4-FFF2-40B4-BE49-F238E27FC236}">
-                <a16:creationId xmlns:a16="http://schemas.microsoft.com/office/drawing/2014/main" id="{66F57D9B-2926-4904-A3D8-F54F85834B23}"/>
+          <p:cNvPr id="10" name="page-number">
+            <a:extLst xmlns:a="http://schemas.openxmlformats.org/drawingml/2006/main">
+              <a:ext uri="{FF2B5EF4-FFF2-40B4-BE49-F238E27FC236}">
+                <a16:creationId xmlns:a16="http://schemas.microsoft.com/office/drawing/2014/main" id="{099877C1-2C33-4FDE-BEB1-F2F43B404398}"/>
               </a:ext>
             </a:extLst>
           </p:cNvPr>
@@ -9891,7 +10586,7 @@
     </p:spTree>
     <p:extLst>
       <p:ext uri="{BB962C8B-B14F-4D97-AF65-F5344CB8AC3E}">
-        <p14:creationId xmlns:p14="http://schemas.microsoft.com/office/powerpoint/2010/main" val="1023296505"/>
+        <p14:creationId xmlns:p14="http://schemas.microsoft.com/office/powerpoint/2010/main" val="1189343023"/>
       </p:ext>
     </p:extLst>
   </p:cSld>
@@ -9919,10 +10614,10 @@
       </p:grpSpPr>
       <p:sp>
         <p:nvSpPr>
-          <p:cNvPr id="7" name="slide-title">
-            <a:extLst xmlns:a="http://schemas.openxmlformats.org/drawingml/2006/main">
-              <a:ext uri="{FF2B5EF4-FFF2-40B4-BE49-F238E27FC236}">
-                <a16:creationId xmlns:a16="http://schemas.microsoft.com/office/drawing/2014/main" id="{3B3B21D8-DC23-453F-8BC8-C74CEF8750CF}"/>
+          <p:cNvPr id="9" name="slide-title">
+            <a:extLst xmlns:a="http://schemas.openxmlformats.org/drawingml/2006/main">
+              <a:ext uri="{FF2B5EF4-FFF2-40B4-BE49-F238E27FC236}">
+                <a16:creationId xmlns:a16="http://schemas.microsoft.com/office/drawing/2014/main" id="{A535DAB9-E069-4564-A534-67133C53F317}"/>
               </a:ext>
             </a:extLst>
           </p:cNvPr>
@@ -9973,7 +10668,7 @@
           <p:cNvPr id="2" name="bullets">
             <a:extLst xmlns:a="http://schemas.openxmlformats.org/drawingml/2006/main">
               <a:ext uri="{FF2B5EF4-FFF2-40B4-BE49-F238E27FC236}">
-                <a16:creationId xmlns:a16="http://schemas.microsoft.com/office/drawing/2014/main" id="{9EBB3F5A-58D8-49A3-A5F3-E78F50E861EE}"/>
+                <a16:creationId xmlns:a16="http://schemas.microsoft.com/office/drawing/2014/main" id="{E15F2345-11B0-4DDE-A2E1-819CDD097C77}"/>
               </a:ext>
             </a:extLst>
           </p:cNvPr>
@@ -10060,7 +10755,7 @@
           <p:cNvPr id="3" name="eyebrow">
             <a:extLst xmlns:a="http://schemas.openxmlformats.org/drawingml/2006/main">
               <a:ext uri="{FF2B5EF4-FFF2-40B4-BE49-F238E27FC236}">
-                <a16:creationId xmlns:a16="http://schemas.microsoft.com/office/drawing/2014/main" id="{7519FAC1-02F7-4EBD-9B8A-6902DA8ACCD8}"/>
+                <a16:creationId xmlns:a16="http://schemas.microsoft.com/office/drawing/2014/main" id="{7BB2CE7D-53A5-4D18-ADE9-D1D0DFCD95A1}"/>
               </a:ext>
             </a:extLst>
           </p:cNvPr>
@@ -10108,10 +10803,69 @@
       </p:sp>
       <p:sp>
         <p:nvSpPr>
-          <p:cNvPr id="4" name="footer-rule">
-            <a:extLst xmlns:a="http://schemas.openxmlformats.org/drawingml/2006/main">
-              <a:ext uri="{FF2B5EF4-FFF2-40B4-BE49-F238E27FC236}">
-                <a16:creationId xmlns:a16="http://schemas.microsoft.com/office/drawing/2014/main" id="{CE2DFF3C-257C-4A0F-AC59-BD54D5F1ABAD}"/>
+          <p:cNvPr id="4" name="rescue-point-logo-background">
+            <a:extLst xmlns:a="http://schemas.openxmlformats.org/drawingml/2006/main">
+              <a:ext uri="{FF2B5EF4-FFF2-40B4-BE49-F238E27FC236}">
+                <a16:creationId xmlns:a16="http://schemas.microsoft.com/office/drawing/2014/main" id="{575AE5DC-F108-4B8F-8BF4-82272811E816}"/>
+              </a:ext>
+            </a:extLst>
+          </p:cNvPr>
+          <p:cNvSpPr>
+            <a:spLocks xmlns:a="http://schemas.openxmlformats.org/drawingml/2006/main" noGrp="1"/>
+          </p:cNvSpPr>
+          <p:nvPr/>
+        </p:nvSpPr>
+        <p:spPr>
+          <a:xfrm xmlns:a="http://schemas.openxmlformats.org/drawingml/2006/main">
+            <a:off x="9772650" y="133350"/>
+            <a:ext cx="1733550" cy="457200"/>
+          </a:xfrm>
+          <a:prstGeom xmlns:a="http://schemas.openxmlformats.org/drawingml/2006/main" prst="roundRect">
+            <a:avLst>
+              <a:gd name="adj" fmla="val 16667"/>
+            </a:avLst>
+          </a:prstGeom>
+          <a:solidFill xmlns:a="http://schemas.openxmlformats.org/drawingml/2006/main">
+            <a:srgbClr val="06142E"/>
+          </a:solidFill>
+          <a:ln xmlns:a="http://schemas.openxmlformats.org/drawingml/2006/main" w="9525">
+            <a:solidFill>
+              <a:srgbClr val="1EC5FF">
+                <a:alpha val="33333"/>
+              </a:srgbClr>
+            </a:solidFill>
+            <a:prstDash val="solid"/>
+          </a:ln>
+        </p:spPr>
+      </p:sp>
+      <p:pic>
+        <p:nvPicPr>
+          <p:cNvPr id="15" name="" descr="Figura oficial da documentação dbt usada para explicar: Limitações que precisam permanecer visíveis — • Freshness não mede volume."/>
+          <p:cNvPicPr>
+            <a:picLocks xmlns:a="http://schemas.openxmlformats.org/drawingml/2006/main" noChangeAspect="1"/>
+          </p:cNvPicPr>
+          <p:nvPr/>
+        </p:nvPicPr>
+        <p:blipFill>
+          <a:blip xmlns:r="http://schemas.openxmlformats.org/officeDocument/2006/relationships" xmlns:a="http://schemas.openxmlformats.org/drawingml/2006/main" r:embed="R6fc279534a074bc4"/>
+          <a:stretch xmlns:a="http://schemas.openxmlformats.org/drawingml/2006/main"/>
+        </p:blipFill>
+        <p:spPr>
+          <a:xfrm xmlns:a="http://schemas.openxmlformats.org/drawingml/2006/main">
+            <a:off x="9893718" y="209550"/>
+            <a:ext cx="1491414" cy="323850"/>
+          </a:xfrm>
+          <a:prstGeom xmlns:a="http://schemas.openxmlformats.org/drawingml/2006/main" prst="rect">
+            <a:avLst/>
+          </a:prstGeom>
+        </p:spPr>
+      </p:pic>
+      <p:sp>
+        <p:nvSpPr>
+          <p:cNvPr id="6" name="footer-rule">
+            <a:extLst xmlns:a="http://schemas.openxmlformats.org/drawingml/2006/main">
+              <a:ext uri="{FF2B5EF4-FFF2-40B4-BE49-F238E27FC236}">
+                <a16:creationId xmlns:a16="http://schemas.microsoft.com/office/drawing/2014/main" id="{7B53F1D9-9788-47FC-835B-06D913609480}"/>
               </a:ext>
             </a:extLst>
           </p:cNvPr>
@@ -10141,10 +10895,10 @@
       </p:sp>
       <p:sp>
         <p:nvSpPr>
-          <p:cNvPr id="5" name="footer">
-            <a:extLst xmlns:a="http://schemas.openxmlformats.org/drawingml/2006/main">
-              <a:ext uri="{FF2B5EF4-FFF2-40B4-BE49-F238E27FC236}">
-                <a16:creationId xmlns:a16="http://schemas.microsoft.com/office/drawing/2014/main" id="{0B4F4862-1BB9-4D1C-9209-CC875523876E}"/>
+          <p:cNvPr id="7" name="footer">
+            <a:extLst xmlns:a="http://schemas.openxmlformats.org/drawingml/2006/main">
+              <a:ext uri="{FF2B5EF4-FFF2-40B4-BE49-F238E27FC236}">
+                <a16:creationId xmlns:a16="http://schemas.microsoft.com/office/drawing/2014/main" id="{1F387B1C-9FAE-4142-8251-DD2BC3BAF0CB}"/>
               </a:ext>
             </a:extLst>
           </p:cNvPr>
@@ -10196,10 +10950,10 @@
       </p:sp>
       <p:sp>
         <p:nvSpPr>
-          <p:cNvPr id="6" name="page-number">
-            <a:extLst xmlns:a="http://schemas.openxmlformats.org/drawingml/2006/main">
-              <a:ext uri="{FF2B5EF4-FFF2-40B4-BE49-F238E27FC236}">
-                <a16:creationId xmlns:a16="http://schemas.microsoft.com/office/drawing/2014/main" id="{A1C4884A-4DF2-4F02-8D36-042B56742490}"/>
+          <p:cNvPr id="8" name="page-number">
+            <a:extLst xmlns:a="http://schemas.openxmlformats.org/drawingml/2006/main">
+              <a:ext uri="{FF2B5EF4-FFF2-40B4-BE49-F238E27FC236}">
+                <a16:creationId xmlns:a16="http://schemas.microsoft.com/office/drawing/2014/main" id="{CBC0B08D-1C9E-41C2-815E-61083AD2EF73}"/>
               </a:ext>
             </a:extLst>
           </p:cNvPr>
@@ -10252,7 +11006,7 @@
     </p:spTree>
     <p:extLst>
       <p:ext uri="{BB962C8B-B14F-4D97-AF65-F5344CB8AC3E}">
-        <p14:creationId xmlns:p14="http://schemas.microsoft.com/office/powerpoint/2010/main" val="101990683"/>
+        <p14:creationId xmlns:p14="http://schemas.microsoft.com/office/powerpoint/2010/main" val="822184701"/>
       </p:ext>
     </p:extLst>
   </p:cSld>
@@ -10280,10 +11034,10 @@
       </p:grpSpPr>
       <p:sp>
         <p:nvSpPr>
-          <p:cNvPr id="10" name="hook">
-            <a:extLst xmlns:a="http://schemas.openxmlformats.org/drawingml/2006/main">
-              <a:ext uri="{FF2B5EF4-FFF2-40B4-BE49-F238E27FC236}">
-                <a16:creationId xmlns:a16="http://schemas.microsoft.com/office/drawing/2014/main" id="{A8FBC774-33B1-4857-9011-75757B00FA05}"/>
+          <p:cNvPr id="12" name="hook">
+            <a:extLst xmlns:a="http://schemas.openxmlformats.org/drawingml/2006/main">
+              <a:ext uri="{FF2B5EF4-FFF2-40B4-BE49-F238E27FC236}">
+                <a16:creationId xmlns:a16="http://schemas.microsoft.com/office/drawing/2014/main" id="{7FC123A2-B950-45EB-AE18-B59F6288F618}"/>
               </a:ext>
             </a:extLst>
           </p:cNvPr>
@@ -10334,7 +11088,7 @@
           <p:cNvPr id="2" name="hook-rule">
             <a:extLst xmlns:a="http://schemas.openxmlformats.org/drawingml/2006/main">
               <a:ext uri="{FF2B5EF4-FFF2-40B4-BE49-F238E27FC236}">
-                <a16:creationId xmlns:a16="http://schemas.microsoft.com/office/drawing/2014/main" id="{AE7E9BF7-704D-441C-BA20-0185D94F826B}"/>
+                <a16:creationId xmlns:a16="http://schemas.microsoft.com/office/drawing/2014/main" id="{FBA41CEE-3EB7-4544-B800-D704654EB3F8}"/>
               </a:ext>
             </a:extLst>
           </p:cNvPr>
@@ -10365,7 +11119,7 @@
           <p:cNvPr id="3" name="hook-label">
             <a:extLst xmlns:a="http://schemas.openxmlformats.org/drawingml/2006/main">
               <a:ext uri="{FF2B5EF4-FFF2-40B4-BE49-F238E27FC236}">
-                <a16:creationId xmlns:a16="http://schemas.microsoft.com/office/drawing/2014/main" id="{E654438A-0445-4DE4-A7BC-2AD4A9F3270C}"/>
+                <a16:creationId xmlns:a16="http://schemas.microsoft.com/office/drawing/2014/main" id="{3DC5DC14-6412-4023-B09D-54BDB4CB5AA1}"/>
               </a:ext>
             </a:extLst>
           </p:cNvPr>
@@ -10416,7 +11170,7 @@
           <p:cNvPr id="4" name="diagram-surface">
             <a:extLst xmlns:a="http://schemas.openxmlformats.org/drawingml/2006/main">
               <a:ext uri="{FF2B5EF4-FFF2-40B4-BE49-F238E27FC236}">
-                <a16:creationId xmlns:a16="http://schemas.microsoft.com/office/drawing/2014/main" id="{321C4213-8C0E-4815-BC49-7C192B22AD05}"/>
+                <a16:creationId xmlns:a16="http://schemas.microsoft.com/office/drawing/2014/main" id="{0E1E331D-3B18-4BC9-8EFE-0D85D698B0F2}"/>
               </a:ext>
             </a:extLst>
           </p:cNvPr>
@@ -10448,14 +11202,14 @@
       </p:sp>
       <p:pic>
         <p:nvPicPr>
-          <p:cNvPr id="16" name="" descr="Diagrama didático autoral que apresenta: not_null pode passar enquanto um prazo devolve menos cinco dias. — A pergunta que guia a aula."/>
+          <p:cNvPr id="19" name="" descr="Diagrama didático autoral que apresenta: not_null pode passar enquanto um prazo devolve menos cinco dias. — A pergunta que guia a aula."/>
           <p:cNvPicPr>
             <a:picLocks xmlns:a="http://schemas.openxmlformats.org/drawingml/2006/main" noChangeAspect="1"/>
           </p:cNvPicPr>
           <p:nvPr/>
         </p:nvPicPr>
         <p:blipFill>
-          <a:blip xmlns:r="http://schemas.openxmlformats.org/officeDocument/2006/relationships" xmlns:a="http://schemas.openxmlformats.org/drawingml/2006/main" r:embed="Ra40788c29962495b"/>
+          <a:blip xmlns:r="http://schemas.openxmlformats.org/officeDocument/2006/relationships" xmlns:a="http://schemas.openxmlformats.org/drawingml/2006/main" r:embed="R4e9df1739aee48c8"/>
           <a:stretch xmlns:a="http://schemas.openxmlformats.org/drawingml/2006/main"/>
         </p:blipFill>
         <p:spPr>
@@ -10473,7 +11227,7 @@
           <p:cNvPr id="6" name="eyebrow">
             <a:extLst xmlns:a="http://schemas.openxmlformats.org/drawingml/2006/main">
               <a:ext uri="{FF2B5EF4-FFF2-40B4-BE49-F238E27FC236}">
-                <a16:creationId xmlns:a16="http://schemas.microsoft.com/office/drawing/2014/main" id="{25E7342A-E4E3-4900-86CD-52CC333B16FB}"/>
+                <a16:creationId xmlns:a16="http://schemas.microsoft.com/office/drawing/2014/main" id="{949629F1-588E-4D9B-A370-D8AF6B3A2ED9}"/>
               </a:ext>
             </a:extLst>
           </p:cNvPr>
@@ -10521,10 +11275,69 @@
       </p:sp>
       <p:sp>
         <p:nvSpPr>
-          <p:cNvPr id="7" name="footer-rule">
-            <a:extLst xmlns:a="http://schemas.openxmlformats.org/drawingml/2006/main">
-              <a:ext uri="{FF2B5EF4-FFF2-40B4-BE49-F238E27FC236}">
-                <a16:creationId xmlns:a16="http://schemas.microsoft.com/office/drawing/2014/main" id="{CE99DD0A-F085-4ECC-AD67-2079C638594F}"/>
+          <p:cNvPr id="7" name="rescue-point-logo-background">
+            <a:extLst xmlns:a="http://schemas.openxmlformats.org/drawingml/2006/main">
+              <a:ext uri="{FF2B5EF4-FFF2-40B4-BE49-F238E27FC236}">
+                <a16:creationId xmlns:a16="http://schemas.microsoft.com/office/drawing/2014/main" id="{9A3379AA-D476-4AB0-8FD3-7D245FE36FE3}"/>
+              </a:ext>
+            </a:extLst>
+          </p:cNvPr>
+          <p:cNvSpPr>
+            <a:spLocks xmlns:a="http://schemas.openxmlformats.org/drawingml/2006/main" noGrp="1"/>
+          </p:cNvSpPr>
+          <p:nvPr/>
+        </p:nvSpPr>
+        <p:spPr>
+          <a:xfrm xmlns:a="http://schemas.openxmlformats.org/drawingml/2006/main">
+            <a:off x="9772650" y="133350"/>
+            <a:ext cx="1733550" cy="457200"/>
+          </a:xfrm>
+          <a:prstGeom xmlns:a="http://schemas.openxmlformats.org/drawingml/2006/main" prst="roundRect">
+            <a:avLst>
+              <a:gd name="adj" fmla="val 16667"/>
+            </a:avLst>
+          </a:prstGeom>
+          <a:solidFill xmlns:a="http://schemas.openxmlformats.org/drawingml/2006/main">
+            <a:srgbClr val="06142E"/>
+          </a:solidFill>
+          <a:ln xmlns:a="http://schemas.openxmlformats.org/drawingml/2006/main" w="9525">
+            <a:solidFill>
+              <a:srgbClr val="1EC5FF">
+                <a:alpha val="33333"/>
+              </a:srgbClr>
+            </a:solidFill>
+            <a:prstDash val="solid"/>
+          </a:ln>
+        </p:spPr>
+      </p:sp>
+      <p:pic>
+        <p:nvPicPr>
+          <p:cNvPr id="22" name="" descr="Diagrama didático autoral que apresenta: not_null pode passar enquanto um prazo devolve menos cinco dias. — A pergunta que guia a aula."/>
+          <p:cNvPicPr>
+            <a:picLocks xmlns:a="http://schemas.openxmlformats.org/drawingml/2006/main" noChangeAspect="1"/>
+          </p:cNvPicPr>
+          <p:nvPr/>
+        </p:nvPicPr>
+        <p:blipFill>
+          <a:blip xmlns:r="http://schemas.openxmlformats.org/officeDocument/2006/relationships" xmlns:a="http://schemas.openxmlformats.org/drawingml/2006/main" r:embed="Rb0016195c9684afa"/>
+          <a:stretch xmlns:a="http://schemas.openxmlformats.org/drawingml/2006/main"/>
+        </p:blipFill>
+        <p:spPr>
+          <a:xfrm xmlns:a="http://schemas.openxmlformats.org/drawingml/2006/main">
+            <a:off x="9893718" y="209550"/>
+            <a:ext cx="1491414" cy="323850"/>
+          </a:xfrm>
+          <a:prstGeom xmlns:a="http://schemas.openxmlformats.org/drawingml/2006/main" prst="rect">
+            <a:avLst/>
+          </a:prstGeom>
+        </p:spPr>
+      </p:pic>
+      <p:sp>
+        <p:nvSpPr>
+          <p:cNvPr id="9" name="footer-rule">
+            <a:extLst xmlns:a="http://schemas.openxmlformats.org/drawingml/2006/main">
+              <a:ext uri="{FF2B5EF4-FFF2-40B4-BE49-F238E27FC236}">
+                <a16:creationId xmlns:a16="http://schemas.microsoft.com/office/drawing/2014/main" id="{6CE3E7EC-7BA1-48A5-B1E5-A7F734773CC2}"/>
               </a:ext>
             </a:extLst>
           </p:cNvPr>
@@ -10554,10 +11367,10 @@
       </p:sp>
       <p:sp>
         <p:nvSpPr>
-          <p:cNvPr id="8" name="footer">
-            <a:extLst xmlns:a="http://schemas.openxmlformats.org/drawingml/2006/main">
-              <a:ext uri="{FF2B5EF4-FFF2-40B4-BE49-F238E27FC236}">
-                <a16:creationId xmlns:a16="http://schemas.microsoft.com/office/drawing/2014/main" id="{09A04704-21B0-441D-A568-3BFA8CA266DD}"/>
+          <p:cNvPr id="10" name="footer">
+            <a:extLst xmlns:a="http://schemas.openxmlformats.org/drawingml/2006/main">
+              <a:ext uri="{FF2B5EF4-FFF2-40B4-BE49-F238E27FC236}">
+                <a16:creationId xmlns:a16="http://schemas.microsoft.com/office/drawing/2014/main" id="{23A97163-D676-4C2B-AFF2-E401B59C28CD}"/>
               </a:ext>
             </a:extLst>
           </p:cNvPr>
@@ -10609,10 +11422,10 @@
       </p:sp>
       <p:sp>
         <p:nvSpPr>
-          <p:cNvPr id="9" name="page-number">
-            <a:extLst xmlns:a="http://schemas.openxmlformats.org/drawingml/2006/main">
-              <a:ext uri="{FF2B5EF4-FFF2-40B4-BE49-F238E27FC236}">
-                <a16:creationId xmlns:a16="http://schemas.microsoft.com/office/drawing/2014/main" id="{B9C0F508-06B0-4D92-94B6-04AAE4C91D0C}"/>
+          <p:cNvPr id="11" name="page-number">
+            <a:extLst xmlns:a="http://schemas.openxmlformats.org/drawingml/2006/main">
+              <a:ext uri="{FF2B5EF4-FFF2-40B4-BE49-F238E27FC236}">
+                <a16:creationId xmlns:a16="http://schemas.microsoft.com/office/drawing/2014/main" id="{6A021A2F-38E3-48BB-90F1-22F81CCE5DC6}"/>
               </a:ext>
             </a:extLst>
           </p:cNvPr>
@@ -10665,7 +11478,7 @@
     </p:spTree>
     <p:extLst>
       <p:ext uri="{BB962C8B-B14F-4D97-AF65-F5344CB8AC3E}">
-        <p14:creationId xmlns:p14="http://schemas.microsoft.com/office/powerpoint/2010/main" val="1543525688"/>
+        <p14:creationId xmlns:p14="http://schemas.microsoft.com/office/powerpoint/2010/main" val="142581688"/>
       </p:ext>
     </p:extLst>
   </p:cSld>
@@ -10701,10 +11514,10 @@
       </p:grpSpPr>
       <p:sp>
         <p:nvSpPr>
-          <p:cNvPr id="10" name="radar-label">
-            <a:extLst xmlns:a="http://schemas.openxmlformats.org/drawingml/2006/main">
-              <a:ext uri="{FF2B5EF4-FFF2-40B4-BE49-F238E27FC236}">
-                <a16:creationId xmlns:a16="http://schemas.microsoft.com/office/drawing/2014/main" id="{5012E1DD-ECB5-4DA8-8A15-0B2371F7A5C0}"/>
+          <p:cNvPr id="12" name="radar-label">
+            <a:extLst xmlns:a="http://schemas.openxmlformats.org/drawingml/2006/main">
+              <a:ext uri="{FF2B5EF4-FFF2-40B4-BE49-F238E27FC236}">
+                <a16:creationId xmlns:a16="http://schemas.microsoft.com/office/drawing/2014/main" id="{43CD00C5-076A-4A23-AFD0-FB5E17D14C5B}"/>
               </a:ext>
             </a:extLst>
           </p:cNvPr>
@@ -10755,7 +11568,7 @@
           <p:cNvPr id="2" name="radar-text">
             <a:extLst xmlns:a="http://schemas.openxmlformats.org/drawingml/2006/main">
               <a:ext uri="{FF2B5EF4-FFF2-40B4-BE49-F238E27FC236}">
-                <a16:creationId xmlns:a16="http://schemas.microsoft.com/office/drawing/2014/main" id="{F6C90011-85EA-4234-A093-02551E8232C7}"/>
+                <a16:creationId xmlns:a16="http://schemas.microsoft.com/office/drawing/2014/main" id="{185456CA-7DE3-4829-A8E1-571017695C90}"/>
               </a:ext>
             </a:extLst>
           </p:cNvPr>
@@ -10806,7 +11619,7 @@
           <p:cNvPr id="3" name="radar-rule">
             <a:extLst xmlns:a="http://schemas.openxmlformats.org/drawingml/2006/main">
               <a:ext uri="{FF2B5EF4-FFF2-40B4-BE49-F238E27FC236}">
-                <a16:creationId xmlns:a16="http://schemas.microsoft.com/office/drawing/2014/main" id="{4B9CF19F-AEBB-40CB-BCB5-4AB0C58E186A}"/>
+                <a16:creationId xmlns:a16="http://schemas.microsoft.com/office/drawing/2014/main" id="{15FCEF47-3C93-47F1-90CA-59F4657BF515}"/>
               </a:ext>
             </a:extLst>
           </p:cNvPr>
@@ -10857,7 +11670,7 @@
           <p:cNvPr id="4" name="ambient-glow">
             <a:extLst xmlns:a="http://schemas.openxmlformats.org/drawingml/2006/main">
               <a:ext uri="{FF2B5EF4-FFF2-40B4-BE49-F238E27FC236}">
-                <a16:creationId xmlns:a16="http://schemas.microsoft.com/office/drawing/2014/main" id="{A6175855-FA7C-4958-871E-BD006EEF2099}"/>
+                <a16:creationId xmlns:a16="http://schemas.microsoft.com/office/drawing/2014/main" id="{B9845365-8E15-41F3-A45D-A38245976250}"/>
               </a:ext>
             </a:extLst>
           </p:cNvPr>
@@ -10894,7 +11707,7 @@
           <p:cNvPr id="5" name="ambient-core">
             <a:extLst xmlns:a="http://schemas.openxmlformats.org/drawingml/2006/main">
               <a:ext uri="{FF2B5EF4-FFF2-40B4-BE49-F238E27FC236}">
-                <a16:creationId xmlns:a16="http://schemas.microsoft.com/office/drawing/2014/main" id="{61EC99E8-B8E9-4552-A1E4-69890C52B26A}"/>
+                <a16:creationId xmlns:a16="http://schemas.microsoft.com/office/drawing/2014/main" id="{7A1079EF-6D87-48AA-B915-4CCA7FD8068A}"/>
               </a:ext>
             </a:extLst>
           </p:cNvPr>
@@ -10931,7 +11744,7 @@
           <p:cNvPr id="6" name="eyebrow">
             <a:extLst xmlns:a="http://schemas.openxmlformats.org/drawingml/2006/main">
               <a:ext uri="{FF2B5EF4-FFF2-40B4-BE49-F238E27FC236}">
-                <a16:creationId xmlns:a16="http://schemas.microsoft.com/office/drawing/2014/main" id="{A3886858-695F-45F1-9907-1A294ADC9DF6}"/>
+                <a16:creationId xmlns:a16="http://schemas.microsoft.com/office/drawing/2014/main" id="{291805E9-802E-4F4E-B357-A74DC1DD5BC3}"/>
               </a:ext>
             </a:extLst>
           </p:cNvPr>
@@ -10979,10 +11792,69 @@
       </p:sp>
       <p:sp>
         <p:nvSpPr>
-          <p:cNvPr id="7" name="footer-rule">
-            <a:extLst xmlns:a="http://schemas.openxmlformats.org/drawingml/2006/main">
-              <a:ext uri="{FF2B5EF4-FFF2-40B4-BE49-F238E27FC236}">
-                <a16:creationId xmlns:a16="http://schemas.microsoft.com/office/drawing/2014/main" id="{BC7DD113-AD1D-4902-9B96-B5919B3035D3}"/>
+          <p:cNvPr id="7" name="rescue-point-logo-background">
+            <a:extLst xmlns:a="http://schemas.openxmlformats.org/drawingml/2006/main">
+              <a:ext uri="{FF2B5EF4-FFF2-40B4-BE49-F238E27FC236}">
+                <a16:creationId xmlns:a16="http://schemas.microsoft.com/office/drawing/2014/main" id="{4A107BCA-7A05-4AED-A6E9-EC0E888F5116}"/>
+              </a:ext>
+            </a:extLst>
+          </p:cNvPr>
+          <p:cNvSpPr>
+            <a:spLocks xmlns:a="http://schemas.openxmlformats.org/drawingml/2006/main" noGrp="1"/>
+          </p:cNvSpPr>
+          <p:nvPr/>
+        </p:nvSpPr>
+        <p:spPr>
+          <a:xfrm xmlns:a="http://schemas.openxmlformats.org/drawingml/2006/main">
+            <a:off x="9772650" y="133350"/>
+            <a:ext cx="1733550" cy="457200"/>
+          </a:xfrm>
+          <a:prstGeom xmlns:a="http://schemas.openxmlformats.org/drawingml/2006/main" prst="roundRect">
+            <a:avLst>
+              <a:gd name="adj" fmla="val 16667"/>
+            </a:avLst>
+          </a:prstGeom>
+          <a:solidFill xmlns:a="http://schemas.openxmlformats.org/drawingml/2006/main">
+            <a:srgbClr val="06142E"/>
+          </a:solidFill>
+          <a:ln xmlns:a="http://schemas.openxmlformats.org/drawingml/2006/main" w="9525">
+            <a:solidFill>
+              <a:srgbClr val="1EC5FF">
+                <a:alpha val="33333"/>
+              </a:srgbClr>
+            </a:solidFill>
+            <a:prstDash val="solid"/>
+          </a:ln>
+        </p:spPr>
+      </p:sp>
+      <p:pic>
+        <p:nvPicPr>
+          <p:cNvPr id="21" name="" descr="Figura oficial da documentação dbt usada para explicar: RADAR — Engines novas antecipam parse; não substituem testes, freshness ou SLO.."/>
+          <p:cNvPicPr>
+            <a:picLocks xmlns:a="http://schemas.openxmlformats.org/drawingml/2006/main" noChangeAspect="1"/>
+          </p:cNvPicPr>
+          <p:nvPr/>
+        </p:nvPicPr>
+        <p:blipFill>
+          <a:blip xmlns:r="http://schemas.openxmlformats.org/officeDocument/2006/relationships" xmlns:a="http://schemas.openxmlformats.org/drawingml/2006/main" r:embed="Rc006d61be1ae4174"/>
+          <a:stretch xmlns:a="http://schemas.openxmlformats.org/drawingml/2006/main"/>
+        </p:blipFill>
+        <p:spPr>
+          <a:xfrm xmlns:a="http://schemas.openxmlformats.org/drawingml/2006/main">
+            <a:off x="9893718" y="209550"/>
+            <a:ext cx="1491414" cy="323850"/>
+          </a:xfrm>
+          <a:prstGeom xmlns:a="http://schemas.openxmlformats.org/drawingml/2006/main" prst="rect">
+            <a:avLst/>
+          </a:prstGeom>
+        </p:spPr>
+      </p:pic>
+      <p:sp>
+        <p:nvSpPr>
+          <p:cNvPr id="9" name="footer-rule">
+            <a:extLst xmlns:a="http://schemas.openxmlformats.org/drawingml/2006/main">
+              <a:ext uri="{FF2B5EF4-FFF2-40B4-BE49-F238E27FC236}">
+                <a16:creationId xmlns:a16="http://schemas.microsoft.com/office/drawing/2014/main" id="{952469FA-6AB9-4120-89B9-0D5D2A7DC598}"/>
               </a:ext>
             </a:extLst>
           </p:cNvPr>
@@ -11012,10 +11884,10 @@
       </p:sp>
       <p:sp>
         <p:nvSpPr>
-          <p:cNvPr id="8" name="footer">
-            <a:extLst xmlns:a="http://schemas.openxmlformats.org/drawingml/2006/main">
-              <a:ext uri="{FF2B5EF4-FFF2-40B4-BE49-F238E27FC236}">
-                <a16:creationId xmlns:a16="http://schemas.microsoft.com/office/drawing/2014/main" id="{82AD777A-E980-4516-BD80-3A86A43EF29A}"/>
+          <p:cNvPr id="10" name="footer">
+            <a:extLst xmlns:a="http://schemas.openxmlformats.org/drawingml/2006/main">
+              <a:ext uri="{FF2B5EF4-FFF2-40B4-BE49-F238E27FC236}">
+                <a16:creationId xmlns:a16="http://schemas.microsoft.com/office/drawing/2014/main" id="{FBBBA225-BDCF-4216-9386-4B13FEEB81CE}"/>
               </a:ext>
             </a:extLst>
           </p:cNvPr>
@@ -11067,10 +11939,10 @@
       </p:sp>
       <p:sp>
         <p:nvSpPr>
-          <p:cNvPr id="9" name="page-number">
-            <a:extLst xmlns:a="http://schemas.openxmlformats.org/drawingml/2006/main">
-              <a:ext uri="{FF2B5EF4-FFF2-40B4-BE49-F238E27FC236}">
-                <a16:creationId xmlns:a16="http://schemas.microsoft.com/office/drawing/2014/main" id="{C5112CD0-E7AD-4FC2-BE77-1F4D898F6D12}"/>
+          <p:cNvPr id="11" name="page-number">
+            <a:extLst xmlns:a="http://schemas.openxmlformats.org/drawingml/2006/main">
+              <a:ext uri="{FF2B5EF4-FFF2-40B4-BE49-F238E27FC236}">
+                <a16:creationId xmlns:a16="http://schemas.microsoft.com/office/drawing/2014/main" id="{5792DA4F-2693-4FB7-99AA-EC9630AFD91B}"/>
               </a:ext>
             </a:extLst>
           </p:cNvPr>
@@ -11123,7 +11995,7 @@
     </p:spTree>
     <p:extLst>
       <p:ext uri="{BB962C8B-B14F-4D97-AF65-F5344CB8AC3E}">
-        <p14:creationId xmlns:p14="http://schemas.microsoft.com/office/powerpoint/2010/main" val="1273322209"/>
+        <p14:creationId xmlns:p14="http://schemas.microsoft.com/office/powerpoint/2010/main" val="1775854651"/>
       </p:ext>
     </p:extLst>
   </p:cSld>
@@ -11151,10 +12023,10 @@
       </p:grpSpPr>
       <p:sp>
         <p:nvSpPr>
-          <p:cNvPr id="8" name="cta-label">
-            <a:extLst xmlns:a="http://schemas.openxmlformats.org/drawingml/2006/main">
-              <a:ext uri="{FF2B5EF4-FFF2-40B4-BE49-F238E27FC236}">
-                <a16:creationId xmlns:a16="http://schemas.microsoft.com/office/drawing/2014/main" id="{B6EE384F-EA4F-4493-9D86-F0D40C80BADD}"/>
+          <p:cNvPr id="10" name="cta-label">
+            <a:extLst xmlns:a="http://schemas.openxmlformats.org/drawingml/2006/main">
+              <a:ext uri="{FF2B5EF4-FFF2-40B4-BE49-F238E27FC236}">
+                <a16:creationId xmlns:a16="http://schemas.microsoft.com/office/drawing/2014/main" id="{8BADF2AB-C6A2-471E-BA01-B9A78D13A725}"/>
               </a:ext>
             </a:extLst>
           </p:cNvPr>
@@ -11205,7 +12077,7 @@
           <p:cNvPr id="2" name="cta">
             <a:extLst xmlns:a="http://schemas.openxmlformats.org/drawingml/2006/main">
               <a:ext uri="{FF2B5EF4-FFF2-40B4-BE49-F238E27FC236}">
-                <a16:creationId xmlns:a16="http://schemas.microsoft.com/office/drawing/2014/main" id="{2F510EA1-869B-4DDC-B8B8-BDA27444A497}"/>
+                <a16:creationId xmlns:a16="http://schemas.microsoft.com/office/drawing/2014/main" id="{D439522E-8B3D-458F-8BFE-949390D29184}"/>
               </a:ext>
             </a:extLst>
           </p:cNvPr>
@@ -11256,7 +12128,7 @@
           <p:cNvPr id="3" name="cta-meta">
             <a:extLst xmlns:a="http://schemas.openxmlformats.org/drawingml/2006/main">
               <a:ext uri="{FF2B5EF4-FFF2-40B4-BE49-F238E27FC236}">
-                <a16:creationId xmlns:a16="http://schemas.microsoft.com/office/drawing/2014/main" id="{A3957D5B-F444-49F1-BACE-0FEBCDCDA359}"/>
+                <a16:creationId xmlns:a16="http://schemas.microsoft.com/office/drawing/2014/main" id="{7D799D7A-4A53-4B09-BEDB-9EF9CBCF1BDF}"/>
               </a:ext>
             </a:extLst>
           </p:cNvPr>
@@ -11307,7 +12179,7 @@
           <p:cNvPr id="4" name="eyebrow">
             <a:extLst xmlns:a="http://schemas.openxmlformats.org/drawingml/2006/main">
               <a:ext uri="{FF2B5EF4-FFF2-40B4-BE49-F238E27FC236}">
-                <a16:creationId xmlns:a16="http://schemas.microsoft.com/office/drawing/2014/main" id="{0C9DB7FE-002D-45BF-B48E-E572314B8949}"/>
+                <a16:creationId xmlns:a16="http://schemas.microsoft.com/office/drawing/2014/main" id="{D9183D27-DA0B-4C50-B9C7-2CFB16C468C8}"/>
               </a:ext>
             </a:extLst>
           </p:cNvPr>
@@ -11355,10 +12227,69 @@
       </p:sp>
       <p:sp>
         <p:nvSpPr>
-          <p:cNvPr id="5" name="footer-rule">
-            <a:extLst xmlns:a="http://schemas.openxmlformats.org/drawingml/2006/main">
-              <a:ext uri="{FF2B5EF4-FFF2-40B4-BE49-F238E27FC236}">
-                <a16:creationId xmlns:a16="http://schemas.microsoft.com/office/drawing/2014/main" id="{555237E6-60DD-403D-8296-F3A5A6A3B327}"/>
+          <p:cNvPr id="5" name="rescue-point-logo-background">
+            <a:extLst xmlns:a="http://schemas.openxmlformats.org/drawingml/2006/main">
+              <a:ext uri="{FF2B5EF4-FFF2-40B4-BE49-F238E27FC236}">
+                <a16:creationId xmlns:a16="http://schemas.microsoft.com/office/drawing/2014/main" id="{CB2756C5-1186-46E8-9F07-D6E865779239}"/>
+              </a:ext>
+            </a:extLst>
+          </p:cNvPr>
+          <p:cNvSpPr>
+            <a:spLocks xmlns:a="http://schemas.openxmlformats.org/drawingml/2006/main" noGrp="1"/>
+          </p:cNvSpPr>
+          <p:nvPr/>
+        </p:nvSpPr>
+        <p:spPr>
+          <a:xfrm xmlns:a="http://schemas.openxmlformats.org/drawingml/2006/main">
+            <a:off x="9772650" y="133350"/>
+            <a:ext cx="1733550" cy="457200"/>
+          </a:xfrm>
+          <a:prstGeom xmlns:a="http://schemas.openxmlformats.org/drawingml/2006/main" prst="roundRect">
+            <a:avLst>
+              <a:gd name="adj" fmla="val 16667"/>
+            </a:avLst>
+          </a:prstGeom>
+          <a:solidFill xmlns:a="http://schemas.openxmlformats.org/drawingml/2006/main">
+            <a:srgbClr val="06142E"/>
+          </a:solidFill>
+          <a:ln xmlns:a="http://schemas.openxmlformats.org/drawingml/2006/main" w="9525">
+            <a:solidFill>
+              <a:srgbClr val="1EC5FF">
+                <a:alpha val="33333"/>
+              </a:srgbClr>
+            </a:solidFill>
+            <a:prstDash val="solid"/>
+          </a:ln>
+        </p:spPr>
+      </p:sp>
+      <p:pic>
+        <p:nvPicPr>
+          <p:cNvPr id="17" name="" descr="Figura oficial da documentação dbt usada para explicar: PRÓXIMO PASSO — Escreva o menor unit test que reproduz um bug possível.."/>
+          <p:cNvPicPr>
+            <a:picLocks xmlns:a="http://schemas.openxmlformats.org/drawingml/2006/main" noChangeAspect="1"/>
+          </p:cNvPicPr>
+          <p:nvPr/>
+        </p:nvPicPr>
+        <p:blipFill>
+          <a:blip xmlns:r="http://schemas.openxmlformats.org/officeDocument/2006/relationships" xmlns:a="http://schemas.openxmlformats.org/drawingml/2006/main" r:embed="R79b819106e0e4002"/>
+          <a:stretch xmlns:a="http://schemas.openxmlformats.org/drawingml/2006/main"/>
+        </p:blipFill>
+        <p:spPr>
+          <a:xfrm xmlns:a="http://schemas.openxmlformats.org/drawingml/2006/main">
+            <a:off x="9893718" y="209550"/>
+            <a:ext cx="1491414" cy="323850"/>
+          </a:xfrm>
+          <a:prstGeom xmlns:a="http://schemas.openxmlformats.org/drawingml/2006/main" prst="rect">
+            <a:avLst/>
+          </a:prstGeom>
+        </p:spPr>
+      </p:pic>
+      <p:sp>
+        <p:nvSpPr>
+          <p:cNvPr id="7" name="footer-rule">
+            <a:extLst xmlns:a="http://schemas.openxmlformats.org/drawingml/2006/main">
+              <a:ext uri="{FF2B5EF4-FFF2-40B4-BE49-F238E27FC236}">
+                <a16:creationId xmlns:a16="http://schemas.microsoft.com/office/drawing/2014/main" id="{B9A04668-5FD1-4D49-A43A-DB78D1502B05}"/>
               </a:ext>
             </a:extLst>
           </p:cNvPr>
@@ -11388,10 +12319,10 @@
       </p:sp>
       <p:sp>
         <p:nvSpPr>
-          <p:cNvPr id="6" name="footer">
-            <a:extLst xmlns:a="http://schemas.openxmlformats.org/drawingml/2006/main">
-              <a:ext uri="{FF2B5EF4-FFF2-40B4-BE49-F238E27FC236}">
-                <a16:creationId xmlns:a16="http://schemas.microsoft.com/office/drawing/2014/main" id="{E9C7DC31-FCEA-4085-9728-58145CFC5B44}"/>
+          <p:cNvPr id="8" name="footer">
+            <a:extLst xmlns:a="http://schemas.openxmlformats.org/drawingml/2006/main">
+              <a:ext uri="{FF2B5EF4-FFF2-40B4-BE49-F238E27FC236}">
+                <a16:creationId xmlns:a16="http://schemas.microsoft.com/office/drawing/2014/main" id="{C87B5EC6-ABC8-45D5-B7DF-466FF28809B2}"/>
               </a:ext>
             </a:extLst>
           </p:cNvPr>
@@ -11443,10 +12374,10 @@
       </p:sp>
       <p:sp>
         <p:nvSpPr>
-          <p:cNvPr id="7" name="page-number">
-            <a:extLst xmlns:a="http://schemas.openxmlformats.org/drawingml/2006/main">
-              <a:ext uri="{FF2B5EF4-FFF2-40B4-BE49-F238E27FC236}">
-                <a16:creationId xmlns:a16="http://schemas.microsoft.com/office/drawing/2014/main" id="{2C4A1F1C-7C2B-4E6E-9789-2552CB0FEB36}"/>
+          <p:cNvPr id="9" name="page-number">
+            <a:extLst xmlns:a="http://schemas.openxmlformats.org/drawingml/2006/main">
+              <a:ext uri="{FF2B5EF4-FFF2-40B4-BE49-F238E27FC236}">
+                <a16:creationId xmlns:a16="http://schemas.microsoft.com/office/drawing/2014/main" id="{905495E5-176A-439E-8AA4-7BDBA39EC30F}"/>
               </a:ext>
             </a:extLst>
           </p:cNvPr>
@@ -11499,7 +12430,7 @@
     </p:spTree>
     <p:extLst>
       <p:ext uri="{BB962C8B-B14F-4D97-AF65-F5344CB8AC3E}">
-        <p14:creationId xmlns:p14="http://schemas.microsoft.com/office/powerpoint/2010/main" val="245288070"/>
+        <p14:creationId xmlns:p14="http://schemas.microsoft.com/office/powerpoint/2010/main" val="2092483143"/>
       </p:ext>
     </p:extLst>
   </p:cSld>
@@ -11535,10 +12466,10 @@
       </p:grpSpPr>
       <p:sp>
         <p:nvSpPr>
-          <p:cNvPr id="14" name="slide-title">
-            <a:extLst xmlns:a="http://schemas.openxmlformats.org/drawingml/2006/main">
-              <a:ext uri="{FF2B5EF4-FFF2-40B4-BE49-F238E27FC236}">
-                <a16:creationId xmlns:a16="http://schemas.microsoft.com/office/drawing/2014/main" id="{44B53A5E-EED3-4787-BC8F-6B0491E82A89}"/>
+          <p:cNvPr id="16" name="slide-title">
+            <a:extLst xmlns:a="http://schemas.openxmlformats.org/drawingml/2006/main">
+              <a:ext uri="{FF2B5EF4-FFF2-40B4-BE49-F238E27FC236}">
+                <a16:creationId xmlns:a16="http://schemas.microsoft.com/office/drawing/2014/main" id="{BEC17299-BAAD-4BFF-AE35-882723E48CED}"/>
               </a:ext>
             </a:extLst>
           </p:cNvPr>
@@ -11589,7 +12520,7 @@
           <p:cNvPr id="2" name="step-num-1">
             <a:extLst xmlns:a="http://schemas.openxmlformats.org/drawingml/2006/main">
               <a:ext uri="{FF2B5EF4-FFF2-40B4-BE49-F238E27FC236}">
-                <a16:creationId xmlns:a16="http://schemas.microsoft.com/office/drawing/2014/main" id="{80526130-E81C-4121-89F4-1D52FA3AA52C}"/>
+                <a16:creationId xmlns:a16="http://schemas.microsoft.com/office/drawing/2014/main" id="{BD0F3FEB-EAF2-40CA-889B-61F88476E18F}"/>
               </a:ext>
             </a:extLst>
           </p:cNvPr>
@@ -11640,7 +12571,7 @@
           <p:cNvPr id="3" name="step-label-1">
             <a:extLst xmlns:a="http://schemas.openxmlformats.org/drawingml/2006/main">
               <a:ext uri="{FF2B5EF4-FFF2-40B4-BE49-F238E27FC236}">
-                <a16:creationId xmlns:a16="http://schemas.microsoft.com/office/drawing/2014/main" id="{60F6200E-C483-45CF-A794-B38DD10D1D99}"/>
+                <a16:creationId xmlns:a16="http://schemas.microsoft.com/office/drawing/2014/main" id="{7446CA64-A9E9-42D8-970B-61F7236C0C8D}"/>
               </a:ext>
             </a:extLst>
           </p:cNvPr>
@@ -11691,7 +12622,7 @@
           <p:cNvPr id="4" name="step-line-1">
             <a:extLst xmlns:a="http://schemas.openxmlformats.org/drawingml/2006/main">
               <a:ext uri="{FF2B5EF4-FFF2-40B4-BE49-F238E27FC236}">
-                <a16:creationId xmlns:a16="http://schemas.microsoft.com/office/drawing/2014/main" id="{631B360D-C404-46A6-965A-C50A04657698}"/>
+                <a16:creationId xmlns:a16="http://schemas.microsoft.com/office/drawing/2014/main" id="{70B1D386-936F-4986-AFDF-7E3426C9154C}"/>
               </a:ext>
             </a:extLst>
           </p:cNvPr>
@@ -11722,7 +12653,7 @@
           <p:cNvPr id="5" name="step-num-2">
             <a:extLst xmlns:a="http://schemas.openxmlformats.org/drawingml/2006/main">
               <a:ext uri="{FF2B5EF4-FFF2-40B4-BE49-F238E27FC236}">
-                <a16:creationId xmlns:a16="http://schemas.microsoft.com/office/drawing/2014/main" id="{11A29224-C706-4003-B43B-20959DC71E3B}"/>
+                <a16:creationId xmlns:a16="http://schemas.microsoft.com/office/drawing/2014/main" id="{FF4FD52F-6B58-4D2A-8149-CA8EBFBB3863}"/>
               </a:ext>
             </a:extLst>
           </p:cNvPr>
@@ -11773,7 +12704,7 @@
           <p:cNvPr id="6" name="step-label-2">
             <a:extLst xmlns:a="http://schemas.openxmlformats.org/drawingml/2006/main">
               <a:ext uri="{FF2B5EF4-FFF2-40B4-BE49-F238E27FC236}">
-                <a16:creationId xmlns:a16="http://schemas.microsoft.com/office/drawing/2014/main" id="{19308BE8-AC1F-4436-8AC2-8F569EF9B8E4}"/>
+                <a16:creationId xmlns:a16="http://schemas.microsoft.com/office/drawing/2014/main" id="{3BA415B0-CC10-4AAC-9AD2-6770790A4C77}"/>
               </a:ext>
             </a:extLst>
           </p:cNvPr>
@@ -11824,7 +12755,7 @@
           <p:cNvPr id="7" name="step-line-2">
             <a:extLst xmlns:a="http://schemas.openxmlformats.org/drawingml/2006/main">
               <a:ext uri="{FF2B5EF4-FFF2-40B4-BE49-F238E27FC236}">
-                <a16:creationId xmlns:a16="http://schemas.microsoft.com/office/drawing/2014/main" id="{908D2AD0-39F2-463D-B4EF-3EA2962B0DEA}"/>
+                <a16:creationId xmlns:a16="http://schemas.microsoft.com/office/drawing/2014/main" id="{9FD484F0-9D66-4146-8737-A66CEF82122D}"/>
               </a:ext>
             </a:extLst>
           </p:cNvPr>
@@ -11855,7 +12786,7 @@
           <p:cNvPr id="8" name="step-num-3">
             <a:extLst xmlns:a="http://schemas.openxmlformats.org/drawingml/2006/main">
               <a:ext uri="{FF2B5EF4-FFF2-40B4-BE49-F238E27FC236}">
-                <a16:creationId xmlns:a16="http://schemas.microsoft.com/office/drawing/2014/main" id="{E2708816-F156-45D5-85AF-DAC7655BF3DF}"/>
+                <a16:creationId xmlns:a16="http://schemas.microsoft.com/office/drawing/2014/main" id="{E642D65D-26E2-4FD6-9BF6-F16CB029D6E2}"/>
               </a:ext>
             </a:extLst>
           </p:cNvPr>
@@ -11906,7 +12837,7 @@
           <p:cNvPr id="9" name="step-label-3">
             <a:extLst xmlns:a="http://schemas.openxmlformats.org/drawingml/2006/main">
               <a:ext uri="{FF2B5EF4-FFF2-40B4-BE49-F238E27FC236}">
-                <a16:creationId xmlns:a16="http://schemas.microsoft.com/office/drawing/2014/main" id="{35F1F54B-2156-47EF-8E6C-D83ABF84CE1A}"/>
+                <a16:creationId xmlns:a16="http://schemas.microsoft.com/office/drawing/2014/main" id="{2661DBFF-4466-40EF-8A5C-D2CE5336607F}"/>
               </a:ext>
             </a:extLst>
           </p:cNvPr>
@@ -11957,7 +12888,7 @@
           <p:cNvPr id="10" name="eyebrow">
             <a:extLst xmlns:a="http://schemas.openxmlformats.org/drawingml/2006/main">
               <a:ext uri="{FF2B5EF4-FFF2-40B4-BE49-F238E27FC236}">
-                <a16:creationId xmlns:a16="http://schemas.microsoft.com/office/drawing/2014/main" id="{2902165E-4334-431F-8CA4-B47DAE5CD841}"/>
+                <a16:creationId xmlns:a16="http://schemas.microsoft.com/office/drawing/2014/main" id="{6D2ECC2C-BAF3-48BE-9959-E69B232FD9E6}"/>
               </a:ext>
             </a:extLst>
           </p:cNvPr>
@@ -12005,10 +12936,69 @@
       </p:sp>
       <p:sp>
         <p:nvSpPr>
-          <p:cNvPr id="11" name="footer-rule">
-            <a:extLst xmlns:a="http://schemas.openxmlformats.org/drawingml/2006/main">
-              <a:ext uri="{FF2B5EF4-FFF2-40B4-BE49-F238E27FC236}">
-                <a16:creationId xmlns:a16="http://schemas.microsoft.com/office/drawing/2014/main" id="{51CFBA81-FCA1-4957-A3FF-D7ED53E30771}"/>
+          <p:cNvPr id="11" name="rescue-point-logo-background">
+            <a:extLst xmlns:a="http://schemas.openxmlformats.org/drawingml/2006/main">
+              <a:ext uri="{FF2B5EF4-FFF2-40B4-BE49-F238E27FC236}">
+                <a16:creationId xmlns:a16="http://schemas.microsoft.com/office/drawing/2014/main" id="{14D4D4F8-8D46-4E24-896A-77E99558325A}"/>
+              </a:ext>
+            </a:extLst>
+          </p:cNvPr>
+          <p:cNvSpPr>
+            <a:spLocks xmlns:a="http://schemas.openxmlformats.org/drawingml/2006/main" noGrp="1"/>
+          </p:cNvSpPr>
+          <p:nvPr/>
+        </p:nvSpPr>
+        <p:spPr>
+          <a:xfrm xmlns:a="http://schemas.openxmlformats.org/drawingml/2006/main">
+            <a:off x="9772650" y="133350"/>
+            <a:ext cx="1733550" cy="457200"/>
+          </a:xfrm>
+          <a:prstGeom xmlns:a="http://schemas.openxmlformats.org/drawingml/2006/main" prst="roundRect">
+            <a:avLst>
+              <a:gd name="adj" fmla="val 16667"/>
+            </a:avLst>
+          </a:prstGeom>
+          <a:solidFill xmlns:a="http://schemas.openxmlformats.org/drawingml/2006/main">
+            <a:srgbClr val="06142E"/>
+          </a:solidFill>
+          <a:ln xmlns:a="http://schemas.openxmlformats.org/drawingml/2006/main" w="9525">
+            <a:solidFill>
+              <a:srgbClr val="1EC5FF">
+                <a:alpha val="33333"/>
+              </a:srgbClr>
+            </a:solidFill>
+            <a:prstDash val="solid"/>
+          </a:ln>
+        </p:spPr>
+      </p:sp>
+      <p:pic>
+        <p:nvPicPr>
+          <p:cNvPr id="29" name="" descr="Figura oficial da documentação dbt usada para explicar: Ao final, você consegue... — 01."/>
+          <p:cNvPicPr>
+            <a:picLocks xmlns:a="http://schemas.openxmlformats.org/drawingml/2006/main" noChangeAspect="1"/>
+          </p:cNvPicPr>
+          <p:nvPr/>
+        </p:nvPicPr>
+        <p:blipFill>
+          <a:blip xmlns:r="http://schemas.openxmlformats.org/officeDocument/2006/relationships" xmlns:a="http://schemas.openxmlformats.org/drawingml/2006/main" r:embed="R7c15be2bef1f4c85"/>
+          <a:stretch xmlns:a="http://schemas.openxmlformats.org/drawingml/2006/main"/>
+        </p:blipFill>
+        <p:spPr>
+          <a:xfrm xmlns:a="http://schemas.openxmlformats.org/drawingml/2006/main">
+            <a:off x="9893718" y="209550"/>
+            <a:ext cx="1491414" cy="323850"/>
+          </a:xfrm>
+          <a:prstGeom xmlns:a="http://schemas.openxmlformats.org/drawingml/2006/main" prst="rect">
+            <a:avLst/>
+          </a:prstGeom>
+        </p:spPr>
+      </p:pic>
+      <p:sp>
+        <p:nvSpPr>
+          <p:cNvPr id="13" name="footer-rule">
+            <a:extLst xmlns:a="http://schemas.openxmlformats.org/drawingml/2006/main">
+              <a:ext uri="{FF2B5EF4-FFF2-40B4-BE49-F238E27FC236}">
+                <a16:creationId xmlns:a16="http://schemas.microsoft.com/office/drawing/2014/main" id="{2E5E96CB-A6EE-42C4-8A11-5070CCB0F65D}"/>
               </a:ext>
             </a:extLst>
           </p:cNvPr>
@@ -12038,10 +13028,10 @@
       </p:sp>
       <p:sp>
         <p:nvSpPr>
-          <p:cNvPr id="12" name="footer">
-            <a:extLst xmlns:a="http://schemas.openxmlformats.org/drawingml/2006/main">
-              <a:ext uri="{FF2B5EF4-FFF2-40B4-BE49-F238E27FC236}">
-                <a16:creationId xmlns:a16="http://schemas.microsoft.com/office/drawing/2014/main" id="{538DBD12-E669-4AC9-9650-F11F4A4F00AA}"/>
+          <p:cNvPr id="14" name="footer">
+            <a:extLst xmlns:a="http://schemas.openxmlformats.org/drawingml/2006/main">
+              <a:ext uri="{FF2B5EF4-FFF2-40B4-BE49-F238E27FC236}">
+                <a16:creationId xmlns:a16="http://schemas.microsoft.com/office/drawing/2014/main" id="{779AFAE1-4060-48F0-A97C-A340FCDF1480}"/>
               </a:ext>
             </a:extLst>
           </p:cNvPr>
@@ -12093,10 +13083,10 @@
       </p:sp>
       <p:sp>
         <p:nvSpPr>
-          <p:cNvPr id="13" name="page-number">
-            <a:extLst xmlns:a="http://schemas.openxmlformats.org/drawingml/2006/main">
-              <a:ext uri="{FF2B5EF4-FFF2-40B4-BE49-F238E27FC236}">
-                <a16:creationId xmlns:a16="http://schemas.microsoft.com/office/drawing/2014/main" id="{D07D55F4-CD5C-4CD5-92A7-734A7F126703}"/>
+          <p:cNvPr id="15" name="page-number">
+            <a:extLst xmlns:a="http://schemas.openxmlformats.org/drawingml/2006/main">
+              <a:ext uri="{FF2B5EF4-FFF2-40B4-BE49-F238E27FC236}">
+                <a16:creationId xmlns:a16="http://schemas.microsoft.com/office/drawing/2014/main" id="{1ACC0C71-992B-4128-A97D-63E69C244B2D}"/>
               </a:ext>
             </a:extLst>
           </p:cNvPr>
@@ -12149,7 +13139,7 @@
     </p:spTree>
     <p:extLst>
       <p:ext uri="{BB962C8B-B14F-4D97-AF65-F5344CB8AC3E}">
-        <p14:creationId xmlns:p14="http://schemas.microsoft.com/office/powerpoint/2010/main" val="1601852008"/>
+        <p14:creationId xmlns:p14="http://schemas.microsoft.com/office/powerpoint/2010/main" val="20235642"/>
       </p:ext>
     </p:extLst>
   </p:cSld>
@@ -12185,10 +13175,10 @@
       </p:grpSpPr>
       <p:sp>
         <p:nvSpPr>
-          <p:cNvPr id="11" name="slide-title">
-            <a:extLst xmlns:a="http://schemas.openxmlformats.org/drawingml/2006/main">
-              <a:ext uri="{FF2B5EF4-FFF2-40B4-BE49-F238E27FC236}">
-                <a16:creationId xmlns:a16="http://schemas.microsoft.com/office/drawing/2014/main" id="{55328006-DD39-46C4-A0CA-FBF038444275}"/>
+          <p:cNvPr id="13" name="slide-title">
+            <a:extLst xmlns:a="http://schemas.openxmlformats.org/drawingml/2006/main">
+              <a:ext uri="{FF2B5EF4-FFF2-40B4-BE49-F238E27FC236}">
+                <a16:creationId xmlns:a16="http://schemas.microsoft.com/office/drawing/2014/main" id="{08DA0E5F-DBCF-47E6-947F-5A53AB80E9FE}"/>
               </a:ext>
             </a:extLst>
           </p:cNvPr>
@@ -12239,7 +13229,7 @@
           <p:cNvPr id="2" name="slide-subtitle">
             <a:extLst xmlns:a="http://schemas.openxmlformats.org/drawingml/2006/main">
               <a:ext uri="{FF2B5EF4-FFF2-40B4-BE49-F238E27FC236}">
-                <a16:creationId xmlns:a16="http://schemas.microsoft.com/office/drawing/2014/main" id="{4161D085-7538-46F8-9B4E-F5A0514B1248}"/>
+                <a16:creationId xmlns:a16="http://schemas.microsoft.com/office/drawing/2014/main" id="{3F8DD91A-6EDC-42F3-88F6-F094D89D1227}"/>
               </a:ext>
             </a:extLst>
           </p:cNvPr>
@@ -12290,7 +13280,7 @@
           <p:cNvPr id="3" name="bullets">
             <a:extLst xmlns:a="http://schemas.openxmlformats.org/drawingml/2006/main">
               <a:ext uri="{FF2B5EF4-FFF2-40B4-BE49-F238E27FC236}">
-                <a16:creationId xmlns:a16="http://schemas.microsoft.com/office/drawing/2014/main" id="{8BDCA689-66F5-4D29-B562-A0DD2E716B35}"/>
+                <a16:creationId xmlns:a16="http://schemas.microsoft.com/office/drawing/2014/main" id="{B6C7CC51-F768-4519-85C2-11FD8DC04AC8}"/>
               </a:ext>
             </a:extLst>
           </p:cNvPr>
@@ -12413,7 +13403,7 @@
           <p:cNvPr id="4" name="ambient-glow">
             <a:extLst xmlns:a="http://schemas.openxmlformats.org/drawingml/2006/main">
               <a:ext uri="{FF2B5EF4-FFF2-40B4-BE49-F238E27FC236}">
-                <a16:creationId xmlns:a16="http://schemas.microsoft.com/office/drawing/2014/main" id="{E577BE1D-F25A-4641-9E2C-E1DFD2ED43BD}"/>
+                <a16:creationId xmlns:a16="http://schemas.microsoft.com/office/drawing/2014/main" id="{16B744EA-F8B8-4A4A-BEC7-0E1F929EF91A}"/>
               </a:ext>
             </a:extLst>
           </p:cNvPr>
@@ -12450,7 +13440,7 @@
           <p:cNvPr id="5" name="ambient-core">
             <a:extLst xmlns:a="http://schemas.openxmlformats.org/drawingml/2006/main">
               <a:ext uri="{FF2B5EF4-FFF2-40B4-BE49-F238E27FC236}">
-                <a16:creationId xmlns:a16="http://schemas.microsoft.com/office/drawing/2014/main" id="{407B51E0-A5F6-485E-B35F-54BB146F3BEF}"/>
+                <a16:creationId xmlns:a16="http://schemas.microsoft.com/office/drawing/2014/main" id="{0868BE16-5E9D-4384-930C-51F74F4D125B}"/>
               </a:ext>
             </a:extLst>
           </p:cNvPr>
@@ -12487,7 +13477,7 @@
           <p:cNvPr id="6" name="section-number">
             <a:extLst xmlns:a="http://schemas.openxmlformats.org/drawingml/2006/main">
               <a:ext uri="{FF2B5EF4-FFF2-40B4-BE49-F238E27FC236}">
-                <a16:creationId xmlns:a16="http://schemas.microsoft.com/office/drawing/2014/main" id="{7C05FC20-D242-457E-AF71-375CB5B7D511}"/>
+                <a16:creationId xmlns:a16="http://schemas.microsoft.com/office/drawing/2014/main" id="{CF2EDC46-8C7F-41A6-8F12-33449D484E4C}"/>
               </a:ext>
             </a:extLst>
           </p:cNvPr>
@@ -12538,7 +13528,7 @@
           <p:cNvPr id="7" name="eyebrow">
             <a:extLst xmlns:a="http://schemas.openxmlformats.org/drawingml/2006/main">
               <a:ext uri="{FF2B5EF4-FFF2-40B4-BE49-F238E27FC236}">
-                <a16:creationId xmlns:a16="http://schemas.microsoft.com/office/drawing/2014/main" id="{84E4150E-CAE4-40F0-8404-1298F04DA554}"/>
+                <a16:creationId xmlns:a16="http://schemas.microsoft.com/office/drawing/2014/main" id="{024794D4-2CD1-4716-A704-4044AE97A921}"/>
               </a:ext>
             </a:extLst>
           </p:cNvPr>
@@ -12586,10 +13576,69 @@
       </p:sp>
       <p:sp>
         <p:nvSpPr>
-          <p:cNvPr id="8" name="footer-rule">
-            <a:extLst xmlns:a="http://schemas.openxmlformats.org/drawingml/2006/main">
-              <a:ext uri="{FF2B5EF4-FFF2-40B4-BE49-F238E27FC236}">
-                <a16:creationId xmlns:a16="http://schemas.microsoft.com/office/drawing/2014/main" id="{3AAC83D9-0141-40A5-A794-57794EE3CF8E}"/>
+          <p:cNvPr id="8" name="rescue-point-logo-background">
+            <a:extLst xmlns:a="http://schemas.openxmlformats.org/drawingml/2006/main">
+              <a:ext uri="{FF2B5EF4-FFF2-40B4-BE49-F238E27FC236}">
+                <a16:creationId xmlns:a16="http://schemas.microsoft.com/office/drawing/2014/main" id="{826FCC58-7C01-4C44-8112-625CF0C53857}"/>
+              </a:ext>
+            </a:extLst>
+          </p:cNvPr>
+          <p:cNvSpPr>
+            <a:spLocks xmlns:a="http://schemas.openxmlformats.org/drawingml/2006/main" noGrp="1"/>
+          </p:cNvSpPr>
+          <p:nvPr/>
+        </p:nvSpPr>
+        <p:spPr>
+          <a:xfrm xmlns:a="http://schemas.openxmlformats.org/drawingml/2006/main">
+            <a:off x="9772650" y="133350"/>
+            <a:ext cx="1733550" cy="457200"/>
+          </a:xfrm>
+          <a:prstGeom xmlns:a="http://schemas.openxmlformats.org/drawingml/2006/main" prst="roundRect">
+            <a:avLst>
+              <a:gd name="adj" fmla="val 16667"/>
+            </a:avLst>
+          </a:prstGeom>
+          <a:solidFill xmlns:a="http://schemas.openxmlformats.org/drawingml/2006/main">
+            <a:srgbClr val="06142E"/>
+          </a:solidFill>
+          <a:ln xmlns:a="http://schemas.openxmlformats.org/drawingml/2006/main" w="9525">
+            <a:solidFill>
+              <a:srgbClr val="1EC5FF">
+                <a:alpha val="33333"/>
+              </a:srgbClr>
+            </a:solidFill>
+            <a:prstDash val="solid"/>
+          </a:ln>
+        </p:spPr>
+      </p:sp>
+      <p:pic>
+        <p:nvPicPr>
+          <p:cNvPr id="23" name="" descr="Figura oficial da documentação dbt usada para explicar: Cinco perguntas, cinco mecanismos — Unit, contrato, data test, freshness e observabilidade cobrem riscos distintos.."/>
+          <p:cNvPicPr>
+            <a:picLocks xmlns:a="http://schemas.openxmlformats.org/drawingml/2006/main" noChangeAspect="1"/>
+          </p:cNvPicPr>
+          <p:nvPr/>
+        </p:nvPicPr>
+        <p:blipFill>
+          <a:blip xmlns:r="http://schemas.openxmlformats.org/officeDocument/2006/relationships" xmlns:a="http://schemas.openxmlformats.org/drawingml/2006/main" r:embed="R4cff29140c8c41b4"/>
+          <a:stretch xmlns:a="http://schemas.openxmlformats.org/drawingml/2006/main"/>
+        </p:blipFill>
+        <p:spPr>
+          <a:xfrm xmlns:a="http://schemas.openxmlformats.org/drawingml/2006/main">
+            <a:off x="9893718" y="209550"/>
+            <a:ext cx="1491414" cy="323850"/>
+          </a:xfrm>
+          <a:prstGeom xmlns:a="http://schemas.openxmlformats.org/drawingml/2006/main" prst="rect">
+            <a:avLst/>
+          </a:prstGeom>
+        </p:spPr>
+      </p:pic>
+      <p:sp>
+        <p:nvSpPr>
+          <p:cNvPr id="10" name="footer-rule">
+            <a:extLst xmlns:a="http://schemas.openxmlformats.org/drawingml/2006/main">
+              <a:ext uri="{FF2B5EF4-FFF2-40B4-BE49-F238E27FC236}">
+                <a16:creationId xmlns:a16="http://schemas.microsoft.com/office/drawing/2014/main" id="{E1637A8E-4ED3-4DC8-A65F-FB47DBAF392F}"/>
               </a:ext>
             </a:extLst>
           </p:cNvPr>
@@ -12619,10 +13668,10 @@
       </p:sp>
       <p:sp>
         <p:nvSpPr>
-          <p:cNvPr id="9" name="footer">
-            <a:extLst xmlns:a="http://schemas.openxmlformats.org/drawingml/2006/main">
-              <a:ext uri="{FF2B5EF4-FFF2-40B4-BE49-F238E27FC236}">
-                <a16:creationId xmlns:a16="http://schemas.microsoft.com/office/drawing/2014/main" id="{F1565F0E-0F66-4D88-B365-1D6BA7EF1208}"/>
+          <p:cNvPr id="11" name="footer">
+            <a:extLst xmlns:a="http://schemas.openxmlformats.org/drawingml/2006/main">
+              <a:ext uri="{FF2B5EF4-FFF2-40B4-BE49-F238E27FC236}">
+                <a16:creationId xmlns:a16="http://schemas.microsoft.com/office/drawing/2014/main" id="{56E49F3E-EC5E-4CBE-BA86-B82C5DC84636}"/>
               </a:ext>
             </a:extLst>
           </p:cNvPr>
@@ -12674,10 +13723,10 @@
       </p:sp>
       <p:sp>
         <p:nvSpPr>
-          <p:cNvPr id="10" name="page-number">
-            <a:extLst xmlns:a="http://schemas.openxmlformats.org/drawingml/2006/main">
-              <a:ext uri="{FF2B5EF4-FFF2-40B4-BE49-F238E27FC236}">
-                <a16:creationId xmlns:a16="http://schemas.microsoft.com/office/drawing/2014/main" id="{8AD0E6A2-42DF-45C9-8913-B76B3E3A1178}"/>
+          <p:cNvPr id="12" name="page-number">
+            <a:extLst xmlns:a="http://schemas.openxmlformats.org/drawingml/2006/main">
+              <a:ext uri="{FF2B5EF4-FFF2-40B4-BE49-F238E27FC236}">
+                <a16:creationId xmlns:a16="http://schemas.microsoft.com/office/drawing/2014/main" id="{A8D77AA5-AAB6-4E13-A00A-717DD3B1E4F4}"/>
               </a:ext>
             </a:extLst>
           </p:cNvPr>
@@ -12730,7 +13779,7 @@
     </p:spTree>
     <p:extLst>
       <p:ext uri="{BB962C8B-B14F-4D97-AF65-F5344CB8AC3E}">
-        <p14:creationId xmlns:p14="http://schemas.microsoft.com/office/powerpoint/2010/main" val="704906834"/>
+        <p14:creationId xmlns:p14="http://schemas.microsoft.com/office/powerpoint/2010/main" val="1378559414"/>
       </p:ext>
     </p:extLst>
   </p:cSld>
@@ -12758,10 +13807,10 @@
       </p:grpSpPr>
       <p:sp>
         <p:nvSpPr>
-          <p:cNvPr id="11" name="slide-title">
-            <a:extLst xmlns:a="http://schemas.openxmlformats.org/drawingml/2006/main">
-              <a:ext uri="{FF2B5EF4-FFF2-40B4-BE49-F238E27FC236}">
-                <a16:creationId xmlns:a16="http://schemas.microsoft.com/office/drawing/2014/main" id="{4E95132F-761D-4B83-816A-F04BACA69B03}"/>
+          <p:cNvPr id="13" name="slide-title">
+            <a:extLst xmlns:a="http://schemas.openxmlformats.org/drawingml/2006/main">
+              <a:ext uri="{FF2B5EF4-FFF2-40B4-BE49-F238E27FC236}">
+                <a16:creationId xmlns:a16="http://schemas.microsoft.com/office/drawing/2014/main" id="{3087EB90-A972-47BC-80F0-C9ED2FF9860A}"/>
               </a:ext>
             </a:extLst>
           </p:cNvPr>
@@ -12812,7 +13861,7 @@
           <p:cNvPr id="2" name="layer-1">
             <a:extLst xmlns:a="http://schemas.openxmlformats.org/drawingml/2006/main">
               <a:ext uri="{FF2B5EF4-FFF2-40B4-BE49-F238E27FC236}">
-                <a16:creationId xmlns:a16="http://schemas.microsoft.com/office/drawing/2014/main" id="{33645E7E-3AE5-4812-8CDA-292E8062FDBE}"/>
+                <a16:creationId xmlns:a16="http://schemas.microsoft.com/office/drawing/2014/main" id="{1D03AE94-05CC-47BD-8A77-203CEA5EA898}"/>
               </a:ext>
             </a:extLst>
           </p:cNvPr>
@@ -12869,7 +13918,7 @@
           <p:cNvPr id="3" name="layer-2">
             <a:extLst xmlns:a="http://schemas.openxmlformats.org/drawingml/2006/main">
               <a:ext uri="{FF2B5EF4-FFF2-40B4-BE49-F238E27FC236}">
-                <a16:creationId xmlns:a16="http://schemas.microsoft.com/office/drawing/2014/main" id="{995BE518-B3DC-47CD-8BB3-6FB1BAA6BFF9}"/>
+                <a16:creationId xmlns:a16="http://schemas.microsoft.com/office/drawing/2014/main" id="{18BCF876-1191-4F1E-BDB9-A127980CB8E7}"/>
               </a:ext>
             </a:extLst>
           </p:cNvPr>
@@ -12926,7 +13975,7 @@
           <p:cNvPr id="4" name="layer-3">
             <a:extLst xmlns:a="http://schemas.openxmlformats.org/drawingml/2006/main">
               <a:ext uri="{FF2B5EF4-FFF2-40B4-BE49-F238E27FC236}">
-                <a16:creationId xmlns:a16="http://schemas.microsoft.com/office/drawing/2014/main" id="{9F45FD96-811B-4597-9D93-AC0D1AA55153}"/>
+                <a16:creationId xmlns:a16="http://schemas.microsoft.com/office/drawing/2014/main" id="{ABAB07EC-92C5-481E-BE11-72F1D7AC2769}"/>
               </a:ext>
             </a:extLst>
           </p:cNvPr>
@@ -12983,7 +14032,7 @@
           <p:cNvPr id="5" name="layer-4">
             <a:extLst xmlns:a="http://schemas.openxmlformats.org/drawingml/2006/main">
               <a:ext uri="{FF2B5EF4-FFF2-40B4-BE49-F238E27FC236}">
-                <a16:creationId xmlns:a16="http://schemas.microsoft.com/office/drawing/2014/main" id="{39FFAB00-C983-4DAC-ADD5-55930377F593}"/>
+                <a16:creationId xmlns:a16="http://schemas.microsoft.com/office/drawing/2014/main" id="{0891A062-0E09-4BDE-9966-BF017B1E359F}"/>
               </a:ext>
             </a:extLst>
           </p:cNvPr>
@@ -13040,7 +14089,7 @@
           <p:cNvPr id="6" name="layer-5">
             <a:extLst xmlns:a="http://schemas.openxmlformats.org/drawingml/2006/main">
               <a:ext uri="{FF2B5EF4-FFF2-40B4-BE49-F238E27FC236}">
-                <a16:creationId xmlns:a16="http://schemas.microsoft.com/office/drawing/2014/main" id="{6261FC85-9883-468B-A076-113D1AD4DE38}"/>
+                <a16:creationId xmlns:a16="http://schemas.microsoft.com/office/drawing/2014/main" id="{0F8EE153-B550-44F1-81BD-AC2F663AC348}"/>
               </a:ext>
             </a:extLst>
           </p:cNvPr>
@@ -13097,7 +14146,7 @@
           <p:cNvPr id="7" name="eyebrow">
             <a:extLst xmlns:a="http://schemas.openxmlformats.org/drawingml/2006/main">
               <a:ext uri="{FF2B5EF4-FFF2-40B4-BE49-F238E27FC236}">
-                <a16:creationId xmlns:a16="http://schemas.microsoft.com/office/drawing/2014/main" id="{BD382B8C-C8FE-4728-BA16-A310572F63B2}"/>
+                <a16:creationId xmlns:a16="http://schemas.microsoft.com/office/drawing/2014/main" id="{CE174200-8FFC-4A50-8E13-F8602544C70C}"/>
               </a:ext>
             </a:extLst>
           </p:cNvPr>
@@ -13145,10 +14194,69 @@
       </p:sp>
       <p:sp>
         <p:nvSpPr>
-          <p:cNvPr id="8" name="footer-rule">
-            <a:extLst xmlns:a="http://schemas.openxmlformats.org/drawingml/2006/main">
-              <a:ext uri="{FF2B5EF4-FFF2-40B4-BE49-F238E27FC236}">
-                <a16:creationId xmlns:a16="http://schemas.microsoft.com/office/drawing/2014/main" id="{294DA378-1C12-4592-9A6A-8E6720E13424}"/>
+          <p:cNvPr id="8" name="rescue-point-logo-background">
+            <a:extLst xmlns:a="http://schemas.openxmlformats.org/drawingml/2006/main">
+              <a:ext uri="{FF2B5EF4-FFF2-40B4-BE49-F238E27FC236}">
+                <a16:creationId xmlns:a16="http://schemas.microsoft.com/office/drawing/2014/main" id="{B35DB9FF-4B04-410A-9FD9-B949D2E2239B}"/>
+              </a:ext>
+            </a:extLst>
+          </p:cNvPr>
+          <p:cNvSpPr>
+            <a:spLocks xmlns:a="http://schemas.openxmlformats.org/drawingml/2006/main" noGrp="1"/>
+          </p:cNvSpPr>
+          <p:nvPr/>
+        </p:nvSpPr>
+        <p:spPr>
+          <a:xfrm xmlns:a="http://schemas.openxmlformats.org/drawingml/2006/main">
+            <a:off x="9772650" y="133350"/>
+            <a:ext cx="1733550" cy="457200"/>
+          </a:xfrm>
+          <a:prstGeom xmlns:a="http://schemas.openxmlformats.org/drawingml/2006/main" prst="roundRect">
+            <a:avLst>
+              <a:gd name="adj" fmla="val 16667"/>
+            </a:avLst>
+          </a:prstGeom>
+          <a:solidFill xmlns:a="http://schemas.openxmlformats.org/drawingml/2006/main">
+            <a:srgbClr val="06142E"/>
+          </a:solidFill>
+          <a:ln xmlns:a="http://schemas.openxmlformats.org/drawingml/2006/main" w="9525">
+            <a:solidFill>
+              <a:srgbClr val="1EC5FF">
+                <a:alpha val="33333"/>
+              </a:srgbClr>
+            </a:solidFill>
+            <a:prstDash val="solid"/>
+          </a:ln>
+        </p:spPr>
+      </p:sp>
+      <p:pic>
+        <p:nvPicPr>
+          <p:cNvPr id="23" name="" descr="Figura oficial da documentação dbt usada para explicar: Cinco perguntas, cinco mecanismos — Contrato."/>
+          <p:cNvPicPr>
+            <a:picLocks xmlns:a="http://schemas.openxmlformats.org/drawingml/2006/main" noChangeAspect="1"/>
+          </p:cNvPicPr>
+          <p:nvPr/>
+        </p:nvPicPr>
+        <p:blipFill>
+          <a:blip xmlns:r="http://schemas.openxmlformats.org/officeDocument/2006/relationships" xmlns:a="http://schemas.openxmlformats.org/drawingml/2006/main" r:embed="Rf6a7b5da061a40d8"/>
+          <a:stretch xmlns:a="http://schemas.openxmlformats.org/drawingml/2006/main"/>
+        </p:blipFill>
+        <p:spPr>
+          <a:xfrm xmlns:a="http://schemas.openxmlformats.org/drawingml/2006/main">
+            <a:off x="9893718" y="209550"/>
+            <a:ext cx="1491414" cy="323850"/>
+          </a:xfrm>
+          <a:prstGeom xmlns:a="http://schemas.openxmlformats.org/drawingml/2006/main" prst="rect">
+            <a:avLst/>
+          </a:prstGeom>
+        </p:spPr>
+      </p:pic>
+      <p:sp>
+        <p:nvSpPr>
+          <p:cNvPr id="10" name="footer-rule">
+            <a:extLst xmlns:a="http://schemas.openxmlformats.org/drawingml/2006/main">
+              <a:ext uri="{FF2B5EF4-FFF2-40B4-BE49-F238E27FC236}">
+                <a16:creationId xmlns:a16="http://schemas.microsoft.com/office/drawing/2014/main" id="{85AFFCE3-09DB-4DA6-A762-62617E3FD89E}"/>
               </a:ext>
             </a:extLst>
           </p:cNvPr>
@@ -13178,10 +14286,10 @@
       </p:sp>
       <p:sp>
         <p:nvSpPr>
-          <p:cNvPr id="9" name="footer">
-            <a:extLst xmlns:a="http://schemas.openxmlformats.org/drawingml/2006/main">
-              <a:ext uri="{FF2B5EF4-FFF2-40B4-BE49-F238E27FC236}">
-                <a16:creationId xmlns:a16="http://schemas.microsoft.com/office/drawing/2014/main" id="{F843113F-2CF7-4577-815E-371D4DB64CAF}"/>
+          <p:cNvPr id="11" name="footer">
+            <a:extLst xmlns:a="http://schemas.openxmlformats.org/drawingml/2006/main">
+              <a:ext uri="{FF2B5EF4-FFF2-40B4-BE49-F238E27FC236}">
+                <a16:creationId xmlns:a16="http://schemas.microsoft.com/office/drawing/2014/main" id="{6B29D418-A3D6-4310-B539-C5C0BCD8C1E1}"/>
               </a:ext>
             </a:extLst>
           </p:cNvPr>
@@ -13233,10 +14341,10 @@
       </p:sp>
       <p:sp>
         <p:nvSpPr>
-          <p:cNvPr id="10" name="page-number">
-            <a:extLst xmlns:a="http://schemas.openxmlformats.org/drawingml/2006/main">
-              <a:ext uri="{FF2B5EF4-FFF2-40B4-BE49-F238E27FC236}">
-                <a16:creationId xmlns:a16="http://schemas.microsoft.com/office/drawing/2014/main" id="{F3477D45-E48C-41A3-97D5-C31BF428C8A0}"/>
+          <p:cNvPr id="12" name="page-number">
+            <a:extLst xmlns:a="http://schemas.openxmlformats.org/drawingml/2006/main">
+              <a:ext uri="{FF2B5EF4-FFF2-40B4-BE49-F238E27FC236}">
+                <a16:creationId xmlns:a16="http://schemas.microsoft.com/office/drawing/2014/main" id="{26628FE3-914A-48E2-85C5-05A92966DEEE}"/>
               </a:ext>
             </a:extLst>
           </p:cNvPr>
@@ -13289,7 +14397,7 @@
     </p:spTree>
     <p:extLst>
       <p:ext uri="{BB962C8B-B14F-4D97-AF65-F5344CB8AC3E}">
-        <p14:creationId xmlns:p14="http://schemas.microsoft.com/office/powerpoint/2010/main" val="172470782"/>
+        <p14:creationId xmlns:p14="http://schemas.microsoft.com/office/powerpoint/2010/main" val="1583036185"/>
       </p:ext>
     </p:extLst>
   </p:cSld>
@@ -13317,10 +14425,10 @@
       </p:grpSpPr>
       <p:sp>
         <p:nvSpPr>
-          <p:cNvPr id="11" name="slide-title">
-            <a:extLst xmlns:a="http://schemas.openxmlformats.org/drawingml/2006/main">
-              <a:ext uri="{FF2B5EF4-FFF2-40B4-BE49-F238E27FC236}">
-                <a16:creationId xmlns:a16="http://schemas.microsoft.com/office/drawing/2014/main" id="{CF541F82-6AB1-4665-A95F-B10C5D87794F}"/>
+          <p:cNvPr id="13" name="slide-title">
+            <a:extLst xmlns:a="http://schemas.openxmlformats.org/drawingml/2006/main">
+              <a:ext uri="{FF2B5EF4-FFF2-40B4-BE49-F238E27FC236}">
+                <a16:creationId xmlns:a16="http://schemas.microsoft.com/office/drawing/2014/main" id="{D8755E67-7973-4F96-9482-FECFB86E33C4}"/>
               </a:ext>
             </a:extLst>
           </p:cNvPr>
@@ -13371,7 +14479,7 @@
           <p:cNvPr id="2" name="slide-subtitle">
             <a:extLst xmlns:a="http://schemas.openxmlformats.org/drawingml/2006/main">
               <a:ext uri="{FF2B5EF4-FFF2-40B4-BE49-F238E27FC236}">
-                <a16:creationId xmlns:a16="http://schemas.microsoft.com/office/drawing/2014/main" id="{0DC13058-670D-4A5C-90D9-1F357D0C7359}"/>
+                <a16:creationId xmlns:a16="http://schemas.microsoft.com/office/drawing/2014/main" id="{A3D0B15A-E899-4B7C-B27A-F5B1674C0FD0}"/>
               </a:ext>
             </a:extLst>
           </p:cNvPr>
@@ -13422,7 +14530,7 @@
           <p:cNvPr id="3" name="bullets">
             <a:extLst xmlns:a="http://schemas.openxmlformats.org/drawingml/2006/main">
               <a:ext uri="{FF2B5EF4-FFF2-40B4-BE49-F238E27FC236}">
-                <a16:creationId xmlns:a16="http://schemas.microsoft.com/office/drawing/2014/main" id="{164426E4-A318-404B-8DD1-14FE944E11FB}"/>
+                <a16:creationId xmlns:a16="http://schemas.microsoft.com/office/drawing/2014/main" id="{C114302D-ADB3-43BC-BF26-486EB65B18AB}"/>
               </a:ext>
             </a:extLst>
           </p:cNvPr>
@@ -13509,7 +14617,7 @@
           <p:cNvPr id="4" name="ambient-glow">
             <a:extLst xmlns:a="http://schemas.openxmlformats.org/drawingml/2006/main">
               <a:ext uri="{FF2B5EF4-FFF2-40B4-BE49-F238E27FC236}">
-                <a16:creationId xmlns:a16="http://schemas.microsoft.com/office/drawing/2014/main" id="{A64D1F20-6419-494D-910B-1A756AB52D49}"/>
+                <a16:creationId xmlns:a16="http://schemas.microsoft.com/office/drawing/2014/main" id="{414F9EC2-6A2E-4ECC-8EBF-8C16B01FD395}"/>
               </a:ext>
             </a:extLst>
           </p:cNvPr>
@@ -13546,7 +14654,7 @@
           <p:cNvPr id="5" name="ambient-core">
             <a:extLst xmlns:a="http://schemas.openxmlformats.org/drawingml/2006/main">
               <a:ext uri="{FF2B5EF4-FFF2-40B4-BE49-F238E27FC236}">
-                <a16:creationId xmlns:a16="http://schemas.microsoft.com/office/drawing/2014/main" id="{257A77AA-9C87-418A-9662-E0D5E1F62398}"/>
+                <a16:creationId xmlns:a16="http://schemas.microsoft.com/office/drawing/2014/main" id="{09E2BD63-6A13-456C-9F4D-DF548E2A76F2}"/>
               </a:ext>
             </a:extLst>
           </p:cNvPr>
@@ -13583,7 +14691,7 @@
           <p:cNvPr id="6" name="section-number">
             <a:extLst xmlns:a="http://schemas.openxmlformats.org/drawingml/2006/main">
               <a:ext uri="{FF2B5EF4-FFF2-40B4-BE49-F238E27FC236}">
-                <a16:creationId xmlns:a16="http://schemas.microsoft.com/office/drawing/2014/main" id="{1390CF0F-E22D-4CDF-AA3F-0BAACB8EEF52}"/>
+                <a16:creationId xmlns:a16="http://schemas.microsoft.com/office/drawing/2014/main" id="{413A2735-DF83-468A-A336-4C4F0B253CF0}"/>
               </a:ext>
             </a:extLst>
           </p:cNvPr>
@@ -13634,7 +14742,7 @@
           <p:cNvPr id="7" name="eyebrow">
             <a:extLst xmlns:a="http://schemas.openxmlformats.org/drawingml/2006/main">
               <a:ext uri="{FF2B5EF4-FFF2-40B4-BE49-F238E27FC236}">
-                <a16:creationId xmlns:a16="http://schemas.microsoft.com/office/drawing/2014/main" id="{645D3030-037A-4D1F-AFF2-B575013E7CEB}"/>
+                <a16:creationId xmlns:a16="http://schemas.microsoft.com/office/drawing/2014/main" id="{F595AE35-D774-4C1E-94C8-2A531BD3DD20}"/>
               </a:ext>
             </a:extLst>
           </p:cNvPr>
@@ -13682,10 +14790,69 @@
       </p:sp>
       <p:sp>
         <p:nvSpPr>
-          <p:cNvPr id="8" name="footer-rule">
-            <a:extLst xmlns:a="http://schemas.openxmlformats.org/drawingml/2006/main">
-              <a:ext uri="{FF2B5EF4-FFF2-40B4-BE49-F238E27FC236}">
-                <a16:creationId xmlns:a16="http://schemas.microsoft.com/office/drawing/2014/main" id="{65F57D65-9194-4DB6-832C-55316F3E2DDC}"/>
+          <p:cNvPr id="8" name="rescue-point-logo-background">
+            <a:extLst xmlns:a="http://schemas.openxmlformats.org/drawingml/2006/main">
+              <a:ext uri="{FF2B5EF4-FFF2-40B4-BE49-F238E27FC236}">
+                <a16:creationId xmlns:a16="http://schemas.microsoft.com/office/drawing/2014/main" id="{2877BE41-8907-420D-8C99-69362411B8C9}"/>
+              </a:ext>
+            </a:extLst>
+          </p:cNvPr>
+          <p:cNvSpPr>
+            <a:spLocks xmlns:a="http://schemas.openxmlformats.org/drawingml/2006/main" noGrp="1"/>
+          </p:cNvSpPr>
+          <p:nvPr/>
+        </p:nvSpPr>
+        <p:spPr>
+          <a:xfrm xmlns:a="http://schemas.openxmlformats.org/drawingml/2006/main">
+            <a:off x="9772650" y="133350"/>
+            <a:ext cx="1733550" cy="457200"/>
+          </a:xfrm>
+          <a:prstGeom xmlns:a="http://schemas.openxmlformats.org/drawingml/2006/main" prst="roundRect">
+            <a:avLst>
+              <a:gd name="adj" fmla="val 16667"/>
+            </a:avLst>
+          </a:prstGeom>
+          <a:solidFill xmlns:a="http://schemas.openxmlformats.org/drawingml/2006/main">
+            <a:srgbClr val="06142E"/>
+          </a:solidFill>
+          <a:ln xmlns:a="http://schemas.openxmlformats.org/drawingml/2006/main" w="9525">
+            <a:solidFill>
+              <a:srgbClr val="1EC5FF">
+                <a:alpha val="33333"/>
+              </a:srgbClr>
+            </a:solidFill>
+            <a:prstDash val="solid"/>
+          </a:ln>
+        </p:spPr>
+      </p:sp>
+      <p:pic>
+        <p:nvPicPr>
+          <p:cNvPr id="23" name="" descr="Figura oficial da documentação dbt usada para explicar: Unit test captura o bug conhecido — Compra em 1º e entrega em 5 de janeiro devem produzir quatro dias positivos.."/>
+          <p:cNvPicPr>
+            <a:picLocks xmlns:a="http://schemas.openxmlformats.org/drawingml/2006/main" noChangeAspect="1"/>
+          </p:cNvPicPr>
+          <p:nvPr/>
+        </p:nvPicPr>
+        <p:blipFill>
+          <a:blip xmlns:r="http://schemas.openxmlformats.org/officeDocument/2006/relationships" xmlns:a="http://schemas.openxmlformats.org/drawingml/2006/main" r:embed="Rc0823e91113541d6"/>
+          <a:stretch xmlns:a="http://schemas.openxmlformats.org/drawingml/2006/main"/>
+        </p:blipFill>
+        <p:spPr>
+          <a:xfrm xmlns:a="http://schemas.openxmlformats.org/drawingml/2006/main">
+            <a:off x="9893718" y="209550"/>
+            <a:ext cx="1491414" cy="323850"/>
+          </a:xfrm>
+          <a:prstGeom xmlns:a="http://schemas.openxmlformats.org/drawingml/2006/main" prst="rect">
+            <a:avLst/>
+          </a:prstGeom>
+        </p:spPr>
+      </p:pic>
+      <p:sp>
+        <p:nvSpPr>
+          <p:cNvPr id="10" name="footer-rule">
+            <a:extLst xmlns:a="http://schemas.openxmlformats.org/drawingml/2006/main">
+              <a:ext uri="{FF2B5EF4-FFF2-40B4-BE49-F238E27FC236}">
+                <a16:creationId xmlns:a16="http://schemas.microsoft.com/office/drawing/2014/main" id="{3337785B-909F-4950-8C79-5B887AD65728}"/>
               </a:ext>
             </a:extLst>
           </p:cNvPr>
@@ -13715,10 +14882,10 @@
       </p:sp>
       <p:sp>
         <p:nvSpPr>
-          <p:cNvPr id="9" name="footer">
-            <a:extLst xmlns:a="http://schemas.openxmlformats.org/drawingml/2006/main">
-              <a:ext uri="{FF2B5EF4-FFF2-40B4-BE49-F238E27FC236}">
-                <a16:creationId xmlns:a16="http://schemas.microsoft.com/office/drawing/2014/main" id="{8406FAB7-A3D9-4367-B28B-1B663DAE325F}"/>
+          <p:cNvPr id="11" name="footer">
+            <a:extLst xmlns:a="http://schemas.openxmlformats.org/drawingml/2006/main">
+              <a:ext uri="{FF2B5EF4-FFF2-40B4-BE49-F238E27FC236}">
+                <a16:creationId xmlns:a16="http://schemas.microsoft.com/office/drawing/2014/main" id="{B32A34E0-E47B-4BDC-9ED0-8314ABD5CEC0}"/>
               </a:ext>
             </a:extLst>
           </p:cNvPr>
@@ -13770,10 +14937,10 @@
       </p:sp>
       <p:sp>
         <p:nvSpPr>
-          <p:cNvPr id="10" name="page-number">
-            <a:extLst xmlns:a="http://schemas.openxmlformats.org/drawingml/2006/main">
-              <a:ext uri="{FF2B5EF4-FFF2-40B4-BE49-F238E27FC236}">
-                <a16:creationId xmlns:a16="http://schemas.microsoft.com/office/drawing/2014/main" id="{A224CAAD-D874-4405-9252-5523CBA5E01F}"/>
+          <p:cNvPr id="12" name="page-number">
+            <a:extLst xmlns:a="http://schemas.openxmlformats.org/drawingml/2006/main">
+              <a:ext uri="{FF2B5EF4-FFF2-40B4-BE49-F238E27FC236}">
+                <a16:creationId xmlns:a16="http://schemas.microsoft.com/office/drawing/2014/main" id="{762F3A44-0ECC-46F9-971A-484F7C568571}"/>
               </a:ext>
             </a:extLst>
           </p:cNvPr>
@@ -13826,7 +14993,7 @@
     </p:spTree>
     <p:extLst>
       <p:ext uri="{BB962C8B-B14F-4D97-AF65-F5344CB8AC3E}">
-        <p14:creationId xmlns:p14="http://schemas.microsoft.com/office/powerpoint/2010/main" val="1831038361"/>
+        <p14:creationId xmlns:p14="http://schemas.microsoft.com/office/powerpoint/2010/main" val="145733385"/>
       </p:ext>
     </p:extLst>
   </p:cSld>
@@ -13862,10 +15029,10 @@
       </p:grpSpPr>
       <p:sp>
         <p:nvSpPr>
-          <p:cNvPr id="11" name="slide-title">
-            <a:extLst xmlns:a="http://schemas.openxmlformats.org/drawingml/2006/main">
-              <a:ext uri="{FF2B5EF4-FFF2-40B4-BE49-F238E27FC236}">
-                <a16:creationId xmlns:a16="http://schemas.microsoft.com/office/drawing/2014/main" id="{1AD536CF-4731-42A8-A31A-7E7D3FDB0AE9}"/>
+          <p:cNvPr id="13" name="slide-title">
+            <a:extLst xmlns:a="http://schemas.openxmlformats.org/drawingml/2006/main">
+              <a:ext uri="{FF2B5EF4-FFF2-40B4-BE49-F238E27FC236}">
+                <a16:creationId xmlns:a16="http://schemas.microsoft.com/office/drawing/2014/main" id="{FC4F8B24-CB10-4579-B736-2EDF50AE2090}"/>
               </a:ext>
             </a:extLst>
           </p:cNvPr>
@@ -13916,7 +15083,7 @@
           <p:cNvPr id="2" name="compare-left-title">
             <a:extLst xmlns:a="http://schemas.openxmlformats.org/drawingml/2006/main">
               <a:ext uri="{FF2B5EF4-FFF2-40B4-BE49-F238E27FC236}">
-                <a16:creationId xmlns:a16="http://schemas.microsoft.com/office/drawing/2014/main" id="{12E1244B-30F2-4118-93A2-3A5B04C6464F}"/>
+                <a16:creationId xmlns:a16="http://schemas.microsoft.com/office/drawing/2014/main" id="{BAA6335E-57E8-4138-9783-3386C12EF022}"/>
               </a:ext>
             </a:extLst>
           </p:cNvPr>
@@ -13967,7 +15134,7 @@
           <p:cNvPr id="3" name="compare-right-title">
             <a:extLst xmlns:a="http://schemas.openxmlformats.org/drawingml/2006/main">
               <a:ext uri="{FF2B5EF4-FFF2-40B4-BE49-F238E27FC236}">
-                <a16:creationId xmlns:a16="http://schemas.microsoft.com/office/drawing/2014/main" id="{709579B9-5C40-4AAA-B2FB-CADAB0DFC5D3}"/>
+                <a16:creationId xmlns:a16="http://schemas.microsoft.com/office/drawing/2014/main" id="{8DC0CB59-08BD-496D-9934-3C6130680A1F}"/>
               </a:ext>
             </a:extLst>
           </p:cNvPr>
@@ -14018,7 +15185,7 @@
           <p:cNvPr id="4" name="compare-divider">
             <a:extLst xmlns:a="http://schemas.openxmlformats.org/drawingml/2006/main">
               <a:ext uri="{FF2B5EF4-FFF2-40B4-BE49-F238E27FC236}">
-                <a16:creationId xmlns:a16="http://schemas.microsoft.com/office/drawing/2014/main" id="{759CAE15-B620-467B-980C-6BD17F51F4B5}"/>
+                <a16:creationId xmlns:a16="http://schemas.microsoft.com/office/drawing/2014/main" id="{CAEE2380-698F-4F28-84A1-446474B5BD40}"/>
               </a:ext>
             </a:extLst>
           </p:cNvPr>
@@ -14051,7 +15218,7 @@
           <p:cNvPr id="5" name="bullets">
             <a:extLst xmlns:a="http://schemas.openxmlformats.org/drawingml/2006/main">
               <a:ext uri="{FF2B5EF4-FFF2-40B4-BE49-F238E27FC236}">
-                <a16:creationId xmlns:a16="http://schemas.microsoft.com/office/drawing/2014/main" id="{77E8448B-59CB-4A48-825C-BC66807BF846}"/>
+                <a16:creationId xmlns:a16="http://schemas.microsoft.com/office/drawing/2014/main" id="{FC9117A9-271C-404E-A256-214C01063765}"/>
               </a:ext>
             </a:extLst>
           </p:cNvPr>
@@ -14120,7 +15287,7 @@
           <p:cNvPr id="6" name="bullets">
             <a:extLst xmlns:a="http://schemas.openxmlformats.org/drawingml/2006/main">
               <a:ext uri="{FF2B5EF4-FFF2-40B4-BE49-F238E27FC236}">
-                <a16:creationId xmlns:a16="http://schemas.microsoft.com/office/drawing/2014/main" id="{C6437FDF-99D8-44E8-B229-C4DB70D71B42}"/>
+                <a16:creationId xmlns:a16="http://schemas.microsoft.com/office/drawing/2014/main" id="{F1F488F8-186E-4549-AA9B-57F22D71F73D}"/>
               </a:ext>
             </a:extLst>
           </p:cNvPr>
@@ -14171,7 +15338,7 @@
           <p:cNvPr id="7" name="eyebrow">
             <a:extLst xmlns:a="http://schemas.openxmlformats.org/drawingml/2006/main">
               <a:ext uri="{FF2B5EF4-FFF2-40B4-BE49-F238E27FC236}">
-                <a16:creationId xmlns:a16="http://schemas.microsoft.com/office/drawing/2014/main" id="{97F127D6-F8EF-4F36-AEB9-8128E7321298}"/>
+                <a16:creationId xmlns:a16="http://schemas.microsoft.com/office/drawing/2014/main" id="{C8464D75-49C5-4649-9113-E09D0AFD039F}"/>
               </a:ext>
             </a:extLst>
           </p:cNvPr>
@@ -14219,10 +15386,69 @@
       </p:sp>
       <p:sp>
         <p:nvSpPr>
-          <p:cNvPr id="8" name="footer-rule">
-            <a:extLst xmlns:a="http://schemas.openxmlformats.org/drawingml/2006/main">
-              <a:ext uri="{FF2B5EF4-FFF2-40B4-BE49-F238E27FC236}">
-                <a16:creationId xmlns:a16="http://schemas.microsoft.com/office/drawing/2014/main" id="{7EAD8C02-DA04-44BB-B9EF-E4DF9A1F4A1A}"/>
+          <p:cNvPr id="8" name="rescue-point-logo-background">
+            <a:extLst xmlns:a="http://schemas.openxmlformats.org/drawingml/2006/main">
+              <a:ext uri="{FF2B5EF4-FFF2-40B4-BE49-F238E27FC236}">
+                <a16:creationId xmlns:a16="http://schemas.microsoft.com/office/drawing/2014/main" id="{3753C85C-3DE5-4AC1-85E1-DDD14FB59142}"/>
+              </a:ext>
+            </a:extLst>
+          </p:cNvPr>
+          <p:cNvSpPr>
+            <a:spLocks xmlns:a="http://schemas.openxmlformats.org/drawingml/2006/main" noGrp="1"/>
+          </p:cNvSpPr>
+          <p:nvPr/>
+        </p:nvSpPr>
+        <p:spPr>
+          <a:xfrm xmlns:a="http://schemas.openxmlformats.org/drawingml/2006/main">
+            <a:off x="9772650" y="133350"/>
+            <a:ext cx="1733550" cy="457200"/>
+          </a:xfrm>
+          <a:prstGeom xmlns:a="http://schemas.openxmlformats.org/drawingml/2006/main" prst="roundRect">
+            <a:avLst>
+              <a:gd name="adj" fmla="val 16667"/>
+            </a:avLst>
+          </a:prstGeom>
+          <a:solidFill xmlns:a="http://schemas.openxmlformats.org/drawingml/2006/main">
+            <a:srgbClr val="06142E"/>
+          </a:solidFill>
+          <a:ln xmlns:a="http://schemas.openxmlformats.org/drawingml/2006/main" w="9525">
+            <a:solidFill>
+              <a:srgbClr val="1EC5FF">
+                <a:alpha val="33333"/>
+              </a:srgbClr>
+            </a:solidFill>
+            <a:prstDash val="solid"/>
+          </a:ln>
+        </p:spPr>
+      </p:sp>
+      <p:pic>
+        <p:nvPicPr>
+          <p:cNvPr id="23" name="" descr="Figura oficial da documentação dbt usada para explicar: Unit test captura o bug conhecido — Fixture."/>
+          <p:cNvPicPr>
+            <a:picLocks xmlns:a="http://schemas.openxmlformats.org/drawingml/2006/main" noChangeAspect="1"/>
+          </p:cNvPicPr>
+          <p:nvPr/>
+        </p:nvPicPr>
+        <p:blipFill>
+          <a:blip xmlns:r="http://schemas.openxmlformats.org/officeDocument/2006/relationships" xmlns:a="http://schemas.openxmlformats.org/drawingml/2006/main" r:embed="R9e5da2a7687c452a"/>
+          <a:stretch xmlns:a="http://schemas.openxmlformats.org/drawingml/2006/main"/>
+        </p:blipFill>
+        <p:spPr>
+          <a:xfrm xmlns:a="http://schemas.openxmlformats.org/drawingml/2006/main">
+            <a:off x="9893718" y="209550"/>
+            <a:ext cx="1491414" cy="323850"/>
+          </a:xfrm>
+          <a:prstGeom xmlns:a="http://schemas.openxmlformats.org/drawingml/2006/main" prst="rect">
+            <a:avLst/>
+          </a:prstGeom>
+        </p:spPr>
+      </p:pic>
+      <p:sp>
+        <p:nvSpPr>
+          <p:cNvPr id="10" name="footer-rule">
+            <a:extLst xmlns:a="http://schemas.openxmlformats.org/drawingml/2006/main">
+              <a:ext uri="{FF2B5EF4-FFF2-40B4-BE49-F238E27FC236}">
+                <a16:creationId xmlns:a16="http://schemas.microsoft.com/office/drawing/2014/main" id="{1DD14AE9-B592-47BC-874F-DD4F09656F57}"/>
               </a:ext>
             </a:extLst>
           </p:cNvPr>
@@ -14252,10 +15478,10 @@
       </p:sp>
       <p:sp>
         <p:nvSpPr>
-          <p:cNvPr id="9" name="footer">
-            <a:extLst xmlns:a="http://schemas.openxmlformats.org/drawingml/2006/main">
-              <a:ext uri="{FF2B5EF4-FFF2-40B4-BE49-F238E27FC236}">
-                <a16:creationId xmlns:a16="http://schemas.microsoft.com/office/drawing/2014/main" id="{54B97C7C-78D5-4450-8B96-C398FACB0FAD}"/>
+          <p:cNvPr id="11" name="footer">
+            <a:extLst xmlns:a="http://schemas.openxmlformats.org/drawingml/2006/main">
+              <a:ext uri="{FF2B5EF4-FFF2-40B4-BE49-F238E27FC236}">
+                <a16:creationId xmlns:a16="http://schemas.microsoft.com/office/drawing/2014/main" id="{50E49B5A-A373-47B2-B61D-7CA471852B62}"/>
               </a:ext>
             </a:extLst>
           </p:cNvPr>
@@ -14307,10 +15533,10 @@
       </p:sp>
       <p:sp>
         <p:nvSpPr>
-          <p:cNvPr id="10" name="page-number">
-            <a:extLst xmlns:a="http://schemas.openxmlformats.org/drawingml/2006/main">
-              <a:ext uri="{FF2B5EF4-FFF2-40B4-BE49-F238E27FC236}">
-                <a16:creationId xmlns:a16="http://schemas.microsoft.com/office/drawing/2014/main" id="{4D80CC23-69BD-4E98-845D-4B316B12FFB7}"/>
+          <p:cNvPr id="12" name="page-number">
+            <a:extLst xmlns:a="http://schemas.openxmlformats.org/drawingml/2006/main">
+              <a:ext uri="{FF2B5EF4-FFF2-40B4-BE49-F238E27FC236}">
+                <a16:creationId xmlns:a16="http://schemas.microsoft.com/office/drawing/2014/main" id="{77607C78-FE6D-4B56-AAF8-6EB671839099}"/>
               </a:ext>
             </a:extLst>
           </p:cNvPr>
@@ -14363,7 +15589,7 @@
     </p:spTree>
     <p:extLst>
       <p:ext uri="{BB962C8B-B14F-4D97-AF65-F5344CB8AC3E}">
-        <p14:creationId xmlns:p14="http://schemas.microsoft.com/office/powerpoint/2010/main" val="1534264439"/>
+        <p14:creationId xmlns:p14="http://schemas.microsoft.com/office/powerpoint/2010/main" val="425695903"/>
       </p:ext>
     </p:extLst>
   </p:cSld>
@@ -14399,10 +15625,10 @@
       </p:grpSpPr>
       <p:sp>
         <p:nvSpPr>
-          <p:cNvPr id="11" name="slide-title">
-            <a:extLst xmlns:a="http://schemas.openxmlformats.org/drawingml/2006/main">
-              <a:ext uri="{FF2B5EF4-FFF2-40B4-BE49-F238E27FC236}">
-                <a16:creationId xmlns:a16="http://schemas.microsoft.com/office/drawing/2014/main" id="{AC3127FF-5C2C-40C7-982F-DE60DB4CF690}"/>
+          <p:cNvPr id="13" name="slide-title">
+            <a:extLst xmlns:a="http://schemas.openxmlformats.org/drawingml/2006/main">
+              <a:ext uri="{FF2B5EF4-FFF2-40B4-BE49-F238E27FC236}">
+                <a16:creationId xmlns:a16="http://schemas.microsoft.com/office/drawing/2014/main" id="{F02CB669-9B70-486B-A43C-E48582BA58EB}"/>
               </a:ext>
             </a:extLst>
           </p:cNvPr>
@@ -14453,7 +15679,7 @@
           <p:cNvPr id="2" name="slide-subtitle">
             <a:extLst xmlns:a="http://schemas.openxmlformats.org/drawingml/2006/main">
               <a:ext uri="{FF2B5EF4-FFF2-40B4-BE49-F238E27FC236}">
-                <a16:creationId xmlns:a16="http://schemas.microsoft.com/office/drawing/2014/main" id="{EE86EC28-26D6-4BA9-829E-74EB1B8637EA}"/>
+                <a16:creationId xmlns:a16="http://schemas.microsoft.com/office/drawing/2014/main" id="{EB30F1F4-E760-4B5F-869C-E04D5D9F1BE4}"/>
               </a:ext>
             </a:extLst>
           </p:cNvPr>
@@ -14504,7 +15730,7 @@
           <p:cNvPr id="3" name="bullets">
             <a:extLst xmlns:a="http://schemas.openxmlformats.org/drawingml/2006/main">
               <a:ext uri="{FF2B5EF4-FFF2-40B4-BE49-F238E27FC236}">
-                <a16:creationId xmlns:a16="http://schemas.microsoft.com/office/drawing/2014/main" id="{F9A31F0E-7E7D-44C9-B4F2-AD2C18D2EDE5}"/>
+                <a16:creationId xmlns:a16="http://schemas.microsoft.com/office/drawing/2014/main" id="{113E9A77-F786-472E-AC9D-F8CB25FC1EF6}"/>
               </a:ext>
             </a:extLst>
           </p:cNvPr>
@@ -14591,7 +15817,7 @@
           <p:cNvPr id="4" name="ambient-glow">
             <a:extLst xmlns:a="http://schemas.openxmlformats.org/drawingml/2006/main">
               <a:ext uri="{FF2B5EF4-FFF2-40B4-BE49-F238E27FC236}">
-                <a16:creationId xmlns:a16="http://schemas.microsoft.com/office/drawing/2014/main" id="{8E3B0A29-3185-484B-A962-657D8672C328}"/>
+                <a16:creationId xmlns:a16="http://schemas.microsoft.com/office/drawing/2014/main" id="{7E7DD81B-2102-4C03-BE76-1BF6CFCACCAA}"/>
               </a:ext>
             </a:extLst>
           </p:cNvPr>
@@ -14628,7 +15854,7 @@
           <p:cNvPr id="5" name="ambient-core">
             <a:extLst xmlns:a="http://schemas.openxmlformats.org/drawingml/2006/main">
               <a:ext uri="{FF2B5EF4-FFF2-40B4-BE49-F238E27FC236}">
-                <a16:creationId xmlns:a16="http://schemas.microsoft.com/office/drawing/2014/main" id="{EEE744A6-95F0-4808-8F5B-9D1171357DA9}"/>
+                <a16:creationId xmlns:a16="http://schemas.microsoft.com/office/drawing/2014/main" id="{5EAADD6D-ED28-41A7-BB8F-5F2D404C27A5}"/>
               </a:ext>
             </a:extLst>
           </p:cNvPr>
@@ -14665,7 +15891,7 @@
           <p:cNvPr id="6" name="section-number">
             <a:extLst xmlns:a="http://schemas.openxmlformats.org/drawingml/2006/main">
               <a:ext uri="{FF2B5EF4-FFF2-40B4-BE49-F238E27FC236}">
-                <a16:creationId xmlns:a16="http://schemas.microsoft.com/office/drawing/2014/main" id="{58086842-FF26-4686-9737-5A49F31CAD5C}"/>
+                <a16:creationId xmlns:a16="http://schemas.microsoft.com/office/drawing/2014/main" id="{907E7ED2-38A3-4AA9-9173-83F6BCF5F9DD}"/>
               </a:ext>
             </a:extLst>
           </p:cNvPr>
@@ -14716,7 +15942,7 @@
           <p:cNvPr id="7" name="eyebrow">
             <a:extLst xmlns:a="http://schemas.openxmlformats.org/drawingml/2006/main">
               <a:ext uri="{FF2B5EF4-FFF2-40B4-BE49-F238E27FC236}">
-                <a16:creationId xmlns:a16="http://schemas.microsoft.com/office/drawing/2014/main" id="{D898E4C5-56EB-4700-AA2F-1509AEBF038B}"/>
+                <a16:creationId xmlns:a16="http://schemas.microsoft.com/office/drawing/2014/main" id="{262E1E52-30EF-49DD-8D87-3D3E0D66127B}"/>
               </a:ext>
             </a:extLst>
           </p:cNvPr>
@@ -14764,10 +15990,69 @@
       </p:sp>
       <p:sp>
         <p:nvSpPr>
-          <p:cNvPr id="8" name="footer-rule">
-            <a:extLst xmlns:a="http://schemas.openxmlformats.org/drawingml/2006/main">
-              <a:ext uri="{FF2B5EF4-FFF2-40B4-BE49-F238E27FC236}">
-                <a16:creationId xmlns:a16="http://schemas.microsoft.com/office/drawing/2014/main" id="{83F7CB66-A2C2-4FBE-A1BB-BFC5447A9E1C}"/>
+          <p:cNvPr id="8" name="rescue-point-logo-background">
+            <a:extLst xmlns:a="http://schemas.openxmlformats.org/drawingml/2006/main">
+              <a:ext uri="{FF2B5EF4-FFF2-40B4-BE49-F238E27FC236}">
+                <a16:creationId xmlns:a16="http://schemas.microsoft.com/office/drawing/2014/main" id="{BA50B74F-B917-45B6-B2DA-BE8C5A4AE872}"/>
+              </a:ext>
+            </a:extLst>
+          </p:cNvPr>
+          <p:cNvSpPr>
+            <a:spLocks xmlns:a="http://schemas.openxmlformats.org/drawingml/2006/main" noGrp="1"/>
+          </p:cNvSpPr>
+          <p:nvPr/>
+        </p:nvSpPr>
+        <p:spPr>
+          <a:xfrm xmlns:a="http://schemas.openxmlformats.org/drawingml/2006/main">
+            <a:off x="9772650" y="133350"/>
+            <a:ext cx="1733550" cy="457200"/>
+          </a:xfrm>
+          <a:prstGeom xmlns:a="http://schemas.openxmlformats.org/drawingml/2006/main" prst="roundRect">
+            <a:avLst>
+              <a:gd name="adj" fmla="val 16667"/>
+            </a:avLst>
+          </a:prstGeom>
+          <a:solidFill xmlns:a="http://schemas.openxmlformats.org/drawingml/2006/main">
+            <a:srgbClr val="06142E"/>
+          </a:solidFill>
+          <a:ln xmlns:a="http://schemas.openxmlformats.org/drawingml/2006/main" w="9525">
+            <a:solidFill>
+              <a:srgbClr val="1EC5FF">
+                <a:alpha val="33333"/>
+              </a:srgbClr>
+            </a:solidFill>
+            <a:prstDash val="solid"/>
+          </a:ln>
+        </p:spPr>
+      </p:sp>
+      <p:pic>
+        <p:nvPicPr>
+          <p:cNvPr id="23" name="" descr="Figura oficial da documentação dbt usada para explicar: O exemplo oficial mostra execução isolada — Unit tests validam lógica SQL antes de materializar toda a população.."/>
+          <p:cNvPicPr>
+            <a:picLocks xmlns:a="http://schemas.openxmlformats.org/drawingml/2006/main" noChangeAspect="1"/>
+          </p:cNvPicPr>
+          <p:nvPr/>
+        </p:nvPicPr>
+        <p:blipFill>
+          <a:blip xmlns:r="http://schemas.openxmlformats.org/officeDocument/2006/relationships" xmlns:a="http://schemas.openxmlformats.org/drawingml/2006/main" r:embed="R5d43659a27064fbf"/>
+          <a:stretch xmlns:a="http://schemas.openxmlformats.org/drawingml/2006/main"/>
+        </p:blipFill>
+        <p:spPr>
+          <a:xfrm xmlns:a="http://schemas.openxmlformats.org/drawingml/2006/main">
+            <a:off x="9893718" y="209550"/>
+            <a:ext cx="1491414" cy="323850"/>
+          </a:xfrm>
+          <a:prstGeom xmlns:a="http://schemas.openxmlformats.org/drawingml/2006/main" prst="rect">
+            <a:avLst/>
+          </a:prstGeom>
+        </p:spPr>
+      </p:pic>
+      <p:sp>
+        <p:nvSpPr>
+          <p:cNvPr id="10" name="footer-rule">
+            <a:extLst xmlns:a="http://schemas.openxmlformats.org/drawingml/2006/main">
+              <a:ext uri="{FF2B5EF4-FFF2-40B4-BE49-F238E27FC236}">
+                <a16:creationId xmlns:a16="http://schemas.microsoft.com/office/drawing/2014/main" id="{108097BD-EF35-4541-9E71-C204F226FF59}"/>
               </a:ext>
             </a:extLst>
           </p:cNvPr>
@@ -14797,10 +16082,10 @@
       </p:sp>
       <p:sp>
         <p:nvSpPr>
-          <p:cNvPr id="9" name="footer">
-            <a:extLst xmlns:a="http://schemas.openxmlformats.org/drawingml/2006/main">
-              <a:ext uri="{FF2B5EF4-FFF2-40B4-BE49-F238E27FC236}">
-                <a16:creationId xmlns:a16="http://schemas.microsoft.com/office/drawing/2014/main" id="{4F82D2AD-E54C-4942-9C36-D5B9F1E3914E}"/>
+          <p:cNvPr id="11" name="footer">
+            <a:extLst xmlns:a="http://schemas.openxmlformats.org/drawingml/2006/main">
+              <a:ext uri="{FF2B5EF4-FFF2-40B4-BE49-F238E27FC236}">
+                <a16:creationId xmlns:a16="http://schemas.microsoft.com/office/drawing/2014/main" id="{24230654-237D-4D37-8038-07BF62A132B3}"/>
               </a:ext>
             </a:extLst>
           </p:cNvPr>
@@ -14852,10 +16137,10 @@
       </p:sp>
       <p:sp>
         <p:nvSpPr>
-          <p:cNvPr id="10" name="page-number">
-            <a:extLst xmlns:a="http://schemas.openxmlformats.org/drawingml/2006/main">
-              <a:ext uri="{FF2B5EF4-FFF2-40B4-BE49-F238E27FC236}">
-                <a16:creationId xmlns:a16="http://schemas.microsoft.com/office/drawing/2014/main" id="{02CA797B-6BA4-42B4-BC14-BBD8BB62FDB2}"/>
+          <p:cNvPr id="12" name="page-number">
+            <a:extLst xmlns:a="http://schemas.openxmlformats.org/drawingml/2006/main">
+              <a:ext uri="{FF2B5EF4-FFF2-40B4-BE49-F238E27FC236}">
+                <a16:creationId xmlns:a16="http://schemas.microsoft.com/office/drawing/2014/main" id="{79561C18-6A20-4CE4-946D-1FE2A08EC40E}"/>
               </a:ext>
             </a:extLst>
           </p:cNvPr>
@@ -14908,7 +16193,7 @@
     </p:spTree>
     <p:extLst>
       <p:ext uri="{BB962C8B-B14F-4D97-AF65-F5344CB8AC3E}">
-        <p14:creationId xmlns:p14="http://schemas.microsoft.com/office/powerpoint/2010/main" val="1325237488"/>
+        <p14:creationId xmlns:p14="http://schemas.microsoft.com/office/powerpoint/2010/main" val="652713581"/>
       </p:ext>
     </p:extLst>
   </p:cSld>
@@ -14936,10 +16221,10 @@
       </p:grpSpPr>
       <p:sp>
         <p:nvSpPr>
-          <p:cNvPr id="10" name="slide-title">
-            <a:extLst xmlns:a="http://schemas.openxmlformats.org/drawingml/2006/main">
-              <a:ext uri="{FF2B5EF4-FFF2-40B4-BE49-F238E27FC236}">
-                <a16:creationId xmlns:a16="http://schemas.microsoft.com/office/drawing/2014/main" id="{D8A4666B-C7A4-4213-8DE6-55893C62CDAE}"/>
+          <p:cNvPr id="12" name="slide-title">
+            <a:extLst xmlns:a="http://schemas.openxmlformats.org/drawingml/2006/main">
+              <a:ext uri="{FF2B5EF4-FFF2-40B4-BE49-F238E27FC236}">
+                <a16:creationId xmlns:a16="http://schemas.microsoft.com/office/drawing/2014/main" id="{50A750DF-66F1-4739-8805-558CE556D8A5}"/>
               </a:ext>
             </a:extLst>
           </p:cNvPr>
@@ -14990,7 +16275,7 @@
           <p:cNvPr id="2" name="visual-claim">
             <a:extLst xmlns:a="http://schemas.openxmlformats.org/drawingml/2006/main">
               <a:ext uri="{FF2B5EF4-FFF2-40B4-BE49-F238E27FC236}">
-                <a16:creationId xmlns:a16="http://schemas.microsoft.com/office/drawing/2014/main" id="{66CAF700-D30B-4260-A393-DC7F55BA2BE1}"/>
+                <a16:creationId xmlns:a16="http://schemas.microsoft.com/office/drawing/2014/main" id="{B89DC1EC-473E-438E-808B-8AEFABD9F971}"/>
               </a:ext>
             </a:extLst>
           </p:cNvPr>
@@ -15041,7 +16326,7 @@
           <p:cNvPr id="3" name="image-surface">
             <a:extLst xmlns:a="http://schemas.openxmlformats.org/drawingml/2006/main">
               <a:ext uri="{FF2B5EF4-FFF2-40B4-BE49-F238E27FC236}">
-                <a16:creationId xmlns:a16="http://schemas.microsoft.com/office/drawing/2014/main" id="{BEAE82B1-7A11-4517-AC66-D93328565E3D}"/>
+                <a16:creationId xmlns:a16="http://schemas.microsoft.com/office/drawing/2014/main" id="{9C6FDFAE-2128-48E0-A25E-615653BC62A0}"/>
               </a:ext>
             </a:extLst>
           </p:cNvPr>
@@ -15073,14 +16358,14 @@
       </p:sp>
       <p:pic>
         <p:nvPicPr>
-          <p:cNvPr id="15" name="" descr="Figura oficial da documentação dbt usada para explicar: O exemplo oficial mostra execução isolada — Unit tests validam lógica SQL antes de materializar toda a população.."/>
+          <p:cNvPr id="18" name="" descr="Figura oficial da documentação dbt usada para explicar: O exemplo oficial mostra execução isolada — Unit tests validam lógica SQL antes de materializar toda a população.."/>
           <p:cNvPicPr>
             <a:picLocks xmlns:a="http://schemas.openxmlformats.org/drawingml/2006/main" noChangeAspect="1"/>
           </p:cNvPicPr>
           <p:nvPr/>
         </p:nvPicPr>
         <p:blipFill>
-          <a:blip xmlns:r="http://schemas.openxmlformats.org/officeDocument/2006/relationships" xmlns:a="http://schemas.openxmlformats.org/drawingml/2006/main" r:embed="R094062bd36bc4e0c"/>
+          <a:blip xmlns:r="http://schemas.openxmlformats.org/officeDocument/2006/relationships" xmlns:a="http://schemas.openxmlformats.org/drawingml/2006/main" r:embed="Rd494c851340d4ab4"/>
           <a:stretch xmlns:a="http://schemas.openxmlformats.org/drawingml/2006/main"/>
         </p:blipFill>
         <p:spPr>
@@ -15098,7 +16383,7 @@
           <p:cNvPr id="5" name="image-caption">
             <a:extLst xmlns:a="http://schemas.openxmlformats.org/drawingml/2006/main">
               <a:ext uri="{FF2B5EF4-FFF2-40B4-BE49-F238E27FC236}">
-                <a16:creationId xmlns:a16="http://schemas.microsoft.com/office/drawing/2014/main" id="{8A874E42-2158-46A7-9E54-C543CA8C71B8}"/>
+                <a16:creationId xmlns:a16="http://schemas.microsoft.com/office/drawing/2014/main" id="{2A9105E6-FD56-4773-B8D2-D88D0A7B262C}"/>
               </a:ext>
             </a:extLst>
           </p:cNvPr>
@@ -15149,7 +16434,7 @@
           <p:cNvPr id="6" name="eyebrow">
             <a:extLst xmlns:a="http://schemas.openxmlformats.org/drawingml/2006/main">
               <a:ext uri="{FF2B5EF4-FFF2-40B4-BE49-F238E27FC236}">
-                <a16:creationId xmlns:a16="http://schemas.microsoft.com/office/drawing/2014/main" id="{D4F47143-DBAF-4999-AD56-786D4ACB2027}"/>
+                <a16:creationId xmlns:a16="http://schemas.microsoft.com/office/drawing/2014/main" id="{0CE57CA2-AA44-4035-8E50-A1565C0DBFD7}"/>
               </a:ext>
             </a:extLst>
           </p:cNvPr>
@@ -15197,10 +16482,69 @@
       </p:sp>
       <p:sp>
         <p:nvSpPr>
-          <p:cNvPr id="7" name="footer-rule">
-            <a:extLst xmlns:a="http://schemas.openxmlformats.org/drawingml/2006/main">
-              <a:ext uri="{FF2B5EF4-FFF2-40B4-BE49-F238E27FC236}">
-                <a16:creationId xmlns:a16="http://schemas.microsoft.com/office/drawing/2014/main" id="{CB57B55C-6FFE-4A50-98D8-7AD3143BFC76}"/>
+          <p:cNvPr id="7" name="rescue-point-logo-background">
+            <a:extLst xmlns:a="http://schemas.openxmlformats.org/drawingml/2006/main">
+              <a:ext uri="{FF2B5EF4-FFF2-40B4-BE49-F238E27FC236}">
+                <a16:creationId xmlns:a16="http://schemas.microsoft.com/office/drawing/2014/main" id="{9C2C767B-A4A7-4074-AFE7-601AB933CF73}"/>
+              </a:ext>
+            </a:extLst>
+          </p:cNvPr>
+          <p:cNvSpPr>
+            <a:spLocks xmlns:a="http://schemas.openxmlformats.org/drawingml/2006/main" noGrp="1"/>
+          </p:cNvSpPr>
+          <p:nvPr/>
+        </p:nvSpPr>
+        <p:spPr>
+          <a:xfrm xmlns:a="http://schemas.openxmlformats.org/drawingml/2006/main">
+            <a:off x="9772650" y="133350"/>
+            <a:ext cx="1733550" cy="457200"/>
+          </a:xfrm>
+          <a:prstGeom xmlns:a="http://schemas.openxmlformats.org/drawingml/2006/main" prst="roundRect">
+            <a:avLst>
+              <a:gd name="adj" fmla="val 16667"/>
+            </a:avLst>
+          </a:prstGeom>
+          <a:solidFill xmlns:a="http://schemas.openxmlformats.org/drawingml/2006/main">
+            <a:srgbClr val="06142E"/>
+          </a:solidFill>
+          <a:ln xmlns:a="http://schemas.openxmlformats.org/drawingml/2006/main" w="9525">
+            <a:solidFill>
+              <a:srgbClr val="1EC5FF">
+                <a:alpha val="33333"/>
+              </a:srgbClr>
+            </a:solidFill>
+            <a:prstDash val="solid"/>
+          </a:ln>
+        </p:spPr>
+      </p:sp>
+      <p:pic>
+        <p:nvPicPr>
+          <p:cNvPr id="22" name="" descr="Figura oficial da documentação dbt usada para explicar: O exemplo oficial mostra execução isolada — Unit tests validam lógica SQL antes de materializar toda a população.."/>
+          <p:cNvPicPr>
+            <a:picLocks xmlns:a="http://schemas.openxmlformats.org/drawingml/2006/main" noChangeAspect="1"/>
+          </p:cNvPicPr>
+          <p:nvPr/>
+        </p:nvPicPr>
+        <p:blipFill>
+          <a:blip xmlns:r="http://schemas.openxmlformats.org/officeDocument/2006/relationships" xmlns:a="http://schemas.openxmlformats.org/drawingml/2006/main" r:embed="R5156a1a3cefa4665"/>
+          <a:stretch xmlns:a="http://schemas.openxmlformats.org/drawingml/2006/main"/>
+        </p:blipFill>
+        <p:spPr>
+          <a:xfrm xmlns:a="http://schemas.openxmlformats.org/drawingml/2006/main">
+            <a:off x="9893718" y="209550"/>
+            <a:ext cx="1491414" cy="323850"/>
+          </a:xfrm>
+          <a:prstGeom xmlns:a="http://schemas.openxmlformats.org/drawingml/2006/main" prst="rect">
+            <a:avLst/>
+          </a:prstGeom>
+        </p:spPr>
+      </p:pic>
+      <p:sp>
+        <p:nvSpPr>
+          <p:cNvPr id="9" name="footer-rule">
+            <a:extLst xmlns:a="http://schemas.openxmlformats.org/drawingml/2006/main">
+              <a:ext uri="{FF2B5EF4-FFF2-40B4-BE49-F238E27FC236}">
+                <a16:creationId xmlns:a16="http://schemas.microsoft.com/office/drawing/2014/main" id="{464DBA8E-06D2-4877-87BA-5F6049E99A29}"/>
               </a:ext>
             </a:extLst>
           </p:cNvPr>
@@ -15230,10 +16574,10 @@
       </p:sp>
       <p:sp>
         <p:nvSpPr>
-          <p:cNvPr id="8" name="footer">
-            <a:extLst xmlns:a="http://schemas.openxmlformats.org/drawingml/2006/main">
-              <a:ext uri="{FF2B5EF4-FFF2-40B4-BE49-F238E27FC236}">
-                <a16:creationId xmlns:a16="http://schemas.microsoft.com/office/drawing/2014/main" id="{D656C68D-C15C-4D08-B5DE-44532E62FD0C}"/>
+          <p:cNvPr id="10" name="footer">
+            <a:extLst xmlns:a="http://schemas.openxmlformats.org/drawingml/2006/main">
+              <a:ext uri="{FF2B5EF4-FFF2-40B4-BE49-F238E27FC236}">
+                <a16:creationId xmlns:a16="http://schemas.microsoft.com/office/drawing/2014/main" id="{FF8D1A13-1A2D-4DA1-A103-A059722638CE}"/>
               </a:ext>
             </a:extLst>
           </p:cNvPr>
@@ -15285,10 +16629,10 @@
       </p:sp>
       <p:sp>
         <p:nvSpPr>
-          <p:cNvPr id="9" name="page-number">
-            <a:extLst xmlns:a="http://schemas.openxmlformats.org/drawingml/2006/main">
-              <a:ext uri="{FF2B5EF4-FFF2-40B4-BE49-F238E27FC236}">
-                <a16:creationId xmlns:a16="http://schemas.microsoft.com/office/drawing/2014/main" id="{2E644A2A-7357-4D6E-96EB-C48A11D9FB9E}"/>
+          <p:cNvPr id="11" name="page-number">
+            <a:extLst xmlns:a="http://schemas.openxmlformats.org/drawingml/2006/main">
+              <a:ext uri="{FF2B5EF4-FFF2-40B4-BE49-F238E27FC236}">
+                <a16:creationId xmlns:a16="http://schemas.microsoft.com/office/drawing/2014/main" id="{4A97141B-FA35-476A-A4E8-A1AB42D204FD}"/>
               </a:ext>
             </a:extLst>
           </p:cNvPr>
@@ -15341,7 +16685,7 @@
     </p:spTree>
     <p:extLst>
       <p:ext uri="{BB962C8B-B14F-4D97-AF65-F5344CB8AC3E}">
-        <p14:creationId xmlns:p14="http://schemas.microsoft.com/office/powerpoint/2010/main" val="166457400"/>
+        <p14:creationId xmlns:p14="http://schemas.microsoft.com/office/powerpoint/2010/main" val="736004904"/>
       </p:ext>
     </p:extLst>
   </p:cSld>
